--- a/docs/presentation/IQL_RL_Proposal.pptx
+++ b/docs/presentation/IQL_RL_Proposal.pptx
@@ -2,20 +2,20 @@
 <file path=ppt/presentation.xml><?xml version="1.0" encoding="utf-8"?>
 <p:presentation xmlns:p="http://schemas.openxmlformats.org/presentationml/2006/main">
   <p:sldMasterIdLst>
-    <p:sldMasterId xmlns:r="http://schemas.openxmlformats.org/officeDocument/2006/relationships" id="2147483648" r:id="Rba515cbe0acf4e56"/>
+    <p:sldMasterId xmlns:r="http://schemas.openxmlformats.org/officeDocument/2006/relationships" id="2147483648" r:id="Rda01435594704423"/>
   </p:sldMasterIdLst>
   <p:notesMasterIdLst>
-    <p:notesMasterId xmlns:r="http://schemas.openxmlformats.org/officeDocument/2006/relationships" r:id="R5bdf1e86373146f0"/>
+    <p:notesMasterId xmlns:r="http://schemas.openxmlformats.org/officeDocument/2006/relationships" r:id="R8527ff8ddb2c4179"/>
   </p:notesMasterIdLst>
   <p:sldIdLst>
-    <p:sldId xmlns:r="http://schemas.openxmlformats.org/officeDocument/2006/relationships" id="256" r:id="Rdba01c958dbe4135"/>
-    <p:sldId xmlns:r="http://schemas.openxmlformats.org/officeDocument/2006/relationships" id="257" r:id="R629de5d968914e68"/>
-    <p:sldId xmlns:r="http://schemas.openxmlformats.org/officeDocument/2006/relationships" id="258" r:id="R2409ed47c01e4820"/>
-    <p:sldId xmlns:r="http://schemas.openxmlformats.org/officeDocument/2006/relationships" id="259" r:id="Rf89d6572a84e495f"/>
-    <p:sldId xmlns:r="http://schemas.openxmlformats.org/officeDocument/2006/relationships" id="260" r:id="R19f224e067e34014"/>
-    <p:sldId xmlns:r="http://schemas.openxmlformats.org/officeDocument/2006/relationships" id="261" r:id="Rf9e19913c0c94e9f"/>
-    <p:sldId xmlns:r="http://schemas.openxmlformats.org/officeDocument/2006/relationships" id="262" r:id="R9dd19732201843d6"/>
-    <p:sldId xmlns:r="http://schemas.openxmlformats.org/officeDocument/2006/relationships" id="263" r:id="R55b5448a520d486b"/>
+    <p:sldId xmlns:r="http://schemas.openxmlformats.org/officeDocument/2006/relationships" id="256" r:id="R75b41a3c8c1b4967"/>
+    <p:sldId xmlns:r="http://schemas.openxmlformats.org/officeDocument/2006/relationships" id="257" r:id="Rcb43989ace1f40e3"/>
+    <p:sldId xmlns:r="http://schemas.openxmlformats.org/officeDocument/2006/relationships" id="258" r:id="R3b3f638e6b924ee5"/>
+    <p:sldId xmlns:r="http://schemas.openxmlformats.org/officeDocument/2006/relationships" id="259" r:id="R8711f9a4840148b7"/>
+    <p:sldId xmlns:r="http://schemas.openxmlformats.org/officeDocument/2006/relationships" id="260" r:id="Rb32388543491498e"/>
+    <p:sldId xmlns:r="http://schemas.openxmlformats.org/officeDocument/2006/relationships" id="261" r:id="R0899d2f60f274893"/>
+    <p:sldId xmlns:r="http://schemas.openxmlformats.org/officeDocument/2006/relationships" id="262" r:id="R01aa012b1b324c82"/>
+    <p:sldId xmlns:r="http://schemas.openxmlformats.org/officeDocument/2006/relationships" id="263" r:id="R8bd1d91ef33340c6"/>
   </p:sldIdLst>
   <p:sldSz cx="12192000" cy="6858000"/>
   <p:notesSz cx="6858000" cy="9144000"/>
@@ -449,7 +449,7 @@
           <a:lstStyle xmlns:a="http://schemas.openxmlformats.org/drawingml/2006/main"/>
           <a:p xmlns:a="http://schemas.openxmlformats.org/drawingml/2006/main">
             <a:r>
-              <a:t>Suggested time: 20 seconds. Suggested speaker: Aleksandr Medvedev.</a:t>
+              <a:t>20 seconds. Suggested speaker: Aleksandr Medvedev.</a:t>
             </a:r>
           </a:p>
           <a:p xmlns:a="http://schemas.openxmlformats.org/drawingml/2006/main">
@@ -459,7 +459,7 @@
           </a:p>
           <a:p xmlns:a="http://schemas.openxmlformats.org/drawingml/2006/main">
             <a:r>
-              <a:t>Show the title slide in full-screen presentation mode. Keep it visible while introducing the project and team.</a:t>
+              <a:t>Our project uses Implicit Q-Learning, or IQL, to learn continuous locomotion from recorded data. We will explain how the algorithm works, what HalfCheetah requires, and why this combination is suitable. The final slide shows measured feasibility evidence from our existing project.</a:t>
             </a:r>
           </a:p>
           <a:p xmlns:a="http://schemas.openxmlformats.org/drawingml/2006/main">
@@ -469,7 +469,7 @@
           </a:p>
           <a:p xmlns:a="http://schemas.openxmlformats.org/drawingml/2006/main">
             <a:r>
-              <a:t>Hello. We are presenting our reinforcement learning project proposal: Implicit Q-Learning on HalfCheetah. Our team is Aleksandr Medvedev, Nikita Shankin, Leo Vesin, Ruslan Nasibullin, and Telman Nuruzov. We will explain the algorithm, describe the environment, and show why this combination fits our project.</a:t>
+              <a:t>Show: Introduce the title and team. Point to the actual HalfCheetah rollout image; hold briefly before advancing.</a:t>
             </a:r>
           </a:p>
           <a:p xmlns:a="http://schemas.openxmlformats.org/drawingml/2006/main">
@@ -485,6 +485,11 @@
           <a:p xmlns:a="http://schemas.openxmlformats.org/drawingml/2006/main">
             <a:r>
               <a:t>https://github.com/MedvAx-AI/iql-halfcheetah</a:t>
+            </a:r>
+          </a:p>
+          <a:p xmlns:a="http://schemas.openxmlformats.org/drawingml/2006/main">
+            <a:r>
+              <a:t>Image: actual project rollout, seed 1 at 500k, evaluation seed 10000, frame at 20 seconds. https://github.com/MedvAx-AI/iql-halfcheetah/releases/tag/policy-continuation-experiment</a:t>
             </a:r>
           </a:p>
         </p:txBody>
@@ -554,7 +559,7 @@
           <a:lstStyle xmlns:a="http://schemas.openxmlformats.org/drawingml/2006/main"/>
           <a:p xmlns:a="http://schemas.openxmlformats.org/drawingml/2006/main">
             <a:r>
-              <a:t>Suggested time: 45 seconds. Suggested speaker: Leo Vesin.</a:t>
+              <a:t>50 seconds. Suggested speaker: Leo Vesin.</a:t>
             </a:r>
           </a:p>
           <a:p xmlns:a="http://schemas.openxmlformats.org/drawingml/2006/main">
@@ -564,7 +569,7 @@
           </a:p>
           <a:p xmlns:a="http://schemas.openxmlformats.org/drawingml/2006/main">
             <a:r>
-              <a:t>Show slide 2. Point to Classification, then Training data, then Main idea. Explain offline training versus simulator evaluation.</a:t>
+              <a:t>IQL is offline, model-free actor-critic reinforcement learning. Training starts with a fixed dataset of observations, actions, rewards and next observations. The diagram separates learning from evaluation. IQL estimates values using recorded actions, then trains the actor to imitate stronger actions more heavily. It avoids explicitly maximizing the value backup over unseen actions. The simulator is used to evaluate the policy after training, rather than collect new training data. The policy produces six bounded torque controls at each step.</a:t>
             </a:r>
           </a:p>
           <a:p xmlns:a="http://schemas.openxmlformats.org/drawingml/2006/main">
@@ -574,7 +579,7 @@
           </a:p>
           <a:p xmlns:a="http://schemas.openxmlformats.org/drawingml/2006/main">
             <a:r>
-              <a:t>Our assigned algorithm is Implicit Q-Learning, usually called IQL. It is an offline, model-free actor-critic method. Offline means that training uses a fixed collection of recorded transitions rather than collecting new actions from the simulator. Each transition includes an observation, an action, a reward, the next observation, and episode flags. The critic estimates how useful actions are. The actor learns a continuous control policy from those recorded actions. IQL first learns state values that emphasize better actions present in the dataset. It then gives actions with higher estimated advantage more influence during policy training. We use simulator interactions to evaluate the learned policy, while keeping training itself offline.</a:t>
+              <a:t>Show: Follow the upper diagram from recorded transitions to learner to policy. Point to the separate simulator evaluation path. Pause so the audience can follow the distinction.</a:t>
             </a:r>
           </a:p>
           <a:p xmlns:a="http://schemas.openxmlformats.org/drawingml/2006/main">
@@ -664,7 +669,7 @@
           <a:lstStyle xmlns:a="http://schemas.openxmlformats.org/drawingml/2006/main"/>
           <a:p xmlns:a="http://schemas.openxmlformats.org/drawingml/2006/main">
             <a:r>
-              <a:t>Suggested time: 55 seconds. Suggested speaker: Leo Vesin.</a:t>
+              <a:t>50 seconds. Suggested speaker: Leo Vesin.</a:t>
             </a:r>
           </a:p>
           <a:p xmlns:a="http://schemas.openxmlformats.org/drawingml/2006/main">
@@ -674,7 +679,7 @@
           </a:p>
           <a:p xmlns:a="http://schemas.openxmlformats.org/drawingml/2006/main">
             <a:r>
-              <a:t>Show slide 3. Follow the four rows from top to bottom. Explain the equations in words; do not read every symbol.</a:t>
+              <a:t>The learner has three updates. First, the state-value network uses an upper expectile of zero point seven, emphasizing higher-valued recorded actions. Second, the twin Q networks fit reward plus discounted next-state value, with discount zero point nine nine. Third, the actor fits recorded actions using advantage weights: the exponential of three times advantage, capped at one hundred. Advantage is the minimum target-critic estimate minus the state value. Three is inverse temperature. A tanh-squashed Gaussian keeps the actor's outputs within the action bounds. The repeated updates improve the policy without changing the fixed dataset.</a:t>
             </a:r>
           </a:p>
           <a:p xmlns:a="http://schemas.openxmlformats.org/drawingml/2006/main">
@@ -684,7 +689,7 @@
           </a:p>
           <a:p xmlns:a="http://schemas.openxmlformats.org/drawingml/2006/main">
             <a:r>
-              <a:t>The implementation has a state-value network, two Q networks, and a policy network. The value network uses expectile regression. With an expectile of zero point seven, positive errors receive more weight, so the value estimate favors stronger actions in the dataset. The Q networks learn from the recorded reward plus the discounted value of the next state. We use a discount of zero point nine nine and the minimum of the target critics when estimating advantage. The policy then maximizes the likelihood of recorded actions, weighted by the exponential of three times their advantage, capped at one hundred. Three is our inverse-temperature setting. A tanh-squashed Gaussian keeps actions within the environment bounds. These updates avoid an explicit maximization over unseen actions in the value backup, although limited dataset coverage remains a challenge.</a:t>
+              <a:t>Show: Explain each update in order. Point to 0.7, 0.99 and the weight cap of 100. Read the equations in words and allow brief pauses.</a:t>
             </a:r>
           </a:p>
           <a:p xmlns:a="http://schemas.openxmlformats.org/drawingml/2006/main">
@@ -779,7 +784,7 @@
           <a:lstStyle xmlns:a="http://schemas.openxmlformats.org/drawingml/2006/main"/>
           <a:p xmlns:a="http://schemas.openxmlformats.org/drawingml/2006/main">
             <a:r>
-              <a:t>Suggested time: 65 seconds. Suggested speaker: Nikita Shankin.</a:t>
+              <a:t>65 seconds. Suggested speaker: Nikita Shankin.</a:t>
             </a:r>
           </a:p>
           <a:p xmlns:a="http://schemas.openxmlformats.org/drawingml/2006/main">
@@ -789,7 +794,7 @@
           </a:p>
           <a:p xmlns:a="http://schemas.openxmlformats.org/drawingml/2006/main">
             <a:r>
-              <a:t>Show slide 4. Point to the robot, then the 17-value observation and 6-value action descriptions. The image is sufficient; no live notebook run is needed.</a:t>
+              <a:t>HalfCheetah version five is a two-dimensional locomotion task in Gymnasium and MuJoCo. The robot has front and back legs. Its seventeen-value observation combines eight position or angle values with nine velocities. These describe the robot's pose and motion. Absolute horizontal position is excluded from the default observation. The action has six continuous torque components: thigh, shin and foot on each leg. Every component lies between minus one and one. The policy must use the current observation to coordinate these joints into a useful gait. The image comes from a real project rollout, while the color split shows the observation structure.</a:t>
             </a:r>
           </a:p>
           <a:p xmlns:a="http://schemas.openxmlformats.org/drawingml/2006/main">
@@ -799,7 +804,7 @@
           </a:p>
           <a:p xmlns:a="http://schemas.openxmlformats.org/drawingml/2006/main">
             <a:r>
-              <a:t>We selected HalfCheetah version five, a two-dimensional locomotion environment implemented in Gymnasium with MuJoCo physics. The image shows the actual environment from our project. The agent controls the robot's front and back legs and tries to move forward. Its observation is a vector of seventeen values. Eight describe positions or angles, including body height, body orientation, and leg joint angles. The other nine describe velocities. The default observation excludes absolute horizontal position, which encourages a policy that can run from different locations. The action is a vector of six continuous torque controls for the front and back thigh, shin, and foot joints. Each component is bounded between minus one and one. This is a continuous-control problem: at every step, the policy must coordinate the joints using the current pose and motion, rather than choose from a small set of discrete moves.</a:t>
+              <a:t>Show: Point to the actual robot, then trace the 8 plus 9 observation split. Explain the three joints on each of two legs and the action bound. Leave time for the audience to inspect the image.</a:t>
             </a:r>
           </a:p>
           <a:p xmlns:a="http://schemas.openxmlformats.org/drawingml/2006/main">
@@ -819,7 +824,7 @@
           </a:p>
           <a:p xmlns:a="http://schemas.openxmlformats.org/drawingml/2006/main">
             <a:r>
-              <a:t>Image: project rollout, seed 1, 500k checkpoint, evaluation seed 10000, frame at 10 seconds. https://github.com/MedvAx-AI/iql-halfcheetah/releases/tag/policy-continuation-experiment</a:t>
+              <a:t>Image: actual project rollout, seed 1 at 500k, evaluation seed 10000, frame at 0 seconds. https://github.com/MedvAx-AI/iql-halfcheetah/releases/tag/policy-continuation-experiment</a:t>
             </a:r>
           </a:p>
         </p:txBody>
@@ -889,7 +894,7 @@
           <a:lstStyle xmlns:a="http://schemas.openxmlformats.org/drawingml/2006/main"/>
           <a:p xmlns:a="http://schemas.openxmlformats.org/drawingml/2006/main">
             <a:r>
-              <a:t>Suggested time: 55 seconds. Suggested speaker: Nikita Shankin.</a:t>
+              <a:t>55 seconds. Suggested speaker: Nikita Shankin.</a:t>
             </a:r>
           </a:p>
           <a:p xmlns:a="http://schemas.openxmlformats.org/drawingml/2006/main">
@@ -899,7 +904,7 @@
           </a:p>
           <a:p xmlns:a="http://schemas.openxmlformats.org/drawingml/2006/main">
             <a:r>
-              <a:t>Show slide 5. Point to the reward first, then Episode ending. Explicitly say that falling does not end HalfCheetah.</a:t>
+              <a:t>The default reward is forward velocity minus zero point one times squared control effort. The numerical example is illustrative: at five meters per second, six action components of zero point five produce a cost of zero point fifteen, so the reward is four point eight five. This encourages efficient forward motion. The agent should learn a gait that maintains speed throughout the episode. A fall does not terminate HalfCheetah. The time limit is one thousand steps, about fifty simulated seconds. A failed policy can remain on the ground until that limit. Time-limit truncation still preserves next-state value bootstrapping in our learning targets.</a:t>
             </a:r>
           </a:p>
           <a:p xmlns:a="http://schemas.openxmlformats.org/drawingml/2006/main">
@@ -909,7 +914,7 @@
           </a:p>
           <a:p xmlns:a="http://schemas.openxmlformats.org/drawingml/2006/main">
             <a:r>
-              <a:t>The reward combines forward progress with an effort penalty. With the default settings, it equals horizontal forward velocity minus zero point one times the sum of squared action components. Running forward increases reward, while unnecessarily large torques reduce it. The agent should learn a coordinated gait that sustains speed efficiently throughout the episode. HalfCheetah has an important episode rule: a fall does not naturally terminate the task. The standard environment continues until the time limit of one thousand control steps, which corresponds to about fifty simulated seconds. Therefore, a policy can fall and remain on the ground for the rest of the rollout. We assess the complete episode, including that behavior. In our training targets, a time-limit truncation preserves the next-state value term. Only a true termination would remove that bootstrap term. This distinction keeps the learning target consistent with the task.</a:t>
+              <a:t>Show: Follow the numerical reward example from speed through effort cost to net reward. Trace the 0-to-50-second episode line. Emphasize that a fall does not end the episode.</a:t>
             </a:r>
           </a:p>
           <a:p xmlns:a="http://schemas.openxmlformats.org/drawingml/2006/main">
@@ -999,7 +1004,7 @@
           <a:lstStyle xmlns:a="http://schemas.openxmlformats.org/drawingml/2006/main"/>
           <a:p xmlns:a="http://schemas.openxmlformats.org/drawingml/2006/main">
             <a:r>
-              <a:t>Suggested time: 40 seconds. Suggested speaker: Ruslan Nasibullin.</a:t>
+              <a:t>40 seconds. Suggested speaker: Ruslan Nasibullin.</a:t>
             </a:r>
           </a:p>
           <a:p xmlns:a="http://schemas.openxmlformats.org/drawingml/2006/main">
@@ -1009,7 +1014,7 @@
           </a:p>
           <a:p xmlns:a="http://schemas.openxmlformats.org/drawingml/2006/main">
             <a:r>
-              <a:t>Show slide 6. Explain the fixed dataset, planned budget and repeatable evaluation. Do not switch to Colab or wait for training.</a:t>
+              <a:t>We use Minari's HalfCheetah medium dataset: one million transitions from one thousand episodes. Our protocol trains three seeds for five hundred thousand offline updates each, with batches of two hundred fifty-six. We evaluate checkpoints over ten episodes, compare raw return with a random baseline, then test the selected checkpoint on separate final episode seeds. We retain full videos and separate episode variation from training-seed variation. MuJoCo three point two point three matches the recorded dataset runtime.</a:t>
             </a:r>
           </a:p>
           <a:p xmlns:a="http://schemas.openxmlformats.org/drawingml/2006/main">
@@ -1019,7 +1024,7 @@
           </a:p>
           <a:p xmlns:a="http://schemas.openxmlformats.org/drawingml/2006/main">
             <a:r>
-              <a:t>For offline training, we use Minari's HalfCheetah medium dataset. It contains one thousand episodes and one million transitions. Its recorded continuous actions and observations match the chosen task. Our project protocol uses five hundred thousand offline updates for each of three training seeds, with batches of two hundred fifty-six transitions. We evaluate intermediate checkpoints over ten episodes per run and compare raw episodic return with a uniform random policy. We report variation across episodes separately from variation across training seeds. Checkpoint selection and final testing use separate episode seeds. We also keep full rollouts and match the dataset environment with MuJoCo version three point two point three.</a:t>
+              <a:t>Show: Point to the large dataset and budget numbers, then follow the training-to-selection-to-final-test timeline. Distinguish training seeds from evaluation episode seeds.</a:t>
             </a:r>
           </a:p>
           <a:p xmlns:a="http://schemas.openxmlformats.org/drawingml/2006/main">
@@ -1109,7 +1114,7 @@
           <a:lstStyle xmlns:a="http://schemas.openxmlformats.org/drawingml/2006/main"/>
           <a:p xmlns:a="http://schemas.openxmlformats.org/drawingml/2006/main">
             <a:r>
-              <a:t>Suggested time: 50 seconds. Suggested speaker: Telman Nuruzov.</a:t>
+              <a:t>60 seconds. Suggested speaker: Telman Nuruzov.</a:t>
             </a:r>
           </a:p>
           <a:p xmlns:a="http://schemas.openxmlformats.org/drawingml/2006/main">
@@ -1119,7 +1124,7 @@
           </a:p>
           <a:p xmlns:a="http://schemas.openxmlformats.org/drawingml/2006/main">
             <a:r>
-              <a:t>Show slide 7. Connect each reason to the algorithm or environment. Emphasize that better performance must be measured.</a:t>
+              <a:t>The match has three practical reasons. Continuous joint torques fit a continuous actor directly. Available offline locomotion data makes training feasible without a new data-collection stage. Finally, numerical returns and visible movement make evaluation understandable. IQL's advantage weighting can favor better recorded actions, but improvement is something to test, not assume. The main challenges are limited coverage, policy variation and simulator differences. We address them with multiple training seeds, pinned dependencies and full-episode evaluation. Aleksandr owns integration, Nikita the environment and data, Leo IQL, Ruslan evaluation, and Telman the notebook and presentation. Our shared outputs are a reproducible Colab, checkpoints, plots and complete rollouts.</a:t>
             </a:r>
           </a:p>
           <a:p xmlns:a="http://schemas.openxmlformats.org/drawingml/2006/main">
@@ -1129,7 +1134,7 @@
           </a:p>
           <a:p xmlns:a="http://schemas.openxmlformats.org/drawingml/2006/main">
             <a:r>
-              <a:t>We chose this environment because it gives IQL a concrete and measurable continuous-control task. The policy can directly represent the bounded torques needed by the robot, so we do not need to discretize the action space. A ready-made offline dataset makes the project feasible without an additional data-collection stage. It contains recorded locomotion behavior from which IQL can learn state values and action advantages. The advantage weights let stronger recorded actions influence the learned policy more heavily. This creates a useful research question: can the resulting policy improve on the recorded behavior while remaining reliable across episodes? Improvement is an empirical hypothesis, not a guarantee. HalfCheetah also provides numerical returns and clear visual behavior. These let us compare policies quantitatively and inspect whether the robot maintains a useful gait throughout a full rollout.</a:t>
+              <a:t>Show: Follow the three algorithm-to-task matches. Explain the challenges along the bottom. Point to the team ownership line and name each personâ€™s contribution without reading all slide labels aloud.</a:t>
             </a:r>
           </a:p>
           <a:p xmlns:a="http://schemas.openxmlformats.org/drawingml/2006/main">
@@ -1224,7 +1229,7 @@
           <a:lstStyle xmlns:a="http://schemas.openxmlformats.org/drawingml/2006/main"/>
           <a:p xmlns:a="http://schemas.openxmlformats.org/drawingml/2006/main">
             <a:r>
-              <a:t>Suggested time: 50 seconds. Suggested speaker: Aleksandr Medvedev.</a:t>
+              <a:t>50 seconds. Suggested speaker: Aleksandr Medvedev.</a:t>
             </a:r>
           </a:p>
           <a:p xmlns:a="http://schemas.openxmlformats.org/drawingml/2006/main">
@@ -1234,7 +1239,7 @@
           </a:p>
           <a:p xmlns:a="http://schemas.openxmlformats.org/drawingml/2006/main">
             <a:r>
-              <a:t>Show slide 8. Explain the challenges, name the responsibility owners, and finish. Leave the slide visible briefly before stopping the recording.</a:t>
+              <a:t>This chart shows recorded Colab validation means for all three training seeds at five measured checkpoints. Each point averages ten episodes. Performance varies across seeds, and the lines do not claim values between measurements. The selected seed-one policy reached a raw return of about fifteen thousand two hundred sixty on ten separate final-test episodes, compared with about two thousand twenty-six at one hundred thousand updates. Long stationary tails decreased from ten out of ten episodes to zero out of ten. Those tails mean at least five seconds of very slow movement at the end. Other training seeds still fail, and these samples do not guarantee success everywhere. The evidence supports feasibility while preserving the limits. Thank you.</a:t>
             </a:r>
           </a:p>
           <a:p xmlns:a="http://schemas.openxmlformats.org/drawingml/2006/main">
@@ -1244,7 +1249,7 @@
           </a:p>
           <a:p xmlns:a="http://schemas.openxmlformats.org/drawingml/2006/main">
             <a:r>
-              <a:t>The main challenges are limited dataset coverage and variation between trained policies. A high average return can hide occasional falls, so our final evaluation includes multiple seeds and complete videos. Physics versions can also change a rollout, which is why we pin the environment dependencies and document evaluation settings. Our final-project workflow is to validate the dataset, train IQL, compare checkpoints on selection episodes, and test the selected policy on separate final episodes. Aleksandr handles integration and reproducibility. Nikita owns the environment and dataset. Leo owns IQL. Ruslan owns evaluation, and Telman owns the notebook and presentation. The shared deliverables are a reproducible Colab, saved checkpoints, evaluation plots, and a complete policy demonstration. This proposal establishes our algorithm, task, and evaluation approach. Thank you.</a:t>
+              <a:t>Show: Trace all three measured curves. Point to the separate final-test return and stationary-tail counts. Say the other-seed limitation clearly, then pause on the closing slide.</a:t>
             </a:r>
           </a:p>
           <a:p xmlns:a="http://schemas.openxmlformats.org/drawingml/2006/main">
@@ -1265,6 +1270,21 @@
           <a:p xmlns:a="http://schemas.openxmlformats.org/drawingml/2006/main">
             <a:r>
               <a:t>https://github.com/MedvAx-AI/iql-halfcheetah/blob/c372ec0423b81839956ec00dd7338700db8d3737/docs/POLICY_CONTINUATION.md</a:t>
+            </a:r>
+          </a:p>
+          <a:p xmlns:a="http://schemas.openxmlformats.org/drawingml/2006/main">
+            <a:r>
+              <a:t>https://github.com/MedvAx-AI/iql-halfcheetah/blob/aa9ad5baec910730502e1f24459325b5f273b952/docs/evidence/continuation/validation/summary.json</a:t>
+            </a:r>
+          </a:p>
+          <a:p xmlns:a="http://schemas.openxmlformats.org/drawingml/2006/main">
+            <a:r>
+              <a:t>https://github.com/MedvAx-AI/iql-halfcheetah/blob/aa9ad5baec910730502e1f24459325b5f273b952/docs/evidence/continuation/independent-final-test.json</a:t>
+            </a:r>
+          </a:p>
+          <a:p xmlns:a="http://schemas.openxmlformats.org/drawingml/2006/main">
+            <a:r>
+              <a:t>Long stationary tail: at least 5 seconds at the end with absolute forward velocity &lt;= 0.1 m/s. Descriptive diagnostic, not a standard benchmark success score.</a:t>
             </a:r>
           </a:p>
         </p:txBody>
@@ -1311,7 +1331,7 @@
           <p:cNvPr id="3" name="Title">
             <a:extLst xmlns:a="http://schemas.openxmlformats.org/drawingml/2006/main">
               <a:ext uri="{FF2B5EF4-FFF2-40B4-BE49-F238E27FC236}">
-                <a16:creationId xmlns:a16="http://schemas.microsoft.com/office/drawing/2014/main" id="{776AD9C8-799B-4EFE-9B01-CE797F7CDCD2}"/>
+                <a16:creationId xmlns:a16="http://schemas.microsoft.com/office/drawing/2014/main" id="{2F61F7D7-A11C-47E7-81CD-C5299C196855}"/>
               </a:ext>
             </a:extLst>
           </p:cNvPr>
@@ -1468,7 +1488,7 @@
           <p:cNvPr id="2" name="Subtitle">
             <a:extLst xmlns:a="http://schemas.openxmlformats.org/drawingml/2006/main">
               <a:ext uri="{FF2B5EF4-FFF2-40B4-BE49-F238E27FC236}">
-                <a16:creationId xmlns:a16="http://schemas.microsoft.com/office/drawing/2014/main" id="{A36B7830-0EF8-468E-AE6D-A5AF7FEE0AA5}"/>
+                <a16:creationId xmlns:a16="http://schemas.microsoft.com/office/drawing/2014/main" id="{791F4228-FE8E-40A9-8174-D570C3CEE1ED}"/>
               </a:ext>
             </a:extLst>
           </p:cNvPr>
@@ -1642,7 +1662,7 @@
           <p:cNvPr id="2" name="Section title">
             <a:extLst xmlns:a="http://schemas.openxmlformats.org/drawingml/2006/main">
               <a:ext uri="{FF2B5EF4-FFF2-40B4-BE49-F238E27FC236}">
-                <a16:creationId xmlns:a16="http://schemas.microsoft.com/office/drawing/2014/main" id="{ED4DFCB1-B136-4DDE-BE4B-0F8CE09E5118}"/>
+                <a16:creationId xmlns:a16="http://schemas.microsoft.com/office/drawing/2014/main" id="{353D6F6F-54FB-4A69-ADF1-D9E1DFD6BA5C}"/>
               </a:ext>
             </a:extLst>
           </p:cNvPr>
@@ -1816,7 +1836,7 @@
           <p:cNvPr id="3" name="Title">
             <a:extLst xmlns:a="http://schemas.openxmlformats.org/drawingml/2006/main">
               <a:ext uri="{FF2B5EF4-FFF2-40B4-BE49-F238E27FC236}">
-                <a16:creationId xmlns:a16="http://schemas.microsoft.com/office/drawing/2014/main" id="{1CE9EB56-EE31-4A30-B8F7-80AE766F56F2}"/>
+                <a16:creationId xmlns:a16="http://schemas.microsoft.com/office/drawing/2014/main" id="{2F881542-D777-48C3-BC6C-4CC0C7D3BCE4}"/>
               </a:ext>
             </a:extLst>
           </p:cNvPr>
@@ -1973,7 +1993,7 @@
           <p:cNvPr id="2" name="Body">
             <a:extLst xmlns:a="http://schemas.openxmlformats.org/drawingml/2006/main">
               <a:ext uri="{FF2B5EF4-FFF2-40B4-BE49-F238E27FC236}">
-                <a16:creationId xmlns:a16="http://schemas.microsoft.com/office/drawing/2014/main" id="{7CF11202-0E79-407E-BE78-C34D98493D97}"/>
+                <a16:creationId xmlns:a16="http://schemas.microsoft.com/office/drawing/2014/main" id="{AC24F64E-1420-4A03-AF54-61163353C5E6}"/>
               </a:ext>
             </a:extLst>
           </p:cNvPr>
@@ -2147,7 +2167,7 @@
           <p:cNvPr id="4" name="Title">
             <a:extLst xmlns:a="http://schemas.openxmlformats.org/drawingml/2006/main">
               <a:ext uri="{FF2B5EF4-FFF2-40B4-BE49-F238E27FC236}">
-                <a16:creationId xmlns:a16="http://schemas.microsoft.com/office/drawing/2014/main" id="{04BA688B-F711-414C-8C92-421891B6C00E}"/>
+                <a16:creationId xmlns:a16="http://schemas.microsoft.com/office/drawing/2014/main" id="{C4808622-FCDA-4A98-80D1-7822343FCC48}"/>
               </a:ext>
             </a:extLst>
           </p:cNvPr>
@@ -2304,7 +2324,7 @@
           <p:cNvPr id="2" name="Left column">
             <a:extLst xmlns:a="http://schemas.openxmlformats.org/drawingml/2006/main">
               <a:ext uri="{FF2B5EF4-FFF2-40B4-BE49-F238E27FC236}">
-                <a16:creationId xmlns:a16="http://schemas.microsoft.com/office/drawing/2014/main" id="{0BFB0A56-38A2-4816-82E4-5512220711B9}"/>
+                <a16:creationId xmlns:a16="http://schemas.microsoft.com/office/drawing/2014/main" id="{990153EA-E4E8-4B6F-BA4D-0E4CECC09694}"/>
               </a:ext>
             </a:extLst>
           </p:cNvPr>
@@ -2461,7 +2481,7 @@
           <p:cNvPr id="3" name="Right column">
             <a:extLst xmlns:a="http://schemas.openxmlformats.org/drawingml/2006/main">
               <a:ext uri="{FF2B5EF4-FFF2-40B4-BE49-F238E27FC236}">
-                <a16:creationId xmlns:a16="http://schemas.microsoft.com/office/drawing/2014/main" id="{26F90974-7F89-443B-8EFE-0223AF7666B8}"/>
+                <a16:creationId xmlns:a16="http://schemas.microsoft.com/office/drawing/2014/main" id="{33F1E681-5763-4B01-A0E6-02BDFB9AF5A3}"/>
               </a:ext>
             </a:extLst>
           </p:cNvPr>
@@ -2635,7 +2655,7 @@
           <p:cNvPr id="3" name="Title">
             <a:extLst xmlns:a="http://schemas.openxmlformats.org/drawingml/2006/main">
               <a:ext uri="{FF2B5EF4-FFF2-40B4-BE49-F238E27FC236}">
-                <a16:creationId xmlns:a16="http://schemas.microsoft.com/office/drawing/2014/main" id="{EC9F6203-3E3C-4714-B6C0-AA4097CA36DE}"/>
+                <a16:creationId xmlns:a16="http://schemas.microsoft.com/office/drawing/2014/main" id="{C132BC16-05FB-4B44-BD2E-8304EE373832}"/>
               </a:ext>
             </a:extLst>
           </p:cNvPr>
@@ -2792,7 +2812,7 @@
           <p:cNvPr id="2" name="Left column">
             <a:extLst xmlns:a="http://schemas.openxmlformats.org/drawingml/2006/main">
               <a:ext uri="{FF2B5EF4-FFF2-40B4-BE49-F238E27FC236}">
-                <a16:creationId xmlns:a16="http://schemas.microsoft.com/office/drawing/2014/main" id="{F70CD6BB-5B8A-445D-8DCF-7B6AA144335C}"/>
+                <a16:creationId xmlns:a16="http://schemas.microsoft.com/office/drawing/2014/main" id="{5AA327A6-A65A-4B96-8681-477142BC8389}"/>
               </a:ext>
             </a:extLst>
           </p:cNvPr>
@@ -2987,12 +3007,12 @@
   </p:cSld>
   <p:clrMap bg1="lt1" tx1="dk1" bg2="lt2" tx2="dk2" accent1="accent1" accent2="accent2" accent3="accent3" accent4="accent4" accent5="accent5" accent6="accent6" hlink="hlink" folHlink="folHlink"/>
   <p:sldLayoutIdLst>
-    <p:sldLayoutId xmlns:r="http://schemas.openxmlformats.org/officeDocument/2006/relationships" id="2147483649" r:id="Rd045dfeace0b4c4b"/>
-    <p:sldLayoutId xmlns:r="http://schemas.openxmlformats.org/officeDocument/2006/relationships" id="2147483650" r:id="Rfd68162d5d964abd"/>
-    <p:sldLayoutId xmlns:r="http://schemas.openxmlformats.org/officeDocument/2006/relationships" id="2147483651" r:id="R0f70949dd62740fc"/>
-    <p:sldLayoutId xmlns:r="http://schemas.openxmlformats.org/officeDocument/2006/relationships" id="2147483652" r:id="R4d2c49b581d4465b"/>
-    <p:sldLayoutId xmlns:r="http://schemas.openxmlformats.org/officeDocument/2006/relationships" id="2147483653" r:id="R910ab27117dd44c5"/>
-    <p:sldLayoutId xmlns:r="http://schemas.openxmlformats.org/officeDocument/2006/relationships" id="2147483654" r:id="R116f8ec27d88458b"/>
+    <p:sldLayoutId xmlns:r="http://schemas.openxmlformats.org/officeDocument/2006/relationships" id="2147483649" r:id="R697ce5d6b2f64ccf"/>
+    <p:sldLayoutId xmlns:r="http://schemas.openxmlformats.org/officeDocument/2006/relationships" id="2147483650" r:id="Rcd6171aac5604088"/>
+    <p:sldLayoutId xmlns:r="http://schemas.openxmlformats.org/officeDocument/2006/relationships" id="2147483651" r:id="R0cb37f6dd6154e5e"/>
+    <p:sldLayoutId xmlns:r="http://schemas.openxmlformats.org/officeDocument/2006/relationships" id="2147483652" r:id="R772d03b2574f4f54"/>
+    <p:sldLayoutId xmlns:r="http://schemas.openxmlformats.org/officeDocument/2006/relationships" id="2147483653" r:id="Ref9532bb40af4323"/>
+    <p:sldLayoutId xmlns:r="http://schemas.openxmlformats.org/officeDocument/2006/relationships" id="2147483654" r:id="Rc19597d993c442d1"/>
   </p:sldLayoutIdLst>
   <p:txStyles>
     <p:titleStyle>
@@ -3519,13 +3539,601 @@
 </a:theme>
 </file>
 
+<file path=ppt/slides/charts/chart1.xml><?xml version="1.0" encoding="utf-8"?>
+<c:chartSpace xmlns:c="http://schemas.openxmlformats.org/drawingml/2006/chart" xmlns:r="http://schemas.openxmlformats.org/officeDocument/2006/relationships">
+  <c:lang val="en-US"/>
+  <c:chart>
+    <c:title>
+      <c:tx>
+        <c:rich>
+          <a:bodyPr xmlns:a="http://schemas.openxmlformats.org/drawingml/2006/main"/>
+          <a:lstStyle xmlns:a="http://schemas.openxmlformats.org/drawingml/2006/main"/>
+          <a:p xmlns:a="http://schemas.openxmlformats.org/drawingml/2006/main">
+            <a:r>
+              <a:rPr sz="1875" b="1">
+                <a:latin typeface="Arial"/>
+                <a:ea typeface="Arial"/>
+                <a:cs typeface="Arial"/>
+              </a:rPr>
+              <a:t>Observation components</a:t>
+            </a:r>
+          </a:p>
+        </c:rich>
+      </c:tx>
+      <c:overlay val="0"/>
+      <c:txPr>
+        <a:bodyPr xmlns:a="http://schemas.openxmlformats.org/drawingml/2006/main" anchorCtr="1"/>
+        <a:lstStyle xmlns:a="http://schemas.openxmlformats.org/drawingml/2006/main"/>
+        <a:p xmlns:a="http://schemas.openxmlformats.org/drawingml/2006/main">
+          <a:pPr>
+            <a:defRPr sz="1875" b="1">
+              <a:latin typeface="Arial"/>
+              <a:ea typeface="Arial"/>
+              <a:cs typeface="Arial"/>
+            </a:defRPr>
+          </a:pPr>
+        </a:p>
+      </c:txPr>
+    </c:title>
+    <c:plotArea>
+      <c:doughnutChart>
+        <c:ser>
+          <c:idx val="0"/>
+          <c:order val="0"/>
+          <c:tx>
+            <c:v>Observed dimensions</c:v>
+          </c:tx>
+          <c:dPt>
+            <c:idx val="0"/>
+            <c:spPr>
+              <a:solidFill xmlns:a="http://schemas.openxmlformats.org/drawingml/2006/main">
+                <a:srgbClr val="007F80"/>
+              </a:solidFill>
+            </c:spPr>
+          </c:dPt>
+          <c:dPt>
+            <c:idx val="1"/>
+            <c:spPr>
+              <a:solidFill xmlns:a="http://schemas.openxmlformats.org/drawingml/2006/main">
+                <a:srgbClr val="E47F29"/>
+              </a:solidFill>
+            </c:spPr>
+          </c:dPt>
+          <c:cat>
+            <c:strRef>
+              <c:f>'Chart Data'!$A$2:$A$3</c:f>
+              <c:strCache>
+                <c:ptCount val="2"/>
+                <c:pt idx="0">
+                  <c:v>Pose: 8</c:v>
+                </c:pt>
+                <c:pt idx="1">
+                  <c:v>Velocity: 9</c:v>
+                </c:pt>
+              </c:strCache>
+            </c:strRef>
+          </c:cat>
+          <c:val>
+            <c:numRef>
+              <c:f>'Chart Data'!$B$2:$B$3</c:f>
+              <c:numCache>
+                <c:formatCode>General</c:formatCode>
+                <c:ptCount val="2"/>
+                <c:pt idx="0">
+                  <c:v>8</c:v>
+                </c:pt>
+                <c:pt idx="1">
+                  <c:v>9</c:v>
+                </c:pt>
+              </c:numCache>
+            </c:numRef>
+          </c:val>
+        </c:ser>
+        <c:dLbls>
+          <c:txPr>
+            <a:bodyPr xmlns:a="http://schemas.openxmlformats.org/drawingml/2006/main" anchorCtr="1"/>
+            <a:lstStyle xmlns:a="http://schemas.openxmlformats.org/drawingml/2006/main"/>
+            <a:p xmlns:a="http://schemas.openxmlformats.org/drawingml/2006/main">
+              <a:pPr>
+                <a:defRPr>
+                  <a:latin typeface="Arial"/>
+                  <a:ea typeface="Arial"/>
+                  <a:cs typeface="Arial"/>
+                </a:defRPr>
+              </a:pPr>
+            </a:p>
+          </c:txPr>
+          <c:showLegendKey val="0"/>
+          <c:showVal val="0"/>
+          <c:showCatName val="0"/>
+          <c:showSerName val="0"/>
+          <c:showPercent val="0"/>
+          <c:showBubbleSize val="0"/>
+          <c:showLeaderLines val="0"/>
+        </c:dLbls>
+        <c:holeSize val="76"/>
+      </c:doughnutChart>
+      <c:spPr>
+        <a:solidFill xmlns:a="http://schemas.openxmlformats.org/drawingml/2006/main">
+          <a:srgbClr val="FBFCFD"/>
+        </a:solidFill>
+      </c:spPr>
+    </c:plotArea>
+    <c:legend>
+      <c:legendPos val="b"/>
+      <c:overlay val="0"/>
+      <c:txPr>
+        <a:bodyPr xmlns:a="http://schemas.openxmlformats.org/drawingml/2006/main" anchorCtr="1"/>
+        <a:lstStyle xmlns:a="http://schemas.openxmlformats.org/drawingml/2006/main"/>
+        <a:p xmlns:a="http://schemas.openxmlformats.org/drawingml/2006/main">
+          <a:pPr>
+            <a:defRPr sz="1875">
+              <a:latin typeface="Arial"/>
+              <a:ea typeface="Arial"/>
+              <a:cs typeface="Arial"/>
+            </a:defRPr>
+          </a:pPr>
+        </a:p>
+      </c:txPr>
+    </c:legend>
+    <c:plotVisOnly val="1"/>
+  </c:chart>
+  <c:spPr>
+    <a:solidFill xmlns:a="http://schemas.openxmlformats.org/drawingml/2006/main">
+      <a:srgbClr val="FBFCFD"/>
+    </a:solidFill>
+    <a:ln xmlns:a="http://schemas.openxmlformats.org/drawingml/2006/main">
+      <a:noFill/>
+    </a:ln>
+  </c:spPr>
+  <c:externalData r:id="rIdChartSnapshot1">
+    <c:autoUpdate val="0"/>
+  </c:externalData>
+</c:chartSpace>
+</file>
+
+<file path=ppt/slides/charts/chart2.xml><?xml version="1.0" encoding="utf-8"?>
+<c:chartSpace xmlns:c="http://schemas.openxmlformats.org/drawingml/2006/chart" xmlns:r="http://schemas.openxmlformats.org/officeDocument/2006/relationships">
+  <c:lang val="en-US"/>
+  <c:chart>
+    <c:title>
+      <c:tx>
+        <c:rich>
+          <a:bodyPr xmlns:a="http://schemas.openxmlformats.org/drawingml/2006/main"/>
+          <a:lstStyle xmlns:a="http://schemas.openxmlformats.org/drawingml/2006/main"/>
+          <a:p xmlns:a="http://schemas.openxmlformats.org/drawingml/2006/main">
+            <a:r>
+              <a:rPr sz="1950" b="1">
+                <a:latin typeface="Arial"/>
+                <a:ea typeface="Arial"/>
+                <a:cs typeface="Arial"/>
+              </a:rPr>
+              <a:t>Validation raw episodic return</a:t>
+            </a:r>
+          </a:p>
+        </c:rich>
+      </c:tx>
+      <c:overlay val="0"/>
+      <c:txPr>
+        <a:bodyPr xmlns:a="http://schemas.openxmlformats.org/drawingml/2006/main" anchorCtr="1"/>
+        <a:lstStyle xmlns:a="http://schemas.openxmlformats.org/drawingml/2006/main"/>
+        <a:p xmlns:a="http://schemas.openxmlformats.org/drawingml/2006/main">
+          <a:pPr>
+            <a:defRPr sz="1950" b="1">
+              <a:latin typeface="Arial"/>
+              <a:ea typeface="Arial"/>
+              <a:cs typeface="Arial"/>
+            </a:defRPr>
+          </a:pPr>
+        </a:p>
+      </c:txPr>
+    </c:title>
+    <c:plotArea>
+      <c:scatterChart>
+        <c:scatterStyle val="lineMarker"/>
+        <c:varyColors val="0"/>
+        <c:ser>
+          <c:idx val="0"/>
+          <c:order val="0"/>
+          <c:tx>
+            <c:v>Seed 0</c:v>
+          </c:tx>
+          <c:spPr>
+            <a:ln xmlns:a="http://schemas.openxmlformats.org/drawingml/2006/main" w="28575">
+              <a:solidFill>
+                <a:srgbClr val="6D8190"/>
+              </a:solidFill>
+            </a:ln>
+          </c:spPr>
+          <c:marker>
+            <c:symbol val="circle"/>
+            <c:size val="7"/>
+            <c:spPr>
+              <a:solidFill xmlns:a="http://schemas.openxmlformats.org/drawingml/2006/main">
+                <a:srgbClr val="6D8190"/>
+              </a:solidFill>
+            </c:spPr>
+          </c:marker>
+          <c:xVal>
+            <c:numRef>
+              <c:f>'Chart Data'!$A$2:$A$6</c:f>
+              <c:numCache>
+                <c:formatCode>General</c:formatCode>
+                <c:ptCount val="5"/>
+                <c:pt idx="0">
+                  <c:v>100</c:v>
+                </c:pt>
+                <c:pt idx="1">
+                  <c:v>150</c:v>
+                </c:pt>
+                <c:pt idx="2">
+                  <c:v>200</c:v>
+                </c:pt>
+                <c:pt idx="3">
+                  <c:v>300</c:v>
+                </c:pt>
+                <c:pt idx="4">
+                  <c:v>500</c:v>
+                </c:pt>
+              </c:numCache>
+            </c:numRef>
+          </c:xVal>
+          <c:yVal>
+            <c:numRef>
+              <c:f>'Chart Data'!$B$2:$B$6</c:f>
+              <c:numCache>
+                <c:formatCode>#,##0</c:formatCode>
+                <c:ptCount val="5"/>
+                <c:pt idx="0">
+                  <c:v>1613.03</c:v>
+                </c:pt>
+                <c:pt idx="1">
+                  <c:v>4049.37</c:v>
+                </c:pt>
+                <c:pt idx="2">
+                  <c:v>5403.12</c:v>
+                </c:pt>
+                <c:pt idx="3">
+                  <c:v>6629.58</c:v>
+                </c:pt>
+                <c:pt idx="4">
+                  <c:v>6864.09</c:v>
+                </c:pt>
+              </c:numCache>
+            </c:numRef>
+          </c:yVal>
+        </c:ser>
+        <c:ser>
+          <c:idx val="1"/>
+          <c:order val="1"/>
+          <c:tx>
+            <c:v>Seed 1</c:v>
+          </c:tx>
+          <c:spPr>
+            <a:ln xmlns:a="http://schemas.openxmlformats.org/drawingml/2006/main" w="28575">
+              <a:solidFill>
+                <a:srgbClr val="007F80"/>
+              </a:solidFill>
+            </a:ln>
+          </c:spPr>
+          <c:marker>
+            <c:symbol val="circle"/>
+            <c:size val="7"/>
+            <c:spPr>
+              <a:solidFill xmlns:a="http://schemas.openxmlformats.org/drawingml/2006/main">
+                <a:srgbClr val="007F80"/>
+              </a:solidFill>
+            </c:spPr>
+          </c:marker>
+          <c:xVal>
+            <c:numRef>
+              <c:f>'Chart Data'!$C$2:$C$6</c:f>
+              <c:numCache>
+                <c:formatCode>General</c:formatCode>
+                <c:ptCount val="5"/>
+                <c:pt idx="0">
+                  <c:v>100</c:v>
+                </c:pt>
+                <c:pt idx="1">
+                  <c:v>150</c:v>
+                </c:pt>
+                <c:pt idx="2">
+                  <c:v>200</c:v>
+                </c:pt>
+                <c:pt idx="3">
+                  <c:v>300</c:v>
+                </c:pt>
+                <c:pt idx="4">
+                  <c:v>500</c:v>
+                </c:pt>
+              </c:numCache>
+            </c:numRef>
+          </c:xVal>
+          <c:yVal>
+            <c:numRef>
+              <c:f>'Chart Data'!$D$2:$D$6</c:f>
+              <c:numCache>
+                <c:formatCode>#,##0</c:formatCode>
+                <c:ptCount val="5"/>
+                <c:pt idx="0">
+                  <c:v>1504.65</c:v>
+                </c:pt>
+                <c:pt idx="1">
+                  <c:v>5661.84</c:v>
+                </c:pt>
+                <c:pt idx="2">
+                  <c:v>2852.51</c:v>
+                </c:pt>
+                <c:pt idx="3">
+                  <c:v>8762.76</c:v>
+                </c:pt>
+                <c:pt idx="4">
+                  <c:v>15232.53</c:v>
+                </c:pt>
+              </c:numCache>
+            </c:numRef>
+          </c:yVal>
+        </c:ser>
+        <c:ser>
+          <c:idx val="2"/>
+          <c:order val="2"/>
+          <c:tx>
+            <c:v>Seed 2</c:v>
+          </c:tx>
+          <c:spPr>
+            <a:ln xmlns:a="http://schemas.openxmlformats.org/drawingml/2006/main" w="28575">
+              <a:solidFill>
+                <a:srgbClr val="E47F29"/>
+              </a:solidFill>
+            </a:ln>
+          </c:spPr>
+          <c:marker>
+            <c:symbol val="circle"/>
+            <c:size val="7"/>
+            <c:spPr>
+              <a:solidFill xmlns:a="http://schemas.openxmlformats.org/drawingml/2006/main">
+                <a:srgbClr val="E47F29"/>
+              </a:solidFill>
+            </c:spPr>
+          </c:marker>
+          <c:xVal>
+            <c:numRef>
+              <c:f>'Chart Data'!$E$2:$E$6</c:f>
+              <c:numCache>
+                <c:formatCode>General</c:formatCode>
+                <c:ptCount val="5"/>
+                <c:pt idx="0">
+                  <c:v>100</c:v>
+                </c:pt>
+                <c:pt idx="1">
+                  <c:v>150</c:v>
+                </c:pt>
+                <c:pt idx="2">
+                  <c:v>200</c:v>
+                </c:pt>
+                <c:pt idx="3">
+                  <c:v>300</c:v>
+                </c:pt>
+                <c:pt idx="4">
+                  <c:v>500</c:v>
+                </c:pt>
+              </c:numCache>
+            </c:numRef>
+          </c:xVal>
+          <c:yVal>
+            <c:numRef>
+              <c:f>'Chart Data'!$F$2:$F$6</c:f>
+              <c:numCache>
+                <c:formatCode>#,##0</c:formatCode>
+                <c:ptCount val="5"/>
+                <c:pt idx="0">
+                  <c:v>2667.16</c:v>
+                </c:pt>
+                <c:pt idx="1">
+                  <c:v>6968.4</c:v>
+                </c:pt>
+                <c:pt idx="2">
+                  <c:v>12024.62</c:v>
+                </c:pt>
+                <c:pt idx="3">
+                  <c:v>6957.27</c:v>
+                </c:pt>
+                <c:pt idx="4">
+                  <c:v>12732.22</c:v>
+                </c:pt>
+              </c:numCache>
+            </c:numRef>
+          </c:yVal>
+        </c:ser>
+        <c:dLbls>
+          <c:txPr>
+            <a:bodyPr xmlns:a="http://schemas.openxmlformats.org/drawingml/2006/main" anchorCtr="1"/>
+            <a:lstStyle xmlns:a="http://schemas.openxmlformats.org/drawingml/2006/main"/>
+            <a:p xmlns:a="http://schemas.openxmlformats.org/drawingml/2006/main">
+              <a:pPr>
+                <a:defRPr>
+                  <a:latin typeface="Arial"/>
+                  <a:ea typeface="Arial"/>
+                  <a:cs typeface="Arial"/>
+                </a:defRPr>
+              </a:pPr>
+            </a:p>
+          </c:txPr>
+          <c:showLegendKey val="0"/>
+          <c:showVal val="0"/>
+          <c:showCatName val="0"/>
+          <c:showSerName val="0"/>
+          <c:showPercent val="0"/>
+          <c:showBubbleSize val="0"/>
+          <c:showLeaderLines val="0"/>
+        </c:dLbls>
+        <c:axId val="48650112"/>
+        <c:axId val="48672768"/>
+      </c:scatterChart>
+      <c:valAx>
+        <c:axId val="48672768"/>
+        <c:scaling>
+          <c:orientation val="minMax"/>
+          <c:max val="16000"/>
+          <c:min val="0"/>
+        </c:scaling>
+        <c:delete val="0"/>
+        <c:axPos val="l"/>
+        <c:majorGridlines>
+          <c:spPr>
+            <a:ln xmlns:a="http://schemas.openxmlformats.org/drawingml/2006/main" w="9525">
+              <a:solidFill>
+                <a:srgbClr val="DBE4E9"/>
+              </a:solidFill>
+            </a:ln>
+          </c:spPr>
+        </c:majorGridlines>
+        <c:numFmt formatCode="#,##0"/>
+        <c:majorTickMark val="none"/>
+        <c:minorTickMark val="none"/>
+        <c:spPr>
+          <a:ln xmlns:a="http://schemas.openxmlformats.org/drawingml/2006/main" w="9525">
+            <a:solidFill>
+              <a:srgbClr val="D4D4D4"/>
+            </a:solidFill>
+            <a:prstDash val="solid"/>
+          </a:ln>
+        </c:spPr>
+        <c:txPr>
+          <a:bodyPr xmlns:a="http://schemas.openxmlformats.org/drawingml/2006/main" anchorCtr="1"/>
+          <a:lstStyle xmlns:a="http://schemas.openxmlformats.org/drawingml/2006/main"/>
+          <a:p xmlns:a="http://schemas.openxmlformats.org/drawingml/2006/main">
+            <a:pPr>
+              <a:defRPr sz="1650">
+                <a:solidFill>
+                  <a:srgbClr val="666666"/>
+                </a:solidFill>
+                <a:latin typeface="Arial"/>
+                <a:ea typeface="Arial"/>
+                <a:cs typeface="Arial"/>
+              </a:defRPr>
+            </a:pPr>
+          </a:p>
+        </c:txPr>
+        <c:crossAx val="48650112"/>
+        <c:majorUnit val="4000"/>
+      </c:valAx>
+      <c:valAx>
+        <c:axId val="48650112"/>
+        <c:scaling>
+          <c:orientation val="minMax"/>
+          <c:max val="500"/>
+          <c:min val="100"/>
+        </c:scaling>
+        <c:delete val="0"/>
+        <c:axPos val="b"/>
+        <c:title>
+          <c:tx>
+            <c:rich>
+              <a:bodyPr xmlns:a="http://schemas.openxmlformats.org/drawingml/2006/main"/>
+              <a:lstStyle xmlns:a="http://schemas.openxmlformats.org/drawingml/2006/main"/>
+              <a:p xmlns:a="http://schemas.openxmlformats.org/drawingml/2006/main">
+                <a:r>
+                  <a:rPr sz="1725">
+                    <a:latin typeface="Arial"/>
+                    <a:ea typeface="Arial"/>
+                    <a:cs typeface="Arial"/>
+                  </a:rPr>
+                  <a:t>Offline updates (thousands)</a:t>
+                </a:r>
+              </a:p>
+            </c:rich>
+          </c:tx>
+          <c:overlay val="0"/>
+          <c:txPr>
+            <a:bodyPr xmlns:a="http://schemas.openxmlformats.org/drawingml/2006/main" anchorCtr="1"/>
+            <a:lstStyle xmlns:a="http://schemas.openxmlformats.org/drawingml/2006/main"/>
+            <a:p xmlns:a="http://schemas.openxmlformats.org/drawingml/2006/main">
+              <a:pPr>
+                <a:defRPr sz="1725">
+                  <a:latin typeface="Arial"/>
+                  <a:ea typeface="Arial"/>
+                  <a:cs typeface="Arial"/>
+                </a:defRPr>
+              </a:pPr>
+            </a:p>
+          </c:txPr>
+        </c:title>
+        <c:numFmt formatCode="0"/>
+        <c:majorTickMark val="none"/>
+        <c:minorTickMark val="none"/>
+        <c:spPr>
+          <a:ln xmlns:a="http://schemas.openxmlformats.org/drawingml/2006/main" w="9525">
+            <a:solidFill>
+              <a:srgbClr val="DBE4E9"/>
+            </a:solidFill>
+          </a:ln>
+        </c:spPr>
+        <c:txPr>
+          <a:bodyPr xmlns:a="http://schemas.openxmlformats.org/drawingml/2006/main" anchorCtr="1"/>
+          <a:lstStyle xmlns:a="http://schemas.openxmlformats.org/drawingml/2006/main"/>
+          <a:p xmlns:a="http://schemas.openxmlformats.org/drawingml/2006/main">
+            <a:pPr>
+              <a:defRPr sz="1650">
+                <a:solidFill>
+                  <a:srgbClr val="666666"/>
+                </a:solidFill>
+                <a:latin typeface="Arial"/>
+                <a:ea typeface="Arial"/>
+                <a:cs typeface="Arial"/>
+              </a:defRPr>
+            </a:pPr>
+          </a:p>
+        </c:txPr>
+        <c:crossAx val="48672768"/>
+        <c:majorUnit val="100"/>
+      </c:valAx>
+      <c:spPr>
+        <a:solidFill xmlns:a="http://schemas.openxmlformats.org/drawingml/2006/main">
+          <a:srgbClr val="FBFCFD"/>
+        </a:solidFill>
+      </c:spPr>
+    </c:plotArea>
+    <c:legend>
+      <c:legendPos val="b"/>
+      <c:overlay val="0"/>
+      <c:txPr>
+        <a:bodyPr xmlns:a="http://schemas.openxmlformats.org/drawingml/2006/main" anchorCtr="1"/>
+        <a:lstStyle xmlns:a="http://schemas.openxmlformats.org/drawingml/2006/main"/>
+        <a:p xmlns:a="http://schemas.openxmlformats.org/drawingml/2006/main">
+          <a:pPr>
+            <a:defRPr sz="1725">
+              <a:latin typeface="Arial"/>
+              <a:ea typeface="Arial"/>
+              <a:cs typeface="Arial"/>
+            </a:defRPr>
+          </a:pPr>
+        </a:p>
+      </c:txPr>
+    </c:legend>
+    <c:plotVisOnly val="1"/>
+  </c:chart>
+  <c:spPr>
+    <a:solidFill xmlns:a="http://schemas.openxmlformats.org/drawingml/2006/main">
+      <a:srgbClr val="FBFCFD"/>
+    </a:solidFill>
+    <a:ln xmlns:a="http://schemas.openxmlformats.org/drawingml/2006/main">
+      <a:noFill/>
+    </a:ln>
+  </c:spPr>
+  <c:externalData r:id="rIdChartSnapshot1">
+    <c:autoUpdate val="0"/>
+  </c:externalData>
+</c:chartSpace>
+</file>
+
 <file path=ppt/slides/slide1.xml><?xml version="1.0" encoding="utf-8"?>
 <p:sld xmlns:p="http://schemas.openxmlformats.org/presentationml/2006/main">
   <p:cSld>
     <p:bg>
       <p:bgPr>
         <a:solidFill xmlns:a="http://schemas.openxmlformats.org/drawingml/2006/main">
-          <a:srgbClr val="F7FAFC"/>
+          <a:srgbClr val="132E40"/>
         </a:solidFill>
       </p:bgPr>
     </p:bg>
@@ -3540,10 +4148,10 @@
       </p:grpSpPr>
       <p:sp>
         <p:nvSpPr>
-          <p:cNvPr id="5" name="heading">
-            <a:extLst xmlns:a="http://schemas.openxmlformats.org/drawingml/2006/main">
-              <a:ext uri="{FF2B5EF4-FFF2-40B4-BE49-F238E27FC236}">
-                <a16:creationId xmlns:a16="http://schemas.microsoft.com/office/drawing/2014/main" id="{BAC5D57D-8522-490C-8F54-EECD8660F90B}"/>
+          <p:cNvPr id="7" name="">
+            <a:extLst xmlns:a="http://schemas.openxmlformats.org/drawingml/2006/main">
+              <a:ext uri="{FF2B5EF4-FFF2-40B4-BE49-F238E27FC236}">
+                <a16:creationId xmlns:a16="http://schemas.microsoft.com/office/drawing/2014/main" id="{C9F75A27-6017-42D0-956B-1578C42AA6D6}"/>
               </a:ext>
             </a:extLst>
           </p:cNvPr>
@@ -3554,8 +4162,8 @@
         </p:nvSpPr>
         <p:spPr>
           <a:xfrm xmlns:a="http://schemas.openxmlformats.org/drawingml/2006/main">
-            <a:off x="685800" y="1238250"/>
-            <a:ext cx="10572750" cy="1666875"/>
+            <a:off x="609600" y="1066800"/>
+            <a:ext cx="5905500" cy="1905000"/>
           </a:xfrm>
           <a:prstGeom xmlns:a="http://schemas.openxmlformats.org/drawingml/2006/main" prst="rect">
             <a:avLst/>
@@ -3568,10 +4176,10 @@
         <p:txBody>
           <a:bodyPr xmlns:a="http://schemas.openxmlformats.org/drawingml/2006/main" lIns="0" tIns="0" rIns="0" bIns="0"/>
           <a:lstStyle xmlns:a="http://schemas.openxmlformats.org/drawingml/2006/main">
-            <a:defPPr>
-              <a:defRPr sz="4950" b="1">
-                <a:solidFill>
-                  <a:srgbClr val="142B40"/>
+            <a:defPPr algn="l">
+              <a:defRPr sz="5700" b="1">
+                <a:solidFill>
+                  <a:srgbClr val="FFFFFF"/>
                 </a:solidFill>
                 <a:latin typeface="Arial"/>
                 <a:ea typeface="Arial"/>
@@ -3580,10 +4188,10 @@
             </a:defPPr>
           </a:lstStyle>
           <a:p xmlns:a="http://schemas.openxmlformats.org/drawingml/2006/main">
-            <a:pPr>
-              <a:defRPr sz="4950" b="1">
-                <a:solidFill>
-                  <a:srgbClr val="142B40"/>
+            <a:pPr algn="l">
+              <a:defRPr sz="5700" b="1">
+                <a:solidFill>
+                  <a:srgbClr val="FFFFFF"/>
                 </a:solidFill>
                 <a:latin typeface="Arial"/>
                 <a:ea typeface="Arial"/>
@@ -3591,22 +4199,22 @@
               </a:defRPr>
             </a:pPr>
             <a:r>
-              <a:rPr sz="4950" b="1">
-                <a:solidFill>
-                  <a:srgbClr val="142B40"/>
+              <a:rPr sz="5700" b="1">
+                <a:solidFill>
+                  <a:srgbClr val="FFFFFF"/>
                 </a:solidFill>
                 <a:latin typeface="Arial"/>
                 <a:ea typeface="Arial"/>
                 <a:cs typeface="Arial"/>
               </a:rPr>
-              <a:t>Implicit Q-Learning</a:t>
-            </a:r>
-          </a:p>
-          <a:p xmlns:a="http://schemas.openxmlformats.org/drawingml/2006/main">
-            <a:pPr>
-              <a:defRPr sz="4950" b="1">
-                <a:solidFill>
-                  <a:srgbClr val="142B40"/>
+              <a:t>Implicit</a:t>
+            </a:r>
+          </a:p>
+          <a:p xmlns:a="http://schemas.openxmlformats.org/drawingml/2006/main">
+            <a:pPr algn="l">
+              <a:defRPr sz="5700" b="1">
+                <a:solidFill>
+                  <a:srgbClr val="FFFFFF"/>
                 </a:solidFill>
                 <a:latin typeface="Arial"/>
                 <a:ea typeface="Arial"/>
@@ -3614,25 +4222,25 @@
               </a:defRPr>
             </a:pPr>
             <a:r>
-              <a:rPr sz="4950" b="1">
-                <a:solidFill>
-                  <a:srgbClr val="142B40"/>
+              <a:rPr sz="5700" b="1">
+                <a:solidFill>
+                  <a:srgbClr val="FFFFFF"/>
                 </a:solidFill>
                 <a:latin typeface="Arial"/>
                 <a:ea typeface="Arial"/>
                 <a:cs typeface="Arial"/>
               </a:rPr>
-              <a:t>on HalfCheetah</a:t>
-            </a:r>
-          </a:p>
-        </p:txBody>
-      </p:sp>
-      <p:sp>
-        <p:nvSpPr>
-          <p:cNvPr id="2" name="body">
-            <a:extLst xmlns:a="http://schemas.openxmlformats.org/drawingml/2006/main">
-              <a:ext uri="{FF2B5EF4-FFF2-40B4-BE49-F238E27FC236}">
-                <a16:creationId xmlns:a16="http://schemas.microsoft.com/office/drawing/2014/main" id="{A008D9F6-6EE3-43AE-B7FC-BADBF1772DD4}"/>
+              <a:t>Q-Learning</a:t>
+            </a:r>
+          </a:p>
+        </p:txBody>
+      </p:sp>
+      <p:sp>
+        <p:nvSpPr>
+          <p:cNvPr id="2" name="">
+            <a:extLst xmlns:a="http://schemas.openxmlformats.org/drawingml/2006/main">
+              <a:ext uri="{FF2B5EF4-FFF2-40B4-BE49-F238E27FC236}">
+                <a16:creationId xmlns:a16="http://schemas.microsoft.com/office/drawing/2014/main" id="{22507F52-B895-46DA-91A5-C75443BDDB1A}"/>
               </a:ext>
             </a:extLst>
           </p:cNvPr>
@@ -3643,8 +4251,8 @@
         </p:nvSpPr>
         <p:spPr>
           <a:xfrm xmlns:a="http://schemas.openxmlformats.org/drawingml/2006/main">
-            <a:off x="685800" y="3190875"/>
-            <a:ext cx="10477500" cy="571500"/>
+            <a:off x="609600" y="3209925"/>
+            <a:ext cx="5810250" cy="714375"/>
           </a:xfrm>
           <a:prstGeom xmlns:a="http://schemas.openxmlformats.org/drawingml/2006/main" prst="rect">
             <a:avLst/>
@@ -3657,10 +4265,10 @@
         <p:txBody>
           <a:bodyPr xmlns:a="http://schemas.openxmlformats.org/drawingml/2006/main" lIns="0" tIns="0" rIns="0" bIns="0"/>
           <a:lstStyle xmlns:a="http://schemas.openxmlformats.org/drawingml/2006/main">
-            <a:defPPr>
-              <a:defRPr sz="2700" b="0">
-                <a:solidFill>
-                  <a:srgbClr val="147A78"/>
+            <a:defPPr algn="l">
+              <a:defRPr sz="3450" b="1">
+                <a:solidFill>
+                  <a:srgbClr val="60D3C0"/>
                 </a:solidFill>
                 <a:latin typeface="Arial"/>
                 <a:ea typeface="Arial"/>
@@ -3669,10 +4277,10 @@
             </a:defPPr>
           </a:lstStyle>
           <a:p xmlns:a="http://schemas.openxmlformats.org/drawingml/2006/main">
-            <a:pPr>
-              <a:defRPr sz="2700" b="0">
-                <a:solidFill>
-                  <a:srgbClr val="147A78"/>
+            <a:pPr algn="l">
+              <a:defRPr sz="3450" b="1">
+                <a:solidFill>
+                  <a:srgbClr val="60D3C0"/>
                 </a:solidFill>
                 <a:latin typeface="Arial"/>
                 <a:ea typeface="Arial"/>
@@ -3680,25 +4288,25 @@
               </a:defRPr>
             </a:pPr>
             <a:r>
-              <a:rPr sz="2700" b="0">
-                <a:solidFill>
-                  <a:srgbClr val="147A78"/>
+              <a:rPr sz="3450" b="1">
+                <a:solidFill>
+                  <a:srgbClr val="60D3C0"/>
                 </a:solidFill>
                 <a:latin typeface="Arial"/>
                 <a:ea typeface="Arial"/>
                 <a:cs typeface="Arial"/>
               </a:rPr>
-              <a:t>RL project proposal</a:t>
-            </a:r>
-          </a:p>
-        </p:txBody>
-      </p:sp>
-      <p:sp>
-        <p:nvSpPr>
-          <p:cNvPr id="3" name="body">
-            <a:extLst xmlns:a="http://schemas.openxmlformats.org/drawingml/2006/main">
-              <a:ext uri="{FF2B5EF4-FFF2-40B4-BE49-F238E27FC236}">
-                <a16:creationId xmlns:a16="http://schemas.microsoft.com/office/drawing/2014/main" id="{50C6F1A8-12C4-43CF-B1DF-ACEC1E8C0485}"/>
+              <a:t>HalfCheetah-v5</a:t>
+            </a:r>
+          </a:p>
+        </p:txBody>
+      </p:sp>
+      <p:sp>
+        <p:nvSpPr>
+          <p:cNvPr id="3" name="">
+            <a:extLst xmlns:a="http://schemas.openxmlformats.org/drawingml/2006/main">
+              <a:ext uri="{FF2B5EF4-FFF2-40B4-BE49-F238E27FC236}">
+                <a16:creationId xmlns:a16="http://schemas.microsoft.com/office/drawing/2014/main" id="{787A6054-1BDD-4F9C-9E74-EB642930C9E9}"/>
               </a:ext>
             </a:extLst>
           </p:cNvPr>
@@ -3709,8 +4317,8 @@
         </p:nvSpPr>
         <p:spPr>
           <a:xfrm xmlns:a="http://schemas.openxmlformats.org/drawingml/2006/main">
-            <a:off x="685800" y="4572000"/>
-            <a:ext cx="10477500" cy="1047750"/>
+            <a:off x="609600" y="4086225"/>
+            <a:ext cx="6286500" cy="476250"/>
           </a:xfrm>
           <a:prstGeom xmlns:a="http://schemas.openxmlformats.org/drawingml/2006/main" prst="rect">
             <a:avLst/>
@@ -3723,10 +4331,10 @@
         <p:txBody>
           <a:bodyPr xmlns:a="http://schemas.openxmlformats.org/drawingml/2006/main" lIns="0" tIns="0" rIns="0" bIns="0"/>
           <a:lstStyle xmlns:a="http://schemas.openxmlformats.org/drawingml/2006/main">
-            <a:defPPr>
-              <a:defRPr sz="2025" b="0">
-                <a:solidFill>
-                  <a:srgbClr val="142B40"/>
+            <a:defPPr algn="l">
+              <a:defRPr sz="2100" b="0">
+                <a:solidFill>
+                  <a:srgbClr val="FFFFFF"/>
                 </a:solidFill>
                 <a:latin typeface="Arial"/>
                 <a:ea typeface="Arial"/>
@@ -3735,10 +4343,10 @@
             </a:defPPr>
           </a:lstStyle>
           <a:p xmlns:a="http://schemas.openxmlformats.org/drawingml/2006/main">
-            <a:pPr>
-              <a:defRPr sz="2025" b="0">
-                <a:solidFill>
-                  <a:srgbClr val="142B40"/>
+            <a:pPr algn="l">
+              <a:defRPr sz="2100" b="0">
+                <a:solidFill>
+                  <a:srgbClr val="FFFFFF"/>
                 </a:solidFill>
                 <a:latin typeface="Arial"/>
                 <a:ea typeface="Arial"/>
@@ -3746,60 +4354,65 @@
               </a:defRPr>
             </a:pPr>
             <a:r>
-              <a:rPr sz="2025" b="0">
-                <a:solidFill>
-                  <a:srgbClr val="142B40"/>
+              <a:rPr sz="2100" b="0">
+                <a:solidFill>
+                  <a:srgbClr val="FFFFFF"/>
                 </a:solidFill>
                 <a:latin typeface="Arial"/>
                 <a:ea typeface="Arial"/>
                 <a:cs typeface="Arial"/>
               </a:rPr>
-              <a:t>Aleksandr Medvedev, Nikita Shankin, Leo Vesin</a:t>
-            </a:r>
-          </a:p>
-          <a:p xmlns:a="http://schemas.openxmlformats.org/drawingml/2006/main">
-            <a:pPr>
-              <a:defRPr sz="2025" b="0">
-                <a:solidFill>
-                  <a:srgbClr val="142B40"/>
-                </a:solidFill>
-                <a:latin typeface="Arial"/>
-                <a:ea typeface="Arial"/>
-                <a:cs typeface="Arial"/>
-              </a:defRPr>
-            </a:pPr>
-            <a:r>
-              <a:rPr sz="2025" b="0">
-                <a:solidFill>
-                  <a:srgbClr val="142B40"/>
-                </a:solidFill>
-                <a:latin typeface="Arial"/>
-                <a:ea typeface="Arial"/>
-                <a:cs typeface="Arial"/>
-              </a:rPr>
-              <a:t>Ruslan Nasibullin, Telman Nuruzov</a:t>
-            </a:r>
-          </a:p>
-        </p:txBody>
-      </p:sp>
-      <p:sp>
-        <p:nvSpPr>
-          <p:cNvPr id="4" name="body">
-            <a:extLst xmlns:a="http://schemas.openxmlformats.org/drawingml/2006/main">
-              <a:ext uri="{FF2B5EF4-FFF2-40B4-BE49-F238E27FC236}">
-                <a16:creationId xmlns:a16="http://schemas.microsoft.com/office/drawing/2014/main" id="{5DE5526E-299E-49B6-98DF-A76C7E2E9A70}"/>
-              </a:ext>
-            </a:extLst>
-          </p:cNvPr>
-          <p:cNvSpPr>
-            <a:spLocks xmlns:a="http://schemas.openxmlformats.org/drawingml/2006/main" noGrp="1"/>
-          </p:cNvSpPr>
+              <a:t>Offline reinforcement learning proposal</a:t>
+            </a:r>
+          </a:p>
+        </p:txBody>
+      </p:sp>
+      <p:pic>
+        <p:nvPicPr>
+          <p:cNvPr id="4" name="">
+            <a:extLst xmlns:a="http://schemas.openxmlformats.org/drawingml/2006/main">
+              <a:ext uri="{FF2B5EF4-FFF2-40B4-BE49-F238E27FC236}">
+                <a16:creationId xmlns:a16="http://schemas.microsoft.com/office/drawing/2014/main" id="{DE0D56D1-31DB-4160-AF25-863AC8CF64F3}"/>
+              </a:ext>
+            </a:extLst>
+          </p:cNvPr>
+          <p:cNvPicPr>
+            <a:picLocks xmlns:a="http://schemas.openxmlformats.org/drawingml/2006/main" noChangeAspect="1"/>
+          </p:cNvPicPr>
           <p:nvPr/>
-        </p:nvSpPr>
-        <p:spPr>
-          <a:xfrm xmlns:a="http://schemas.openxmlformats.org/drawingml/2006/main">
-            <a:off x="10858500" y="6305550"/>
-            <a:ext cx="762000" cy="266700"/>
+        </p:nvPicPr>
+        <p:blipFill>
+          <a:blip xmlns:r="http://schemas.openxmlformats.org/officeDocument/2006/relationships" xmlns:a="http://schemas.openxmlformats.org/drawingml/2006/main" r:embed="Rb01540bf285a4bca"/>
+          <a:stretch xmlns:a="http://schemas.openxmlformats.org/drawingml/2006/main"/>
+        </p:blipFill>
+        <p:spPr>
+          <a:xfrm xmlns:a="http://schemas.openxmlformats.org/drawingml/2006/main">
+            <a:off x="7191375" y="952500"/>
+            <a:ext cx="4191000" cy="4191000"/>
+          </a:xfrm>
+          <a:prstGeom xmlns:a="http://schemas.openxmlformats.org/drawingml/2006/main" prst="rect">
+            <a:avLst/>
+          </a:prstGeom>
+        </p:spPr>
+      </p:pic>
+      <p:sp>
+        <p:nvSpPr>
+          <p:cNvPr id="5" name="">
+            <a:extLst xmlns:a="http://schemas.openxmlformats.org/drawingml/2006/main">
+              <a:ext uri="{FF2B5EF4-FFF2-40B4-BE49-F238E27FC236}">
+                <a16:creationId xmlns:a16="http://schemas.microsoft.com/office/drawing/2014/main" id="{054DC60F-7BE0-4A4E-AF19-98E9957238A3}"/>
+              </a:ext>
+            </a:extLst>
+          </p:cNvPr>
+          <p:cNvSpPr>
+            <a:spLocks xmlns:a="http://schemas.openxmlformats.org/drawingml/2006/main" noGrp="1"/>
+          </p:cNvSpPr>
+          <p:nvPr/>
+        </p:nvSpPr>
+        <p:spPr>
+          <a:xfrm xmlns:a="http://schemas.openxmlformats.org/drawingml/2006/main">
+            <a:off x="609600" y="5429250"/>
+            <a:ext cx="10477500" cy="762000"/>
           </a:xfrm>
           <a:prstGeom xmlns:a="http://schemas.openxmlformats.org/drawingml/2006/main" prst="rect">
             <a:avLst/>
@@ -3812,10 +4425,10 @@
         <p:txBody>
           <a:bodyPr xmlns:a="http://schemas.openxmlformats.org/drawingml/2006/main" lIns="0" tIns="0" rIns="0" bIns="0"/>
           <a:lstStyle xmlns:a="http://schemas.openxmlformats.org/drawingml/2006/main">
-            <a:defPPr>
-              <a:defRPr sz="1350" b="0">
-                <a:solidFill>
-                  <a:srgbClr val="5B6D7A"/>
+            <a:defPPr algn="l">
+              <a:defRPr sz="1875" b="0">
+                <a:solidFill>
+                  <a:srgbClr val="FFFFFF"/>
                 </a:solidFill>
                 <a:latin typeface="Arial"/>
                 <a:ea typeface="Arial"/>
@@ -3824,10 +4437,99 @@
             </a:defPPr>
           </a:lstStyle>
           <a:p xmlns:a="http://schemas.openxmlformats.org/drawingml/2006/main">
-            <a:pPr>
+            <a:pPr algn="l">
+              <a:defRPr sz="1875" b="0">
+                <a:solidFill>
+                  <a:srgbClr val="FFFFFF"/>
+                </a:solidFill>
+                <a:latin typeface="Arial"/>
+                <a:ea typeface="Arial"/>
+                <a:cs typeface="Arial"/>
+              </a:defRPr>
+            </a:pPr>
+            <a:r>
+              <a:rPr sz="1875" b="0">
+                <a:solidFill>
+                  <a:srgbClr val="FFFFFF"/>
+                </a:solidFill>
+                <a:latin typeface="Arial"/>
+                <a:ea typeface="Arial"/>
+                <a:cs typeface="Arial"/>
+              </a:rPr>
+              <a:t>Aleksandr Medvedev   Nikita Shankin   Leo Vesin</a:t>
+            </a:r>
+          </a:p>
+          <a:p xmlns:a="http://schemas.openxmlformats.org/drawingml/2006/main">
+            <a:pPr algn="l">
+              <a:defRPr sz="1875" b="0">
+                <a:solidFill>
+                  <a:srgbClr val="FFFFFF"/>
+                </a:solidFill>
+                <a:latin typeface="Arial"/>
+                <a:ea typeface="Arial"/>
+                <a:cs typeface="Arial"/>
+              </a:defRPr>
+            </a:pPr>
+            <a:r>
+              <a:rPr sz="1875" b="0">
+                <a:solidFill>
+                  <a:srgbClr val="FFFFFF"/>
+                </a:solidFill>
+                <a:latin typeface="Arial"/>
+                <a:ea typeface="Arial"/>
+                <a:cs typeface="Arial"/>
+              </a:rPr>
+              <a:t>Ruslan Nasibullin   Telman Nuruzov</a:t>
+            </a:r>
+          </a:p>
+        </p:txBody>
+      </p:sp>
+      <p:sp>
+        <p:nvSpPr>
+          <p:cNvPr id="6" name="">
+            <a:extLst xmlns:a="http://schemas.openxmlformats.org/drawingml/2006/main">
+              <a:ext uri="{FF2B5EF4-FFF2-40B4-BE49-F238E27FC236}">
+                <a16:creationId xmlns:a16="http://schemas.microsoft.com/office/drawing/2014/main" id="{5C89E22C-0AD4-4CAD-891F-DDCA7F220D18}"/>
+              </a:ext>
+            </a:extLst>
+          </p:cNvPr>
+          <p:cNvSpPr>
+            <a:spLocks xmlns:a="http://schemas.openxmlformats.org/drawingml/2006/main" noGrp="1"/>
+          </p:cNvSpPr>
+          <p:nvPr/>
+        </p:nvSpPr>
+        <p:spPr>
+          <a:xfrm xmlns:a="http://schemas.openxmlformats.org/drawingml/2006/main">
+            <a:off x="11077575" y="6457950"/>
+            <a:ext cx="666750" cy="266700"/>
+          </a:xfrm>
+          <a:prstGeom xmlns:a="http://schemas.openxmlformats.org/drawingml/2006/main" prst="rect">
+            <a:avLst/>
+          </a:prstGeom>
+          <a:noFill xmlns:a="http://schemas.openxmlformats.org/drawingml/2006/main"/>
+          <a:ln xmlns:a="http://schemas.openxmlformats.org/drawingml/2006/main" w="0">
+            <a:noFill/>
+          </a:ln>
+        </p:spPr>
+        <p:txBody>
+          <a:bodyPr xmlns:a="http://schemas.openxmlformats.org/drawingml/2006/main" lIns="0" tIns="0" rIns="0" bIns="0"/>
+          <a:lstStyle xmlns:a="http://schemas.openxmlformats.org/drawingml/2006/main">
+            <a:defPPr algn="l">
               <a:defRPr sz="1350" b="0">
                 <a:solidFill>
-                  <a:srgbClr val="5B6D7A"/>
+                  <a:srgbClr val="FFFFFF"/>
+                </a:solidFill>
+                <a:latin typeface="Arial"/>
+                <a:ea typeface="Arial"/>
+                <a:cs typeface="Arial"/>
+              </a:defRPr>
+            </a:defPPr>
+          </a:lstStyle>
+          <a:p xmlns:a="http://schemas.openxmlformats.org/drawingml/2006/main">
+            <a:pPr algn="l">
+              <a:defRPr sz="1350" b="0">
+                <a:solidFill>
+                  <a:srgbClr val="FFFFFF"/>
                 </a:solidFill>
                 <a:latin typeface="Arial"/>
                 <a:ea typeface="Arial"/>
@@ -3837,7 +4539,7 @@
             <a:r>
               <a:rPr sz="1350" b="0">
                 <a:solidFill>
-                  <a:srgbClr val="5B6D7A"/>
+                  <a:srgbClr val="FFFFFF"/>
                 </a:solidFill>
                 <a:latin typeface="Arial"/>
                 <a:ea typeface="Arial"/>
@@ -3851,7 +4553,7 @@
     </p:spTree>
     <p:extLst>
       <p:ext uri="{BB962C8B-B14F-4D97-AF65-F5344CB8AC3E}">
-        <p14:creationId xmlns:p14="http://schemas.microsoft.com/office/powerpoint/2010/main" val="71597261"/>
+        <p14:creationId xmlns:p14="http://schemas.microsoft.com/office/powerpoint/2010/main" val="454889662"/>
       </p:ext>
     </p:extLst>
   </p:cSld>
@@ -3864,7 +4566,7 @@
     <p:bg>
       <p:bgPr>
         <a:solidFill xmlns:a="http://schemas.openxmlformats.org/drawingml/2006/main">
-          <a:srgbClr val="F7FAFC"/>
+          <a:srgbClr val="FBFCFD"/>
         </a:solidFill>
       </p:bgPr>
     </p:bg>
@@ -3879,10 +4581,10 @@
       </p:grpSpPr>
       <p:sp>
         <p:nvSpPr>
-          <p:cNvPr id="11" name="heading">
-            <a:extLst xmlns:a="http://schemas.openxmlformats.org/drawingml/2006/main">
-              <a:ext uri="{FF2B5EF4-FFF2-40B4-BE49-F238E27FC236}">
-                <a16:creationId xmlns:a16="http://schemas.microsoft.com/office/drawing/2014/main" id="{8730C9E9-ACB2-4F64-AED3-F0B7F6CF4F45}"/>
+          <p:cNvPr id="22" name="">
+            <a:extLst xmlns:a="http://schemas.openxmlformats.org/drawingml/2006/main">
+              <a:ext uri="{FF2B5EF4-FFF2-40B4-BE49-F238E27FC236}">
+                <a16:creationId xmlns:a16="http://schemas.microsoft.com/office/drawing/2014/main" id="{5E3F73F7-6EE8-439B-BD7E-2DBAC2F53547}"/>
               </a:ext>
             </a:extLst>
           </p:cNvPr>
@@ -3893,8 +4595,8 @@
         </p:nvSpPr>
         <p:spPr>
           <a:xfrm xmlns:a="http://schemas.openxmlformats.org/drawingml/2006/main">
-            <a:off x="685800" y="523875"/>
-            <a:ext cx="10858500" cy="933450"/>
+            <a:off x="609600" y="457200"/>
+            <a:ext cx="11049000" cy="952500"/>
           </a:xfrm>
           <a:prstGeom xmlns:a="http://schemas.openxmlformats.org/drawingml/2006/main" prst="rect">
             <a:avLst/>
@@ -3907,10 +4609,10 @@
         <p:txBody>
           <a:bodyPr xmlns:a="http://schemas.openxmlformats.org/drawingml/2006/main" lIns="0" tIns="0" rIns="0" bIns="0"/>
           <a:lstStyle xmlns:a="http://schemas.openxmlformats.org/drawingml/2006/main">
-            <a:defPPr>
+            <a:defPPr algn="l">
               <a:defRPr sz="3450" b="1">
                 <a:solidFill>
-                  <a:srgbClr val="142B40"/>
+                  <a:srgbClr val="132E40"/>
                 </a:solidFill>
                 <a:latin typeface="Arial"/>
                 <a:ea typeface="Arial"/>
@@ -3919,10 +4621,10 @@
             </a:defPPr>
           </a:lstStyle>
           <a:p xmlns:a="http://schemas.openxmlformats.org/drawingml/2006/main">
-            <a:pPr>
+            <a:pPr algn="l">
               <a:defRPr sz="3450" b="1">
                 <a:solidFill>
-                  <a:srgbClr val="142B40"/>
+                  <a:srgbClr val="132E40"/>
                 </a:solidFill>
                 <a:latin typeface="Arial"/>
                 <a:ea typeface="Arial"/>
@@ -3932,23 +4634,23 @@
             <a:r>
               <a:rPr sz="3450" b="1">
                 <a:solidFill>
-                  <a:srgbClr val="142B40"/>
+                  <a:srgbClr val="132E40"/>
                 </a:solidFill>
                 <a:latin typeface="Arial"/>
                 <a:ea typeface="Arial"/>
                 <a:cs typeface="Arial"/>
               </a:rPr>
-              <a:t>IQL: learning from a fixed dataset</a:t>
-            </a:r>
-          </a:p>
-        </p:txBody>
-      </p:sp>
-      <p:sp>
-        <p:nvSpPr>
-          <p:cNvPr id="2" name="heading">
-            <a:extLst xmlns:a="http://schemas.openxmlformats.org/drawingml/2006/main">
-              <a:ext uri="{FF2B5EF4-FFF2-40B4-BE49-F238E27FC236}">
-                <a16:creationId xmlns:a16="http://schemas.microsoft.com/office/drawing/2014/main" id="{7886CE27-F2E7-43CF-B7B8-538206F3985F}"/>
+              <a:t>Offline data, learned values, continuous control</a:t>
+            </a:r>
+          </a:p>
+        </p:txBody>
+      </p:sp>
+      <p:sp>
+        <p:nvSpPr>
+          <p:cNvPr id="2" name="">
+            <a:extLst xmlns:a="http://schemas.openxmlformats.org/drawingml/2006/main">
+              <a:ext uri="{FF2B5EF4-FFF2-40B4-BE49-F238E27FC236}">
+                <a16:creationId xmlns:a16="http://schemas.microsoft.com/office/drawing/2014/main" id="{BCA156BC-1B46-4F25-8A5B-BD65835A9448}"/>
               </a:ext>
             </a:extLst>
           </p:cNvPr>
@@ -3959,8 +4661,8 @@
         </p:nvSpPr>
         <p:spPr>
           <a:xfrm xmlns:a="http://schemas.openxmlformats.org/drawingml/2006/main">
-            <a:off x="685800" y="1762125"/>
-            <a:ext cx="2714625" cy="647700"/>
+            <a:off x="609600" y="1619250"/>
+            <a:ext cx="2762250" cy="476250"/>
           </a:xfrm>
           <a:prstGeom xmlns:a="http://schemas.openxmlformats.org/drawingml/2006/main" prst="rect">
             <a:avLst/>
@@ -3973,10 +4675,10 @@
         <p:txBody>
           <a:bodyPr xmlns:a="http://schemas.openxmlformats.org/drawingml/2006/main" lIns="0" tIns="0" rIns="0" bIns="0"/>
           <a:lstStyle xmlns:a="http://schemas.openxmlformats.org/drawingml/2006/main">
-            <a:defPPr>
-              <a:defRPr sz="2100" b="1">
-                <a:solidFill>
-                  <a:srgbClr val="147A78"/>
+            <a:defPPr algn="l">
+              <a:defRPr sz="2550" b="1">
+                <a:solidFill>
+                  <a:srgbClr val="007F80"/>
                 </a:solidFill>
                 <a:latin typeface="Arial"/>
                 <a:ea typeface="Arial"/>
@@ -3985,10 +4687,10 @@
             </a:defPPr>
           </a:lstStyle>
           <a:p xmlns:a="http://schemas.openxmlformats.org/drawingml/2006/main">
-            <a:pPr>
-              <a:defRPr sz="2100" b="1">
-                <a:solidFill>
-                  <a:srgbClr val="147A78"/>
+            <a:pPr algn="l">
+              <a:defRPr sz="2550" b="1">
+                <a:solidFill>
+                  <a:srgbClr val="007F80"/>
                 </a:solidFill>
                 <a:latin typeface="Arial"/>
                 <a:ea typeface="Arial"/>
@@ -3996,25 +4698,25 @@
               </a:defRPr>
             </a:pPr>
             <a:r>
-              <a:rPr sz="2100" b="1">
-                <a:solidFill>
-                  <a:srgbClr val="147A78"/>
+              <a:rPr sz="2550" b="1">
+                <a:solidFill>
+                  <a:srgbClr val="007F80"/>
                 </a:solidFill>
                 <a:latin typeface="Arial"/>
                 <a:ea typeface="Arial"/>
                 <a:cs typeface="Arial"/>
               </a:rPr>
-              <a:t>Classification</a:t>
-            </a:r>
-          </a:p>
-        </p:txBody>
-      </p:sp>
-      <p:sp>
-        <p:nvSpPr>
-          <p:cNvPr id="3" name="body">
-            <a:extLst xmlns:a="http://schemas.openxmlformats.org/drawingml/2006/main">
-              <a:ext uri="{FF2B5EF4-FFF2-40B4-BE49-F238E27FC236}">
-                <a16:creationId xmlns:a16="http://schemas.microsoft.com/office/drawing/2014/main" id="{1AEF1222-AAC4-42C5-92C8-665EE7BDC722}"/>
+              <a:t>OFFLINE</a:t>
+            </a:r>
+          </a:p>
+        </p:txBody>
+      </p:sp>
+      <p:sp>
+        <p:nvSpPr>
+          <p:cNvPr id="3" name="">
+            <a:extLst xmlns:a="http://schemas.openxmlformats.org/drawingml/2006/main">
+              <a:ext uri="{FF2B5EF4-FFF2-40B4-BE49-F238E27FC236}">
+                <a16:creationId xmlns:a16="http://schemas.microsoft.com/office/drawing/2014/main" id="{B4623081-B288-4BD1-8804-28F730C1B6AF}"/>
               </a:ext>
             </a:extLst>
           </p:cNvPr>
@@ -4025,8 +4727,8 @@
         </p:nvSpPr>
         <p:spPr>
           <a:xfrm xmlns:a="http://schemas.openxmlformats.org/drawingml/2006/main">
-            <a:off x="3571875" y="1762125"/>
-            <a:ext cx="7858125" cy="952500"/>
+            <a:off x="3524250" y="1666875"/>
+            <a:ext cx="7048500" cy="476250"/>
           </a:xfrm>
           <a:prstGeom xmlns:a="http://schemas.openxmlformats.org/drawingml/2006/main" prst="rect">
             <a:avLst/>
@@ -4039,10 +4741,10 @@
         <p:txBody>
           <a:bodyPr xmlns:a="http://schemas.openxmlformats.org/drawingml/2006/main" lIns="0" tIns="0" rIns="0" bIns="0"/>
           <a:lstStyle xmlns:a="http://schemas.openxmlformats.org/drawingml/2006/main">
-            <a:defPPr>
-              <a:defRPr sz="2025" b="0">
-                <a:solidFill>
-                  <a:srgbClr val="142B40"/>
+            <a:defPPr algn="l">
+              <a:defRPr sz="2250" b="0">
+                <a:solidFill>
+                  <a:srgbClr val="132E40"/>
                 </a:solidFill>
                 <a:latin typeface="Arial"/>
                 <a:ea typeface="Arial"/>
@@ -4051,10 +4753,10 @@
             </a:defPPr>
           </a:lstStyle>
           <a:p xmlns:a="http://schemas.openxmlformats.org/drawingml/2006/main">
-            <a:pPr>
-              <a:defRPr sz="2025" b="0">
-                <a:solidFill>
-                  <a:srgbClr val="142B40"/>
+            <a:pPr algn="l">
+              <a:defRPr sz="2250" b="0">
+                <a:solidFill>
+                  <a:srgbClr val="132E40"/>
                 </a:solidFill>
                 <a:latin typeface="Arial"/>
                 <a:ea typeface="Arial"/>
@@ -4062,25 +4764,25 @@
               </a:defRPr>
             </a:pPr>
             <a:r>
-              <a:rPr sz="2025" b="0">
-                <a:solidFill>
-                  <a:srgbClr val="142B40"/>
+              <a:rPr sz="2250" b="0">
+                <a:solidFill>
+                  <a:srgbClr val="132E40"/>
                 </a:solidFill>
                 <a:latin typeface="Arial"/>
                 <a:ea typeface="Arial"/>
                 <a:cs typeface="Arial"/>
               </a:rPr>
-              <a:t>Offline, model-free actor-critic RL</a:t>
-            </a:r>
-          </a:p>
-        </p:txBody>
-      </p:sp>
-      <p:sp>
-        <p:nvSpPr>
-          <p:cNvPr id="4" name="heading">
-            <a:extLst xmlns:a="http://schemas.openxmlformats.org/drawingml/2006/main">
-              <a:ext uri="{FF2B5EF4-FFF2-40B4-BE49-F238E27FC236}">
-                <a16:creationId xmlns:a16="http://schemas.microsoft.com/office/drawing/2014/main" id="{B877DCDA-7BB1-460A-A811-5794E0BA8606}"/>
+              <a:t>Model-free actor-critic</a:t>
+            </a:r>
+          </a:p>
+        </p:txBody>
+      </p:sp>
+      <p:sp>
+        <p:nvSpPr>
+          <p:cNvPr id="4" name="">
+            <a:extLst xmlns:a="http://schemas.openxmlformats.org/drawingml/2006/main">
+              <a:ext uri="{FF2B5EF4-FFF2-40B4-BE49-F238E27FC236}">
+                <a16:creationId xmlns:a16="http://schemas.microsoft.com/office/drawing/2014/main" id="{BFF358C5-0265-463C-85DD-61199B34F398}"/>
               </a:ext>
             </a:extLst>
           </p:cNvPr>
@@ -4091,8 +4793,38 @@
         </p:nvSpPr>
         <p:spPr>
           <a:xfrm xmlns:a="http://schemas.openxmlformats.org/drawingml/2006/main">
-            <a:off x="685800" y="2800350"/>
-            <a:ext cx="2714625" cy="647700"/>
+            <a:off x="609600" y="2638425"/>
+            <a:ext cx="2857500" cy="1333500"/>
+          </a:xfrm>
+          <a:prstGeom xmlns:a="http://schemas.openxmlformats.org/drawingml/2006/main" prst="rect">
+            <a:avLst/>
+          </a:prstGeom>
+          <a:solidFill xmlns:a="http://schemas.openxmlformats.org/drawingml/2006/main">
+            <a:srgbClr val="E7F4F1"/>
+          </a:solidFill>
+          <a:ln xmlns:a="http://schemas.openxmlformats.org/drawingml/2006/main" w="0">
+            <a:noFill/>
+          </a:ln>
+        </p:spPr>
+      </p:sp>
+      <p:sp>
+        <p:nvSpPr>
+          <p:cNvPr id="5" name="">
+            <a:extLst xmlns:a="http://schemas.openxmlformats.org/drawingml/2006/main">
+              <a:ext uri="{FF2B5EF4-FFF2-40B4-BE49-F238E27FC236}">
+                <a16:creationId xmlns:a16="http://schemas.microsoft.com/office/drawing/2014/main" id="{45F3D23C-FB99-436D-8BF0-9FF351FD29AB}"/>
+              </a:ext>
+            </a:extLst>
+          </p:cNvPr>
+          <p:cNvSpPr>
+            <a:spLocks xmlns:a="http://schemas.openxmlformats.org/drawingml/2006/main" noGrp="1"/>
+          </p:cNvSpPr>
+          <p:nvPr/>
+        </p:nvSpPr>
+        <p:spPr>
+          <a:xfrm xmlns:a="http://schemas.openxmlformats.org/drawingml/2006/main">
+            <a:off x="800100" y="2828925"/>
+            <a:ext cx="2476500" cy="476250"/>
           </a:xfrm>
           <a:prstGeom xmlns:a="http://schemas.openxmlformats.org/drawingml/2006/main" prst="rect">
             <a:avLst/>
@@ -4105,10 +4837,10 @@
         <p:txBody>
           <a:bodyPr xmlns:a="http://schemas.openxmlformats.org/drawingml/2006/main" lIns="0" tIns="0" rIns="0" bIns="0"/>
           <a:lstStyle xmlns:a="http://schemas.openxmlformats.org/drawingml/2006/main">
-            <a:defPPr>
-              <a:defRPr sz="2100" b="1">
-                <a:solidFill>
-                  <a:srgbClr val="147A78"/>
+            <a:defPPr algn="l">
+              <a:defRPr sz="2400" b="1">
+                <a:solidFill>
+                  <a:srgbClr val="007F80"/>
                 </a:solidFill>
                 <a:latin typeface="Arial"/>
                 <a:ea typeface="Arial"/>
@@ -4117,10 +4849,10 @@
             </a:defPPr>
           </a:lstStyle>
           <a:p xmlns:a="http://schemas.openxmlformats.org/drawingml/2006/main">
-            <a:pPr>
-              <a:defRPr sz="2100" b="1">
-                <a:solidFill>
-                  <a:srgbClr val="147A78"/>
+            <a:pPr algn="l">
+              <a:defRPr sz="2400" b="1">
+                <a:solidFill>
+                  <a:srgbClr val="007F80"/>
                 </a:solidFill>
                 <a:latin typeface="Arial"/>
                 <a:ea typeface="Arial"/>
@@ -4128,25 +4860,25 @@
               </a:defRPr>
             </a:pPr>
             <a:r>
-              <a:rPr sz="2100" b="1">
-                <a:solidFill>
-                  <a:srgbClr val="147A78"/>
+              <a:rPr sz="2400" b="1">
+                <a:solidFill>
+                  <a:srgbClr val="007F80"/>
                 </a:solidFill>
                 <a:latin typeface="Arial"/>
                 <a:ea typeface="Arial"/>
                 <a:cs typeface="Arial"/>
               </a:rPr>
-              <a:t>Training data</a:t>
-            </a:r>
-          </a:p>
-        </p:txBody>
-      </p:sp>
-      <p:sp>
-        <p:nvSpPr>
-          <p:cNvPr id="5" name="body">
-            <a:extLst xmlns:a="http://schemas.openxmlformats.org/drawingml/2006/main">
-              <a:ext uri="{FF2B5EF4-FFF2-40B4-BE49-F238E27FC236}">
-                <a16:creationId xmlns:a16="http://schemas.microsoft.com/office/drawing/2014/main" id="{32774DE2-E30B-4250-AEBC-B2C4456ECE49}"/>
+              <a:t>Recorded data</a:t>
+            </a:r>
+          </a:p>
+        </p:txBody>
+      </p:sp>
+      <p:sp>
+        <p:nvSpPr>
+          <p:cNvPr id="6" name="">
+            <a:extLst xmlns:a="http://schemas.openxmlformats.org/drawingml/2006/main">
+              <a:ext uri="{FF2B5EF4-FFF2-40B4-BE49-F238E27FC236}">
+                <a16:creationId xmlns:a16="http://schemas.microsoft.com/office/drawing/2014/main" id="{B0D6AEDC-4A8A-4F48-8070-3670AB9C1436}"/>
               </a:ext>
             </a:extLst>
           </p:cNvPr>
@@ -4157,8 +4889,8 @@
         </p:nvSpPr>
         <p:spPr>
           <a:xfrm xmlns:a="http://schemas.openxmlformats.org/drawingml/2006/main">
-            <a:off x="3571875" y="2800350"/>
-            <a:ext cx="7858125" cy="952500"/>
+            <a:off x="800100" y="3381375"/>
+            <a:ext cx="2476500" cy="476250"/>
           </a:xfrm>
           <a:prstGeom xmlns:a="http://schemas.openxmlformats.org/drawingml/2006/main" prst="rect">
             <a:avLst/>
@@ -4171,10 +4903,10 @@
         <p:txBody>
           <a:bodyPr xmlns:a="http://schemas.openxmlformats.org/drawingml/2006/main" lIns="0" tIns="0" rIns="0" bIns="0"/>
           <a:lstStyle xmlns:a="http://schemas.openxmlformats.org/drawingml/2006/main">
-            <a:defPPr>
-              <a:defRPr sz="2025" b="0">
-                <a:solidFill>
-                  <a:srgbClr val="142B40"/>
+            <a:defPPr algn="l">
+              <a:defRPr sz="1875" b="0">
+                <a:solidFill>
+                  <a:srgbClr val="132E40"/>
                 </a:solidFill>
                 <a:latin typeface="Arial"/>
                 <a:ea typeface="Arial"/>
@@ -4183,10 +4915,10 @@
             </a:defPPr>
           </a:lstStyle>
           <a:p xmlns:a="http://schemas.openxmlformats.org/drawingml/2006/main">
-            <a:pPr>
-              <a:defRPr sz="2025" b="0">
-                <a:solidFill>
-                  <a:srgbClr val="142B40"/>
+            <a:pPr algn="l">
+              <a:defRPr sz="1875" b="0">
+                <a:solidFill>
+                  <a:srgbClr val="132E40"/>
                 </a:solidFill>
                 <a:latin typeface="Arial"/>
                 <a:ea typeface="Arial"/>
@@ -4194,25 +4926,25 @@
               </a:defRPr>
             </a:pPr>
             <a:r>
-              <a:rPr sz="2025" b="0">
-                <a:solidFill>
-                  <a:srgbClr val="142B40"/>
+              <a:rPr sz="1875" b="0">
+                <a:solidFill>
+                  <a:srgbClr val="132E40"/>
                 </a:solidFill>
                 <a:latin typeface="Arial"/>
                 <a:ea typeface="Arial"/>
                 <a:cs typeface="Arial"/>
               </a:rPr>
-              <a:t>Recorded transitions: state, action, reward, next state</a:t>
-            </a:r>
-          </a:p>
-        </p:txBody>
-      </p:sp>
-      <p:sp>
-        <p:nvSpPr>
-          <p:cNvPr id="6" name="heading">
-            <a:extLst xmlns:a="http://schemas.openxmlformats.org/drawingml/2006/main">
-              <a:ext uri="{FF2B5EF4-FFF2-40B4-BE49-F238E27FC236}">
-                <a16:creationId xmlns:a16="http://schemas.microsoft.com/office/drawing/2014/main" id="{1D878D2E-EC6F-4A61-BB06-3B40512ECF1D}"/>
+              <a:t>(s, a, r, next s)</a:t>
+            </a:r>
+          </a:p>
+        </p:txBody>
+      </p:sp>
+      <p:sp>
+        <p:nvSpPr>
+          <p:cNvPr id="7" name="">
+            <a:extLst xmlns:a="http://schemas.openxmlformats.org/drawingml/2006/main">
+              <a:ext uri="{FF2B5EF4-FFF2-40B4-BE49-F238E27FC236}">
+                <a16:creationId xmlns:a16="http://schemas.microsoft.com/office/drawing/2014/main" id="{8EBF11B5-C255-4A7E-924D-FBA05A930750}"/>
               </a:ext>
             </a:extLst>
           </p:cNvPr>
@@ -4223,8 +4955,68 @@
         </p:nvSpPr>
         <p:spPr>
           <a:xfrm xmlns:a="http://schemas.openxmlformats.org/drawingml/2006/main">
-            <a:off x="685800" y="3838575"/>
-            <a:ext cx="2714625" cy="647700"/>
+            <a:off x="3667125" y="3190875"/>
+            <a:ext cx="457200" cy="228600"/>
+          </a:xfrm>
+          <a:prstGeom xmlns:a="http://schemas.openxmlformats.org/drawingml/2006/main" prst="rightArrow">
+            <a:avLst/>
+          </a:prstGeom>
+          <a:solidFill xmlns:a="http://schemas.openxmlformats.org/drawingml/2006/main">
+            <a:srgbClr val="007F80"/>
+          </a:solidFill>
+          <a:ln xmlns:a="http://schemas.openxmlformats.org/drawingml/2006/main" w="0">
+            <a:noFill/>
+          </a:ln>
+        </p:spPr>
+      </p:sp>
+      <p:sp>
+        <p:nvSpPr>
+          <p:cNvPr id="8" name="">
+            <a:extLst xmlns:a="http://schemas.openxmlformats.org/drawingml/2006/main">
+              <a:ext uri="{FF2B5EF4-FFF2-40B4-BE49-F238E27FC236}">
+                <a16:creationId xmlns:a16="http://schemas.microsoft.com/office/drawing/2014/main" id="{8E5EA6D2-7914-427D-8070-862FD1EDE45E}"/>
+              </a:ext>
+            </a:extLst>
+          </p:cNvPr>
+          <p:cNvSpPr>
+            <a:spLocks xmlns:a="http://schemas.openxmlformats.org/drawingml/2006/main" noGrp="1"/>
+          </p:cNvSpPr>
+          <p:nvPr/>
+        </p:nvSpPr>
+        <p:spPr>
+          <a:xfrm xmlns:a="http://schemas.openxmlformats.org/drawingml/2006/main">
+            <a:off x="4333875" y="2638425"/>
+            <a:ext cx="2857500" cy="1333500"/>
+          </a:xfrm>
+          <a:prstGeom xmlns:a="http://schemas.openxmlformats.org/drawingml/2006/main" prst="rect">
+            <a:avLst/>
+          </a:prstGeom>
+          <a:solidFill xmlns:a="http://schemas.openxmlformats.org/drawingml/2006/main">
+            <a:srgbClr val="E7F4F1"/>
+          </a:solidFill>
+          <a:ln xmlns:a="http://schemas.openxmlformats.org/drawingml/2006/main" w="0">
+            <a:noFill/>
+          </a:ln>
+        </p:spPr>
+      </p:sp>
+      <p:sp>
+        <p:nvSpPr>
+          <p:cNvPr id="9" name="">
+            <a:extLst xmlns:a="http://schemas.openxmlformats.org/drawingml/2006/main">
+              <a:ext uri="{FF2B5EF4-FFF2-40B4-BE49-F238E27FC236}">
+                <a16:creationId xmlns:a16="http://schemas.microsoft.com/office/drawing/2014/main" id="{8E637521-642B-4CF8-9DAA-2C7A544611D6}"/>
+              </a:ext>
+            </a:extLst>
+          </p:cNvPr>
+          <p:cNvSpPr>
+            <a:spLocks xmlns:a="http://schemas.openxmlformats.org/drawingml/2006/main" noGrp="1"/>
+          </p:cNvSpPr>
+          <p:nvPr/>
+        </p:nvSpPr>
+        <p:spPr>
+          <a:xfrm xmlns:a="http://schemas.openxmlformats.org/drawingml/2006/main">
+            <a:off x="4524375" y="2828925"/>
+            <a:ext cx="2476500" cy="476250"/>
           </a:xfrm>
           <a:prstGeom xmlns:a="http://schemas.openxmlformats.org/drawingml/2006/main" prst="rect">
             <a:avLst/>
@@ -4237,10 +5029,10 @@
         <p:txBody>
           <a:bodyPr xmlns:a="http://schemas.openxmlformats.org/drawingml/2006/main" lIns="0" tIns="0" rIns="0" bIns="0"/>
           <a:lstStyle xmlns:a="http://schemas.openxmlformats.org/drawingml/2006/main">
-            <a:defPPr>
-              <a:defRPr sz="2100" b="1">
-                <a:solidFill>
-                  <a:srgbClr val="147A78"/>
+            <a:defPPr algn="l">
+              <a:defRPr sz="2400" b="1">
+                <a:solidFill>
+                  <a:srgbClr val="007F80"/>
                 </a:solidFill>
                 <a:latin typeface="Arial"/>
                 <a:ea typeface="Arial"/>
@@ -4249,10 +5041,10 @@
             </a:defPPr>
           </a:lstStyle>
           <a:p xmlns:a="http://schemas.openxmlformats.org/drawingml/2006/main">
-            <a:pPr>
-              <a:defRPr sz="2100" b="1">
-                <a:solidFill>
-                  <a:srgbClr val="147A78"/>
+            <a:pPr algn="l">
+              <a:defRPr sz="2400" b="1">
+                <a:solidFill>
+                  <a:srgbClr val="007F80"/>
                 </a:solidFill>
                 <a:latin typeface="Arial"/>
                 <a:ea typeface="Arial"/>
@@ -4260,25 +5052,25 @@
               </a:defRPr>
             </a:pPr>
             <a:r>
-              <a:rPr sz="2100" b="1">
-                <a:solidFill>
-                  <a:srgbClr val="147A78"/>
+              <a:rPr sz="2400" b="1">
+                <a:solidFill>
+                  <a:srgbClr val="007F80"/>
                 </a:solidFill>
                 <a:latin typeface="Arial"/>
                 <a:ea typeface="Arial"/>
                 <a:cs typeface="Arial"/>
               </a:rPr>
-              <a:t>Main idea</a:t>
-            </a:r>
-          </a:p>
-        </p:txBody>
-      </p:sp>
-      <p:sp>
-        <p:nvSpPr>
-          <p:cNvPr id="7" name="body">
-            <a:extLst xmlns:a="http://schemas.openxmlformats.org/drawingml/2006/main">
-              <a:ext uri="{FF2B5EF4-FFF2-40B4-BE49-F238E27FC236}">
-                <a16:creationId xmlns:a16="http://schemas.microsoft.com/office/drawing/2014/main" id="{6BBBBBF5-428E-4236-A0F9-22CCF5F4CF75}"/>
+              <a:t>IQL learner</a:t>
+            </a:r>
+          </a:p>
+        </p:txBody>
+      </p:sp>
+      <p:sp>
+        <p:nvSpPr>
+          <p:cNvPr id="10" name="">
+            <a:extLst xmlns:a="http://schemas.openxmlformats.org/drawingml/2006/main">
+              <a:ext uri="{FF2B5EF4-FFF2-40B4-BE49-F238E27FC236}">
+                <a16:creationId xmlns:a16="http://schemas.microsoft.com/office/drawing/2014/main" id="{9098B749-3EB6-4AF3-87FE-510DDAAA702C}"/>
               </a:ext>
             </a:extLst>
           </p:cNvPr>
@@ -4289,8 +5081,8 @@
         </p:nvSpPr>
         <p:spPr>
           <a:xfrm xmlns:a="http://schemas.openxmlformats.org/drawingml/2006/main">
-            <a:off x="3571875" y="3838575"/>
-            <a:ext cx="7858125" cy="952500"/>
+            <a:off x="4524375" y="3381375"/>
+            <a:ext cx="2476500" cy="476250"/>
           </a:xfrm>
           <a:prstGeom xmlns:a="http://schemas.openxmlformats.org/drawingml/2006/main" prst="rect">
             <a:avLst/>
@@ -4303,10 +5095,10 @@
         <p:txBody>
           <a:bodyPr xmlns:a="http://schemas.openxmlformats.org/drawingml/2006/main" lIns="0" tIns="0" rIns="0" bIns="0"/>
           <a:lstStyle xmlns:a="http://schemas.openxmlformats.org/drawingml/2006/main">
-            <a:defPPr>
-              <a:defRPr sz="2025" b="0">
-                <a:solidFill>
-                  <a:srgbClr val="142B40"/>
+            <a:defPPr algn="l">
+              <a:defRPr sz="1875" b="0">
+                <a:solidFill>
+                  <a:srgbClr val="132E40"/>
                 </a:solidFill>
                 <a:latin typeface="Arial"/>
                 <a:ea typeface="Arial"/>
@@ -4315,10 +5107,10 @@
             </a:defPPr>
           </a:lstStyle>
           <a:p xmlns:a="http://schemas.openxmlformats.org/drawingml/2006/main">
-            <a:pPr>
-              <a:defRPr sz="2025" b="0">
-                <a:solidFill>
-                  <a:srgbClr val="142B40"/>
+            <a:pPr algn="l">
+              <a:defRPr sz="1875" b="0">
+                <a:solidFill>
+                  <a:srgbClr val="132E40"/>
                 </a:solidFill>
                 <a:latin typeface="Arial"/>
                 <a:ea typeface="Arial"/>
@@ -4326,48 +5118,25 @@
               </a:defRPr>
             </a:pPr>
             <a:r>
-              <a:rPr sz="2025" b="0">
-                <a:solidFill>
-                  <a:srgbClr val="142B40"/>
+              <a:rPr sz="1875" b="0">
+                <a:solidFill>
+                  <a:srgbClr val="132E40"/>
                 </a:solidFill>
                 <a:latin typeface="Arial"/>
                 <a:ea typeface="Arial"/>
                 <a:cs typeface="Arial"/>
               </a:rPr>
-              <a:t>Learn values from dataset actions, then give better actions</a:t>
-            </a:r>
-          </a:p>
-          <a:p xmlns:a="http://schemas.openxmlformats.org/drawingml/2006/main">
-            <a:pPr>
-              <a:defRPr sz="2025" b="0">
-                <a:solidFill>
-                  <a:srgbClr val="142B40"/>
-                </a:solidFill>
-                <a:latin typeface="Arial"/>
-                <a:ea typeface="Arial"/>
-                <a:cs typeface="Arial"/>
-              </a:defRPr>
-            </a:pPr>
-            <a:r>
-              <a:rPr sz="2025" b="0">
-                <a:solidFill>
-                  <a:srgbClr val="142B40"/>
-                </a:solidFill>
-                <a:latin typeface="Arial"/>
-                <a:ea typeface="Arial"/>
-                <a:cs typeface="Arial"/>
-              </a:rPr>
-              <a:t>more weight when fitting the policy</a:t>
-            </a:r>
-          </a:p>
-        </p:txBody>
-      </p:sp>
-      <p:sp>
-        <p:nvSpPr>
-          <p:cNvPr id="8" name="heading">
-            <a:extLst xmlns:a="http://schemas.openxmlformats.org/drawingml/2006/main">
-              <a:ext uri="{FF2B5EF4-FFF2-40B4-BE49-F238E27FC236}">
-                <a16:creationId xmlns:a16="http://schemas.microsoft.com/office/drawing/2014/main" id="{4DC7A111-7554-42F1-B676-784E08AF77E5}"/>
+              <a:t>Values + actor</a:t>
+            </a:r>
+          </a:p>
+        </p:txBody>
+      </p:sp>
+      <p:sp>
+        <p:nvSpPr>
+          <p:cNvPr id="11" name="">
+            <a:extLst xmlns:a="http://schemas.openxmlformats.org/drawingml/2006/main">
+              <a:ext uri="{FF2B5EF4-FFF2-40B4-BE49-F238E27FC236}">
+                <a16:creationId xmlns:a16="http://schemas.microsoft.com/office/drawing/2014/main" id="{E0863EDB-EF07-4FC8-9AF5-D9F810482A4B}"/>
               </a:ext>
             </a:extLst>
           </p:cNvPr>
@@ -4378,8 +5147,68 @@
         </p:nvSpPr>
         <p:spPr>
           <a:xfrm xmlns:a="http://schemas.openxmlformats.org/drawingml/2006/main">
-            <a:off x="685800" y="4876800"/>
-            <a:ext cx="2714625" cy="647700"/>
+            <a:off x="7400925" y="3190875"/>
+            <a:ext cx="457200" cy="228600"/>
+          </a:xfrm>
+          <a:prstGeom xmlns:a="http://schemas.openxmlformats.org/drawingml/2006/main" prst="rightArrow">
+            <a:avLst/>
+          </a:prstGeom>
+          <a:solidFill xmlns:a="http://schemas.openxmlformats.org/drawingml/2006/main">
+            <a:srgbClr val="007F80"/>
+          </a:solidFill>
+          <a:ln xmlns:a="http://schemas.openxmlformats.org/drawingml/2006/main" w="0">
+            <a:noFill/>
+          </a:ln>
+        </p:spPr>
+      </p:sp>
+      <p:sp>
+        <p:nvSpPr>
+          <p:cNvPr id="12" name="">
+            <a:extLst xmlns:a="http://schemas.openxmlformats.org/drawingml/2006/main">
+              <a:ext uri="{FF2B5EF4-FFF2-40B4-BE49-F238E27FC236}">
+                <a16:creationId xmlns:a16="http://schemas.microsoft.com/office/drawing/2014/main" id="{0EADE651-C5E6-402D-B6FC-9095D913297F}"/>
+              </a:ext>
+            </a:extLst>
+          </p:cNvPr>
+          <p:cNvSpPr>
+            <a:spLocks xmlns:a="http://schemas.openxmlformats.org/drawingml/2006/main" noGrp="1"/>
+          </p:cNvSpPr>
+          <p:nvPr/>
+        </p:nvSpPr>
+        <p:spPr>
+          <a:xfrm xmlns:a="http://schemas.openxmlformats.org/drawingml/2006/main">
+            <a:off x="8067675" y="2638425"/>
+            <a:ext cx="3429000" cy="1333500"/>
+          </a:xfrm>
+          <a:prstGeom xmlns:a="http://schemas.openxmlformats.org/drawingml/2006/main" prst="rect">
+            <a:avLst/>
+          </a:prstGeom>
+          <a:solidFill xmlns:a="http://schemas.openxmlformats.org/drawingml/2006/main">
+            <a:srgbClr val="E7F4F1"/>
+          </a:solidFill>
+          <a:ln xmlns:a="http://schemas.openxmlformats.org/drawingml/2006/main" w="0">
+            <a:noFill/>
+          </a:ln>
+        </p:spPr>
+      </p:sp>
+      <p:sp>
+        <p:nvSpPr>
+          <p:cNvPr id="13" name="">
+            <a:extLst xmlns:a="http://schemas.openxmlformats.org/drawingml/2006/main">
+              <a:ext uri="{FF2B5EF4-FFF2-40B4-BE49-F238E27FC236}">
+                <a16:creationId xmlns:a16="http://schemas.microsoft.com/office/drawing/2014/main" id="{8F42FF6C-DFE6-4368-9C5A-DBC1EB3033D7}"/>
+              </a:ext>
+            </a:extLst>
+          </p:cNvPr>
+          <p:cNvSpPr>
+            <a:spLocks xmlns:a="http://schemas.openxmlformats.org/drawingml/2006/main" noGrp="1"/>
+          </p:cNvSpPr>
+          <p:nvPr/>
+        </p:nvSpPr>
+        <p:spPr>
+          <a:xfrm xmlns:a="http://schemas.openxmlformats.org/drawingml/2006/main">
+            <a:off x="8258175" y="2828925"/>
+            <a:ext cx="3048000" cy="476250"/>
           </a:xfrm>
           <a:prstGeom xmlns:a="http://schemas.openxmlformats.org/drawingml/2006/main" prst="rect">
             <a:avLst/>
@@ -4392,10 +5221,10 @@
         <p:txBody>
           <a:bodyPr xmlns:a="http://schemas.openxmlformats.org/drawingml/2006/main" lIns="0" tIns="0" rIns="0" bIns="0"/>
           <a:lstStyle xmlns:a="http://schemas.openxmlformats.org/drawingml/2006/main">
-            <a:defPPr>
-              <a:defRPr sz="2100" b="1">
-                <a:solidFill>
-                  <a:srgbClr val="147A78"/>
+            <a:defPPr algn="l">
+              <a:defRPr sz="2400" b="1">
+                <a:solidFill>
+                  <a:srgbClr val="007F80"/>
                 </a:solidFill>
                 <a:latin typeface="Arial"/>
                 <a:ea typeface="Arial"/>
@@ -4404,10 +5233,10 @@
             </a:defPPr>
           </a:lstStyle>
           <a:p xmlns:a="http://schemas.openxmlformats.org/drawingml/2006/main">
-            <a:pPr>
-              <a:defRPr sz="2100" b="1">
-                <a:solidFill>
-                  <a:srgbClr val="147A78"/>
+            <a:pPr algn="l">
+              <a:defRPr sz="2400" b="1">
+                <a:solidFill>
+                  <a:srgbClr val="007F80"/>
                 </a:solidFill>
                 <a:latin typeface="Arial"/>
                 <a:ea typeface="Arial"/>
@@ -4415,25 +5244,25 @@
               </a:defRPr>
             </a:pPr>
             <a:r>
-              <a:rPr sz="2100" b="1">
-                <a:solidFill>
-                  <a:srgbClr val="147A78"/>
+              <a:rPr sz="2400" b="1">
+                <a:solidFill>
+                  <a:srgbClr val="007F80"/>
                 </a:solidFill>
                 <a:latin typeface="Arial"/>
                 <a:ea typeface="Arial"/>
                 <a:cs typeface="Arial"/>
               </a:rPr>
-              <a:t>Interaction</a:t>
-            </a:r>
-          </a:p>
-        </p:txBody>
-      </p:sp>
-      <p:sp>
-        <p:nvSpPr>
-          <p:cNvPr id="9" name="body">
-            <a:extLst xmlns:a="http://schemas.openxmlformats.org/drawingml/2006/main">
-              <a:ext uri="{FF2B5EF4-FFF2-40B4-BE49-F238E27FC236}">
-                <a16:creationId xmlns:a16="http://schemas.microsoft.com/office/drawing/2014/main" id="{75DFE3FF-8FF2-4371-B63F-42C747656444}"/>
+              <a:t>Control policy</a:t>
+            </a:r>
+          </a:p>
+        </p:txBody>
+      </p:sp>
+      <p:sp>
+        <p:nvSpPr>
+          <p:cNvPr id="14" name="">
+            <a:extLst xmlns:a="http://schemas.openxmlformats.org/drawingml/2006/main">
+              <a:ext uri="{FF2B5EF4-FFF2-40B4-BE49-F238E27FC236}">
+                <a16:creationId xmlns:a16="http://schemas.microsoft.com/office/drawing/2014/main" id="{8E04DBE7-BC95-45FE-9483-760F87BC6531}"/>
               </a:ext>
             </a:extLst>
           </p:cNvPr>
@@ -4444,8 +5273,8 @@
         </p:nvSpPr>
         <p:spPr>
           <a:xfrm xmlns:a="http://schemas.openxmlformats.org/drawingml/2006/main">
-            <a:off x="3571875" y="4876800"/>
-            <a:ext cx="7858125" cy="952500"/>
+            <a:off x="8258175" y="3381375"/>
+            <a:ext cx="3048000" cy="476250"/>
           </a:xfrm>
           <a:prstGeom xmlns:a="http://schemas.openxmlformats.org/drawingml/2006/main" prst="rect">
             <a:avLst/>
@@ -4458,10 +5287,10 @@
         <p:txBody>
           <a:bodyPr xmlns:a="http://schemas.openxmlformats.org/drawingml/2006/main" lIns="0" tIns="0" rIns="0" bIns="0"/>
           <a:lstStyle xmlns:a="http://schemas.openxmlformats.org/drawingml/2006/main">
-            <a:defPPr>
-              <a:defRPr sz="2025" b="0">
-                <a:solidFill>
-                  <a:srgbClr val="142B40"/>
+            <a:defPPr algn="l">
+              <a:defRPr sz="1875" b="0">
+                <a:solidFill>
+                  <a:srgbClr val="132E40"/>
                 </a:solidFill>
                 <a:latin typeface="Arial"/>
                 <a:ea typeface="Arial"/>
@@ -4470,10 +5299,10 @@
             </a:defPPr>
           </a:lstStyle>
           <a:p xmlns:a="http://schemas.openxmlformats.org/drawingml/2006/main">
-            <a:pPr>
-              <a:defRPr sz="2025" b="0">
-                <a:solidFill>
-                  <a:srgbClr val="142B40"/>
+            <a:pPr algn="l">
+              <a:defRPr sz="1875" b="0">
+                <a:solidFill>
+                  <a:srgbClr val="132E40"/>
                 </a:solidFill>
                 <a:latin typeface="Arial"/>
                 <a:ea typeface="Arial"/>
@@ -4481,25 +5310,25 @@
               </a:defRPr>
             </a:pPr>
             <a:r>
-              <a:rPr sz="2025" b="0">
-                <a:solidFill>
-                  <a:srgbClr val="142B40"/>
+              <a:rPr sz="1875" b="0">
+                <a:solidFill>
+                  <a:srgbClr val="132E40"/>
                 </a:solidFill>
                 <a:latin typeface="Arial"/>
                 <a:ea typeface="Arial"/>
                 <a:cs typeface="Arial"/>
               </a:rPr>
-              <a:t>Simulator rollouts evaluate the policy after training</a:t>
-            </a:r>
-          </a:p>
-        </p:txBody>
-      </p:sp>
-      <p:sp>
-        <p:nvSpPr>
-          <p:cNvPr id="10" name="body">
-            <a:extLst xmlns:a="http://schemas.openxmlformats.org/drawingml/2006/main">
-              <a:ext uri="{FF2B5EF4-FFF2-40B4-BE49-F238E27FC236}">
-                <a16:creationId xmlns:a16="http://schemas.microsoft.com/office/drawing/2014/main" id="{4796AEAF-3C0D-4936-8162-3F351FA83FFF}"/>
+              <a:t>6 continuous torques</a:t>
+            </a:r>
+          </a:p>
+        </p:txBody>
+      </p:sp>
+      <p:sp>
+        <p:nvSpPr>
+          <p:cNvPr id="15" name="">
+            <a:extLst xmlns:a="http://schemas.openxmlformats.org/drawingml/2006/main">
+              <a:ext uri="{FF2B5EF4-FFF2-40B4-BE49-F238E27FC236}">
+                <a16:creationId xmlns:a16="http://schemas.microsoft.com/office/drawing/2014/main" id="{396F43E7-7A19-43AF-9540-481FA360A645}"/>
               </a:ext>
             </a:extLst>
           </p:cNvPr>
@@ -4510,8 +5339,8 @@
         </p:nvSpPr>
         <p:spPr>
           <a:xfrm xmlns:a="http://schemas.openxmlformats.org/drawingml/2006/main">
-            <a:off x="10858500" y="6305550"/>
-            <a:ext cx="762000" cy="266700"/>
+            <a:off x="609600" y="4219575"/>
+            <a:ext cx="6858000" cy="428625"/>
           </a:xfrm>
           <a:prstGeom xmlns:a="http://schemas.openxmlformats.org/drawingml/2006/main" prst="rect">
             <a:avLst/>
@@ -4524,10 +5353,10 @@
         <p:txBody>
           <a:bodyPr xmlns:a="http://schemas.openxmlformats.org/drawingml/2006/main" lIns="0" tIns="0" rIns="0" bIns="0"/>
           <a:lstStyle xmlns:a="http://schemas.openxmlformats.org/drawingml/2006/main">
-            <a:defPPr>
-              <a:defRPr sz="1350" b="0">
-                <a:solidFill>
-                  <a:srgbClr val="5B6D7A"/>
+            <a:defPPr algn="l">
+              <a:defRPr sz="2025" b="1">
+                <a:solidFill>
+                  <a:srgbClr val="132E40"/>
                 </a:solidFill>
                 <a:latin typeface="Arial"/>
                 <a:ea typeface="Arial"/>
@@ -4536,10 +5365,334 @@
             </a:defPPr>
           </a:lstStyle>
           <a:p xmlns:a="http://schemas.openxmlformats.org/drawingml/2006/main">
-            <a:pPr>
+            <a:pPr algn="l">
+              <a:defRPr sz="2025" b="1">
+                <a:solidFill>
+                  <a:srgbClr val="132E40"/>
+                </a:solidFill>
+                <a:latin typeface="Arial"/>
+                <a:ea typeface="Arial"/>
+                <a:cs typeface="Arial"/>
+              </a:defRPr>
+            </a:pPr>
+            <a:r>
+              <a:rPr sz="2025" b="1">
+                <a:solidFill>
+                  <a:srgbClr val="132E40"/>
+                </a:solidFill>
+                <a:latin typeface="Arial"/>
+                <a:ea typeface="Arial"/>
+                <a:cs typeface="Arial"/>
+              </a:rPr>
+              <a:t>Training: fixed transitions only</a:t>
+            </a:r>
+          </a:p>
+        </p:txBody>
+      </p:sp>
+      <p:sp>
+        <p:nvSpPr>
+          <p:cNvPr id="16" name="">
+            <a:extLst xmlns:a="http://schemas.openxmlformats.org/drawingml/2006/main">
+              <a:ext uri="{FF2B5EF4-FFF2-40B4-BE49-F238E27FC236}">
+                <a16:creationId xmlns:a16="http://schemas.microsoft.com/office/drawing/2014/main" id="{6C3D2F84-7549-43D3-93EB-8C35ADC573B8}"/>
+              </a:ext>
+            </a:extLst>
+          </p:cNvPr>
+          <p:cNvSpPr>
+            <a:spLocks xmlns:a="http://schemas.openxmlformats.org/drawingml/2006/main" noGrp="1"/>
+          </p:cNvSpPr>
+          <p:nvPr/>
+        </p:nvSpPr>
+        <p:spPr>
+          <a:xfrm xmlns:a="http://schemas.openxmlformats.org/drawingml/2006/main">
+            <a:off x="8067675" y="4705350"/>
+            <a:ext cx="3429000" cy="1095375"/>
+          </a:xfrm>
+          <a:prstGeom xmlns:a="http://schemas.openxmlformats.org/drawingml/2006/main" prst="rect">
+            <a:avLst/>
+          </a:prstGeom>
+          <a:solidFill xmlns:a="http://schemas.openxmlformats.org/drawingml/2006/main">
+            <a:srgbClr val="FFF0E2"/>
+          </a:solidFill>
+          <a:ln xmlns:a="http://schemas.openxmlformats.org/drawingml/2006/main" w="0">
+            <a:noFill/>
+          </a:ln>
+        </p:spPr>
+      </p:sp>
+      <p:sp>
+        <p:nvSpPr>
+          <p:cNvPr id="17" name="">
+            <a:extLst xmlns:a="http://schemas.openxmlformats.org/drawingml/2006/main">
+              <a:ext uri="{FF2B5EF4-FFF2-40B4-BE49-F238E27FC236}">
+                <a16:creationId xmlns:a16="http://schemas.microsoft.com/office/drawing/2014/main" id="{D5358BF2-8033-408A-8B57-E2957AEC1FB7}"/>
+              </a:ext>
+            </a:extLst>
+          </p:cNvPr>
+          <p:cNvSpPr>
+            <a:spLocks xmlns:a="http://schemas.openxmlformats.org/drawingml/2006/main" noGrp="1"/>
+          </p:cNvSpPr>
+          <p:nvPr/>
+        </p:nvSpPr>
+        <p:spPr>
+          <a:xfrm xmlns:a="http://schemas.openxmlformats.org/drawingml/2006/main">
+            <a:off x="8277225" y="4867275"/>
+            <a:ext cx="3000375" cy="428625"/>
+          </a:xfrm>
+          <a:prstGeom xmlns:a="http://schemas.openxmlformats.org/drawingml/2006/main" prst="rect">
+            <a:avLst/>
+          </a:prstGeom>
+          <a:noFill xmlns:a="http://schemas.openxmlformats.org/drawingml/2006/main"/>
+          <a:ln xmlns:a="http://schemas.openxmlformats.org/drawingml/2006/main" w="0">
+            <a:noFill/>
+          </a:ln>
+        </p:spPr>
+        <p:txBody>
+          <a:bodyPr xmlns:a="http://schemas.openxmlformats.org/drawingml/2006/main" lIns="0" tIns="0" rIns="0" bIns="0"/>
+          <a:lstStyle xmlns:a="http://schemas.openxmlformats.org/drawingml/2006/main">
+            <a:defPPr algn="l">
+              <a:defRPr sz="2100" b="1">
+                <a:solidFill>
+                  <a:srgbClr val="E47F29"/>
+                </a:solidFill>
+                <a:latin typeface="Arial"/>
+                <a:ea typeface="Arial"/>
+                <a:cs typeface="Arial"/>
+              </a:defRPr>
+            </a:defPPr>
+          </a:lstStyle>
+          <a:p xmlns:a="http://schemas.openxmlformats.org/drawingml/2006/main">
+            <a:pPr algn="l">
+              <a:defRPr sz="2100" b="1">
+                <a:solidFill>
+                  <a:srgbClr val="E47F29"/>
+                </a:solidFill>
+                <a:latin typeface="Arial"/>
+                <a:ea typeface="Arial"/>
+                <a:cs typeface="Arial"/>
+              </a:defRPr>
+            </a:pPr>
+            <a:r>
+              <a:rPr sz="2100" b="1">
+                <a:solidFill>
+                  <a:srgbClr val="E47F29"/>
+                </a:solidFill>
+                <a:latin typeface="Arial"/>
+                <a:ea typeface="Arial"/>
+                <a:cs typeface="Arial"/>
+              </a:rPr>
+              <a:t>Simulator evaluation</a:t>
+            </a:r>
+          </a:p>
+        </p:txBody>
+      </p:sp>
+      <p:sp>
+        <p:nvSpPr>
+          <p:cNvPr id="18" name="">
+            <a:extLst xmlns:a="http://schemas.openxmlformats.org/drawingml/2006/main">
+              <a:ext uri="{FF2B5EF4-FFF2-40B4-BE49-F238E27FC236}">
+                <a16:creationId xmlns:a16="http://schemas.microsoft.com/office/drawing/2014/main" id="{A8EE2999-ABE6-4540-85E1-E7123F8B7733}"/>
+              </a:ext>
+            </a:extLst>
+          </p:cNvPr>
+          <p:cNvSpPr>
+            <a:spLocks xmlns:a="http://schemas.openxmlformats.org/drawingml/2006/main" noGrp="1"/>
+          </p:cNvSpPr>
+          <p:nvPr/>
+        </p:nvSpPr>
+        <p:spPr>
+          <a:xfrm xmlns:a="http://schemas.openxmlformats.org/drawingml/2006/main">
+            <a:off x="8277225" y="5295900"/>
+            <a:ext cx="3000375" cy="381000"/>
+          </a:xfrm>
+          <a:prstGeom xmlns:a="http://schemas.openxmlformats.org/drawingml/2006/main" prst="rect">
+            <a:avLst/>
+          </a:prstGeom>
+          <a:noFill xmlns:a="http://schemas.openxmlformats.org/drawingml/2006/main"/>
+          <a:ln xmlns:a="http://schemas.openxmlformats.org/drawingml/2006/main" w="0">
+            <a:noFill/>
+          </a:ln>
+        </p:spPr>
+        <p:txBody>
+          <a:bodyPr xmlns:a="http://schemas.openxmlformats.org/drawingml/2006/main" lIns="0" tIns="0" rIns="0" bIns="0"/>
+          <a:lstStyle xmlns:a="http://schemas.openxmlformats.org/drawingml/2006/main">
+            <a:defPPr algn="l">
+              <a:defRPr sz="1875" b="0">
+                <a:solidFill>
+                  <a:srgbClr val="132E40"/>
+                </a:solidFill>
+                <a:latin typeface="Arial"/>
+                <a:ea typeface="Arial"/>
+                <a:cs typeface="Arial"/>
+              </a:defRPr>
+            </a:defPPr>
+          </a:lstStyle>
+          <a:p xmlns:a="http://schemas.openxmlformats.org/drawingml/2006/main">
+            <a:pPr algn="l">
+              <a:defRPr sz="1875" b="0">
+                <a:solidFill>
+                  <a:srgbClr val="132E40"/>
+                </a:solidFill>
+                <a:latin typeface="Arial"/>
+                <a:ea typeface="Arial"/>
+                <a:cs typeface="Arial"/>
+              </a:defRPr>
+            </a:pPr>
+            <a:r>
+              <a:rPr sz="1875" b="0">
+                <a:solidFill>
+                  <a:srgbClr val="132E40"/>
+                </a:solidFill>
+                <a:latin typeface="Arial"/>
+                <a:ea typeface="Arial"/>
+                <a:cs typeface="Arial"/>
+              </a:rPr>
+              <a:t>Full policy rollouts</a:t>
+            </a:r>
+          </a:p>
+        </p:txBody>
+      </p:sp>
+      <p:sp>
+        <p:nvSpPr>
+          <p:cNvPr id="19" name="">
+            <a:extLst xmlns:a="http://schemas.openxmlformats.org/drawingml/2006/main">
+              <a:ext uri="{FF2B5EF4-FFF2-40B4-BE49-F238E27FC236}">
+                <a16:creationId xmlns:a16="http://schemas.microsoft.com/office/drawing/2014/main" id="{66B895EE-56C1-4ACB-966C-D0D10ADF52EA}"/>
+              </a:ext>
+            </a:extLst>
+          </p:cNvPr>
+          <p:cNvSpPr>
+            <a:spLocks xmlns:a="http://schemas.openxmlformats.org/drawingml/2006/main" noGrp="1"/>
+          </p:cNvSpPr>
+          <p:nvPr/>
+        </p:nvSpPr>
+        <p:spPr>
+          <a:xfrm xmlns:a="http://schemas.openxmlformats.org/drawingml/2006/main">
+            <a:off x="9505950" y="4124325"/>
+            <a:ext cx="285750" cy="419100"/>
+          </a:xfrm>
+          <a:prstGeom xmlns:a="http://schemas.openxmlformats.org/drawingml/2006/main" prst="downArrow">
+            <a:avLst/>
+          </a:prstGeom>
+          <a:solidFill xmlns:a="http://schemas.openxmlformats.org/drawingml/2006/main">
+            <a:srgbClr val="E47F29"/>
+          </a:solidFill>
+          <a:ln xmlns:a="http://schemas.openxmlformats.org/drawingml/2006/main" w="0">
+            <a:noFill/>
+          </a:ln>
+        </p:spPr>
+      </p:sp>
+      <p:sp>
+        <p:nvSpPr>
+          <p:cNvPr id="20" name="">
+            <a:extLst xmlns:a="http://schemas.openxmlformats.org/drawingml/2006/main">
+              <a:ext uri="{FF2B5EF4-FFF2-40B4-BE49-F238E27FC236}">
+                <a16:creationId xmlns:a16="http://schemas.microsoft.com/office/drawing/2014/main" id="{1A83C64D-243B-4DAE-8016-2E35DED88EEF}"/>
+              </a:ext>
+            </a:extLst>
+          </p:cNvPr>
+          <p:cNvSpPr>
+            <a:spLocks xmlns:a="http://schemas.openxmlformats.org/drawingml/2006/main" noGrp="1"/>
+          </p:cNvSpPr>
+          <p:nvPr/>
+        </p:nvSpPr>
+        <p:spPr>
+          <a:xfrm xmlns:a="http://schemas.openxmlformats.org/drawingml/2006/main">
+            <a:off x="609600" y="5105400"/>
+            <a:ext cx="6619875" cy="762000"/>
+          </a:xfrm>
+          <a:prstGeom xmlns:a="http://schemas.openxmlformats.org/drawingml/2006/main" prst="rect">
+            <a:avLst/>
+          </a:prstGeom>
+          <a:noFill xmlns:a="http://schemas.openxmlformats.org/drawingml/2006/main"/>
+          <a:ln xmlns:a="http://schemas.openxmlformats.org/drawingml/2006/main" w="0">
+            <a:noFill/>
+          </a:ln>
+        </p:spPr>
+        <p:txBody>
+          <a:bodyPr xmlns:a="http://schemas.openxmlformats.org/drawingml/2006/main" lIns="0" tIns="0" rIns="0" bIns="0"/>
+          <a:lstStyle xmlns:a="http://schemas.openxmlformats.org/drawingml/2006/main">
+            <a:defPPr algn="l">
+              <a:defRPr sz="2400" b="1">
+                <a:solidFill>
+                  <a:srgbClr val="007F80"/>
+                </a:solidFill>
+                <a:latin typeface="Arial"/>
+                <a:ea typeface="Arial"/>
+                <a:cs typeface="Arial"/>
+              </a:defRPr>
+            </a:defPPr>
+          </a:lstStyle>
+          <a:p xmlns:a="http://schemas.openxmlformats.org/drawingml/2006/main">
+            <a:pPr algn="l">
+              <a:defRPr sz="2400" b="1">
+                <a:solidFill>
+                  <a:srgbClr val="007F80"/>
+                </a:solidFill>
+                <a:latin typeface="Arial"/>
+                <a:ea typeface="Arial"/>
+                <a:cs typeface="Arial"/>
+              </a:defRPr>
+            </a:pPr>
+            <a:r>
+              <a:rPr sz="2400" b="1">
+                <a:solidFill>
+                  <a:srgbClr val="007F80"/>
+                </a:solidFill>
+                <a:latin typeface="Arial"/>
+                <a:ea typeface="Arial"/>
+                <a:cs typeface="Arial"/>
+              </a:rPr>
+              <a:t>Better recorded actions receive more weight</a:t>
+            </a:r>
+          </a:p>
+        </p:txBody>
+      </p:sp>
+      <p:sp>
+        <p:nvSpPr>
+          <p:cNvPr id="21" name="">
+            <a:extLst xmlns:a="http://schemas.openxmlformats.org/drawingml/2006/main">
+              <a:ext uri="{FF2B5EF4-FFF2-40B4-BE49-F238E27FC236}">
+                <a16:creationId xmlns:a16="http://schemas.microsoft.com/office/drawing/2014/main" id="{E58B8FDE-4CCE-4178-9BF5-9FD303BE4F01}"/>
+              </a:ext>
+            </a:extLst>
+          </p:cNvPr>
+          <p:cNvSpPr>
+            <a:spLocks xmlns:a="http://schemas.openxmlformats.org/drawingml/2006/main" noGrp="1"/>
+          </p:cNvSpPr>
+          <p:nvPr/>
+        </p:nvSpPr>
+        <p:spPr>
+          <a:xfrm xmlns:a="http://schemas.openxmlformats.org/drawingml/2006/main">
+            <a:off x="11077575" y="6457950"/>
+            <a:ext cx="666750" cy="266700"/>
+          </a:xfrm>
+          <a:prstGeom xmlns:a="http://schemas.openxmlformats.org/drawingml/2006/main" prst="rect">
+            <a:avLst/>
+          </a:prstGeom>
+          <a:noFill xmlns:a="http://schemas.openxmlformats.org/drawingml/2006/main"/>
+          <a:ln xmlns:a="http://schemas.openxmlformats.org/drawingml/2006/main" w="0">
+            <a:noFill/>
+          </a:ln>
+        </p:spPr>
+        <p:txBody>
+          <a:bodyPr xmlns:a="http://schemas.openxmlformats.org/drawingml/2006/main" lIns="0" tIns="0" rIns="0" bIns="0"/>
+          <a:lstStyle xmlns:a="http://schemas.openxmlformats.org/drawingml/2006/main">
+            <a:defPPr algn="l">
               <a:defRPr sz="1350" b="0">
                 <a:solidFill>
-                  <a:srgbClr val="5B6D7A"/>
+                  <a:srgbClr val="6D8190"/>
+                </a:solidFill>
+                <a:latin typeface="Arial"/>
+                <a:ea typeface="Arial"/>
+                <a:cs typeface="Arial"/>
+              </a:defRPr>
+            </a:defPPr>
+          </a:lstStyle>
+          <a:p xmlns:a="http://schemas.openxmlformats.org/drawingml/2006/main">
+            <a:pPr algn="l">
+              <a:defRPr sz="1350" b="0">
+                <a:solidFill>
+                  <a:srgbClr val="6D8190"/>
                 </a:solidFill>
                 <a:latin typeface="Arial"/>
                 <a:ea typeface="Arial"/>
@@ -4549,7 +5702,7 @@
             <a:r>
               <a:rPr sz="1350" b="0">
                 <a:solidFill>
-                  <a:srgbClr val="5B6D7A"/>
+                  <a:srgbClr val="6D8190"/>
                 </a:solidFill>
                 <a:latin typeface="Arial"/>
                 <a:ea typeface="Arial"/>
@@ -4563,7 +5716,7 @@
     </p:spTree>
     <p:extLst>
       <p:ext uri="{BB962C8B-B14F-4D97-AF65-F5344CB8AC3E}">
-        <p14:creationId xmlns:p14="http://schemas.microsoft.com/office/powerpoint/2010/main" val="1756944435"/>
+        <p14:creationId xmlns:p14="http://schemas.microsoft.com/office/powerpoint/2010/main" val="1434975183"/>
       </p:ext>
     </p:extLst>
   </p:cSld>
@@ -4576,7 +5729,7 @@
     <p:bg>
       <p:bgPr>
         <a:solidFill xmlns:a="http://schemas.openxmlformats.org/drawingml/2006/main">
-          <a:srgbClr val="F7FAFC"/>
+          <a:srgbClr val="FBFCFD"/>
         </a:solidFill>
       </p:bgPr>
     </p:bg>
@@ -4591,10 +5744,10 @@
       </p:grpSpPr>
       <p:sp>
         <p:nvSpPr>
-          <p:cNvPr id="11" name="heading">
-            <a:extLst xmlns:a="http://schemas.openxmlformats.org/drawingml/2006/main">
-              <a:ext uri="{FF2B5EF4-FFF2-40B4-BE49-F238E27FC236}">
-                <a16:creationId xmlns:a16="http://schemas.microsoft.com/office/drawing/2014/main" id="{38D06ABF-A20F-4EE0-B700-B690DDAE233C}"/>
+          <p:cNvPr id="19" name="">
+            <a:extLst xmlns:a="http://schemas.openxmlformats.org/drawingml/2006/main">
+              <a:ext uri="{FF2B5EF4-FFF2-40B4-BE49-F238E27FC236}">
+                <a16:creationId xmlns:a16="http://schemas.microsoft.com/office/drawing/2014/main" id="{EE3F3F93-62E2-483A-9DBF-39F98D061A47}"/>
               </a:ext>
             </a:extLst>
           </p:cNvPr>
@@ -4605,8 +5758,8 @@
         </p:nvSpPr>
         <p:spPr>
           <a:xfrm xmlns:a="http://schemas.openxmlformats.org/drawingml/2006/main">
-            <a:off x="685800" y="523875"/>
-            <a:ext cx="10858500" cy="933450"/>
+            <a:off x="609600" y="457200"/>
+            <a:ext cx="11049000" cy="952500"/>
           </a:xfrm>
           <a:prstGeom xmlns:a="http://schemas.openxmlformats.org/drawingml/2006/main" prst="rect">
             <a:avLst/>
@@ -4619,10 +5772,10 @@
         <p:txBody>
           <a:bodyPr xmlns:a="http://schemas.openxmlformats.org/drawingml/2006/main" lIns="0" tIns="0" rIns="0" bIns="0"/>
           <a:lstStyle xmlns:a="http://schemas.openxmlformats.org/drawingml/2006/main">
-            <a:defPPr>
+            <a:defPPr algn="l">
               <a:defRPr sz="3450" b="1">
                 <a:solidFill>
-                  <a:srgbClr val="142B40"/>
+                  <a:srgbClr val="132E40"/>
                 </a:solidFill>
                 <a:latin typeface="Arial"/>
                 <a:ea typeface="Arial"/>
@@ -4631,10 +5784,10 @@
             </a:defPPr>
           </a:lstStyle>
           <a:p xmlns:a="http://schemas.openxmlformats.org/drawingml/2006/main">
-            <a:pPr>
+            <a:pPr algn="l">
               <a:defRPr sz="3450" b="1">
                 <a:solidFill>
-                  <a:srgbClr val="142B40"/>
+                  <a:srgbClr val="132E40"/>
                 </a:solidFill>
                 <a:latin typeface="Arial"/>
                 <a:ea typeface="Arial"/>
@@ -4644,23 +5797,23 @@
             <a:r>
               <a:rPr sz="3450" b="1">
                 <a:solidFill>
-                  <a:srgbClr val="142B40"/>
+                  <a:srgbClr val="132E40"/>
                 </a:solidFill>
                 <a:latin typeface="Arial"/>
                 <a:ea typeface="Arial"/>
                 <a:cs typeface="Arial"/>
               </a:rPr>
-              <a:t>The IQL update</a:t>
-            </a:r>
-          </a:p>
-        </p:txBody>
-      </p:sp>
-      <p:sp>
-        <p:nvSpPr>
-          <p:cNvPr id="2" name="heading">
-            <a:extLst xmlns:a="http://schemas.openxmlformats.org/drawingml/2006/main">
-              <a:ext uri="{FF2B5EF4-FFF2-40B4-BE49-F238E27FC236}">
-                <a16:creationId xmlns:a16="http://schemas.microsoft.com/office/drawing/2014/main" id="{D89C7056-36C4-4395-AB8E-2960FF5F4755}"/>
+              <a:t>Three updates inside IQL</a:t>
+            </a:r>
+          </a:p>
+        </p:txBody>
+      </p:sp>
+      <p:sp>
+        <p:nvSpPr>
+          <p:cNvPr id="2" name="">
+            <a:extLst xmlns:a="http://schemas.openxmlformats.org/drawingml/2006/main">
+              <a:ext uri="{FF2B5EF4-FFF2-40B4-BE49-F238E27FC236}">
+                <a16:creationId xmlns:a16="http://schemas.microsoft.com/office/drawing/2014/main" id="{33EDCE12-8D4A-469E-ABB8-8A64519D7DE1}"/>
               </a:ext>
             </a:extLst>
           </p:cNvPr>
@@ -4671,8 +5824,8 @@
         </p:nvSpPr>
         <p:spPr>
           <a:xfrm xmlns:a="http://schemas.openxmlformats.org/drawingml/2006/main">
-            <a:off x="685800" y="1762125"/>
-            <a:ext cx="2714625" cy="647700"/>
+            <a:off x="609600" y="1657350"/>
+            <a:ext cx="952500" cy="809625"/>
           </a:xfrm>
           <a:prstGeom xmlns:a="http://schemas.openxmlformats.org/drawingml/2006/main" prst="rect">
             <a:avLst/>
@@ -4685,10 +5838,10 @@
         <p:txBody>
           <a:bodyPr xmlns:a="http://schemas.openxmlformats.org/drawingml/2006/main" lIns="0" tIns="0" rIns="0" bIns="0"/>
           <a:lstStyle xmlns:a="http://schemas.openxmlformats.org/drawingml/2006/main">
-            <a:defPPr>
-              <a:defRPr sz="2100" b="1">
-                <a:solidFill>
-                  <a:srgbClr val="147A78"/>
+            <a:defPPr algn="l">
+              <a:defRPr sz="4650" b="1">
+                <a:solidFill>
+                  <a:srgbClr val="007F80"/>
                 </a:solidFill>
                 <a:latin typeface="Arial"/>
                 <a:ea typeface="Arial"/>
@@ -4697,10 +5850,10 @@
             </a:defPPr>
           </a:lstStyle>
           <a:p xmlns:a="http://schemas.openxmlformats.org/drawingml/2006/main">
-            <a:pPr>
-              <a:defRPr sz="2100" b="1">
-                <a:solidFill>
-                  <a:srgbClr val="147A78"/>
+            <a:pPr algn="l">
+              <a:defRPr sz="4650" b="1">
+                <a:solidFill>
+                  <a:srgbClr val="007F80"/>
                 </a:solidFill>
                 <a:latin typeface="Arial"/>
                 <a:ea typeface="Arial"/>
@@ -4708,25 +5861,25 @@
               </a:defRPr>
             </a:pPr>
             <a:r>
-              <a:rPr sz="2100" b="1">
-                <a:solidFill>
-                  <a:srgbClr val="147A78"/>
+              <a:rPr sz="4650" b="1">
+                <a:solidFill>
+                  <a:srgbClr val="007F80"/>
                 </a:solidFill>
                 <a:latin typeface="Arial"/>
                 <a:ea typeface="Arial"/>
                 <a:cs typeface="Arial"/>
               </a:rPr>
-              <a:t>State value V</a:t>
-            </a:r>
-          </a:p>
-        </p:txBody>
-      </p:sp>
-      <p:sp>
-        <p:nvSpPr>
-          <p:cNvPr id="3" name="body">
-            <a:extLst xmlns:a="http://schemas.openxmlformats.org/drawingml/2006/main">
-              <a:ext uri="{FF2B5EF4-FFF2-40B4-BE49-F238E27FC236}">
-                <a16:creationId xmlns:a16="http://schemas.microsoft.com/office/drawing/2014/main" id="{F9B9EA73-7BEE-4B22-976B-EB5B1EA1B92C}"/>
+              <a:t>01</a:t>
+            </a:r>
+          </a:p>
+        </p:txBody>
+      </p:sp>
+      <p:sp>
+        <p:nvSpPr>
+          <p:cNvPr id="3" name="">
+            <a:extLst xmlns:a="http://schemas.openxmlformats.org/drawingml/2006/main">
+              <a:ext uri="{FF2B5EF4-FFF2-40B4-BE49-F238E27FC236}">
+                <a16:creationId xmlns:a16="http://schemas.microsoft.com/office/drawing/2014/main" id="{D5D09370-7B26-48DE-885F-6294DBC78F65}"/>
               </a:ext>
             </a:extLst>
           </p:cNvPr>
@@ -4737,8 +5890,8 @@
         </p:nvSpPr>
         <p:spPr>
           <a:xfrm xmlns:a="http://schemas.openxmlformats.org/drawingml/2006/main">
-            <a:off x="3571875" y="1762125"/>
-            <a:ext cx="7858125" cy="952500"/>
+            <a:off x="609600" y="3152775"/>
+            <a:ext cx="952500" cy="809625"/>
           </a:xfrm>
           <a:prstGeom xmlns:a="http://schemas.openxmlformats.org/drawingml/2006/main" prst="rect">
             <a:avLst/>
@@ -4751,10 +5904,10 @@
         <p:txBody>
           <a:bodyPr xmlns:a="http://schemas.openxmlformats.org/drawingml/2006/main" lIns="0" tIns="0" rIns="0" bIns="0"/>
           <a:lstStyle xmlns:a="http://schemas.openxmlformats.org/drawingml/2006/main">
-            <a:defPPr>
-              <a:defRPr sz="2025" b="0">
-                <a:solidFill>
-                  <a:srgbClr val="142B40"/>
+            <a:defPPr algn="l">
+              <a:defRPr sz="4650" b="1">
+                <a:solidFill>
+                  <a:srgbClr val="007F80"/>
                 </a:solidFill>
                 <a:latin typeface="Arial"/>
                 <a:ea typeface="Arial"/>
@@ -4763,10 +5916,10 @@
             </a:defPPr>
           </a:lstStyle>
           <a:p xmlns:a="http://schemas.openxmlformats.org/drawingml/2006/main">
-            <a:pPr>
-              <a:defRPr sz="2025" b="0">
-                <a:solidFill>
-                  <a:srgbClr val="142B40"/>
+            <a:pPr algn="l">
+              <a:defRPr sz="4650" b="1">
+                <a:solidFill>
+                  <a:srgbClr val="007F80"/>
                 </a:solidFill>
                 <a:latin typeface="Arial"/>
                 <a:ea typeface="Arial"/>
@@ -4774,48 +5927,25 @@
               </a:defRPr>
             </a:pPr>
             <a:r>
-              <a:rPr sz="2025" b="0">
-                <a:solidFill>
-                  <a:srgbClr val="142B40"/>
+              <a:rPr sz="4650" b="1">
+                <a:solidFill>
+                  <a:srgbClr val="007F80"/>
                 </a:solidFill>
                 <a:latin typeface="Arial"/>
                 <a:ea typeface="Arial"/>
                 <a:cs typeface="Arial"/>
               </a:rPr>
-              <a:t>Upper expectile regression on dataset Q-values</a:t>
-            </a:r>
-          </a:p>
-          <a:p xmlns:a="http://schemas.openxmlformats.org/drawingml/2006/main">
-            <a:pPr>
-              <a:defRPr sz="2025" b="0">
-                <a:solidFill>
-                  <a:srgbClr val="142B40"/>
-                </a:solidFill>
-                <a:latin typeface="Arial"/>
-                <a:ea typeface="Arial"/>
-                <a:cs typeface="Arial"/>
-              </a:defRPr>
-            </a:pPr>
-            <a:r>
-              <a:rPr sz="2025" b="0">
-                <a:solidFill>
-                  <a:srgbClr val="142B40"/>
-                </a:solidFill>
-                <a:latin typeface="Arial"/>
-                <a:ea typeface="Arial"/>
-                <a:cs typeface="Arial"/>
-              </a:rPr>
-              <a:t>Expectile = 0.7</a:t>
-            </a:r>
-          </a:p>
-        </p:txBody>
-      </p:sp>
-      <p:sp>
-        <p:nvSpPr>
-          <p:cNvPr id="4" name="heading">
-            <a:extLst xmlns:a="http://schemas.openxmlformats.org/drawingml/2006/main">
-              <a:ext uri="{FF2B5EF4-FFF2-40B4-BE49-F238E27FC236}">
-                <a16:creationId xmlns:a16="http://schemas.microsoft.com/office/drawing/2014/main" id="{72C5406C-AE1A-45C3-8646-C86E3025B8A1}"/>
+              <a:t>02</a:t>
+            </a:r>
+          </a:p>
+        </p:txBody>
+      </p:sp>
+      <p:sp>
+        <p:nvSpPr>
+          <p:cNvPr id="4" name="">
+            <a:extLst xmlns:a="http://schemas.openxmlformats.org/drawingml/2006/main">
+              <a:ext uri="{FF2B5EF4-FFF2-40B4-BE49-F238E27FC236}">
+                <a16:creationId xmlns:a16="http://schemas.microsoft.com/office/drawing/2014/main" id="{C5440872-846A-4E69-A08F-81F8F9697821}"/>
               </a:ext>
             </a:extLst>
           </p:cNvPr>
@@ -4826,8 +5956,8 @@
         </p:nvSpPr>
         <p:spPr>
           <a:xfrm xmlns:a="http://schemas.openxmlformats.org/drawingml/2006/main">
-            <a:off x="685800" y="2800350"/>
-            <a:ext cx="2714625" cy="647700"/>
+            <a:off x="609600" y="4648200"/>
+            <a:ext cx="952500" cy="809625"/>
           </a:xfrm>
           <a:prstGeom xmlns:a="http://schemas.openxmlformats.org/drawingml/2006/main" prst="rect">
             <a:avLst/>
@@ -4840,10 +5970,10 @@
         <p:txBody>
           <a:bodyPr xmlns:a="http://schemas.openxmlformats.org/drawingml/2006/main" lIns="0" tIns="0" rIns="0" bIns="0"/>
           <a:lstStyle xmlns:a="http://schemas.openxmlformats.org/drawingml/2006/main">
-            <a:defPPr>
-              <a:defRPr sz="2100" b="1">
-                <a:solidFill>
-                  <a:srgbClr val="147A78"/>
+            <a:defPPr algn="l">
+              <a:defRPr sz="4650" b="1">
+                <a:solidFill>
+                  <a:srgbClr val="E47F29"/>
                 </a:solidFill>
                 <a:latin typeface="Arial"/>
                 <a:ea typeface="Arial"/>
@@ -4852,10 +5982,10 @@
             </a:defPPr>
           </a:lstStyle>
           <a:p xmlns:a="http://schemas.openxmlformats.org/drawingml/2006/main">
-            <a:pPr>
-              <a:defRPr sz="2100" b="1">
-                <a:solidFill>
-                  <a:srgbClr val="147A78"/>
+            <a:pPr algn="l">
+              <a:defRPr sz="4650" b="1">
+                <a:solidFill>
+                  <a:srgbClr val="E47F29"/>
                 </a:solidFill>
                 <a:latin typeface="Arial"/>
                 <a:ea typeface="Arial"/>
@@ -4863,25 +5993,25 @@
               </a:defRPr>
             </a:pPr>
             <a:r>
-              <a:rPr sz="2100" b="1">
-                <a:solidFill>
-                  <a:srgbClr val="147A78"/>
+              <a:rPr sz="4650" b="1">
+                <a:solidFill>
+                  <a:srgbClr val="E47F29"/>
                 </a:solidFill>
                 <a:latin typeface="Arial"/>
                 <a:ea typeface="Arial"/>
                 <a:cs typeface="Arial"/>
               </a:rPr>
-              <a:t>Twin critics Q1, Q2</a:t>
-            </a:r>
-          </a:p>
-        </p:txBody>
-      </p:sp>
-      <p:sp>
-        <p:nvSpPr>
-          <p:cNvPr id="5" name="body">
-            <a:extLst xmlns:a="http://schemas.openxmlformats.org/drawingml/2006/main">
-              <a:ext uri="{FF2B5EF4-FFF2-40B4-BE49-F238E27FC236}">
-                <a16:creationId xmlns:a16="http://schemas.microsoft.com/office/drawing/2014/main" id="{29CFF11A-52A6-4536-B832-D297ABAA7C0E}"/>
+              <a:t>03</a:t>
+            </a:r>
+          </a:p>
+        </p:txBody>
+      </p:sp>
+      <p:sp>
+        <p:nvSpPr>
+          <p:cNvPr id="5" name="">
+            <a:extLst xmlns:a="http://schemas.openxmlformats.org/drawingml/2006/main">
+              <a:ext uri="{FF2B5EF4-FFF2-40B4-BE49-F238E27FC236}">
+                <a16:creationId xmlns:a16="http://schemas.microsoft.com/office/drawing/2014/main" id="{8DAD10A6-12D7-4414-A206-EF77DA8A6DEE}"/>
               </a:ext>
             </a:extLst>
           </p:cNvPr>
@@ -4892,8 +6022,8 @@
         </p:nvSpPr>
         <p:spPr>
           <a:xfrm xmlns:a="http://schemas.openxmlformats.org/drawingml/2006/main">
-            <a:off x="3571875" y="2800350"/>
-            <a:ext cx="7858125" cy="952500"/>
+            <a:off x="1885950" y="1657350"/>
+            <a:ext cx="2571750" cy="428625"/>
           </a:xfrm>
           <a:prstGeom xmlns:a="http://schemas.openxmlformats.org/drawingml/2006/main" prst="rect">
             <a:avLst/>
@@ -4906,10 +6036,10 @@
         <p:txBody>
           <a:bodyPr xmlns:a="http://schemas.openxmlformats.org/drawingml/2006/main" lIns="0" tIns="0" rIns="0" bIns="0"/>
           <a:lstStyle xmlns:a="http://schemas.openxmlformats.org/drawingml/2006/main">
-            <a:defPPr>
-              <a:defRPr sz="2025" b="0">
-                <a:solidFill>
-                  <a:srgbClr val="142B40"/>
+            <a:defPPr algn="l">
+              <a:defRPr sz="2550" b="1">
+                <a:solidFill>
+                  <a:srgbClr val="132E40"/>
                 </a:solidFill>
                 <a:latin typeface="Arial"/>
                 <a:ea typeface="Arial"/>
@@ -4918,10 +6048,10 @@
             </a:defPPr>
           </a:lstStyle>
           <a:p xmlns:a="http://schemas.openxmlformats.org/drawingml/2006/main">
-            <a:pPr>
-              <a:defRPr sz="2025" b="0">
-                <a:solidFill>
-                  <a:srgbClr val="142B40"/>
+            <a:pPr algn="l">
+              <a:defRPr sz="2550" b="1">
+                <a:solidFill>
+                  <a:srgbClr val="132E40"/>
                 </a:solidFill>
                 <a:latin typeface="Arial"/>
                 <a:ea typeface="Arial"/>
@@ -4929,25 +6059,25 @@
               </a:defRPr>
             </a:pPr>
             <a:r>
-              <a:rPr sz="2025" b="0">
-                <a:solidFill>
-                  <a:srgbClr val="142B40"/>
+              <a:rPr sz="2550" b="1">
+                <a:solidFill>
+                  <a:srgbClr val="132E40"/>
                 </a:solidFill>
                 <a:latin typeface="Arial"/>
                 <a:ea typeface="Arial"/>
                 <a:cs typeface="Arial"/>
               </a:rPr>
-              <a:t>Target = reward + 0.99 × (1 - terminated) × V(next state)</a:t>
-            </a:r>
-          </a:p>
-        </p:txBody>
-      </p:sp>
-      <p:sp>
-        <p:nvSpPr>
-          <p:cNvPr id="6" name="heading">
-            <a:extLst xmlns:a="http://schemas.openxmlformats.org/drawingml/2006/main">
-              <a:ext uri="{FF2B5EF4-FFF2-40B4-BE49-F238E27FC236}">
-                <a16:creationId xmlns:a16="http://schemas.microsoft.com/office/drawing/2014/main" id="{E03AEDAE-7C01-4446-9476-EFE06A8B41A5}"/>
+              <a:t>Value V</a:t>
+            </a:r>
+          </a:p>
+        </p:txBody>
+      </p:sp>
+      <p:sp>
+        <p:nvSpPr>
+          <p:cNvPr id="6" name="">
+            <a:extLst xmlns:a="http://schemas.openxmlformats.org/drawingml/2006/main">
+              <a:ext uri="{FF2B5EF4-FFF2-40B4-BE49-F238E27FC236}">
+                <a16:creationId xmlns:a16="http://schemas.microsoft.com/office/drawing/2014/main" id="{D8C87138-FA97-4E80-B8A3-564FBFC82927}"/>
               </a:ext>
             </a:extLst>
           </p:cNvPr>
@@ -4958,8 +6088,8 @@
         </p:nvSpPr>
         <p:spPr>
           <a:xfrm xmlns:a="http://schemas.openxmlformats.org/drawingml/2006/main">
-            <a:off x="685800" y="3838575"/>
-            <a:ext cx="2714625" cy="647700"/>
+            <a:off x="1885950" y="2114550"/>
+            <a:ext cx="3048000" cy="428625"/>
           </a:xfrm>
           <a:prstGeom xmlns:a="http://schemas.openxmlformats.org/drawingml/2006/main" prst="rect">
             <a:avLst/>
@@ -4972,10 +6102,10 @@
         <p:txBody>
           <a:bodyPr xmlns:a="http://schemas.openxmlformats.org/drawingml/2006/main" lIns="0" tIns="0" rIns="0" bIns="0"/>
           <a:lstStyle xmlns:a="http://schemas.openxmlformats.org/drawingml/2006/main">
-            <a:defPPr>
-              <a:defRPr sz="2100" b="1">
-                <a:solidFill>
-                  <a:srgbClr val="147A78"/>
+            <a:defPPr algn="l">
+              <a:defRPr sz="2025" b="0">
+                <a:solidFill>
+                  <a:srgbClr val="132E40"/>
                 </a:solidFill>
                 <a:latin typeface="Arial"/>
                 <a:ea typeface="Arial"/>
@@ -4984,10 +6114,10 @@
             </a:defPPr>
           </a:lstStyle>
           <a:p xmlns:a="http://schemas.openxmlformats.org/drawingml/2006/main">
-            <a:pPr>
-              <a:defRPr sz="2100" b="1">
-                <a:solidFill>
-                  <a:srgbClr val="147A78"/>
+            <a:pPr algn="l">
+              <a:defRPr sz="2025" b="0">
+                <a:solidFill>
+                  <a:srgbClr val="132E40"/>
                 </a:solidFill>
                 <a:latin typeface="Arial"/>
                 <a:ea typeface="Arial"/>
@@ -4995,25 +6125,25 @@
               </a:defRPr>
             </a:pPr>
             <a:r>
-              <a:rPr sz="2100" b="1">
-                <a:solidFill>
-                  <a:srgbClr val="147A78"/>
+              <a:rPr sz="2025" b="0">
+                <a:solidFill>
+                  <a:srgbClr val="132E40"/>
                 </a:solidFill>
                 <a:latin typeface="Arial"/>
                 <a:ea typeface="Arial"/>
                 <a:cs typeface="Arial"/>
               </a:rPr>
-              <a:t>Policy</a:t>
-            </a:r>
-          </a:p>
-        </p:txBody>
-      </p:sp>
-      <p:sp>
-        <p:nvSpPr>
-          <p:cNvPr id="7" name="body">
-            <a:extLst xmlns:a="http://schemas.openxmlformats.org/drawingml/2006/main">
-              <a:ext uri="{FF2B5EF4-FFF2-40B4-BE49-F238E27FC236}">
-                <a16:creationId xmlns:a16="http://schemas.microsoft.com/office/drawing/2014/main" id="{3495B735-D752-435E-8C5E-11AD8791886A}"/>
+              <a:t>Upper expectile</a:t>
+            </a:r>
+          </a:p>
+        </p:txBody>
+      </p:sp>
+      <p:sp>
+        <p:nvSpPr>
+          <p:cNvPr id="7" name="">
+            <a:extLst xmlns:a="http://schemas.openxmlformats.org/drawingml/2006/main">
+              <a:ext uri="{FF2B5EF4-FFF2-40B4-BE49-F238E27FC236}">
+                <a16:creationId xmlns:a16="http://schemas.microsoft.com/office/drawing/2014/main" id="{20F62373-82D2-4A87-AE1A-1D6887E97C15}"/>
               </a:ext>
             </a:extLst>
           </p:cNvPr>
@@ -5024,8 +6154,8 @@
         </p:nvSpPr>
         <p:spPr>
           <a:xfrm xmlns:a="http://schemas.openxmlformats.org/drawingml/2006/main">
-            <a:off x="3571875" y="3838575"/>
-            <a:ext cx="7858125" cy="952500"/>
+            <a:off x="8715375" y="1590675"/>
+            <a:ext cx="2190750" cy="762000"/>
           </a:xfrm>
           <a:prstGeom xmlns:a="http://schemas.openxmlformats.org/drawingml/2006/main" prst="rect">
             <a:avLst/>
@@ -5038,10 +6168,10 @@
         <p:txBody>
           <a:bodyPr xmlns:a="http://schemas.openxmlformats.org/drawingml/2006/main" lIns="0" tIns="0" rIns="0" bIns="0"/>
           <a:lstStyle xmlns:a="http://schemas.openxmlformats.org/drawingml/2006/main">
-            <a:defPPr>
-              <a:defRPr sz="2025" b="0">
-                <a:solidFill>
-                  <a:srgbClr val="142B40"/>
+            <a:defPPr algn="l">
+              <a:defRPr sz="4875" b="1">
+                <a:solidFill>
+                  <a:srgbClr val="007F80"/>
                 </a:solidFill>
                 <a:latin typeface="Arial"/>
                 <a:ea typeface="Arial"/>
@@ -5050,10 +6180,10 @@
             </a:defPPr>
           </a:lstStyle>
           <a:p xmlns:a="http://schemas.openxmlformats.org/drawingml/2006/main">
-            <a:pPr>
-              <a:defRPr sz="2025" b="0">
-                <a:solidFill>
-                  <a:srgbClr val="142B40"/>
+            <a:pPr algn="l">
+              <a:defRPr sz="4875" b="1">
+                <a:solidFill>
+                  <a:srgbClr val="007F80"/>
                 </a:solidFill>
                 <a:latin typeface="Arial"/>
                 <a:ea typeface="Arial"/>
@@ -5061,48 +6191,25 @@
               </a:defRPr>
             </a:pPr>
             <a:r>
-              <a:rPr sz="2025" b="0">
-                <a:solidFill>
-                  <a:srgbClr val="142B40"/>
+              <a:rPr sz="4875" b="1">
+                <a:solidFill>
+                  <a:srgbClr val="007F80"/>
                 </a:solidFill>
                 <a:latin typeface="Arial"/>
                 <a:ea typeface="Arial"/>
                 <a:cs typeface="Arial"/>
               </a:rPr>
-              <a:t>Advantage = min(target Q1, target Q2) - V</a:t>
-            </a:r>
-          </a:p>
-          <a:p xmlns:a="http://schemas.openxmlformats.org/drawingml/2006/main">
-            <a:pPr>
-              <a:defRPr sz="2025" b="0">
-                <a:solidFill>
-                  <a:srgbClr val="142B40"/>
-                </a:solidFill>
-                <a:latin typeface="Arial"/>
-                <a:ea typeface="Arial"/>
-                <a:cs typeface="Arial"/>
-              </a:defRPr>
-            </a:pPr>
-            <a:r>
-              <a:rPr sz="2025" b="0">
-                <a:solidFill>
-                  <a:srgbClr val="142B40"/>
-                </a:solidFill>
-                <a:latin typeface="Arial"/>
-                <a:ea typeface="Arial"/>
-                <a:cs typeface="Arial"/>
-              </a:rPr>
-              <a:t>Weighted log-likelihood of recorded actions</a:t>
-            </a:r>
-          </a:p>
-        </p:txBody>
-      </p:sp>
-      <p:sp>
-        <p:nvSpPr>
-          <p:cNvPr id="8" name="heading">
-            <a:extLst xmlns:a="http://schemas.openxmlformats.org/drawingml/2006/main">
-              <a:ext uri="{FF2B5EF4-FFF2-40B4-BE49-F238E27FC236}">
-                <a16:creationId xmlns:a16="http://schemas.microsoft.com/office/drawing/2014/main" id="{98D329E4-7036-411B-A6F0-EF030D4E87A2}"/>
+              <a:t>0.7</a:t>
+            </a:r>
+          </a:p>
+        </p:txBody>
+      </p:sp>
+      <p:sp>
+        <p:nvSpPr>
+          <p:cNvPr id="8" name="">
+            <a:extLst xmlns:a="http://schemas.openxmlformats.org/drawingml/2006/main">
+              <a:ext uri="{FF2B5EF4-FFF2-40B4-BE49-F238E27FC236}">
+                <a16:creationId xmlns:a16="http://schemas.microsoft.com/office/drawing/2014/main" id="{E126C22C-4477-455A-9172-50A63E0C0C2C}"/>
               </a:ext>
             </a:extLst>
           </p:cNvPr>
@@ -5113,8 +6220,8 @@
         </p:nvSpPr>
         <p:spPr>
           <a:xfrm xmlns:a="http://schemas.openxmlformats.org/drawingml/2006/main">
-            <a:off x="685800" y="4876800"/>
-            <a:ext cx="2714625" cy="647700"/>
+            <a:off x="5524500" y="1924050"/>
+            <a:ext cx="2952750" cy="685800"/>
           </a:xfrm>
           <a:prstGeom xmlns:a="http://schemas.openxmlformats.org/drawingml/2006/main" prst="rect">
             <a:avLst/>
@@ -5127,10 +6234,10 @@
         <p:txBody>
           <a:bodyPr xmlns:a="http://schemas.openxmlformats.org/drawingml/2006/main" lIns="0" tIns="0" rIns="0" bIns="0"/>
           <a:lstStyle xmlns:a="http://schemas.openxmlformats.org/drawingml/2006/main">
-            <a:defPPr>
-              <a:defRPr sz="2100" b="1">
-                <a:solidFill>
-                  <a:srgbClr val="147A78"/>
+            <a:defPPr algn="l">
+              <a:defRPr sz="2100" b="0">
+                <a:solidFill>
+                  <a:srgbClr val="132E40"/>
                 </a:solidFill>
                 <a:latin typeface="Arial"/>
                 <a:ea typeface="Arial"/>
@@ -5139,10 +6246,10 @@
             </a:defPPr>
           </a:lstStyle>
           <a:p xmlns:a="http://schemas.openxmlformats.org/drawingml/2006/main">
-            <a:pPr>
-              <a:defRPr sz="2100" b="1">
-                <a:solidFill>
-                  <a:srgbClr val="147A78"/>
+            <a:pPr algn="l">
+              <a:defRPr sz="2100" b="0">
+                <a:solidFill>
+                  <a:srgbClr val="132E40"/>
                 </a:solidFill>
                 <a:latin typeface="Arial"/>
                 <a:ea typeface="Arial"/>
@@ -5150,25 +6257,25 @@
               </a:defRPr>
             </a:pPr>
             <a:r>
-              <a:rPr sz="2100" b="1">
-                <a:solidFill>
-                  <a:srgbClr val="147A78"/>
+              <a:rPr sz="2100" b="0">
+                <a:solidFill>
+                  <a:srgbClr val="132E40"/>
                 </a:solidFill>
                 <a:latin typeface="Arial"/>
                 <a:ea typeface="Arial"/>
                 <a:cs typeface="Arial"/>
               </a:rPr>
-              <a:t>Policy weight</a:t>
-            </a:r>
-          </a:p>
-        </p:txBody>
-      </p:sp>
-      <p:sp>
-        <p:nvSpPr>
-          <p:cNvPr id="9" name="body">
-            <a:extLst xmlns:a="http://schemas.openxmlformats.org/drawingml/2006/main">
-              <a:ext uri="{FF2B5EF4-FFF2-40B4-BE49-F238E27FC236}">
-                <a16:creationId xmlns:a16="http://schemas.microsoft.com/office/drawing/2014/main" id="{17F41B03-60DE-442C-9EC4-A97880DFA48D}"/>
+              <a:t>Favors stronger actions</a:t>
+            </a:r>
+          </a:p>
+        </p:txBody>
+      </p:sp>
+      <p:sp>
+        <p:nvSpPr>
+          <p:cNvPr id="9" name="">
+            <a:extLst xmlns:a="http://schemas.openxmlformats.org/drawingml/2006/main">
+              <a:ext uri="{FF2B5EF4-FFF2-40B4-BE49-F238E27FC236}">
+                <a16:creationId xmlns:a16="http://schemas.microsoft.com/office/drawing/2014/main" id="{216C37C2-E315-4AB7-A1C5-8C0B99C81438}"/>
               </a:ext>
             </a:extLst>
           </p:cNvPr>
@@ -5179,8 +6286,8 @@
         </p:nvSpPr>
         <p:spPr>
           <a:xfrm xmlns:a="http://schemas.openxmlformats.org/drawingml/2006/main">
-            <a:off x="3571875" y="4876800"/>
-            <a:ext cx="7858125" cy="952500"/>
+            <a:off x="1885950" y="3152775"/>
+            <a:ext cx="3143250" cy="476250"/>
           </a:xfrm>
           <a:prstGeom xmlns:a="http://schemas.openxmlformats.org/drawingml/2006/main" prst="rect">
             <a:avLst/>
@@ -5193,10 +6300,10 @@
         <p:txBody>
           <a:bodyPr xmlns:a="http://schemas.openxmlformats.org/drawingml/2006/main" lIns="0" tIns="0" rIns="0" bIns="0"/>
           <a:lstStyle xmlns:a="http://schemas.openxmlformats.org/drawingml/2006/main">
-            <a:defPPr>
-              <a:defRPr sz="2025" b="0">
-                <a:solidFill>
-                  <a:srgbClr val="142B40"/>
+            <a:defPPr algn="l">
+              <a:defRPr sz="2550" b="1">
+                <a:solidFill>
+                  <a:srgbClr val="132E40"/>
                 </a:solidFill>
                 <a:latin typeface="Arial"/>
                 <a:ea typeface="Arial"/>
@@ -5205,10 +6312,76 @@
             </a:defPPr>
           </a:lstStyle>
           <a:p xmlns:a="http://schemas.openxmlformats.org/drawingml/2006/main">
-            <a:pPr>
+            <a:pPr algn="l">
+              <a:defRPr sz="2550" b="1">
+                <a:solidFill>
+                  <a:srgbClr val="132E40"/>
+                </a:solidFill>
+                <a:latin typeface="Arial"/>
+                <a:ea typeface="Arial"/>
+                <a:cs typeface="Arial"/>
+              </a:defRPr>
+            </a:pPr>
+            <a:r>
+              <a:rPr sz="2550" b="1">
+                <a:solidFill>
+                  <a:srgbClr val="132E40"/>
+                </a:solidFill>
+                <a:latin typeface="Arial"/>
+                <a:ea typeface="Arial"/>
+                <a:cs typeface="Arial"/>
+              </a:rPr>
+              <a:t>Twin critics</a:t>
+            </a:r>
+          </a:p>
+        </p:txBody>
+      </p:sp>
+      <p:sp>
+        <p:nvSpPr>
+          <p:cNvPr id="10" name="">
+            <a:extLst xmlns:a="http://schemas.openxmlformats.org/drawingml/2006/main">
+              <a:ext uri="{FF2B5EF4-FFF2-40B4-BE49-F238E27FC236}">
+                <a16:creationId xmlns:a16="http://schemas.microsoft.com/office/drawing/2014/main" id="{CF091498-EBCC-4755-981F-A5034FBBBAC3}"/>
+              </a:ext>
+            </a:extLst>
+          </p:cNvPr>
+          <p:cNvSpPr>
+            <a:spLocks xmlns:a="http://schemas.openxmlformats.org/drawingml/2006/main" noGrp="1"/>
+          </p:cNvSpPr>
+          <p:nvPr/>
+        </p:nvSpPr>
+        <p:spPr>
+          <a:xfrm xmlns:a="http://schemas.openxmlformats.org/drawingml/2006/main">
+            <a:off x="1885950" y="3629025"/>
+            <a:ext cx="3143250" cy="428625"/>
+          </a:xfrm>
+          <a:prstGeom xmlns:a="http://schemas.openxmlformats.org/drawingml/2006/main" prst="rect">
+            <a:avLst/>
+          </a:prstGeom>
+          <a:noFill xmlns:a="http://schemas.openxmlformats.org/drawingml/2006/main"/>
+          <a:ln xmlns:a="http://schemas.openxmlformats.org/drawingml/2006/main" w="0">
+            <a:noFill/>
+          </a:ln>
+        </p:spPr>
+        <p:txBody>
+          <a:bodyPr xmlns:a="http://schemas.openxmlformats.org/drawingml/2006/main" lIns="0" tIns="0" rIns="0" bIns="0"/>
+          <a:lstStyle xmlns:a="http://schemas.openxmlformats.org/drawingml/2006/main">
+            <a:defPPr algn="l">
               <a:defRPr sz="2025" b="0">
                 <a:solidFill>
-                  <a:srgbClr val="142B40"/>
+                  <a:srgbClr val="132E40"/>
+                </a:solidFill>
+                <a:latin typeface="Arial"/>
+                <a:ea typeface="Arial"/>
+                <a:cs typeface="Arial"/>
+              </a:defRPr>
+            </a:defPPr>
+          </a:lstStyle>
+          <a:p xmlns:a="http://schemas.openxmlformats.org/drawingml/2006/main">
+            <a:pPr algn="l">
+              <a:defRPr sz="2025" b="0">
+                <a:solidFill>
+                  <a:srgbClr val="132E40"/>
                 </a:solidFill>
                 <a:latin typeface="Arial"/>
                 <a:ea typeface="Arial"/>
@@ -5218,7 +6391,337 @@
             <a:r>
               <a:rPr sz="2025" b="0">
                 <a:solidFill>
-                  <a:srgbClr val="142B40"/>
+                  <a:srgbClr val="132E40"/>
+                </a:solidFill>
+                <a:latin typeface="Arial"/>
+                <a:ea typeface="Arial"/>
+                <a:cs typeface="Arial"/>
+              </a:rPr>
+              <a:t>Q1 and Q2</a:t>
+            </a:r>
+          </a:p>
+        </p:txBody>
+      </p:sp>
+      <p:sp>
+        <p:nvSpPr>
+          <p:cNvPr id="11" name="">
+            <a:extLst xmlns:a="http://schemas.openxmlformats.org/drawingml/2006/main">
+              <a:ext uri="{FF2B5EF4-FFF2-40B4-BE49-F238E27FC236}">
+                <a16:creationId xmlns:a16="http://schemas.microsoft.com/office/drawing/2014/main" id="{A0170538-2A68-40D3-AD3E-339406B22240}"/>
+              </a:ext>
+            </a:extLst>
+          </p:cNvPr>
+          <p:cNvSpPr>
+            <a:spLocks xmlns:a="http://schemas.openxmlformats.org/drawingml/2006/main" noGrp="1"/>
+          </p:cNvSpPr>
+          <p:nvPr/>
+        </p:nvSpPr>
+        <p:spPr>
+          <a:xfrm xmlns:a="http://schemas.openxmlformats.org/drawingml/2006/main">
+            <a:off x="5524500" y="3209925"/>
+            <a:ext cx="6048375" cy="523875"/>
+          </a:xfrm>
+          <a:prstGeom xmlns:a="http://schemas.openxmlformats.org/drawingml/2006/main" prst="rect">
+            <a:avLst/>
+          </a:prstGeom>
+          <a:noFill xmlns:a="http://schemas.openxmlformats.org/drawingml/2006/main"/>
+          <a:ln xmlns:a="http://schemas.openxmlformats.org/drawingml/2006/main" w="0">
+            <a:noFill/>
+          </a:ln>
+        </p:spPr>
+        <p:txBody>
+          <a:bodyPr xmlns:a="http://schemas.openxmlformats.org/drawingml/2006/main" lIns="0" tIns="0" rIns="0" bIns="0"/>
+          <a:lstStyle xmlns:a="http://schemas.openxmlformats.org/drawingml/2006/main">
+            <a:defPPr algn="l">
+              <a:defRPr sz="2475" b="1">
+                <a:solidFill>
+                  <a:srgbClr val="132E40"/>
+                </a:solidFill>
+                <a:latin typeface="Arial"/>
+                <a:ea typeface="Arial"/>
+                <a:cs typeface="Arial"/>
+              </a:defRPr>
+            </a:defPPr>
+          </a:lstStyle>
+          <a:p xmlns:a="http://schemas.openxmlformats.org/drawingml/2006/main">
+            <a:pPr algn="l">
+              <a:defRPr sz="2475" b="1">
+                <a:solidFill>
+                  <a:srgbClr val="132E40"/>
+                </a:solidFill>
+                <a:latin typeface="Arial"/>
+                <a:ea typeface="Arial"/>
+                <a:cs typeface="Arial"/>
+              </a:defRPr>
+            </a:pPr>
+            <a:r>
+              <a:rPr sz="2475" b="1">
+                <a:solidFill>
+                  <a:srgbClr val="132E40"/>
+                </a:solidFill>
+                <a:latin typeface="Arial"/>
+                <a:ea typeface="Arial"/>
+                <a:cs typeface="Arial"/>
+              </a:rPr>
+              <a:t>reward + 0.99 × V(next state)</a:t>
+            </a:r>
+          </a:p>
+        </p:txBody>
+      </p:sp>
+      <p:sp>
+        <p:nvSpPr>
+          <p:cNvPr id="12" name="">
+            <a:extLst xmlns:a="http://schemas.openxmlformats.org/drawingml/2006/main">
+              <a:ext uri="{FF2B5EF4-FFF2-40B4-BE49-F238E27FC236}">
+                <a16:creationId xmlns:a16="http://schemas.microsoft.com/office/drawing/2014/main" id="{C79413F8-34DA-4B75-B587-99DD6C08D3CE}"/>
+              </a:ext>
+            </a:extLst>
+          </p:cNvPr>
+          <p:cNvSpPr>
+            <a:spLocks xmlns:a="http://schemas.openxmlformats.org/drawingml/2006/main" noGrp="1"/>
+          </p:cNvSpPr>
+          <p:nvPr/>
+        </p:nvSpPr>
+        <p:spPr>
+          <a:xfrm xmlns:a="http://schemas.openxmlformats.org/drawingml/2006/main">
+            <a:off x="5524500" y="3771900"/>
+            <a:ext cx="6000750" cy="428625"/>
+          </a:xfrm>
+          <a:prstGeom xmlns:a="http://schemas.openxmlformats.org/drawingml/2006/main" prst="rect">
+            <a:avLst/>
+          </a:prstGeom>
+          <a:noFill xmlns:a="http://schemas.openxmlformats.org/drawingml/2006/main"/>
+          <a:ln xmlns:a="http://schemas.openxmlformats.org/drawingml/2006/main" w="0">
+            <a:noFill/>
+          </a:ln>
+        </p:spPr>
+        <p:txBody>
+          <a:bodyPr xmlns:a="http://schemas.openxmlformats.org/drawingml/2006/main" lIns="0" tIns="0" rIns="0" bIns="0"/>
+          <a:lstStyle xmlns:a="http://schemas.openxmlformats.org/drawingml/2006/main">
+            <a:defPPr algn="l">
+              <a:defRPr sz="1875" b="0">
+                <a:solidFill>
+                  <a:srgbClr val="132E40"/>
+                </a:solidFill>
+                <a:latin typeface="Arial"/>
+                <a:ea typeface="Arial"/>
+                <a:cs typeface="Arial"/>
+              </a:defRPr>
+            </a:defPPr>
+          </a:lstStyle>
+          <a:p xmlns:a="http://schemas.openxmlformats.org/drawingml/2006/main">
+            <a:pPr algn="l">
+              <a:defRPr sz="1875" b="0">
+                <a:solidFill>
+                  <a:srgbClr val="132E40"/>
+                </a:solidFill>
+                <a:latin typeface="Arial"/>
+                <a:ea typeface="Arial"/>
+                <a:cs typeface="Arial"/>
+              </a:defRPr>
+            </a:pPr>
+            <a:r>
+              <a:rPr sz="1875" b="0">
+                <a:solidFill>
+                  <a:srgbClr val="132E40"/>
+                </a:solidFill>
+                <a:latin typeface="Arial"/>
+                <a:ea typeface="Arial"/>
+                <a:cs typeface="Arial"/>
+              </a:rPr>
+              <a:t>Bootstrap unless truly terminated</a:t>
+            </a:r>
+          </a:p>
+        </p:txBody>
+      </p:sp>
+      <p:sp>
+        <p:nvSpPr>
+          <p:cNvPr id="13" name="">
+            <a:extLst xmlns:a="http://schemas.openxmlformats.org/drawingml/2006/main">
+              <a:ext uri="{FF2B5EF4-FFF2-40B4-BE49-F238E27FC236}">
+                <a16:creationId xmlns:a16="http://schemas.microsoft.com/office/drawing/2014/main" id="{DC5945CE-3662-4548-8341-0C4A065E8567}"/>
+              </a:ext>
+            </a:extLst>
+          </p:cNvPr>
+          <p:cNvSpPr>
+            <a:spLocks xmlns:a="http://schemas.openxmlformats.org/drawingml/2006/main" noGrp="1"/>
+          </p:cNvSpPr>
+          <p:nvPr/>
+        </p:nvSpPr>
+        <p:spPr>
+          <a:xfrm xmlns:a="http://schemas.openxmlformats.org/drawingml/2006/main">
+            <a:off x="1885950" y="4648200"/>
+            <a:ext cx="2571750" cy="428625"/>
+          </a:xfrm>
+          <a:prstGeom xmlns:a="http://schemas.openxmlformats.org/drawingml/2006/main" prst="rect">
+            <a:avLst/>
+          </a:prstGeom>
+          <a:noFill xmlns:a="http://schemas.openxmlformats.org/drawingml/2006/main"/>
+          <a:ln xmlns:a="http://schemas.openxmlformats.org/drawingml/2006/main" w="0">
+            <a:noFill/>
+          </a:ln>
+        </p:spPr>
+        <p:txBody>
+          <a:bodyPr xmlns:a="http://schemas.openxmlformats.org/drawingml/2006/main" lIns="0" tIns="0" rIns="0" bIns="0"/>
+          <a:lstStyle xmlns:a="http://schemas.openxmlformats.org/drawingml/2006/main">
+            <a:defPPr algn="l">
+              <a:defRPr sz="2550" b="1">
+                <a:solidFill>
+                  <a:srgbClr val="132E40"/>
+                </a:solidFill>
+                <a:latin typeface="Arial"/>
+                <a:ea typeface="Arial"/>
+                <a:cs typeface="Arial"/>
+              </a:defRPr>
+            </a:defPPr>
+          </a:lstStyle>
+          <a:p xmlns:a="http://schemas.openxmlformats.org/drawingml/2006/main">
+            <a:pPr algn="l">
+              <a:defRPr sz="2550" b="1">
+                <a:solidFill>
+                  <a:srgbClr val="132E40"/>
+                </a:solidFill>
+                <a:latin typeface="Arial"/>
+                <a:ea typeface="Arial"/>
+                <a:cs typeface="Arial"/>
+              </a:defRPr>
+            </a:pPr>
+            <a:r>
+              <a:rPr sz="2550" b="1">
+                <a:solidFill>
+                  <a:srgbClr val="132E40"/>
+                </a:solidFill>
+                <a:latin typeface="Arial"/>
+                <a:ea typeface="Arial"/>
+                <a:cs typeface="Arial"/>
+              </a:rPr>
+              <a:t>Actor</a:t>
+            </a:r>
+          </a:p>
+        </p:txBody>
+      </p:sp>
+      <p:sp>
+        <p:nvSpPr>
+          <p:cNvPr id="14" name="">
+            <a:extLst xmlns:a="http://schemas.openxmlformats.org/drawingml/2006/main">
+              <a:ext uri="{FF2B5EF4-FFF2-40B4-BE49-F238E27FC236}">
+                <a16:creationId xmlns:a16="http://schemas.microsoft.com/office/drawing/2014/main" id="{22FBEF7E-0D62-4DB1-B47B-A4B3E62432D6}"/>
+              </a:ext>
+            </a:extLst>
+          </p:cNvPr>
+          <p:cNvSpPr>
+            <a:spLocks xmlns:a="http://schemas.openxmlformats.org/drawingml/2006/main" noGrp="1"/>
+          </p:cNvSpPr>
+          <p:nvPr/>
+        </p:nvSpPr>
+        <p:spPr>
+          <a:xfrm xmlns:a="http://schemas.openxmlformats.org/drawingml/2006/main">
+            <a:off x="1885950" y="5114925"/>
+            <a:ext cx="3143250" cy="428625"/>
+          </a:xfrm>
+          <a:prstGeom xmlns:a="http://schemas.openxmlformats.org/drawingml/2006/main" prst="rect">
+            <a:avLst/>
+          </a:prstGeom>
+          <a:noFill xmlns:a="http://schemas.openxmlformats.org/drawingml/2006/main"/>
+          <a:ln xmlns:a="http://schemas.openxmlformats.org/drawingml/2006/main" w="0">
+            <a:noFill/>
+          </a:ln>
+        </p:spPr>
+        <p:txBody>
+          <a:bodyPr xmlns:a="http://schemas.openxmlformats.org/drawingml/2006/main" lIns="0" tIns="0" rIns="0" bIns="0"/>
+          <a:lstStyle xmlns:a="http://schemas.openxmlformats.org/drawingml/2006/main">
+            <a:defPPr algn="l">
+              <a:defRPr sz="2025" b="0">
+                <a:solidFill>
+                  <a:srgbClr val="132E40"/>
+                </a:solidFill>
+                <a:latin typeface="Arial"/>
+                <a:ea typeface="Arial"/>
+                <a:cs typeface="Arial"/>
+              </a:defRPr>
+            </a:defPPr>
+          </a:lstStyle>
+          <a:p xmlns:a="http://schemas.openxmlformats.org/drawingml/2006/main">
+            <a:pPr algn="l">
+              <a:defRPr sz="2025" b="0">
+                <a:solidFill>
+                  <a:srgbClr val="132E40"/>
+                </a:solidFill>
+                <a:latin typeface="Arial"/>
+                <a:ea typeface="Arial"/>
+                <a:cs typeface="Arial"/>
+              </a:defRPr>
+            </a:pPr>
+            <a:r>
+              <a:rPr sz="2025" b="0">
+                <a:solidFill>
+                  <a:srgbClr val="132E40"/>
+                </a:solidFill>
+                <a:latin typeface="Arial"/>
+                <a:ea typeface="Arial"/>
+                <a:cs typeface="Arial"/>
+              </a:rPr>
+              <a:t>Weighted imitation</a:t>
+            </a:r>
+          </a:p>
+        </p:txBody>
+      </p:sp>
+      <p:sp>
+        <p:nvSpPr>
+          <p:cNvPr id="15" name="">
+            <a:extLst xmlns:a="http://schemas.openxmlformats.org/drawingml/2006/main">
+              <a:ext uri="{FF2B5EF4-FFF2-40B4-BE49-F238E27FC236}">
+                <a16:creationId xmlns:a16="http://schemas.microsoft.com/office/drawing/2014/main" id="{994B9806-0C8A-463A-99FE-6EA547E388E2}"/>
+              </a:ext>
+            </a:extLst>
+          </p:cNvPr>
+          <p:cNvSpPr>
+            <a:spLocks xmlns:a="http://schemas.openxmlformats.org/drawingml/2006/main" noGrp="1"/>
+          </p:cNvSpPr>
+          <p:nvPr/>
+        </p:nvSpPr>
+        <p:spPr>
+          <a:xfrm xmlns:a="http://schemas.openxmlformats.org/drawingml/2006/main">
+            <a:off x="5524500" y="4705350"/>
+            <a:ext cx="6048375" cy="523875"/>
+          </a:xfrm>
+          <a:prstGeom xmlns:a="http://schemas.openxmlformats.org/drawingml/2006/main" prst="rect">
+            <a:avLst/>
+          </a:prstGeom>
+          <a:noFill xmlns:a="http://schemas.openxmlformats.org/drawingml/2006/main"/>
+          <a:ln xmlns:a="http://schemas.openxmlformats.org/drawingml/2006/main" w="0">
+            <a:noFill/>
+          </a:ln>
+        </p:spPr>
+        <p:txBody>
+          <a:bodyPr xmlns:a="http://schemas.openxmlformats.org/drawingml/2006/main" lIns="0" tIns="0" rIns="0" bIns="0"/>
+          <a:lstStyle xmlns:a="http://schemas.openxmlformats.org/drawingml/2006/main">
+            <a:defPPr algn="l">
+              <a:defRPr sz="2475" b="1">
+                <a:solidFill>
+                  <a:srgbClr val="E47F29"/>
+                </a:solidFill>
+                <a:latin typeface="Arial"/>
+                <a:ea typeface="Arial"/>
+                <a:cs typeface="Arial"/>
+              </a:defRPr>
+            </a:defPPr>
+          </a:lstStyle>
+          <a:p xmlns:a="http://schemas.openxmlformats.org/drawingml/2006/main">
+            <a:pPr algn="l">
+              <a:defRPr sz="2475" b="1">
+                <a:solidFill>
+                  <a:srgbClr val="E47F29"/>
+                </a:solidFill>
+                <a:latin typeface="Arial"/>
+                <a:ea typeface="Arial"/>
+                <a:cs typeface="Arial"/>
+              </a:defRPr>
+            </a:pPr>
+            <a:r>
+              <a:rPr sz="2475" b="1">
+                <a:solidFill>
+                  <a:srgbClr val="E47F29"/>
                 </a:solidFill>
                 <a:latin typeface="Arial"/>
                 <a:ea typeface="Arial"/>
@@ -5227,37 +6730,14 @@
               <a:t>min(exp(3 × advantage), 100)</a:t>
             </a:r>
           </a:p>
-          <a:p xmlns:a="http://schemas.openxmlformats.org/drawingml/2006/main">
-            <a:pPr>
-              <a:defRPr sz="2025" b="0">
-                <a:solidFill>
-                  <a:srgbClr val="142B40"/>
-                </a:solidFill>
-                <a:latin typeface="Arial"/>
-                <a:ea typeface="Arial"/>
-                <a:cs typeface="Arial"/>
-              </a:defRPr>
-            </a:pPr>
-            <a:r>
-              <a:rPr sz="2025" b="0">
-                <a:solidFill>
-                  <a:srgbClr val="142B40"/>
-                </a:solidFill>
-                <a:latin typeface="Arial"/>
-                <a:ea typeface="Arial"/>
-                <a:cs typeface="Arial"/>
-              </a:rPr>
-              <a:t>Tanh-squashed Gaussian actions stay within [-1, 1]</a:t>
-            </a:r>
-          </a:p>
-        </p:txBody>
-      </p:sp>
-      <p:sp>
-        <p:nvSpPr>
-          <p:cNvPr id="10" name="body">
-            <a:extLst xmlns:a="http://schemas.openxmlformats.org/drawingml/2006/main">
-              <a:ext uri="{FF2B5EF4-FFF2-40B4-BE49-F238E27FC236}">
-                <a16:creationId xmlns:a16="http://schemas.microsoft.com/office/drawing/2014/main" id="{656CA314-6E02-419E-AE0D-AC849A8939CD}"/>
+        </p:txBody>
+      </p:sp>
+      <p:sp>
+        <p:nvSpPr>
+          <p:cNvPr id="16" name="">
+            <a:extLst xmlns:a="http://schemas.openxmlformats.org/drawingml/2006/main">
+              <a:ext uri="{FF2B5EF4-FFF2-40B4-BE49-F238E27FC236}">
+                <a16:creationId xmlns:a16="http://schemas.microsoft.com/office/drawing/2014/main" id="{A608E52E-60E5-443F-827D-2E570042DD52}"/>
               </a:ext>
             </a:extLst>
           </p:cNvPr>
@@ -5268,8 +6748,8 @@
         </p:nvSpPr>
         <p:spPr>
           <a:xfrm xmlns:a="http://schemas.openxmlformats.org/drawingml/2006/main">
-            <a:off x="10858500" y="6305550"/>
-            <a:ext cx="762000" cy="266700"/>
+            <a:off x="5524500" y="5276850"/>
+            <a:ext cx="6048375" cy="428625"/>
           </a:xfrm>
           <a:prstGeom xmlns:a="http://schemas.openxmlformats.org/drawingml/2006/main" prst="rect">
             <a:avLst/>
@@ -5282,10 +6762,10 @@
         <p:txBody>
           <a:bodyPr xmlns:a="http://schemas.openxmlformats.org/drawingml/2006/main" lIns="0" tIns="0" rIns="0" bIns="0"/>
           <a:lstStyle xmlns:a="http://schemas.openxmlformats.org/drawingml/2006/main">
-            <a:defPPr>
-              <a:defRPr sz="1350" b="0">
-                <a:solidFill>
-                  <a:srgbClr val="5B6D7A"/>
+            <a:defPPr algn="l">
+              <a:defRPr sz="1875" b="0">
+                <a:solidFill>
+                  <a:srgbClr val="132E40"/>
                 </a:solidFill>
                 <a:latin typeface="Arial"/>
                 <a:ea typeface="Arial"/>
@@ -5294,10 +6774,142 @@
             </a:defPPr>
           </a:lstStyle>
           <a:p xmlns:a="http://schemas.openxmlformats.org/drawingml/2006/main">
-            <a:pPr>
+            <a:pPr algn="l">
+              <a:defRPr sz="1875" b="0">
+                <a:solidFill>
+                  <a:srgbClr val="132E40"/>
+                </a:solidFill>
+                <a:latin typeface="Arial"/>
+                <a:ea typeface="Arial"/>
+                <a:cs typeface="Arial"/>
+              </a:defRPr>
+            </a:pPr>
+            <a:r>
+              <a:rPr sz="1875" b="0">
+                <a:solidFill>
+                  <a:srgbClr val="132E40"/>
+                </a:solidFill>
+                <a:latin typeface="Arial"/>
+                <a:ea typeface="Arial"/>
+                <a:cs typeface="Arial"/>
+              </a:rPr>
+              <a:t>Advantage = min(target Q1, Q2) - V</a:t>
+            </a:r>
+          </a:p>
+        </p:txBody>
+      </p:sp>
+      <p:sp>
+        <p:nvSpPr>
+          <p:cNvPr id="17" name="">
+            <a:extLst xmlns:a="http://schemas.openxmlformats.org/drawingml/2006/main">
+              <a:ext uri="{FF2B5EF4-FFF2-40B4-BE49-F238E27FC236}">
+                <a16:creationId xmlns:a16="http://schemas.microsoft.com/office/drawing/2014/main" id="{54D98D43-B6BA-4432-9821-5ED79EE3363D}"/>
+              </a:ext>
+            </a:extLst>
+          </p:cNvPr>
+          <p:cNvSpPr>
+            <a:spLocks xmlns:a="http://schemas.openxmlformats.org/drawingml/2006/main" noGrp="1"/>
+          </p:cNvSpPr>
+          <p:nvPr/>
+        </p:nvSpPr>
+        <p:spPr>
+          <a:xfrm xmlns:a="http://schemas.openxmlformats.org/drawingml/2006/main">
+            <a:off x="1885950" y="5953125"/>
+            <a:ext cx="9048750" cy="361950"/>
+          </a:xfrm>
+          <a:prstGeom xmlns:a="http://schemas.openxmlformats.org/drawingml/2006/main" prst="rect">
+            <a:avLst/>
+          </a:prstGeom>
+          <a:noFill xmlns:a="http://schemas.openxmlformats.org/drawingml/2006/main"/>
+          <a:ln xmlns:a="http://schemas.openxmlformats.org/drawingml/2006/main" w="0">
+            <a:noFill/>
+          </a:ln>
+        </p:spPr>
+        <p:txBody>
+          <a:bodyPr xmlns:a="http://schemas.openxmlformats.org/drawingml/2006/main" lIns="0" tIns="0" rIns="0" bIns="0"/>
+          <a:lstStyle xmlns:a="http://schemas.openxmlformats.org/drawingml/2006/main">
+            <a:defPPr algn="l">
+              <a:defRPr sz="1800" b="0">
+                <a:solidFill>
+                  <a:srgbClr val="132E40"/>
+                </a:solidFill>
+                <a:latin typeface="Arial"/>
+                <a:ea typeface="Arial"/>
+                <a:cs typeface="Arial"/>
+              </a:defRPr>
+            </a:defPPr>
+          </a:lstStyle>
+          <a:p xmlns:a="http://schemas.openxmlformats.org/drawingml/2006/main">
+            <a:pPr algn="l">
+              <a:defRPr sz="1800" b="0">
+                <a:solidFill>
+                  <a:srgbClr val="132E40"/>
+                </a:solidFill>
+                <a:latin typeface="Arial"/>
+                <a:ea typeface="Arial"/>
+                <a:cs typeface="Arial"/>
+              </a:defRPr>
+            </a:pPr>
+            <a:r>
+              <a:rPr sz="1800" b="0">
+                <a:solidFill>
+                  <a:srgbClr val="132E40"/>
+                </a:solidFill>
+                <a:latin typeface="Arial"/>
+                <a:ea typeface="Arial"/>
+                <a:cs typeface="Arial"/>
+              </a:rPr>
+              <a:t>Policy output: tanh-squashed Gaussian</a:t>
+            </a:r>
+          </a:p>
+        </p:txBody>
+      </p:sp>
+      <p:sp>
+        <p:nvSpPr>
+          <p:cNvPr id="18" name="">
+            <a:extLst xmlns:a="http://schemas.openxmlformats.org/drawingml/2006/main">
+              <a:ext uri="{FF2B5EF4-FFF2-40B4-BE49-F238E27FC236}">
+                <a16:creationId xmlns:a16="http://schemas.microsoft.com/office/drawing/2014/main" id="{F8D2EC09-F873-47AD-B387-2CFF7148C957}"/>
+              </a:ext>
+            </a:extLst>
+          </p:cNvPr>
+          <p:cNvSpPr>
+            <a:spLocks xmlns:a="http://schemas.openxmlformats.org/drawingml/2006/main" noGrp="1"/>
+          </p:cNvSpPr>
+          <p:nvPr/>
+        </p:nvSpPr>
+        <p:spPr>
+          <a:xfrm xmlns:a="http://schemas.openxmlformats.org/drawingml/2006/main">
+            <a:off x="11077575" y="6457950"/>
+            <a:ext cx="666750" cy="266700"/>
+          </a:xfrm>
+          <a:prstGeom xmlns:a="http://schemas.openxmlformats.org/drawingml/2006/main" prst="rect">
+            <a:avLst/>
+          </a:prstGeom>
+          <a:noFill xmlns:a="http://schemas.openxmlformats.org/drawingml/2006/main"/>
+          <a:ln xmlns:a="http://schemas.openxmlformats.org/drawingml/2006/main" w="0">
+            <a:noFill/>
+          </a:ln>
+        </p:spPr>
+        <p:txBody>
+          <a:bodyPr xmlns:a="http://schemas.openxmlformats.org/drawingml/2006/main" lIns="0" tIns="0" rIns="0" bIns="0"/>
+          <a:lstStyle xmlns:a="http://schemas.openxmlformats.org/drawingml/2006/main">
+            <a:defPPr algn="l">
               <a:defRPr sz="1350" b="0">
                 <a:solidFill>
-                  <a:srgbClr val="5B6D7A"/>
+                  <a:srgbClr val="6D8190"/>
+                </a:solidFill>
+                <a:latin typeface="Arial"/>
+                <a:ea typeface="Arial"/>
+                <a:cs typeface="Arial"/>
+              </a:defRPr>
+            </a:defPPr>
+          </a:lstStyle>
+          <a:p xmlns:a="http://schemas.openxmlformats.org/drawingml/2006/main">
+            <a:pPr algn="l">
+              <a:defRPr sz="1350" b="0">
+                <a:solidFill>
+                  <a:srgbClr val="6D8190"/>
                 </a:solidFill>
                 <a:latin typeface="Arial"/>
                 <a:ea typeface="Arial"/>
@@ -5307,7 +6919,7 @@
             <a:r>
               <a:rPr sz="1350" b="0">
                 <a:solidFill>
-                  <a:srgbClr val="5B6D7A"/>
+                  <a:srgbClr val="6D8190"/>
                 </a:solidFill>
                 <a:latin typeface="Arial"/>
                 <a:ea typeface="Arial"/>
@@ -5321,7 +6933,7 @@
     </p:spTree>
     <p:extLst>
       <p:ext uri="{BB962C8B-B14F-4D97-AF65-F5344CB8AC3E}">
-        <p14:creationId xmlns:p14="http://schemas.microsoft.com/office/powerpoint/2010/main" val="1626192407"/>
+        <p14:creationId xmlns:p14="http://schemas.microsoft.com/office/powerpoint/2010/main" val="69362325"/>
       </p:ext>
     </p:extLst>
   </p:cSld>
@@ -5334,7 +6946,7 @@
     <p:bg>
       <p:bgPr>
         <a:solidFill xmlns:a="http://schemas.openxmlformats.org/drawingml/2006/main">
-          <a:srgbClr val="F7FAFC"/>
+          <a:srgbClr val="FBFCFD"/>
         </a:solidFill>
       </p:bgPr>
     </p:bg>
@@ -5349,10 +6961,10 @@
       </p:grpSpPr>
       <p:sp>
         <p:nvSpPr>
-          <p:cNvPr id="10" name="heading">
-            <a:extLst xmlns:a="http://schemas.openxmlformats.org/drawingml/2006/main">
-              <a:ext uri="{FF2B5EF4-FFF2-40B4-BE49-F238E27FC236}">
-                <a16:creationId xmlns:a16="http://schemas.microsoft.com/office/drawing/2014/main" id="{1A9E2537-58EA-442D-A7CC-94D5D92DDAF8}"/>
+          <p:cNvPr id="12" name="">
+            <a:extLst xmlns:a="http://schemas.openxmlformats.org/drawingml/2006/main">
+              <a:ext uri="{FF2B5EF4-FFF2-40B4-BE49-F238E27FC236}">
+                <a16:creationId xmlns:a16="http://schemas.microsoft.com/office/drawing/2014/main" id="{596562C8-0274-440D-96F8-47FAA1C96E23}"/>
               </a:ext>
             </a:extLst>
           </p:cNvPr>
@@ -5363,8 +6975,8 @@
         </p:nvSpPr>
         <p:spPr>
           <a:xfrm xmlns:a="http://schemas.openxmlformats.org/drawingml/2006/main">
-            <a:off x="685800" y="523875"/>
-            <a:ext cx="10858500" cy="933450"/>
+            <a:off x="609600" y="457200"/>
+            <a:ext cx="11049000" cy="952500"/>
           </a:xfrm>
           <a:prstGeom xmlns:a="http://schemas.openxmlformats.org/drawingml/2006/main" prst="rect">
             <a:avLst/>
@@ -5377,10 +6989,10 @@
         <p:txBody>
           <a:bodyPr xmlns:a="http://schemas.openxmlformats.org/drawingml/2006/main" lIns="0" tIns="0" rIns="0" bIns="0"/>
           <a:lstStyle xmlns:a="http://schemas.openxmlformats.org/drawingml/2006/main">
-            <a:defPPr>
+            <a:defPPr algn="l">
               <a:defRPr sz="3450" b="1">
                 <a:solidFill>
-                  <a:srgbClr val="142B40"/>
+                  <a:srgbClr val="132E40"/>
                 </a:solidFill>
                 <a:latin typeface="Arial"/>
                 <a:ea typeface="Arial"/>
@@ -5389,10 +7001,10 @@
             </a:defPPr>
           </a:lstStyle>
           <a:p xmlns:a="http://schemas.openxmlformats.org/drawingml/2006/main">
-            <a:pPr>
+            <a:pPr algn="l">
               <a:defRPr sz="3450" b="1">
                 <a:solidFill>
-                  <a:srgbClr val="142B40"/>
+                  <a:srgbClr val="132E40"/>
                 </a:solidFill>
                 <a:latin typeface="Arial"/>
                 <a:ea typeface="Arial"/>
@@ -5402,23 +7014,177 @@
             <a:r>
               <a:rPr sz="3450" b="1">
                 <a:solidFill>
-                  <a:srgbClr val="142B40"/>
+                  <a:srgbClr val="132E40"/>
                 </a:solidFill>
                 <a:latin typeface="Arial"/>
                 <a:ea typeface="Arial"/>
                 <a:cs typeface="Arial"/>
               </a:rPr>
-              <a:t>HalfCheetah-v5: observation and action</a:t>
+              <a:t>17 observations, 6 joint controls</a:t>
+            </a:r>
+          </a:p>
+        </p:txBody>
+      </p:sp>
+      <p:graphicFrame>
+        <p:nvGraphicFramePr>
+          <p:cNvPr id="2" name="Chart">
+            <a:extLst xmlns:a="http://schemas.openxmlformats.org/drawingml/2006/main">
+              <a:ext uri="{FF2B5EF4-FFF2-40B4-BE49-F238E27FC236}">
+                <a16:creationId xmlns:a16="http://schemas.microsoft.com/office/drawing/2014/main" id="{77BB56B9-EC75-4D60-85ED-CB560BD30422}"/>
+              </a:ext>
+            </a:extLst>
+          </p:cNvPr>
+          <p:cNvGraphicFramePr/>
+          <p:nvPr/>
+        </p:nvGraphicFramePr>
+        <p:xfrm>
+          <a:off xmlns:a="http://schemas.openxmlformats.org/drawingml/2006/main" x="400050" y="1590675"/>
+          <a:ext xmlns:a="http://schemas.openxmlformats.org/drawingml/2006/main" cx="4457700" cy="3714750"/>
+        </p:xfrm>
+        <a:graphic xmlns:a="http://schemas.openxmlformats.org/drawingml/2006/main">
+          <a:graphicData uri="http://schemas.openxmlformats.org/drawingml/2006/chart">
+            <c:chart xmlns:r="http://schemas.openxmlformats.org/officeDocument/2006/relationships" xmlns:c="http://schemas.openxmlformats.org/drawingml/2006/chart" r:id="R187c6285c9594a31"/>
+          </a:graphicData>
+        </a:graphic>
+      </p:graphicFrame>
+      <p:sp>
+        <p:nvSpPr>
+          <p:cNvPr id="3" name="">
+            <a:extLst xmlns:a="http://schemas.openxmlformats.org/drawingml/2006/main">
+              <a:ext uri="{FF2B5EF4-FFF2-40B4-BE49-F238E27FC236}">
+                <a16:creationId xmlns:a16="http://schemas.microsoft.com/office/drawing/2014/main" id="{5D177010-97A7-42A2-A63C-3724EF455522}"/>
+              </a:ext>
+            </a:extLst>
+          </p:cNvPr>
+          <p:cNvSpPr>
+            <a:spLocks xmlns:a="http://schemas.openxmlformats.org/drawingml/2006/main" noGrp="1"/>
+          </p:cNvSpPr>
+          <p:nvPr/>
+        </p:nvSpPr>
+        <p:spPr>
+          <a:xfrm xmlns:a="http://schemas.openxmlformats.org/drawingml/2006/main">
+            <a:off x="1924050" y="2876550"/>
+            <a:ext cx="1524000" cy="857250"/>
+          </a:xfrm>
+          <a:prstGeom xmlns:a="http://schemas.openxmlformats.org/drawingml/2006/main" prst="rect">
+            <a:avLst/>
+          </a:prstGeom>
+          <a:noFill xmlns:a="http://schemas.openxmlformats.org/drawingml/2006/main"/>
+          <a:ln xmlns:a="http://schemas.openxmlformats.org/drawingml/2006/main" w="0">
+            <a:noFill/>
+          </a:ln>
+        </p:spPr>
+        <p:txBody>
+          <a:bodyPr xmlns:a="http://schemas.openxmlformats.org/drawingml/2006/main" lIns="0" tIns="0" rIns="0" bIns="0"/>
+          <a:lstStyle xmlns:a="http://schemas.openxmlformats.org/drawingml/2006/main">
+            <a:defPPr algn="ctr">
+              <a:defRPr sz="5250" b="1">
+                <a:solidFill>
+                  <a:srgbClr val="132E40"/>
+                </a:solidFill>
+                <a:latin typeface="Arial"/>
+                <a:ea typeface="Arial"/>
+                <a:cs typeface="Arial"/>
+              </a:defRPr>
+            </a:defPPr>
+          </a:lstStyle>
+          <a:p xmlns:a="http://schemas.openxmlformats.org/drawingml/2006/main">
+            <a:pPr algn="ctr">
+              <a:defRPr sz="5250" b="1">
+                <a:solidFill>
+                  <a:srgbClr val="132E40"/>
+                </a:solidFill>
+                <a:latin typeface="Arial"/>
+                <a:ea typeface="Arial"/>
+                <a:cs typeface="Arial"/>
+              </a:defRPr>
+            </a:pPr>
+            <a:r>
+              <a:rPr sz="5250" b="1">
+                <a:solidFill>
+                  <a:srgbClr val="132E40"/>
+                </a:solidFill>
+                <a:latin typeface="Arial"/>
+                <a:ea typeface="Arial"/>
+                <a:cs typeface="Arial"/>
+              </a:rPr>
+              <a:t>17</a:t>
+            </a:r>
+          </a:p>
+        </p:txBody>
+      </p:sp>
+      <p:sp>
+        <p:nvSpPr>
+          <p:cNvPr id="4" name="">
+            <a:extLst xmlns:a="http://schemas.openxmlformats.org/drawingml/2006/main">
+              <a:ext uri="{FF2B5EF4-FFF2-40B4-BE49-F238E27FC236}">
+                <a16:creationId xmlns:a16="http://schemas.microsoft.com/office/drawing/2014/main" id="{6F1C7597-533D-4059-A66F-9DAC117C8B59}"/>
+              </a:ext>
+            </a:extLst>
+          </p:cNvPr>
+          <p:cNvSpPr>
+            <a:spLocks xmlns:a="http://schemas.openxmlformats.org/drawingml/2006/main" noGrp="1"/>
+          </p:cNvSpPr>
+          <p:nvPr/>
+        </p:nvSpPr>
+        <p:spPr>
+          <a:xfrm xmlns:a="http://schemas.openxmlformats.org/drawingml/2006/main">
+            <a:off x="876300" y="5400675"/>
+            <a:ext cx="4000500" cy="495300"/>
+          </a:xfrm>
+          <a:prstGeom xmlns:a="http://schemas.openxmlformats.org/drawingml/2006/main" prst="rect">
+            <a:avLst/>
+          </a:prstGeom>
+          <a:noFill xmlns:a="http://schemas.openxmlformats.org/drawingml/2006/main"/>
+          <a:ln xmlns:a="http://schemas.openxmlformats.org/drawingml/2006/main" w="0">
+            <a:noFill/>
+          </a:ln>
+        </p:spPr>
+        <p:txBody>
+          <a:bodyPr xmlns:a="http://schemas.openxmlformats.org/drawingml/2006/main" lIns="0" tIns="0" rIns="0" bIns="0"/>
+          <a:lstStyle xmlns:a="http://schemas.openxmlformats.org/drawingml/2006/main">
+            <a:defPPr algn="l">
+              <a:defRPr sz="2025" b="0">
+                <a:solidFill>
+                  <a:srgbClr val="132E40"/>
+                </a:solidFill>
+                <a:latin typeface="Arial"/>
+                <a:ea typeface="Arial"/>
+                <a:cs typeface="Arial"/>
+              </a:defRPr>
+            </a:defPPr>
+          </a:lstStyle>
+          <a:p xmlns:a="http://schemas.openxmlformats.org/drawingml/2006/main">
+            <a:pPr algn="l">
+              <a:defRPr sz="2025" b="0">
+                <a:solidFill>
+                  <a:srgbClr val="132E40"/>
+                </a:solidFill>
+                <a:latin typeface="Arial"/>
+                <a:ea typeface="Arial"/>
+                <a:cs typeface="Arial"/>
+              </a:defRPr>
+            </a:pPr>
+            <a:r>
+              <a:rPr sz="2025" b="0">
+                <a:solidFill>
+                  <a:srgbClr val="132E40"/>
+                </a:solidFill>
+                <a:latin typeface="Arial"/>
+                <a:ea typeface="Arial"/>
+                <a:cs typeface="Arial"/>
+              </a:rPr>
+              <a:t>Absolute x excluded</a:t>
             </a:r>
           </a:p>
         </p:txBody>
       </p:sp>
       <p:pic>
         <p:nvPicPr>
-          <p:cNvPr id="2" name="">
-            <a:extLst xmlns:a="http://schemas.openxmlformats.org/drawingml/2006/main">
-              <a:ext uri="{FF2B5EF4-FFF2-40B4-BE49-F238E27FC236}">
-                <a16:creationId xmlns:a16="http://schemas.microsoft.com/office/drawing/2014/main" id="{E2CED099-4BE9-46DF-9E1C-390E013284E9}"/>
+          <p:cNvPr id="5" name="">
+            <a:extLst xmlns:a="http://schemas.openxmlformats.org/drawingml/2006/main">
+              <a:ext uri="{FF2B5EF4-FFF2-40B4-BE49-F238E27FC236}">
+                <a16:creationId xmlns:a16="http://schemas.microsoft.com/office/drawing/2014/main" id="{EB135245-06E1-4A6E-BD84-E46332B624CA}"/>
               </a:ext>
             </a:extLst>
           </p:cNvPr>
@@ -5428,13 +7194,13 @@
           <p:nvPr/>
         </p:nvPicPr>
         <p:blipFill>
-          <a:blip xmlns:r="http://schemas.openxmlformats.org/officeDocument/2006/relationships" xmlns:a="http://schemas.openxmlformats.org/drawingml/2006/main" r:embed="R0bd8a6af0742498b"/>
+          <a:blip xmlns:r="http://schemas.openxmlformats.org/officeDocument/2006/relationships" xmlns:a="http://schemas.openxmlformats.org/drawingml/2006/main" r:embed="R2b1eb65dfef74473"/>
           <a:stretch xmlns:a="http://schemas.openxmlformats.org/drawingml/2006/main"/>
         </p:blipFill>
         <p:spPr>
           <a:xfrm xmlns:a="http://schemas.openxmlformats.org/drawingml/2006/main">
-            <a:off x="7572375" y="1666875"/>
-            <a:ext cx="3857625" cy="3857625"/>
+            <a:off x="5362575" y="1619250"/>
+            <a:ext cx="4114800" cy="4114800"/>
           </a:xfrm>
           <a:prstGeom xmlns:a="http://schemas.openxmlformats.org/drawingml/2006/main" prst="rect">
             <a:avLst/>
@@ -5443,10 +7209,10 @@
       </p:pic>
       <p:sp>
         <p:nvSpPr>
-          <p:cNvPr id="3" name="heading">
-            <a:extLst xmlns:a="http://schemas.openxmlformats.org/drawingml/2006/main">
-              <a:ext uri="{FF2B5EF4-FFF2-40B4-BE49-F238E27FC236}">
-                <a16:creationId xmlns:a16="http://schemas.microsoft.com/office/drawing/2014/main" id="{E822EAB3-86B7-428F-B984-58638F241027}"/>
+          <p:cNvPr id="6" name="">
+            <a:extLst xmlns:a="http://schemas.openxmlformats.org/drawingml/2006/main">
+              <a:ext uri="{FF2B5EF4-FFF2-40B4-BE49-F238E27FC236}">
+                <a16:creationId xmlns:a16="http://schemas.microsoft.com/office/drawing/2014/main" id="{C949F617-21FD-4E7F-889E-3B93F30284D1}"/>
               </a:ext>
             </a:extLst>
           </p:cNvPr>
@@ -5457,8 +7223,8 @@
         </p:nvSpPr>
         <p:spPr>
           <a:xfrm xmlns:a="http://schemas.openxmlformats.org/drawingml/2006/main">
-            <a:off x="685800" y="1762125"/>
-            <a:ext cx="6572250" cy="400050"/>
+            <a:off x="9782175" y="1981200"/>
+            <a:ext cx="1809750" cy="819150"/>
           </a:xfrm>
           <a:prstGeom xmlns:a="http://schemas.openxmlformats.org/drawingml/2006/main" prst="rect">
             <a:avLst/>
@@ -5471,10 +7237,10 @@
         <p:txBody>
           <a:bodyPr xmlns:a="http://schemas.openxmlformats.org/drawingml/2006/main" lIns="0" tIns="0" rIns="0" bIns="0"/>
           <a:lstStyle xmlns:a="http://schemas.openxmlformats.org/drawingml/2006/main">
-            <a:defPPr>
-              <a:defRPr sz="2175" b="1">
-                <a:solidFill>
-                  <a:srgbClr val="147A78"/>
+            <a:defPPr algn="l">
+              <a:defRPr sz="5250" b="1">
+                <a:solidFill>
+                  <a:srgbClr val="007F80"/>
                 </a:solidFill>
                 <a:latin typeface="Arial"/>
                 <a:ea typeface="Arial"/>
@@ -5483,10 +7249,10 @@
             </a:defPPr>
           </a:lstStyle>
           <a:p xmlns:a="http://schemas.openxmlformats.org/drawingml/2006/main">
-            <a:pPr>
-              <a:defRPr sz="2175" b="1">
-                <a:solidFill>
-                  <a:srgbClr val="147A78"/>
+            <a:pPr algn="l">
+              <a:defRPr sz="5250" b="1">
+                <a:solidFill>
+                  <a:srgbClr val="007F80"/>
                 </a:solidFill>
                 <a:latin typeface="Arial"/>
                 <a:ea typeface="Arial"/>
@@ -5494,25 +7260,25 @@
               </a:defRPr>
             </a:pPr>
             <a:r>
-              <a:rPr sz="2175" b="1">
-                <a:solidFill>
-                  <a:srgbClr val="147A78"/>
+              <a:rPr sz="5250" b="1">
+                <a:solidFill>
+                  <a:srgbClr val="007F80"/>
                 </a:solidFill>
                 <a:latin typeface="Arial"/>
                 <a:ea typeface="Arial"/>
                 <a:cs typeface="Arial"/>
               </a:rPr>
-              <a:t>Environment</a:t>
-            </a:r>
-          </a:p>
-        </p:txBody>
-      </p:sp>
-      <p:sp>
-        <p:nvSpPr>
-          <p:cNvPr id="4" name="body">
-            <a:extLst xmlns:a="http://schemas.openxmlformats.org/drawingml/2006/main">
-              <a:ext uri="{FF2B5EF4-FFF2-40B4-BE49-F238E27FC236}">
-                <a16:creationId xmlns:a16="http://schemas.microsoft.com/office/drawing/2014/main" id="{4A6548F8-900B-466A-9732-808F4E4E1C67}"/>
+              <a:t>6</a:t>
+            </a:r>
+          </a:p>
+        </p:txBody>
+      </p:sp>
+      <p:sp>
+        <p:nvSpPr>
+          <p:cNvPr id="7" name="">
+            <a:extLst xmlns:a="http://schemas.openxmlformats.org/drawingml/2006/main">
+              <a:ext uri="{FF2B5EF4-FFF2-40B4-BE49-F238E27FC236}">
+                <a16:creationId xmlns:a16="http://schemas.microsoft.com/office/drawing/2014/main" id="{439BDAB9-3BDE-45D8-85A0-D018AE3893FD}"/>
               </a:ext>
             </a:extLst>
           </p:cNvPr>
@@ -5523,8 +7289,8 @@
         </p:nvSpPr>
         <p:spPr>
           <a:xfrm xmlns:a="http://schemas.openxmlformats.org/drawingml/2006/main">
-            <a:off x="685800" y="2190750"/>
-            <a:ext cx="6572250" cy="809625"/>
+            <a:off x="9782175" y="2838450"/>
+            <a:ext cx="1809750" cy="628650"/>
           </a:xfrm>
           <a:prstGeom xmlns:a="http://schemas.openxmlformats.org/drawingml/2006/main" prst="rect">
             <a:avLst/>
@@ -5537,10 +7303,10 @@
         <p:txBody>
           <a:bodyPr xmlns:a="http://schemas.openxmlformats.org/drawingml/2006/main" lIns="0" tIns="0" rIns="0" bIns="0"/>
           <a:lstStyle xmlns:a="http://schemas.openxmlformats.org/drawingml/2006/main">
-            <a:defPPr>
-              <a:defRPr sz="2025" b="0">
-                <a:solidFill>
-                  <a:srgbClr val="142B40"/>
+            <a:defPPr algn="l">
+              <a:defRPr sz="1950" b="0">
+                <a:solidFill>
+                  <a:srgbClr val="132E40"/>
                 </a:solidFill>
                 <a:latin typeface="Arial"/>
                 <a:ea typeface="Arial"/>
@@ -5549,10 +7315,10 @@
             </a:defPPr>
           </a:lstStyle>
           <a:p xmlns:a="http://schemas.openxmlformats.org/drawingml/2006/main">
-            <a:pPr>
-              <a:defRPr sz="2025" b="0">
-                <a:solidFill>
-                  <a:srgbClr val="142B40"/>
+            <a:pPr algn="l">
+              <a:defRPr sz="1950" b="0">
+                <a:solidFill>
+                  <a:srgbClr val="132E40"/>
                 </a:solidFill>
                 <a:latin typeface="Arial"/>
                 <a:ea typeface="Arial"/>
@@ -5560,25 +7326,25 @@
               </a:defRPr>
             </a:pPr>
             <a:r>
-              <a:rPr sz="2025" b="0">
-                <a:solidFill>
-                  <a:srgbClr val="142B40"/>
+              <a:rPr sz="1950" b="0">
+                <a:solidFill>
+                  <a:srgbClr val="132E40"/>
                 </a:solidFill>
                 <a:latin typeface="Arial"/>
                 <a:ea typeface="Arial"/>
                 <a:cs typeface="Arial"/>
               </a:rPr>
-              <a:t>2D locomotion in Gymnasium and MuJoCo</a:t>
-            </a:r>
-          </a:p>
-        </p:txBody>
-      </p:sp>
-      <p:sp>
-        <p:nvSpPr>
-          <p:cNvPr id="5" name="heading">
-            <a:extLst xmlns:a="http://schemas.openxmlformats.org/drawingml/2006/main">
-              <a:ext uri="{FF2B5EF4-FFF2-40B4-BE49-F238E27FC236}">
-                <a16:creationId xmlns:a16="http://schemas.microsoft.com/office/drawing/2014/main" id="{5BC037C4-5F6D-447D-A112-0680AF3B9240}"/>
+              <a:t>joint torques</a:t>
+            </a:r>
+          </a:p>
+        </p:txBody>
+      </p:sp>
+      <p:sp>
+        <p:nvSpPr>
+          <p:cNvPr id="8" name="">
+            <a:extLst xmlns:a="http://schemas.openxmlformats.org/drawingml/2006/main">
+              <a:ext uri="{FF2B5EF4-FFF2-40B4-BE49-F238E27FC236}">
+                <a16:creationId xmlns:a16="http://schemas.microsoft.com/office/drawing/2014/main" id="{E419BBFE-D68A-4997-8174-0D7A5A32A3C8}"/>
               </a:ext>
             </a:extLst>
           </p:cNvPr>
@@ -5589,8 +7355,8 @@
         </p:nvSpPr>
         <p:spPr>
           <a:xfrm xmlns:a="http://schemas.openxmlformats.org/drawingml/2006/main">
-            <a:off x="685800" y="3143250"/>
-            <a:ext cx="6572250" cy="400050"/>
+            <a:off x="9782175" y="3876675"/>
+            <a:ext cx="1857375" cy="600075"/>
           </a:xfrm>
           <a:prstGeom xmlns:a="http://schemas.openxmlformats.org/drawingml/2006/main" prst="rect">
             <a:avLst/>
@@ -5603,10 +7369,10 @@
         <p:txBody>
           <a:bodyPr xmlns:a="http://schemas.openxmlformats.org/drawingml/2006/main" lIns="0" tIns="0" rIns="0" bIns="0"/>
           <a:lstStyle xmlns:a="http://schemas.openxmlformats.org/drawingml/2006/main">
-            <a:defPPr>
-              <a:defRPr sz="2175" b="1">
-                <a:solidFill>
-                  <a:srgbClr val="147A78"/>
+            <a:defPPr algn="l">
+              <a:defRPr sz="3300" b="1">
+                <a:solidFill>
+                  <a:srgbClr val="E47F29"/>
                 </a:solidFill>
                 <a:latin typeface="Arial"/>
                 <a:ea typeface="Arial"/>
@@ -5615,10 +7381,10 @@
             </a:defPPr>
           </a:lstStyle>
           <a:p xmlns:a="http://schemas.openxmlformats.org/drawingml/2006/main">
-            <a:pPr>
-              <a:defRPr sz="2175" b="1">
-                <a:solidFill>
-                  <a:srgbClr val="147A78"/>
+            <a:pPr algn="l">
+              <a:defRPr sz="3300" b="1">
+                <a:solidFill>
+                  <a:srgbClr val="E47F29"/>
                 </a:solidFill>
                 <a:latin typeface="Arial"/>
                 <a:ea typeface="Arial"/>
@@ -5626,25 +7392,25 @@
               </a:defRPr>
             </a:pPr>
             <a:r>
-              <a:rPr sz="2175" b="1">
-                <a:solidFill>
-                  <a:srgbClr val="147A78"/>
+              <a:rPr sz="3300" b="1">
+                <a:solidFill>
+                  <a:srgbClr val="E47F29"/>
                 </a:solidFill>
                 <a:latin typeface="Arial"/>
                 <a:ea typeface="Arial"/>
                 <a:cs typeface="Arial"/>
               </a:rPr>
-              <a:t>Observation: 17 values</a:t>
-            </a:r>
-          </a:p>
-        </p:txBody>
-      </p:sp>
-      <p:sp>
-        <p:nvSpPr>
-          <p:cNvPr id="6" name="body">
-            <a:extLst xmlns:a="http://schemas.openxmlformats.org/drawingml/2006/main">
-              <a:ext uri="{FF2B5EF4-FFF2-40B4-BE49-F238E27FC236}">
-                <a16:creationId xmlns:a16="http://schemas.microsoft.com/office/drawing/2014/main" id="{1A46112F-1654-4990-BCF3-6B259EACCF2E}"/>
+              <a:t>[-1, 1]</a:t>
+            </a:r>
+          </a:p>
+        </p:txBody>
+      </p:sp>
+      <p:sp>
+        <p:nvSpPr>
+          <p:cNvPr id="9" name="">
+            <a:extLst xmlns:a="http://schemas.openxmlformats.org/drawingml/2006/main">
+              <a:ext uri="{FF2B5EF4-FFF2-40B4-BE49-F238E27FC236}">
+                <a16:creationId xmlns:a16="http://schemas.microsoft.com/office/drawing/2014/main" id="{34E304A1-CD20-4900-95A3-77CFBCB00B83}"/>
               </a:ext>
             </a:extLst>
           </p:cNvPr>
@@ -5655,8 +7421,8 @@
         </p:nvSpPr>
         <p:spPr>
           <a:xfrm xmlns:a="http://schemas.openxmlformats.org/drawingml/2006/main">
-            <a:off x="685800" y="3571875"/>
-            <a:ext cx="6572250" cy="809625"/>
+            <a:off x="9782175" y="4524375"/>
+            <a:ext cx="1857375" cy="428625"/>
           </a:xfrm>
           <a:prstGeom xmlns:a="http://schemas.openxmlformats.org/drawingml/2006/main" prst="rect">
             <a:avLst/>
@@ -5669,10 +7435,10 @@
         <p:txBody>
           <a:bodyPr xmlns:a="http://schemas.openxmlformats.org/drawingml/2006/main" lIns="0" tIns="0" rIns="0" bIns="0"/>
           <a:lstStyle xmlns:a="http://schemas.openxmlformats.org/drawingml/2006/main">
-            <a:defPPr>
-              <a:defRPr sz="2025" b="0">
-                <a:solidFill>
-                  <a:srgbClr val="142B40"/>
+            <a:defPPr algn="l">
+              <a:defRPr sz="1875" b="0">
+                <a:solidFill>
+                  <a:srgbClr val="132E40"/>
                 </a:solidFill>
                 <a:latin typeface="Arial"/>
                 <a:ea typeface="Arial"/>
@@ -5681,10 +7447,10 @@
             </a:defPPr>
           </a:lstStyle>
           <a:p xmlns:a="http://schemas.openxmlformats.org/drawingml/2006/main">
-            <a:pPr>
-              <a:defRPr sz="2025" b="0">
-                <a:solidFill>
-                  <a:srgbClr val="142B40"/>
+            <a:pPr algn="l">
+              <a:defRPr sz="1875" b="0">
+                <a:solidFill>
+                  <a:srgbClr val="132E40"/>
                 </a:solidFill>
                 <a:latin typeface="Arial"/>
                 <a:ea typeface="Arial"/>
@@ -5692,48 +7458,25 @@
               </a:defRPr>
             </a:pPr>
             <a:r>
-              <a:rPr sz="2025" b="0">
-                <a:solidFill>
-                  <a:srgbClr val="142B40"/>
+              <a:rPr sz="1875" b="0">
+                <a:solidFill>
+                  <a:srgbClr val="132E40"/>
                 </a:solidFill>
                 <a:latin typeface="Arial"/>
                 <a:ea typeface="Arial"/>
                 <a:cs typeface="Arial"/>
               </a:rPr>
-              <a:t>8 position / angle values + 9 velocities</a:t>
-            </a:r>
-          </a:p>
-          <a:p xmlns:a="http://schemas.openxmlformats.org/drawingml/2006/main">
-            <a:pPr>
-              <a:defRPr sz="2025" b="0">
-                <a:solidFill>
-                  <a:srgbClr val="142B40"/>
-                </a:solidFill>
-                <a:latin typeface="Arial"/>
-                <a:ea typeface="Arial"/>
-                <a:cs typeface="Arial"/>
-              </a:defRPr>
-            </a:pPr>
-            <a:r>
-              <a:rPr sz="2025" b="0">
-                <a:solidFill>
-                  <a:srgbClr val="142B40"/>
-                </a:solidFill>
-                <a:latin typeface="Arial"/>
-                <a:ea typeface="Arial"/>
-                <a:cs typeface="Arial"/>
-              </a:rPr>
-              <a:t>Absolute horizontal position is excluded</a:t>
-            </a:r>
-          </a:p>
-        </p:txBody>
-      </p:sp>
-      <p:sp>
-        <p:nvSpPr>
-          <p:cNvPr id="7" name="heading">
-            <a:extLst xmlns:a="http://schemas.openxmlformats.org/drawingml/2006/main">
-              <a:ext uri="{FF2B5EF4-FFF2-40B4-BE49-F238E27FC236}">
-                <a16:creationId xmlns:a16="http://schemas.microsoft.com/office/drawing/2014/main" id="{8EF15FC7-D51D-46DB-A677-1C9373F3F829}"/>
+              <a:t>per joint</a:t>
+            </a:r>
+          </a:p>
+        </p:txBody>
+      </p:sp>
+      <p:sp>
+        <p:nvSpPr>
+          <p:cNvPr id="10" name="">
+            <a:extLst xmlns:a="http://schemas.openxmlformats.org/drawingml/2006/main">
+              <a:ext uri="{FF2B5EF4-FFF2-40B4-BE49-F238E27FC236}">
+                <a16:creationId xmlns:a16="http://schemas.microsoft.com/office/drawing/2014/main" id="{4F7EC2DF-4D6C-40F6-AC7D-6EBB67375068}"/>
               </a:ext>
             </a:extLst>
           </p:cNvPr>
@@ -5744,8 +7487,8 @@
         </p:nvSpPr>
         <p:spPr>
           <a:xfrm xmlns:a="http://schemas.openxmlformats.org/drawingml/2006/main">
-            <a:off x="685800" y="4524375"/>
-            <a:ext cx="6572250" cy="400050"/>
+            <a:off x="5457825" y="5886450"/>
+            <a:ext cx="6000750" cy="381000"/>
           </a:xfrm>
           <a:prstGeom xmlns:a="http://schemas.openxmlformats.org/drawingml/2006/main" prst="rect">
             <a:avLst/>
@@ -5758,10 +7501,10 @@
         <p:txBody>
           <a:bodyPr xmlns:a="http://schemas.openxmlformats.org/drawingml/2006/main" lIns="0" tIns="0" rIns="0" bIns="0"/>
           <a:lstStyle xmlns:a="http://schemas.openxmlformats.org/drawingml/2006/main">
-            <a:defPPr>
-              <a:defRPr sz="2175" b="1">
-                <a:solidFill>
-                  <a:srgbClr val="147A78"/>
+            <a:defPPr algn="l">
+              <a:defRPr sz="2025" b="1">
+                <a:solidFill>
+                  <a:srgbClr val="132E40"/>
                 </a:solidFill>
                 <a:latin typeface="Arial"/>
                 <a:ea typeface="Arial"/>
@@ -5770,10 +7513,10 @@
             </a:defPPr>
           </a:lstStyle>
           <a:p xmlns:a="http://schemas.openxmlformats.org/drawingml/2006/main">
-            <a:pPr>
-              <a:defRPr sz="2175" b="1">
-                <a:solidFill>
-                  <a:srgbClr val="147A78"/>
+            <a:pPr algn="l">
+              <a:defRPr sz="2025" b="1">
+                <a:solidFill>
+                  <a:srgbClr val="132E40"/>
                 </a:solidFill>
                 <a:latin typeface="Arial"/>
                 <a:ea typeface="Arial"/>
@@ -5781,25 +7524,25 @@
               </a:defRPr>
             </a:pPr>
             <a:r>
-              <a:rPr sz="2175" b="1">
-                <a:solidFill>
-                  <a:srgbClr val="147A78"/>
+              <a:rPr sz="2025" b="1">
+                <a:solidFill>
+                  <a:srgbClr val="132E40"/>
                 </a:solidFill>
                 <a:latin typeface="Arial"/>
                 <a:ea typeface="Arial"/>
                 <a:cs typeface="Arial"/>
               </a:rPr>
-              <a:t>Action: 6 values</a:t>
-            </a:r>
-          </a:p>
-        </p:txBody>
-      </p:sp>
-      <p:sp>
-        <p:nvSpPr>
-          <p:cNvPr id="8" name="body">
-            <a:extLst xmlns:a="http://schemas.openxmlformats.org/drawingml/2006/main">
-              <a:ext uri="{FF2B5EF4-FFF2-40B4-BE49-F238E27FC236}">
-                <a16:creationId xmlns:a16="http://schemas.microsoft.com/office/drawing/2014/main" id="{C44FB146-1C2B-4A23-B423-D1E83BDBD808}"/>
+              <a:t>2 legs × (thigh + shin + foot)</a:t>
+            </a:r>
+          </a:p>
+        </p:txBody>
+      </p:sp>
+      <p:sp>
+        <p:nvSpPr>
+          <p:cNvPr id="11" name="">
+            <a:extLst xmlns:a="http://schemas.openxmlformats.org/drawingml/2006/main">
+              <a:ext uri="{FF2B5EF4-FFF2-40B4-BE49-F238E27FC236}">
+                <a16:creationId xmlns:a16="http://schemas.microsoft.com/office/drawing/2014/main" id="{B2379A2D-8EE1-443D-85C1-E1B554C36197}"/>
               </a:ext>
             </a:extLst>
           </p:cNvPr>
@@ -5810,8 +7553,8 @@
         </p:nvSpPr>
         <p:spPr>
           <a:xfrm xmlns:a="http://schemas.openxmlformats.org/drawingml/2006/main">
-            <a:off x="685800" y="4953000"/>
-            <a:ext cx="6572250" cy="809625"/>
+            <a:off x="11077575" y="6457950"/>
+            <a:ext cx="666750" cy="266700"/>
           </a:xfrm>
           <a:prstGeom xmlns:a="http://schemas.openxmlformats.org/drawingml/2006/main" prst="rect">
             <a:avLst/>
@@ -5824,10 +7567,10 @@
         <p:txBody>
           <a:bodyPr xmlns:a="http://schemas.openxmlformats.org/drawingml/2006/main" lIns="0" tIns="0" rIns="0" bIns="0"/>
           <a:lstStyle xmlns:a="http://schemas.openxmlformats.org/drawingml/2006/main">
-            <a:defPPr>
-              <a:defRPr sz="2025" b="0">
-                <a:solidFill>
-                  <a:srgbClr val="142B40"/>
+            <a:defPPr algn="l">
+              <a:defRPr sz="1350" b="0">
+                <a:solidFill>
+                  <a:srgbClr val="6D8190"/>
                 </a:solidFill>
                 <a:latin typeface="Arial"/>
                 <a:ea typeface="Arial"/>
@@ -5836,10 +7579,10 @@
             </a:defPPr>
           </a:lstStyle>
           <a:p xmlns:a="http://schemas.openxmlformats.org/drawingml/2006/main">
-            <a:pPr>
-              <a:defRPr sz="2025" b="0">
-                <a:solidFill>
-                  <a:srgbClr val="142B40"/>
+            <a:pPr algn="l">
+              <a:defRPr sz="1350" b="0">
+                <a:solidFill>
+                  <a:srgbClr val="6D8190"/>
                 </a:solidFill>
                 <a:latin typeface="Arial"/>
                 <a:ea typeface="Arial"/>
@@ -5847,98 +7590,9 @@
               </a:defRPr>
             </a:pPr>
             <a:r>
-              <a:rPr sz="2025" b="0">
-                <a:solidFill>
-                  <a:srgbClr val="142B40"/>
-                </a:solidFill>
-                <a:latin typeface="Arial"/>
-                <a:ea typeface="Arial"/>
-                <a:cs typeface="Arial"/>
-              </a:rPr>
-              <a:t>Continuous torques for front and back leg joints</a:t>
-            </a:r>
-          </a:p>
-          <a:p xmlns:a="http://schemas.openxmlformats.org/drawingml/2006/main">
-            <a:pPr>
-              <a:defRPr sz="2025" b="0">
-                <a:solidFill>
-                  <a:srgbClr val="142B40"/>
-                </a:solidFill>
-                <a:latin typeface="Arial"/>
-                <a:ea typeface="Arial"/>
-                <a:cs typeface="Arial"/>
-              </a:defRPr>
-            </a:pPr>
-            <a:r>
-              <a:rPr sz="2025" b="0">
-                <a:solidFill>
-                  <a:srgbClr val="142B40"/>
-                </a:solidFill>
-                <a:latin typeface="Arial"/>
-                <a:ea typeface="Arial"/>
-                <a:cs typeface="Arial"/>
-              </a:rPr>
-              <a:t>Each action component lies in [-1, 1]</a:t>
-            </a:r>
-          </a:p>
-        </p:txBody>
-      </p:sp>
-      <p:sp>
-        <p:nvSpPr>
-          <p:cNvPr id="9" name="body">
-            <a:extLst xmlns:a="http://schemas.openxmlformats.org/drawingml/2006/main">
-              <a:ext uri="{FF2B5EF4-FFF2-40B4-BE49-F238E27FC236}">
-                <a16:creationId xmlns:a16="http://schemas.microsoft.com/office/drawing/2014/main" id="{A9036AD4-4547-4E46-82D2-10B581D1BBA3}"/>
-              </a:ext>
-            </a:extLst>
-          </p:cNvPr>
-          <p:cNvSpPr>
-            <a:spLocks xmlns:a="http://schemas.openxmlformats.org/drawingml/2006/main" noGrp="1"/>
-          </p:cNvSpPr>
-          <p:nvPr/>
-        </p:nvSpPr>
-        <p:spPr>
-          <a:xfrm xmlns:a="http://schemas.openxmlformats.org/drawingml/2006/main">
-            <a:off x="10858500" y="6305550"/>
-            <a:ext cx="762000" cy="266700"/>
-          </a:xfrm>
-          <a:prstGeom xmlns:a="http://schemas.openxmlformats.org/drawingml/2006/main" prst="rect">
-            <a:avLst/>
-          </a:prstGeom>
-          <a:noFill xmlns:a="http://schemas.openxmlformats.org/drawingml/2006/main"/>
-          <a:ln xmlns:a="http://schemas.openxmlformats.org/drawingml/2006/main" w="0">
-            <a:noFill/>
-          </a:ln>
-        </p:spPr>
-        <p:txBody>
-          <a:bodyPr xmlns:a="http://schemas.openxmlformats.org/drawingml/2006/main" lIns="0" tIns="0" rIns="0" bIns="0"/>
-          <a:lstStyle xmlns:a="http://schemas.openxmlformats.org/drawingml/2006/main">
-            <a:defPPr>
-              <a:defRPr sz="1350" b="0">
-                <a:solidFill>
-                  <a:srgbClr val="5B6D7A"/>
-                </a:solidFill>
-                <a:latin typeface="Arial"/>
-                <a:ea typeface="Arial"/>
-                <a:cs typeface="Arial"/>
-              </a:defRPr>
-            </a:defPPr>
-          </a:lstStyle>
-          <a:p xmlns:a="http://schemas.openxmlformats.org/drawingml/2006/main">
-            <a:pPr>
-              <a:defRPr sz="1350" b="0">
-                <a:solidFill>
-                  <a:srgbClr val="5B6D7A"/>
-                </a:solidFill>
-                <a:latin typeface="Arial"/>
-                <a:ea typeface="Arial"/>
-                <a:cs typeface="Arial"/>
-              </a:defRPr>
-            </a:pPr>
-            <a:r>
               <a:rPr sz="1350" b="0">
                 <a:solidFill>
-                  <a:srgbClr val="5B6D7A"/>
+                  <a:srgbClr val="6D8190"/>
                 </a:solidFill>
                 <a:latin typeface="Arial"/>
                 <a:ea typeface="Arial"/>
@@ -5952,7 +7606,7 @@
     </p:spTree>
     <p:extLst>
       <p:ext uri="{BB962C8B-B14F-4D97-AF65-F5344CB8AC3E}">
-        <p14:creationId xmlns:p14="http://schemas.microsoft.com/office/powerpoint/2010/main" val="1530443430"/>
+        <p14:creationId xmlns:p14="http://schemas.microsoft.com/office/powerpoint/2010/main" val="1432835080"/>
       </p:ext>
     </p:extLst>
   </p:cSld>
@@ -5965,7 +7619,7 @@
     <p:bg>
       <p:bgPr>
         <a:solidFill xmlns:a="http://schemas.openxmlformats.org/drawingml/2006/main">
-          <a:srgbClr val="F7FAFC"/>
+          <a:srgbClr val="FBFCFD"/>
         </a:solidFill>
       </p:bgPr>
     </p:bg>
@@ -5980,10 +7634,10 @@
       </p:grpSpPr>
       <p:sp>
         <p:nvSpPr>
-          <p:cNvPr id="11" name="heading">
-            <a:extLst xmlns:a="http://schemas.openxmlformats.org/drawingml/2006/main">
-              <a:ext uri="{FF2B5EF4-FFF2-40B4-BE49-F238E27FC236}">
-                <a16:creationId xmlns:a16="http://schemas.microsoft.com/office/drawing/2014/main" id="{9B20B971-C6C0-4F40-A8E2-981AA0182B79}"/>
+          <p:cNvPr id="18" name="">
+            <a:extLst xmlns:a="http://schemas.openxmlformats.org/drawingml/2006/main">
+              <a:ext uri="{FF2B5EF4-FFF2-40B4-BE49-F238E27FC236}">
+                <a16:creationId xmlns:a16="http://schemas.microsoft.com/office/drawing/2014/main" id="{7C38D0BC-B7E4-4AF2-B6A7-003AAF13AD20}"/>
               </a:ext>
             </a:extLst>
           </p:cNvPr>
@@ -5994,8 +7648,8 @@
         </p:nvSpPr>
         <p:spPr>
           <a:xfrm xmlns:a="http://schemas.openxmlformats.org/drawingml/2006/main">
-            <a:off x="685800" y="523875"/>
-            <a:ext cx="10858500" cy="933450"/>
+            <a:off x="609600" y="457200"/>
+            <a:ext cx="11049000" cy="952500"/>
           </a:xfrm>
           <a:prstGeom xmlns:a="http://schemas.openxmlformats.org/drawingml/2006/main" prst="rect">
             <a:avLst/>
@@ -6008,10 +7662,10 @@
         <p:txBody>
           <a:bodyPr xmlns:a="http://schemas.openxmlformats.org/drawingml/2006/main" lIns="0" tIns="0" rIns="0" bIns="0"/>
           <a:lstStyle xmlns:a="http://schemas.openxmlformats.org/drawingml/2006/main">
-            <a:defPPr>
+            <a:defPPr algn="l">
               <a:defRPr sz="3450" b="1">
                 <a:solidFill>
-                  <a:srgbClr val="142B40"/>
+                  <a:srgbClr val="132E40"/>
                 </a:solidFill>
                 <a:latin typeface="Arial"/>
                 <a:ea typeface="Arial"/>
@@ -6020,10 +7674,10 @@
             </a:defPPr>
           </a:lstStyle>
           <a:p xmlns:a="http://schemas.openxmlformats.org/drawingml/2006/main">
-            <a:pPr>
+            <a:pPr algn="l">
               <a:defRPr sz="3450" b="1">
                 <a:solidFill>
-                  <a:srgbClr val="142B40"/>
+                  <a:srgbClr val="132E40"/>
                 </a:solidFill>
                 <a:latin typeface="Arial"/>
                 <a:ea typeface="Arial"/>
@@ -6033,23 +7687,23 @@
             <a:r>
               <a:rPr sz="3450" b="1">
                 <a:solidFill>
-                  <a:srgbClr val="142B40"/>
+                  <a:srgbClr val="132E40"/>
                 </a:solidFill>
                 <a:latin typeface="Arial"/>
                 <a:ea typeface="Arial"/>
                 <a:cs typeface="Arial"/>
               </a:rPr>
-              <a:t>Reward, goal and episode ending</a:t>
-            </a:r>
-          </a:p>
-        </p:txBody>
-      </p:sp>
-      <p:sp>
-        <p:nvSpPr>
-          <p:cNvPr id="2" name="heading">
-            <a:extLst xmlns:a="http://schemas.openxmlformats.org/drawingml/2006/main">
-              <a:ext uri="{FF2B5EF4-FFF2-40B4-BE49-F238E27FC236}">
-                <a16:creationId xmlns:a16="http://schemas.microsoft.com/office/drawing/2014/main" id="{D8CC8FE4-6B5D-4658-8269-711590CFA63A}"/>
+              <a:t>Forward motion earns reward</a:t>
+            </a:r>
+          </a:p>
+        </p:txBody>
+      </p:sp>
+      <p:sp>
+        <p:nvSpPr>
+          <p:cNvPr id="2" name="">
+            <a:extLst xmlns:a="http://schemas.openxmlformats.org/drawingml/2006/main">
+              <a:ext uri="{FF2B5EF4-FFF2-40B4-BE49-F238E27FC236}">
+                <a16:creationId xmlns:a16="http://schemas.microsoft.com/office/drawing/2014/main" id="{093908B7-1F54-439F-BBB3-4DADDA4C6CE4}"/>
               </a:ext>
             </a:extLst>
           </p:cNvPr>
@@ -6060,8 +7714,8 @@
         </p:nvSpPr>
         <p:spPr>
           <a:xfrm xmlns:a="http://schemas.openxmlformats.org/drawingml/2006/main">
-            <a:off x="685800" y="1762125"/>
-            <a:ext cx="2714625" cy="647700"/>
+            <a:off x="609600" y="1552575"/>
+            <a:ext cx="10953750" cy="552450"/>
           </a:xfrm>
           <a:prstGeom xmlns:a="http://schemas.openxmlformats.org/drawingml/2006/main" prst="rect">
             <a:avLst/>
@@ -6074,10 +7728,10 @@
         <p:txBody>
           <a:bodyPr xmlns:a="http://schemas.openxmlformats.org/drawingml/2006/main" lIns="0" tIns="0" rIns="0" bIns="0"/>
           <a:lstStyle xmlns:a="http://schemas.openxmlformats.org/drawingml/2006/main">
-            <a:defPPr>
-              <a:defRPr sz="2100" b="1">
-                <a:solidFill>
-                  <a:srgbClr val="147A78"/>
+            <a:defPPr algn="l">
+              <a:defRPr sz="2550" b="1">
+                <a:solidFill>
+                  <a:srgbClr val="132E40"/>
                 </a:solidFill>
                 <a:latin typeface="Arial"/>
                 <a:ea typeface="Arial"/>
@@ -6086,10 +7740,10 @@
             </a:defPPr>
           </a:lstStyle>
           <a:p xmlns:a="http://schemas.openxmlformats.org/drawingml/2006/main">
-            <a:pPr>
-              <a:defRPr sz="2100" b="1">
-                <a:solidFill>
-                  <a:srgbClr val="147A78"/>
+            <a:pPr algn="l">
+              <a:defRPr sz="2550" b="1">
+                <a:solidFill>
+                  <a:srgbClr val="132E40"/>
                 </a:solidFill>
                 <a:latin typeface="Arial"/>
                 <a:ea typeface="Arial"/>
@@ -6097,25 +7751,25 @@
               </a:defRPr>
             </a:pPr>
             <a:r>
-              <a:rPr sz="2100" b="1">
-                <a:solidFill>
-                  <a:srgbClr val="147A78"/>
+              <a:rPr sz="2550" b="1">
+                <a:solidFill>
+                  <a:srgbClr val="132E40"/>
                 </a:solidFill>
                 <a:latin typeface="Arial"/>
                 <a:ea typeface="Arial"/>
                 <a:cs typeface="Arial"/>
               </a:rPr>
-              <a:t>Reward</a:t>
-            </a:r>
-          </a:p>
-        </p:txBody>
-      </p:sp>
-      <p:sp>
-        <p:nvSpPr>
-          <p:cNvPr id="3" name="body">
-            <a:extLst xmlns:a="http://schemas.openxmlformats.org/drawingml/2006/main">
-              <a:ext uri="{FF2B5EF4-FFF2-40B4-BE49-F238E27FC236}">
-                <a16:creationId xmlns:a16="http://schemas.microsoft.com/office/drawing/2014/main" id="{7BEF6CB5-AA4B-4112-958D-0E322191D6A7}"/>
+              <a:t>Reward = forward velocity - 0.1 × sum(action²)</a:t>
+            </a:r>
+          </a:p>
+        </p:txBody>
+      </p:sp>
+      <p:sp>
+        <p:nvSpPr>
+          <p:cNvPr id="3" name="">
+            <a:extLst xmlns:a="http://schemas.openxmlformats.org/drawingml/2006/main">
+              <a:ext uri="{FF2B5EF4-FFF2-40B4-BE49-F238E27FC236}">
+                <a16:creationId xmlns:a16="http://schemas.microsoft.com/office/drawing/2014/main" id="{0F47998B-7152-4812-9678-74413F0F28BA}"/>
               </a:ext>
             </a:extLst>
           </p:cNvPr>
@@ -6126,8 +7780,8 @@
         </p:nvSpPr>
         <p:spPr>
           <a:xfrm xmlns:a="http://schemas.openxmlformats.org/drawingml/2006/main">
-            <a:off x="3571875" y="1762125"/>
-            <a:ext cx="7858125" cy="952500"/>
+            <a:off x="609600" y="2276475"/>
+            <a:ext cx="10858500" cy="400050"/>
           </a:xfrm>
           <a:prstGeom xmlns:a="http://schemas.openxmlformats.org/drawingml/2006/main" prst="rect">
             <a:avLst/>
@@ -6140,10 +7794,10 @@
         <p:txBody>
           <a:bodyPr xmlns:a="http://schemas.openxmlformats.org/drawingml/2006/main" lIns="0" tIns="0" rIns="0" bIns="0"/>
           <a:lstStyle xmlns:a="http://schemas.openxmlformats.org/drawingml/2006/main">
-            <a:defPPr>
-              <a:defRPr sz="2025" b="0">
-                <a:solidFill>
-                  <a:srgbClr val="142B40"/>
+            <a:defPPr algn="l">
+              <a:defRPr sz="1950" b="0">
+                <a:solidFill>
+                  <a:srgbClr val="6D8190"/>
                 </a:solidFill>
                 <a:latin typeface="Arial"/>
                 <a:ea typeface="Arial"/>
@@ -6152,10 +7806,10 @@
             </a:defPPr>
           </a:lstStyle>
           <a:p xmlns:a="http://schemas.openxmlformats.org/drawingml/2006/main">
-            <a:pPr>
-              <a:defRPr sz="2025" b="0">
-                <a:solidFill>
-                  <a:srgbClr val="142B40"/>
+            <a:pPr algn="l">
+              <a:defRPr sz="1950" b="0">
+                <a:solidFill>
+                  <a:srgbClr val="6D8190"/>
                 </a:solidFill>
                 <a:latin typeface="Arial"/>
                 <a:ea typeface="Arial"/>
@@ -6163,25 +7817,25 @@
               </a:defRPr>
             </a:pPr>
             <a:r>
-              <a:rPr sz="2025" b="0">
-                <a:solidFill>
-                  <a:srgbClr val="142B40"/>
+              <a:rPr sz="1950" b="0">
+                <a:solidFill>
+                  <a:srgbClr val="6D8190"/>
                 </a:solidFill>
                 <a:latin typeface="Arial"/>
                 <a:ea typeface="Arial"/>
                 <a:cs typeface="Arial"/>
               </a:rPr>
-              <a:t>Forward velocity - 0.1 × sum(action²)</a:t>
-            </a:r>
-          </a:p>
-        </p:txBody>
-      </p:sp>
-      <p:sp>
-        <p:nvSpPr>
-          <p:cNvPr id="4" name="heading">
-            <a:extLst xmlns:a="http://schemas.openxmlformats.org/drawingml/2006/main">
-              <a:ext uri="{FF2B5EF4-FFF2-40B4-BE49-F238E27FC236}">
-                <a16:creationId xmlns:a16="http://schemas.microsoft.com/office/drawing/2014/main" id="{71DE7AA9-D5F9-4162-A6B8-614ED5C8CDCD}"/>
+              <a:t>Illustrative step: six action components = 0.5</a:t>
+            </a:r>
+          </a:p>
+        </p:txBody>
+      </p:sp>
+      <p:sp>
+        <p:nvSpPr>
+          <p:cNvPr id="4" name="">
+            <a:extLst xmlns:a="http://schemas.openxmlformats.org/drawingml/2006/main">
+              <a:ext uri="{FF2B5EF4-FFF2-40B4-BE49-F238E27FC236}">
+                <a16:creationId xmlns:a16="http://schemas.microsoft.com/office/drawing/2014/main" id="{5197F274-70E7-4805-A589-7D32444A545E}"/>
               </a:ext>
             </a:extLst>
           </p:cNvPr>
@@ -6192,8 +7846,8 @@
         </p:nvSpPr>
         <p:spPr>
           <a:xfrm xmlns:a="http://schemas.openxmlformats.org/drawingml/2006/main">
-            <a:off x="685800" y="2800350"/>
-            <a:ext cx="2714625" cy="647700"/>
+            <a:off x="609600" y="2847975"/>
+            <a:ext cx="2428875" cy="819150"/>
           </a:xfrm>
           <a:prstGeom xmlns:a="http://schemas.openxmlformats.org/drawingml/2006/main" prst="rect">
             <a:avLst/>
@@ -6206,10 +7860,10 @@
         <p:txBody>
           <a:bodyPr xmlns:a="http://schemas.openxmlformats.org/drawingml/2006/main" lIns="0" tIns="0" rIns="0" bIns="0"/>
           <a:lstStyle xmlns:a="http://schemas.openxmlformats.org/drawingml/2006/main">
-            <a:defPPr>
-              <a:defRPr sz="2100" b="1">
-                <a:solidFill>
-                  <a:srgbClr val="147A78"/>
+            <a:defPPr algn="l">
+              <a:defRPr sz="5250" b="1">
+                <a:solidFill>
+                  <a:srgbClr val="007F80"/>
                 </a:solidFill>
                 <a:latin typeface="Arial"/>
                 <a:ea typeface="Arial"/>
@@ -6218,10 +7872,10 @@
             </a:defPPr>
           </a:lstStyle>
           <a:p xmlns:a="http://schemas.openxmlformats.org/drawingml/2006/main">
-            <a:pPr>
-              <a:defRPr sz="2100" b="1">
-                <a:solidFill>
-                  <a:srgbClr val="147A78"/>
+            <a:pPr algn="l">
+              <a:defRPr sz="5250" b="1">
+                <a:solidFill>
+                  <a:srgbClr val="007F80"/>
                 </a:solidFill>
                 <a:latin typeface="Arial"/>
                 <a:ea typeface="Arial"/>
@@ -6229,25 +7883,25 @@
               </a:defRPr>
             </a:pPr>
             <a:r>
-              <a:rPr sz="2100" b="1">
-                <a:solidFill>
-                  <a:srgbClr val="147A78"/>
+              <a:rPr sz="5250" b="1">
+                <a:solidFill>
+                  <a:srgbClr val="007F80"/>
                 </a:solidFill>
                 <a:latin typeface="Arial"/>
                 <a:ea typeface="Arial"/>
                 <a:cs typeface="Arial"/>
               </a:rPr>
-              <a:t>Agent goal</a:t>
-            </a:r>
-          </a:p>
-        </p:txBody>
-      </p:sp>
-      <p:sp>
-        <p:nvSpPr>
-          <p:cNvPr id="5" name="body">
-            <a:extLst xmlns:a="http://schemas.openxmlformats.org/drawingml/2006/main">
-              <a:ext uri="{FF2B5EF4-FFF2-40B4-BE49-F238E27FC236}">
-                <a16:creationId xmlns:a16="http://schemas.microsoft.com/office/drawing/2014/main" id="{C9760776-B9C2-4B2C-9519-434F5C7F777D}"/>
+              <a:t>5.00</a:t>
+            </a:r>
+          </a:p>
+        </p:txBody>
+      </p:sp>
+      <p:sp>
+        <p:nvSpPr>
+          <p:cNvPr id="5" name="">
+            <a:extLst xmlns:a="http://schemas.openxmlformats.org/drawingml/2006/main">
+              <a:ext uri="{FF2B5EF4-FFF2-40B4-BE49-F238E27FC236}">
+                <a16:creationId xmlns:a16="http://schemas.microsoft.com/office/drawing/2014/main" id="{B8253668-258E-4C0D-A0E2-C763C4CAF554}"/>
               </a:ext>
             </a:extLst>
           </p:cNvPr>
@@ -6258,8 +7912,8 @@
         </p:nvSpPr>
         <p:spPr>
           <a:xfrm xmlns:a="http://schemas.openxmlformats.org/drawingml/2006/main">
-            <a:off x="3571875" y="2800350"/>
-            <a:ext cx="7858125" cy="952500"/>
+            <a:off x="609600" y="3705225"/>
+            <a:ext cx="2428875" cy="628650"/>
           </a:xfrm>
           <a:prstGeom xmlns:a="http://schemas.openxmlformats.org/drawingml/2006/main" prst="rect">
             <a:avLst/>
@@ -6272,10 +7926,10 @@
         <p:txBody>
           <a:bodyPr xmlns:a="http://schemas.openxmlformats.org/drawingml/2006/main" lIns="0" tIns="0" rIns="0" bIns="0"/>
           <a:lstStyle xmlns:a="http://schemas.openxmlformats.org/drawingml/2006/main">
-            <a:defPPr>
-              <a:defRPr sz="2025" b="0">
-                <a:solidFill>
-                  <a:srgbClr val="142B40"/>
+            <a:defPPr algn="l">
+              <a:defRPr sz="1950" b="0">
+                <a:solidFill>
+                  <a:srgbClr val="132E40"/>
                 </a:solidFill>
                 <a:latin typeface="Arial"/>
                 <a:ea typeface="Arial"/>
@@ -6284,10 +7938,10 @@
             </a:defPPr>
           </a:lstStyle>
           <a:p xmlns:a="http://schemas.openxmlformats.org/drawingml/2006/main">
-            <a:pPr>
-              <a:defRPr sz="2025" b="0">
-                <a:solidFill>
-                  <a:srgbClr val="142B40"/>
+            <a:pPr algn="l">
+              <a:defRPr sz="1950" b="0">
+                <a:solidFill>
+                  <a:srgbClr val="132E40"/>
                 </a:solidFill>
                 <a:latin typeface="Arial"/>
                 <a:ea typeface="Arial"/>
@@ -6295,25 +7949,25 @@
               </a:defRPr>
             </a:pPr>
             <a:r>
-              <a:rPr sz="2025" b="0">
-                <a:solidFill>
-                  <a:srgbClr val="142B40"/>
+              <a:rPr sz="1950" b="0">
+                <a:solidFill>
+                  <a:srgbClr val="132E40"/>
                 </a:solidFill>
                 <a:latin typeface="Arial"/>
                 <a:ea typeface="Arial"/>
                 <a:cs typeface="Arial"/>
               </a:rPr>
-              <a:t>Sustained forward motion with efficient torque use</a:t>
-            </a:r>
-          </a:p>
-        </p:txBody>
-      </p:sp>
-      <p:sp>
-        <p:nvSpPr>
-          <p:cNvPr id="6" name="heading">
-            <a:extLst xmlns:a="http://schemas.openxmlformats.org/drawingml/2006/main">
-              <a:ext uri="{FF2B5EF4-FFF2-40B4-BE49-F238E27FC236}">
-                <a16:creationId xmlns:a16="http://schemas.microsoft.com/office/drawing/2014/main" id="{8ED12D31-66DE-47FD-8828-BCAA70FC01C9}"/>
+              <a:t>forward velocity</a:t>
+            </a:r>
+          </a:p>
+        </p:txBody>
+      </p:sp>
+      <p:sp>
+        <p:nvSpPr>
+          <p:cNvPr id="6" name="">
+            <a:extLst xmlns:a="http://schemas.openxmlformats.org/drawingml/2006/main">
+              <a:ext uri="{FF2B5EF4-FFF2-40B4-BE49-F238E27FC236}">
+                <a16:creationId xmlns:a16="http://schemas.microsoft.com/office/drawing/2014/main" id="{2161EE94-4133-4CF8-AAF3-1D33C5AAAF5D}"/>
               </a:ext>
             </a:extLst>
           </p:cNvPr>
@@ -6324,8 +7978,8 @@
         </p:nvSpPr>
         <p:spPr>
           <a:xfrm xmlns:a="http://schemas.openxmlformats.org/drawingml/2006/main">
-            <a:off x="685800" y="3838575"/>
-            <a:ext cx="2714625" cy="647700"/>
+            <a:off x="3209925" y="3057525"/>
+            <a:ext cx="619125" cy="619125"/>
           </a:xfrm>
           <a:prstGeom xmlns:a="http://schemas.openxmlformats.org/drawingml/2006/main" prst="rect">
             <a:avLst/>
@@ -6338,10 +7992,10 @@
         <p:txBody>
           <a:bodyPr xmlns:a="http://schemas.openxmlformats.org/drawingml/2006/main" lIns="0" tIns="0" rIns="0" bIns="0"/>
           <a:lstStyle xmlns:a="http://schemas.openxmlformats.org/drawingml/2006/main">
-            <a:defPPr>
-              <a:defRPr sz="2100" b="1">
-                <a:solidFill>
-                  <a:srgbClr val="147A78"/>
+            <a:defPPr algn="l">
+              <a:defRPr sz="3975" b="1">
+                <a:solidFill>
+                  <a:srgbClr val="E47F29"/>
                 </a:solidFill>
                 <a:latin typeface="Arial"/>
                 <a:ea typeface="Arial"/>
@@ -6350,10 +8004,10 @@
             </a:defPPr>
           </a:lstStyle>
           <a:p xmlns:a="http://schemas.openxmlformats.org/drawingml/2006/main">
-            <a:pPr>
-              <a:defRPr sz="2100" b="1">
-                <a:solidFill>
-                  <a:srgbClr val="147A78"/>
+            <a:pPr algn="l">
+              <a:defRPr sz="3975" b="1">
+                <a:solidFill>
+                  <a:srgbClr val="E47F29"/>
                 </a:solidFill>
                 <a:latin typeface="Arial"/>
                 <a:ea typeface="Arial"/>
@@ -6361,25 +8015,25 @@
               </a:defRPr>
             </a:pPr>
             <a:r>
-              <a:rPr sz="2100" b="1">
-                <a:solidFill>
-                  <a:srgbClr val="147A78"/>
+              <a:rPr sz="3975" b="1">
+                <a:solidFill>
+                  <a:srgbClr val="E47F29"/>
                 </a:solidFill>
                 <a:latin typeface="Arial"/>
                 <a:ea typeface="Arial"/>
                 <a:cs typeface="Arial"/>
               </a:rPr>
-              <a:t>Episode ending</a:t>
-            </a:r>
-          </a:p>
-        </p:txBody>
-      </p:sp>
-      <p:sp>
-        <p:nvSpPr>
-          <p:cNvPr id="7" name="body">
-            <a:extLst xmlns:a="http://schemas.openxmlformats.org/drawingml/2006/main">
-              <a:ext uri="{FF2B5EF4-FFF2-40B4-BE49-F238E27FC236}">
-                <a16:creationId xmlns:a16="http://schemas.microsoft.com/office/drawing/2014/main" id="{526C3D45-11B1-4DBF-9734-1288F2E86938}"/>
+              <a:t>−</a:t>
+            </a:r>
+          </a:p>
+        </p:txBody>
+      </p:sp>
+      <p:sp>
+        <p:nvSpPr>
+          <p:cNvPr id="7" name="">
+            <a:extLst xmlns:a="http://schemas.openxmlformats.org/drawingml/2006/main">
+              <a:ext uri="{FF2B5EF4-FFF2-40B4-BE49-F238E27FC236}">
+                <a16:creationId xmlns:a16="http://schemas.microsoft.com/office/drawing/2014/main" id="{56BB3728-51FF-47C7-912B-454CB3D2A1A0}"/>
               </a:ext>
             </a:extLst>
           </p:cNvPr>
@@ -6390,8 +8044,8 @@
         </p:nvSpPr>
         <p:spPr>
           <a:xfrm xmlns:a="http://schemas.openxmlformats.org/drawingml/2006/main">
-            <a:off x="3571875" y="3838575"/>
-            <a:ext cx="7858125" cy="952500"/>
+            <a:off x="4238625" y="2847975"/>
+            <a:ext cx="2428875" cy="819150"/>
           </a:xfrm>
           <a:prstGeom xmlns:a="http://schemas.openxmlformats.org/drawingml/2006/main" prst="rect">
             <a:avLst/>
@@ -6404,10 +8058,10 @@
         <p:txBody>
           <a:bodyPr xmlns:a="http://schemas.openxmlformats.org/drawingml/2006/main" lIns="0" tIns="0" rIns="0" bIns="0"/>
           <a:lstStyle xmlns:a="http://schemas.openxmlformats.org/drawingml/2006/main">
-            <a:defPPr>
-              <a:defRPr sz="2025" b="0">
-                <a:solidFill>
-                  <a:srgbClr val="142B40"/>
+            <a:defPPr algn="l">
+              <a:defRPr sz="5250" b="1">
+                <a:solidFill>
+                  <a:srgbClr val="E47F29"/>
                 </a:solidFill>
                 <a:latin typeface="Arial"/>
                 <a:ea typeface="Arial"/>
@@ -6416,10 +8070,10 @@
             </a:defPPr>
           </a:lstStyle>
           <a:p xmlns:a="http://schemas.openxmlformats.org/drawingml/2006/main">
-            <a:pPr>
-              <a:defRPr sz="2025" b="0">
-                <a:solidFill>
-                  <a:srgbClr val="142B40"/>
+            <a:pPr algn="l">
+              <a:defRPr sz="5250" b="1">
+                <a:solidFill>
+                  <a:srgbClr val="E47F29"/>
                 </a:solidFill>
                 <a:latin typeface="Arial"/>
                 <a:ea typeface="Arial"/>
@@ -6427,48 +8081,25 @@
               </a:defRPr>
             </a:pPr>
             <a:r>
-              <a:rPr sz="2025" b="0">
-                <a:solidFill>
-                  <a:srgbClr val="142B40"/>
+              <a:rPr sz="5250" b="1">
+                <a:solidFill>
+                  <a:srgbClr val="E47F29"/>
                 </a:solidFill>
                 <a:latin typeface="Arial"/>
                 <a:ea typeface="Arial"/>
                 <a:cs typeface="Arial"/>
               </a:rPr>
-              <a:t>No natural termination, including after a fall</a:t>
-            </a:r>
-          </a:p>
-          <a:p xmlns:a="http://schemas.openxmlformats.org/drawingml/2006/main">
-            <a:pPr>
-              <a:defRPr sz="2025" b="0">
-                <a:solidFill>
-                  <a:srgbClr val="142B40"/>
-                </a:solidFill>
-                <a:latin typeface="Arial"/>
-                <a:ea typeface="Arial"/>
-                <a:cs typeface="Arial"/>
-              </a:defRPr>
-            </a:pPr>
-            <a:r>
-              <a:rPr sz="2025" b="0">
-                <a:solidFill>
-                  <a:srgbClr val="142B40"/>
-                </a:solidFill>
-                <a:latin typeface="Arial"/>
-                <a:ea typeface="Arial"/>
-                <a:cs typeface="Arial"/>
-              </a:rPr>
-              <a:t>Time limit: 1,000 steps, about 50 simulated seconds</a:t>
-            </a:r>
-          </a:p>
-        </p:txBody>
-      </p:sp>
-      <p:sp>
-        <p:nvSpPr>
-          <p:cNvPr id="8" name="heading">
-            <a:extLst xmlns:a="http://schemas.openxmlformats.org/drawingml/2006/main">
-              <a:ext uri="{FF2B5EF4-FFF2-40B4-BE49-F238E27FC236}">
-                <a16:creationId xmlns:a16="http://schemas.microsoft.com/office/drawing/2014/main" id="{6F9EC753-5731-417A-B45A-32DCBED47EF7}"/>
+              <a:t>0.15</a:t>
+            </a:r>
+          </a:p>
+        </p:txBody>
+      </p:sp>
+      <p:sp>
+        <p:nvSpPr>
+          <p:cNvPr id="8" name="">
+            <a:extLst xmlns:a="http://schemas.openxmlformats.org/drawingml/2006/main">
+              <a:ext uri="{FF2B5EF4-FFF2-40B4-BE49-F238E27FC236}">
+                <a16:creationId xmlns:a16="http://schemas.microsoft.com/office/drawing/2014/main" id="{054A0394-E3BE-4467-BA3C-1CBB81830791}"/>
               </a:ext>
             </a:extLst>
           </p:cNvPr>
@@ -6479,8 +8110,8 @@
         </p:nvSpPr>
         <p:spPr>
           <a:xfrm xmlns:a="http://schemas.openxmlformats.org/drawingml/2006/main">
-            <a:off x="685800" y="4876800"/>
-            <a:ext cx="2714625" cy="647700"/>
+            <a:off x="4238625" y="3705225"/>
+            <a:ext cx="2428875" cy="628650"/>
           </a:xfrm>
           <a:prstGeom xmlns:a="http://schemas.openxmlformats.org/drawingml/2006/main" prst="rect">
             <a:avLst/>
@@ -6493,10 +8124,10 @@
         <p:txBody>
           <a:bodyPr xmlns:a="http://schemas.openxmlformats.org/drawingml/2006/main" lIns="0" tIns="0" rIns="0" bIns="0"/>
           <a:lstStyle xmlns:a="http://schemas.openxmlformats.org/drawingml/2006/main">
-            <a:defPPr>
-              <a:defRPr sz="2100" b="1">
-                <a:solidFill>
-                  <a:srgbClr val="147A78"/>
+            <a:defPPr algn="l">
+              <a:defRPr sz="1950" b="0">
+                <a:solidFill>
+                  <a:srgbClr val="132E40"/>
                 </a:solidFill>
                 <a:latin typeface="Arial"/>
                 <a:ea typeface="Arial"/>
@@ -6505,10 +8136,10 @@
             </a:defPPr>
           </a:lstStyle>
           <a:p xmlns:a="http://schemas.openxmlformats.org/drawingml/2006/main">
-            <a:pPr>
-              <a:defRPr sz="2100" b="1">
-                <a:solidFill>
-                  <a:srgbClr val="147A78"/>
+            <a:pPr algn="l">
+              <a:defRPr sz="1950" b="0">
+                <a:solidFill>
+                  <a:srgbClr val="132E40"/>
                 </a:solidFill>
                 <a:latin typeface="Arial"/>
                 <a:ea typeface="Arial"/>
@@ -6516,25 +8147,25 @@
               </a:defRPr>
             </a:pPr>
             <a:r>
-              <a:rPr sz="2100" b="1">
-                <a:solidFill>
-                  <a:srgbClr val="147A78"/>
+              <a:rPr sz="1950" b="0">
+                <a:solidFill>
+                  <a:srgbClr val="132E40"/>
                 </a:solidFill>
                 <a:latin typeface="Arial"/>
                 <a:ea typeface="Arial"/>
                 <a:cs typeface="Arial"/>
               </a:rPr>
-              <a:t>Learning target</a:t>
-            </a:r>
-          </a:p>
-        </p:txBody>
-      </p:sp>
-      <p:sp>
-        <p:nvSpPr>
-          <p:cNvPr id="9" name="body">
-            <a:extLst xmlns:a="http://schemas.openxmlformats.org/drawingml/2006/main">
-              <a:ext uri="{FF2B5EF4-FFF2-40B4-BE49-F238E27FC236}">
-                <a16:creationId xmlns:a16="http://schemas.microsoft.com/office/drawing/2014/main" id="{EE8F2ECE-3405-45E3-AE81-61961F505E92}"/>
+              <a:t>control cost</a:t>
+            </a:r>
+          </a:p>
+        </p:txBody>
+      </p:sp>
+      <p:sp>
+        <p:nvSpPr>
+          <p:cNvPr id="9" name="">
+            <a:extLst xmlns:a="http://schemas.openxmlformats.org/drawingml/2006/main">
+              <a:ext uri="{FF2B5EF4-FFF2-40B4-BE49-F238E27FC236}">
+                <a16:creationId xmlns:a16="http://schemas.microsoft.com/office/drawing/2014/main" id="{F55E4D14-8F04-4DFC-9DA7-7AC2E7F9DA81}"/>
               </a:ext>
             </a:extLst>
           </p:cNvPr>
@@ -6545,8 +8176,8 @@
         </p:nvSpPr>
         <p:spPr>
           <a:xfrm xmlns:a="http://schemas.openxmlformats.org/drawingml/2006/main">
-            <a:off x="3571875" y="4876800"/>
-            <a:ext cx="7858125" cy="952500"/>
+            <a:off x="6953250" y="3057525"/>
+            <a:ext cx="619125" cy="619125"/>
           </a:xfrm>
           <a:prstGeom xmlns:a="http://schemas.openxmlformats.org/drawingml/2006/main" prst="rect">
             <a:avLst/>
@@ -6559,10 +8190,10 @@
         <p:txBody>
           <a:bodyPr xmlns:a="http://schemas.openxmlformats.org/drawingml/2006/main" lIns="0" tIns="0" rIns="0" bIns="0"/>
           <a:lstStyle xmlns:a="http://schemas.openxmlformats.org/drawingml/2006/main">
-            <a:defPPr>
-              <a:defRPr sz="2025" b="0">
-                <a:solidFill>
-                  <a:srgbClr val="142B40"/>
+            <a:defPPr algn="l">
+              <a:defRPr sz="3975" b="1">
+                <a:solidFill>
+                  <a:srgbClr val="6D8190"/>
                 </a:solidFill>
                 <a:latin typeface="Arial"/>
                 <a:ea typeface="Arial"/>
@@ -6571,10 +8202,10 @@
             </a:defPPr>
           </a:lstStyle>
           <a:p xmlns:a="http://schemas.openxmlformats.org/drawingml/2006/main">
-            <a:pPr>
-              <a:defRPr sz="2025" b="0">
-                <a:solidFill>
-                  <a:srgbClr val="142B40"/>
+            <a:pPr algn="l">
+              <a:defRPr sz="3975" b="1">
+                <a:solidFill>
+                  <a:srgbClr val="6D8190"/>
                 </a:solidFill>
                 <a:latin typeface="Arial"/>
                 <a:ea typeface="Arial"/>
@@ -6582,48 +8213,25 @@
               </a:defRPr>
             </a:pPr>
             <a:r>
-              <a:rPr sz="2025" b="0">
-                <a:solidFill>
-                  <a:srgbClr val="142B40"/>
+              <a:rPr sz="3975" b="1">
+                <a:solidFill>
+                  <a:srgbClr val="6D8190"/>
                 </a:solidFill>
                 <a:latin typeface="Arial"/>
                 <a:ea typeface="Arial"/>
                 <a:cs typeface="Arial"/>
               </a:rPr>
-              <a:t>A coordinated gait that maintains speed</a:t>
-            </a:r>
-          </a:p>
-          <a:p xmlns:a="http://schemas.openxmlformats.org/drawingml/2006/main">
-            <a:pPr>
-              <a:defRPr sz="2025" b="0">
-                <a:solidFill>
-                  <a:srgbClr val="142B40"/>
-                </a:solidFill>
-                <a:latin typeface="Arial"/>
-                <a:ea typeface="Arial"/>
-                <a:cs typeface="Arial"/>
-              </a:defRPr>
-            </a:pPr>
-            <a:r>
-              <a:rPr sz="2025" b="0">
-                <a:solidFill>
-                  <a:srgbClr val="142B40"/>
-                </a:solidFill>
-                <a:latin typeface="Arial"/>
-                <a:ea typeface="Arial"/>
-                <a:cs typeface="Arial"/>
-              </a:rPr>
-              <a:t>Time-limit truncation preserves value bootstrapping</a:t>
-            </a:r>
-          </a:p>
-        </p:txBody>
-      </p:sp>
-      <p:sp>
-        <p:nvSpPr>
-          <p:cNvPr id="10" name="body">
-            <a:extLst xmlns:a="http://schemas.openxmlformats.org/drawingml/2006/main">
-              <a:ext uri="{FF2B5EF4-FFF2-40B4-BE49-F238E27FC236}">
-                <a16:creationId xmlns:a16="http://schemas.microsoft.com/office/drawing/2014/main" id="{0963F8C2-A66D-40D5-9947-5F065592BBE8}"/>
+              <a:t>=</a:t>
+            </a:r>
+          </a:p>
+        </p:txBody>
+      </p:sp>
+      <p:sp>
+        <p:nvSpPr>
+          <p:cNvPr id="10" name="">
+            <a:extLst xmlns:a="http://schemas.openxmlformats.org/drawingml/2006/main">
+              <a:ext uri="{FF2B5EF4-FFF2-40B4-BE49-F238E27FC236}">
+                <a16:creationId xmlns:a16="http://schemas.microsoft.com/office/drawing/2014/main" id="{7ACE7C5A-3E95-43C5-9604-0748B359E06F}"/>
               </a:ext>
             </a:extLst>
           </p:cNvPr>
@@ -6634,8 +8242,8 @@
         </p:nvSpPr>
         <p:spPr>
           <a:xfrm xmlns:a="http://schemas.openxmlformats.org/drawingml/2006/main">
-            <a:off x="10858500" y="6305550"/>
-            <a:ext cx="762000" cy="266700"/>
+            <a:off x="8448675" y="2847975"/>
+            <a:ext cx="2762250" cy="819150"/>
           </a:xfrm>
           <a:prstGeom xmlns:a="http://schemas.openxmlformats.org/drawingml/2006/main" prst="rect">
             <a:avLst/>
@@ -6648,10 +8256,10 @@
         <p:txBody>
           <a:bodyPr xmlns:a="http://schemas.openxmlformats.org/drawingml/2006/main" lIns="0" tIns="0" rIns="0" bIns="0"/>
           <a:lstStyle xmlns:a="http://schemas.openxmlformats.org/drawingml/2006/main">
-            <a:defPPr>
-              <a:defRPr sz="1350" b="0">
-                <a:solidFill>
-                  <a:srgbClr val="5B6D7A"/>
+            <a:defPPr algn="l">
+              <a:defRPr sz="5250" b="1">
+                <a:solidFill>
+                  <a:srgbClr val="007F80"/>
                 </a:solidFill>
                 <a:latin typeface="Arial"/>
                 <a:ea typeface="Arial"/>
@@ -6660,10 +8268,436 @@
             </a:defPPr>
           </a:lstStyle>
           <a:p xmlns:a="http://schemas.openxmlformats.org/drawingml/2006/main">
-            <a:pPr>
+            <a:pPr algn="l">
+              <a:defRPr sz="5250" b="1">
+                <a:solidFill>
+                  <a:srgbClr val="007F80"/>
+                </a:solidFill>
+                <a:latin typeface="Arial"/>
+                <a:ea typeface="Arial"/>
+                <a:cs typeface="Arial"/>
+              </a:defRPr>
+            </a:pPr>
+            <a:r>
+              <a:rPr sz="5250" b="1">
+                <a:solidFill>
+                  <a:srgbClr val="007F80"/>
+                </a:solidFill>
+                <a:latin typeface="Arial"/>
+                <a:ea typeface="Arial"/>
+                <a:cs typeface="Arial"/>
+              </a:rPr>
+              <a:t>4.85</a:t>
+            </a:r>
+          </a:p>
+        </p:txBody>
+      </p:sp>
+      <p:sp>
+        <p:nvSpPr>
+          <p:cNvPr id="11" name="">
+            <a:extLst xmlns:a="http://schemas.openxmlformats.org/drawingml/2006/main">
+              <a:ext uri="{FF2B5EF4-FFF2-40B4-BE49-F238E27FC236}">
+                <a16:creationId xmlns:a16="http://schemas.microsoft.com/office/drawing/2014/main" id="{B6F2660F-A25D-41C3-AA92-6A58158D991C}"/>
+              </a:ext>
+            </a:extLst>
+          </p:cNvPr>
+          <p:cNvSpPr>
+            <a:spLocks xmlns:a="http://schemas.openxmlformats.org/drawingml/2006/main" noGrp="1"/>
+          </p:cNvSpPr>
+          <p:nvPr/>
+        </p:nvSpPr>
+        <p:spPr>
+          <a:xfrm xmlns:a="http://schemas.openxmlformats.org/drawingml/2006/main">
+            <a:off x="8448675" y="3705225"/>
+            <a:ext cx="2762250" cy="628650"/>
+          </a:xfrm>
+          <a:prstGeom xmlns:a="http://schemas.openxmlformats.org/drawingml/2006/main" prst="rect">
+            <a:avLst/>
+          </a:prstGeom>
+          <a:noFill xmlns:a="http://schemas.openxmlformats.org/drawingml/2006/main"/>
+          <a:ln xmlns:a="http://schemas.openxmlformats.org/drawingml/2006/main" w="0">
+            <a:noFill/>
+          </a:ln>
+        </p:spPr>
+        <p:txBody>
+          <a:bodyPr xmlns:a="http://schemas.openxmlformats.org/drawingml/2006/main" lIns="0" tIns="0" rIns="0" bIns="0"/>
+          <a:lstStyle xmlns:a="http://schemas.openxmlformats.org/drawingml/2006/main">
+            <a:defPPr algn="l">
+              <a:defRPr sz="1950" b="0">
+                <a:solidFill>
+                  <a:srgbClr val="132E40"/>
+                </a:solidFill>
+                <a:latin typeface="Arial"/>
+                <a:ea typeface="Arial"/>
+                <a:cs typeface="Arial"/>
+              </a:defRPr>
+            </a:defPPr>
+          </a:lstStyle>
+          <a:p xmlns:a="http://schemas.openxmlformats.org/drawingml/2006/main">
+            <a:pPr algn="l">
+              <a:defRPr sz="1950" b="0">
+                <a:solidFill>
+                  <a:srgbClr val="132E40"/>
+                </a:solidFill>
+                <a:latin typeface="Arial"/>
+                <a:ea typeface="Arial"/>
+                <a:cs typeface="Arial"/>
+              </a:defRPr>
+            </a:pPr>
+            <a:r>
+              <a:rPr sz="1950" b="0">
+                <a:solidFill>
+                  <a:srgbClr val="132E40"/>
+                </a:solidFill>
+                <a:latin typeface="Arial"/>
+                <a:ea typeface="Arial"/>
+                <a:cs typeface="Arial"/>
+              </a:rPr>
+              <a:t>net reward</a:t>
+            </a:r>
+          </a:p>
+        </p:txBody>
+      </p:sp>
+      <p:sp>
+        <p:nvSpPr>
+          <p:cNvPr id="12" name="">
+            <a:extLst xmlns:a="http://schemas.openxmlformats.org/drawingml/2006/main">
+              <a:ext uri="{FF2B5EF4-FFF2-40B4-BE49-F238E27FC236}">
+                <a16:creationId xmlns:a16="http://schemas.microsoft.com/office/drawing/2014/main" id="{00D52C51-C175-43CB-8047-489D8A73697E}"/>
+              </a:ext>
+            </a:extLst>
+          </p:cNvPr>
+          <p:cNvSpPr>
+            <a:spLocks xmlns:a="http://schemas.openxmlformats.org/drawingml/2006/main" noGrp="1"/>
+          </p:cNvSpPr>
+          <p:nvPr/>
+        </p:nvSpPr>
+        <p:spPr>
+          <a:xfrm xmlns:a="http://schemas.openxmlformats.org/drawingml/2006/main">
+            <a:off x="609600" y="4629150"/>
+            <a:ext cx="10953750" cy="447675"/>
+          </a:xfrm>
+          <a:prstGeom xmlns:a="http://schemas.openxmlformats.org/drawingml/2006/main" prst="rect">
+            <a:avLst/>
+          </a:prstGeom>
+          <a:noFill xmlns:a="http://schemas.openxmlformats.org/drawingml/2006/main"/>
+          <a:ln xmlns:a="http://schemas.openxmlformats.org/drawingml/2006/main" w="0">
+            <a:noFill/>
+          </a:ln>
+        </p:spPr>
+        <p:txBody>
+          <a:bodyPr xmlns:a="http://schemas.openxmlformats.org/drawingml/2006/main" lIns="0" tIns="0" rIns="0" bIns="0"/>
+          <a:lstStyle xmlns:a="http://schemas.openxmlformats.org/drawingml/2006/main">
+            <a:defPPr algn="l">
+              <a:defRPr sz="2250" b="1">
+                <a:solidFill>
+                  <a:srgbClr val="132E40"/>
+                </a:solidFill>
+                <a:latin typeface="Arial"/>
+                <a:ea typeface="Arial"/>
+                <a:cs typeface="Arial"/>
+              </a:defRPr>
+            </a:defPPr>
+          </a:lstStyle>
+          <a:p xmlns:a="http://schemas.openxmlformats.org/drawingml/2006/main">
+            <a:pPr algn="l">
+              <a:defRPr sz="2250" b="1">
+                <a:solidFill>
+                  <a:srgbClr val="132E40"/>
+                </a:solidFill>
+                <a:latin typeface="Arial"/>
+                <a:ea typeface="Arial"/>
+                <a:cs typeface="Arial"/>
+              </a:defRPr>
+            </a:pPr>
+            <a:r>
+              <a:rPr sz="2250" b="1">
+                <a:solidFill>
+                  <a:srgbClr val="132E40"/>
+                </a:solidFill>
+                <a:latin typeface="Arial"/>
+                <a:ea typeface="Arial"/>
+                <a:cs typeface="Arial"/>
+              </a:rPr>
+              <a:t>Goal: sustained, efficient forward motion</a:t>
+            </a:r>
+          </a:p>
+        </p:txBody>
+      </p:sp>
+      <p:sp>
+        <p:nvSpPr>
+          <p:cNvPr id="13" name="">
+            <a:extLst xmlns:a="http://schemas.openxmlformats.org/drawingml/2006/main">
+              <a:ext uri="{FF2B5EF4-FFF2-40B4-BE49-F238E27FC236}">
+                <a16:creationId xmlns:a16="http://schemas.microsoft.com/office/drawing/2014/main" id="{6ABAF0B7-CDE1-4F98-8AD0-4B51611C00AC}"/>
+              </a:ext>
+            </a:extLst>
+          </p:cNvPr>
+          <p:cNvSpPr>
+            <a:spLocks xmlns:a="http://schemas.openxmlformats.org/drawingml/2006/main" noGrp="1"/>
+          </p:cNvSpPr>
+          <p:nvPr/>
+        </p:nvSpPr>
+        <p:spPr>
+          <a:xfrm xmlns:a="http://schemas.openxmlformats.org/drawingml/2006/main">
+            <a:off x="609600" y="5391150"/>
+            <a:ext cx="10820400" cy="57150"/>
+          </a:xfrm>
+          <a:prstGeom xmlns:a="http://schemas.openxmlformats.org/drawingml/2006/main" prst="rect">
+            <a:avLst/>
+          </a:prstGeom>
+          <a:solidFill xmlns:a="http://schemas.openxmlformats.org/drawingml/2006/main">
+            <a:srgbClr val="DBE4E9"/>
+          </a:solidFill>
+          <a:ln xmlns:a="http://schemas.openxmlformats.org/drawingml/2006/main" w="0">
+            <a:noFill/>
+          </a:ln>
+        </p:spPr>
+      </p:sp>
+      <p:sp>
+        <p:nvSpPr>
+          <p:cNvPr id="14" name="">
+            <a:extLst xmlns:a="http://schemas.openxmlformats.org/drawingml/2006/main">
+              <a:ext uri="{FF2B5EF4-FFF2-40B4-BE49-F238E27FC236}">
+                <a16:creationId xmlns:a16="http://schemas.microsoft.com/office/drawing/2014/main" id="{8D6088DC-6CC7-4853-BA74-3CC3A963316B}"/>
+              </a:ext>
+            </a:extLst>
+          </p:cNvPr>
+          <p:cNvSpPr>
+            <a:spLocks xmlns:a="http://schemas.openxmlformats.org/drawingml/2006/main" noGrp="1"/>
+          </p:cNvSpPr>
+          <p:nvPr/>
+        </p:nvSpPr>
+        <p:spPr>
+          <a:xfrm xmlns:a="http://schemas.openxmlformats.org/drawingml/2006/main">
+            <a:off x="609600" y="5524500"/>
+            <a:ext cx="762000" cy="381000"/>
+          </a:xfrm>
+          <a:prstGeom xmlns:a="http://schemas.openxmlformats.org/drawingml/2006/main" prst="rect">
+            <a:avLst/>
+          </a:prstGeom>
+          <a:noFill xmlns:a="http://schemas.openxmlformats.org/drawingml/2006/main"/>
+          <a:ln xmlns:a="http://schemas.openxmlformats.org/drawingml/2006/main" w="0">
+            <a:noFill/>
+          </a:ln>
+        </p:spPr>
+        <p:txBody>
+          <a:bodyPr xmlns:a="http://schemas.openxmlformats.org/drawingml/2006/main" lIns="0" tIns="0" rIns="0" bIns="0"/>
+          <a:lstStyle xmlns:a="http://schemas.openxmlformats.org/drawingml/2006/main">
+            <a:defPPr algn="l">
+              <a:defRPr sz="1875" b="0">
+                <a:solidFill>
+                  <a:srgbClr val="132E40"/>
+                </a:solidFill>
+                <a:latin typeface="Arial"/>
+                <a:ea typeface="Arial"/>
+                <a:cs typeface="Arial"/>
+              </a:defRPr>
+            </a:defPPr>
+          </a:lstStyle>
+          <a:p xmlns:a="http://schemas.openxmlformats.org/drawingml/2006/main">
+            <a:pPr algn="l">
+              <a:defRPr sz="1875" b="0">
+                <a:solidFill>
+                  <a:srgbClr val="132E40"/>
+                </a:solidFill>
+                <a:latin typeface="Arial"/>
+                <a:ea typeface="Arial"/>
+                <a:cs typeface="Arial"/>
+              </a:defRPr>
+            </a:pPr>
+            <a:r>
+              <a:rPr sz="1875" b="0">
+                <a:solidFill>
+                  <a:srgbClr val="132E40"/>
+                </a:solidFill>
+                <a:latin typeface="Arial"/>
+                <a:ea typeface="Arial"/>
+                <a:cs typeface="Arial"/>
+              </a:rPr>
+              <a:t>0</a:t>
+            </a:r>
+          </a:p>
+        </p:txBody>
+      </p:sp>
+      <p:sp>
+        <p:nvSpPr>
+          <p:cNvPr id="15" name="">
+            <a:extLst xmlns:a="http://schemas.openxmlformats.org/drawingml/2006/main">
+              <a:ext uri="{FF2B5EF4-FFF2-40B4-BE49-F238E27FC236}">
+                <a16:creationId xmlns:a16="http://schemas.microsoft.com/office/drawing/2014/main" id="{85610725-985E-49EC-9056-93792C02A334}"/>
+              </a:ext>
+            </a:extLst>
+          </p:cNvPr>
+          <p:cNvSpPr>
+            <a:spLocks xmlns:a="http://schemas.openxmlformats.org/drawingml/2006/main" noGrp="1"/>
+          </p:cNvSpPr>
+          <p:nvPr/>
+        </p:nvSpPr>
+        <p:spPr>
+          <a:xfrm xmlns:a="http://schemas.openxmlformats.org/drawingml/2006/main">
+            <a:off x="6191250" y="5524500"/>
+            <a:ext cx="5238750" cy="400050"/>
+          </a:xfrm>
+          <a:prstGeom xmlns:a="http://schemas.openxmlformats.org/drawingml/2006/main" prst="rect">
+            <a:avLst/>
+          </a:prstGeom>
+          <a:noFill xmlns:a="http://schemas.openxmlformats.org/drawingml/2006/main"/>
+          <a:ln xmlns:a="http://schemas.openxmlformats.org/drawingml/2006/main" w="0">
+            <a:noFill/>
+          </a:ln>
+        </p:spPr>
+        <p:txBody>
+          <a:bodyPr xmlns:a="http://schemas.openxmlformats.org/drawingml/2006/main" lIns="0" tIns="0" rIns="0" bIns="0"/>
+          <a:lstStyle xmlns:a="http://schemas.openxmlformats.org/drawingml/2006/main">
+            <a:defPPr algn="r">
+              <a:defRPr sz="2175" b="1">
+                <a:solidFill>
+                  <a:srgbClr val="007F80"/>
+                </a:solidFill>
+                <a:latin typeface="Arial"/>
+                <a:ea typeface="Arial"/>
+                <a:cs typeface="Arial"/>
+              </a:defRPr>
+            </a:defPPr>
+          </a:lstStyle>
+          <a:p xmlns:a="http://schemas.openxmlformats.org/drawingml/2006/main">
+            <a:pPr algn="r">
+              <a:defRPr sz="2175" b="1">
+                <a:solidFill>
+                  <a:srgbClr val="007F80"/>
+                </a:solidFill>
+                <a:latin typeface="Arial"/>
+                <a:ea typeface="Arial"/>
+                <a:cs typeface="Arial"/>
+              </a:defRPr>
+            </a:pPr>
+            <a:r>
+              <a:rPr sz="2175" b="1">
+                <a:solidFill>
+                  <a:srgbClr val="007F80"/>
+                </a:solidFill>
+                <a:latin typeface="Arial"/>
+                <a:ea typeface="Arial"/>
+                <a:cs typeface="Arial"/>
+              </a:rPr>
+              <a:t>1,000 steps ≈ 50 seconds</a:t>
+            </a:r>
+          </a:p>
+        </p:txBody>
+      </p:sp>
+      <p:sp>
+        <p:nvSpPr>
+          <p:cNvPr id="16" name="">
+            <a:extLst xmlns:a="http://schemas.openxmlformats.org/drawingml/2006/main">
+              <a:ext uri="{FF2B5EF4-FFF2-40B4-BE49-F238E27FC236}">
+                <a16:creationId xmlns:a16="http://schemas.microsoft.com/office/drawing/2014/main" id="{558FECA9-89AA-4567-80EA-D71064172972}"/>
+              </a:ext>
+            </a:extLst>
+          </p:cNvPr>
+          <p:cNvSpPr>
+            <a:spLocks xmlns:a="http://schemas.openxmlformats.org/drawingml/2006/main" noGrp="1"/>
+          </p:cNvSpPr>
+          <p:nvPr/>
+        </p:nvSpPr>
+        <p:spPr>
+          <a:xfrm xmlns:a="http://schemas.openxmlformats.org/drawingml/2006/main">
+            <a:off x="609600" y="5943600"/>
+            <a:ext cx="8572500" cy="381000"/>
+          </a:xfrm>
+          <a:prstGeom xmlns:a="http://schemas.openxmlformats.org/drawingml/2006/main" prst="rect">
+            <a:avLst/>
+          </a:prstGeom>
+          <a:noFill xmlns:a="http://schemas.openxmlformats.org/drawingml/2006/main"/>
+          <a:ln xmlns:a="http://schemas.openxmlformats.org/drawingml/2006/main" w="0">
+            <a:noFill/>
+          </a:ln>
+        </p:spPr>
+        <p:txBody>
+          <a:bodyPr xmlns:a="http://schemas.openxmlformats.org/drawingml/2006/main" lIns="0" tIns="0" rIns="0" bIns="0"/>
+          <a:lstStyle xmlns:a="http://schemas.openxmlformats.org/drawingml/2006/main">
+            <a:defPPr algn="l">
+              <a:defRPr sz="2025" b="1">
+                <a:solidFill>
+                  <a:srgbClr val="E47F29"/>
+                </a:solidFill>
+                <a:latin typeface="Arial"/>
+                <a:ea typeface="Arial"/>
+                <a:cs typeface="Arial"/>
+              </a:defRPr>
+            </a:defPPr>
+          </a:lstStyle>
+          <a:p xmlns:a="http://schemas.openxmlformats.org/drawingml/2006/main">
+            <a:pPr algn="l">
+              <a:defRPr sz="2025" b="1">
+                <a:solidFill>
+                  <a:srgbClr val="E47F29"/>
+                </a:solidFill>
+                <a:latin typeface="Arial"/>
+                <a:ea typeface="Arial"/>
+                <a:cs typeface="Arial"/>
+              </a:defRPr>
+            </a:pPr>
+            <a:r>
+              <a:rPr sz="2025" b="1">
+                <a:solidFill>
+                  <a:srgbClr val="E47F29"/>
+                </a:solidFill>
+                <a:latin typeface="Arial"/>
+                <a:ea typeface="Arial"/>
+                <a:cs typeface="Arial"/>
+              </a:rPr>
+              <a:t>A fall does not end the episode</a:t>
+            </a:r>
+          </a:p>
+        </p:txBody>
+      </p:sp>
+      <p:sp>
+        <p:nvSpPr>
+          <p:cNvPr id="17" name="">
+            <a:extLst xmlns:a="http://schemas.openxmlformats.org/drawingml/2006/main">
+              <a:ext uri="{FF2B5EF4-FFF2-40B4-BE49-F238E27FC236}">
+                <a16:creationId xmlns:a16="http://schemas.microsoft.com/office/drawing/2014/main" id="{E67E4B20-6285-4E01-8291-2220116C6063}"/>
+              </a:ext>
+            </a:extLst>
+          </p:cNvPr>
+          <p:cNvSpPr>
+            <a:spLocks xmlns:a="http://schemas.openxmlformats.org/drawingml/2006/main" noGrp="1"/>
+          </p:cNvSpPr>
+          <p:nvPr/>
+        </p:nvSpPr>
+        <p:spPr>
+          <a:xfrm xmlns:a="http://schemas.openxmlformats.org/drawingml/2006/main">
+            <a:off x="11077575" y="6457950"/>
+            <a:ext cx="666750" cy="266700"/>
+          </a:xfrm>
+          <a:prstGeom xmlns:a="http://schemas.openxmlformats.org/drawingml/2006/main" prst="rect">
+            <a:avLst/>
+          </a:prstGeom>
+          <a:noFill xmlns:a="http://schemas.openxmlformats.org/drawingml/2006/main"/>
+          <a:ln xmlns:a="http://schemas.openxmlformats.org/drawingml/2006/main" w="0">
+            <a:noFill/>
+          </a:ln>
+        </p:spPr>
+        <p:txBody>
+          <a:bodyPr xmlns:a="http://schemas.openxmlformats.org/drawingml/2006/main" lIns="0" tIns="0" rIns="0" bIns="0"/>
+          <a:lstStyle xmlns:a="http://schemas.openxmlformats.org/drawingml/2006/main">
+            <a:defPPr algn="l">
               <a:defRPr sz="1350" b="0">
                 <a:solidFill>
-                  <a:srgbClr val="5B6D7A"/>
+                  <a:srgbClr val="6D8190"/>
+                </a:solidFill>
+                <a:latin typeface="Arial"/>
+                <a:ea typeface="Arial"/>
+                <a:cs typeface="Arial"/>
+              </a:defRPr>
+            </a:defPPr>
+          </a:lstStyle>
+          <a:p xmlns:a="http://schemas.openxmlformats.org/drawingml/2006/main">
+            <a:pPr algn="l">
+              <a:defRPr sz="1350" b="0">
+                <a:solidFill>
+                  <a:srgbClr val="6D8190"/>
                 </a:solidFill>
                 <a:latin typeface="Arial"/>
                 <a:ea typeface="Arial"/>
@@ -6673,7 +8707,7 @@
             <a:r>
               <a:rPr sz="1350" b="0">
                 <a:solidFill>
-                  <a:srgbClr val="5B6D7A"/>
+                  <a:srgbClr val="6D8190"/>
                 </a:solidFill>
                 <a:latin typeface="Arial"/>
                 <a:ea typeface="Arial"/>
@@ -6687,7 +8721,7 @@
     </p:spTree>
     <p:extLst>
       <p:ext uri="{BB962C8B-B14F-4D97-AF65-F5344CB8AC3E}">
-        <p14:creationId xmlns:p14="http://schemas.microsoft.com/office/powerpoint/2010/main" val="971689732"/>
+        <p14:creationId xmlns:p14="http://schemas.microsoft.com/office/powerpoint/2010/main" val="2124756318"/>
       </p:ext>
     </p:extLst>
   </p:cSld>
@@ -6700,7 +8734,7 @@
     <p:bg>
       <p:bgPr>
         <a:solidFill xmlns:a="http://schemas.openxmlformats.org/drawingml/2006/main">
-          <a:srgbClr val="F7FAFC"/>
+          <a:srgbClr val="FBFCFD"/>
         </a:solidFill>
       </p:bgPr>
     </p:bg>
@@ -6715,10 +8749,10 @@
       </p:grpSpPr>
       <p:sp>
         <p:nvSpPr>
-          <p:cNvPr id="11" name="heading">
-            <a:extLst xmlns:a="http://schemas.openxmlformats.org/drawingml/2006/main">
-              <a:ext uri="{FF2B5EF4-FFF2-40B4-BE49-F238E27FC236}">
-                <a16:creationId xmlns:a16="http://schemas.microsoft.com/office/drawing/2014/main" id="{99E8E83C-CF36-454D-B306-47D78DBD19F3}"/>
+          <p:cNvPr id="23" name="">
+            <a:extLst xmlns:a="http://schemas.openxmlformats.org/drawingml/2006/main">
+              <a:ext uri="{FF2B5EF4-FFF2-40B4-BE49-F238E27FC236}">
+                <a16:creationId xmlns:a16="http://schemas.microsoft.com/office/drawing/2014/main" id="{A92721FC-9880-4221-91D1-29DEEB2773D0}"/>
               </a:ext>
             </a:extLst>
           </p:cNvPr>
@@ -6729,8 +8763,8 @@
         </p:nvSpPr>
         <p:spPr>
           <a:xfrm xmlns:a="http://schemas.openxmlformats.org/drawingml/2006/main">
-            <a:off x="685800" y="523875"/>
-            <a:ext cx="10858500" cy="933450"/>
+            <a:off x="609600" y="457200"/>
+            <a:ext cx="11049000" cy="952500"/>
           </a:xfrm>
           <a:prstGeom xmlns:a="http://schemas.openxmlformats.org/drawingml/2006/main" prst="rect">
             <a:avLst/>
@@ -6743,10 +8777,10 @@
         <p:txBody>
           <a:bodyPr xmlns:a="http://schemas.openxmlformats.org/drawingml/2006/main" lIns="0" tIns="0" rIns="0" bIns="0"/>
           <a:lstStyle xmlns:a="http://schemas.openxmlformats.org/drawingml/2006/main">
-            <a:defPPr>
+            <a:defPPr algn="l">
               <a:defRPr sz="3450" b="1">
                 <a:solidFill>
-                  <a:srgbClr val="142B40"/>
+                  <a:srgbClr val="132E40"/>
                 </a:solidFill>
                 <a:latin typeface="Arial"/>
                 <a:ea typeface="Arial"/>
@@ -6755,10 +8789,10 @@
             </a:defPPr>
           </a:lstStyle>
           <a:p xmlns:a="http://schemas.openxmlformats.org/drawingml/2006/main">
-            <a:pPr>
+            <a:pPr algn="l">
               <a:defRPr sz="3450" b="1">
                 <a:solidFill>
-                  <a:srgbClr val="142B40"/>
+                  <a:srgbClr val="132E40"/>
                 </a:solidFill>
                 <a:latin typeface="Arial"/>
                 <a:ea typeface="Arial"/>
@@ -6768,23 +8802,23 @@
             <a:r>
               <a:rPr sz="3450" b="1">
                 <a:solidFill>
-                  <a:srgbClr val="142B40"/>
+                  <a:srgbClr val="132E40"/>
                 </a:solidFill>
                 <a:latin typeface="Arial"/>
                 <a:ea typeface="Arial"/>
                 <a:cs typeface="Arial"/>
               </a:rPr>
-              <a:t>Offline data and evaluation protocol</a:t>
-            </a:r>
-          </a:p>
-        </p:txBody>
-      </p:sp>
-      <p:sp>
-        <p:nvSpPr>
-          <p:cNvPr id="2" name="heading">
-            <a:extLst xmlns:a="http://schemas.openxmlformats.org/drawingml/2006/main">
-              <a:ext uri="{FF2B5EF4-FFF2-40B4-BE49-F238E27FC236}">
-                <a16:creationId xmlns:a16="http://schemas.microsoft.com/office/drawing/2014/main" id="{D298E412-B67E-41C1-AA04-C1AAE4E9D1FD}"/>
+              <a:t>A reproducible training and evaluation plan</a:t>
+            </a:r>
+          </a:p>
+        </p:txBody>
+      </p:sp>
+      <p:sp>
+        <p:nvSpPr>
+          <p:cNvPr id="2" name="">
+            <a:extLst xmlns:a="http://schemas.openxmlformats.org/drawingml/2006/main">
+              <a:ext uri="{FF2B5EF4-FFF2-40B4-BE49-F238E27FC236}">
+                <a16:creationId xmlns:a16="http://schemas.microsoft.com/office/drawing/2014/main" id="{F3EABAFE-6BBB-46AB-AD83-FA8AD958E45C}"/>
               </a:ext>
             </a:extLst>
           </p:cNvPr>
@@ -6795,8 +8829,8 @@
         </p:nvSpPr>
         <p:spPr>
           <a:xfrm xmlns:a="http://schemas.openxmlformats.org/drawingml/2006/main">
-            <a:off x="685800" y="1762125"/>
-            <a:ext cx="2714625" cy="647700"/>
+            <a:off x="609600" y="1695450"/>
+            <a:ext cx="2714625" cy="819150"/>
           </a:xfrm>
           <a:prstGeom xmlns:a="http://schemas.openxmlformats.org/drawingml/2006/main" prst="rect">
             <a:avLst/>
@@ -6809,10 +8843,10 @@
         <p:txBody>
           <a:bodyPr xmlns:a="http://schemas.openxmlformats.org/drawingml/2006/main" lIns="0" tIns="0" rIns="0" bIns="0"/>
           <a:lstStyle xmlns:a="http://schemas.openxmlformats.org/drawingml/2006/main">
-            <a:defPPr>
-              <a:defRPr sz="2100" b="1">
-                <a:solidFill>
-                  <a:srgbClr val="147A78"/>
+            <a:defPPr algn="l">
+              <a:defRPr sz="5250" b="1">
+                <a:solidFill>
+                  <a:srgbClr val="007F80"/>
                 </a:solidFill>
                 <a:latin typeface="Arial"/>
                 <a:ea typeface="Arial"/>
@@ -6821,10 +8855,10 @@
             </a:defPPr>
           </a:lstStyle>
           <a:p xmlns:a="http://schemas.openxmlformats.org/drawingml/2006/main">
-            <a:pPr>
-              <a:defRPr sz="2100" b="1">
-                <a:solidFill>
-                  <a:srgbClr val="147A78"/>
+            <a:pPr algn="l">
+              <a:defRPr sz="5250" b="1">
+                <a:solidFill>
+                  <a:srgbClr val="007F80"/>
                 </a:solidFill>
                 <a:latin typeface="Arial"/>
                 <a:ea typeface="Arial"/>
@@ -6832,25 +8866,25 @@
               </a:defRPr>
             </a:pPr>
             <a:r>
-              <a:rPr sz="2100" b="1">
-                <a:solidFill>
-                  <a:srgbClr val="147A78"/>
+              <a:rPr sz="5250" b="1">
+                <a:solidFill>
+                  <a:srgbClr val="007F80"/>
                 </a:solidFill>
                 <a:latin typeface="Arial"/>
                 <a:ea typeface="Arial"/>
                 <a:cs typeface="Arial"/>
               </a:rPr>
-              <a:t>Dataset</a:t>
-            </a:r>
-          </a:p>
-        </p:txBody>
-      </p:sp>
-      <p:sp>
-        <p:nvSpPr>
-          <p:cNvPr id="3" name="body">
-            <a:extLst xmlns:a="http://schemas.openxmlformats.org/drawingml/2006/main">
-              <a:ext uri="{FF2B5EF4-FFF2-40B4-BE49-F238E27FC236}">
-                <a16:creationId xmlns:a16="http://schemas.microsoft.com/office/drawing/2014/main" id="{997EF609-28AB-4101-9E69-CAE4EF8CDF62}"/>
+              <a:t>1M</a:t>
+            </a:r>
+          </a:p>
+        </p:txBody>
+      </p:sp>
+      <p:sp>
+        <p:nvSpPr>
+          <p:cNvPr id="3" name="">
+            <a:extLst xmlns:a="http://schemas.openxmlformats.org/drawingml/2006/main">
+              <a:ext uri="{FF2B5EF4-FFF2-40B4-BE49-F238E27FC236}">
+                <a16:creationId xmlns:a16="http://schemas.microsoft.com/office/drawing/2014/main" id="{C0161872-0B76-4641-81C8-53FE51F2A811}"/>
               </a:ext>
             </a:extLst>
           </p:cNvPr>
@@ -6861,8 +8895,8 @@
         </p:nvSpPr>
         <p:spPr>
           <a:xfrm xmlns:a="http://schemas.openxmlformats.org/drawingml/2006/main">
-            <a:off x="3571875" y="1762125"/>
-            <a:ext cx="7858125" cy="952500"/>
+            <a:off x="609600" y="2552700"/>
+            <a:ext cx="2714625" cy="628650"/>
           </a:xfrm>
           <a:prstGeom xmlns:a="http://schemas.openxmlformats.org/drawingml/2006/main" prst="rect">
             <a:avLst/>
@@ -6875,10 +8909,10 @@
         <p:txBody>
           <a:bodyPr xmlns:a="http://schemas.openxmlformats.org/drawingml/2006/main" lIns="0" tIns="0" rIns="0" bIns="0"/>
           <a:lstStyle xmlns:a="http://schemas.openxmlformats.org/drawingml/2006/main">
-            <a:defPPr>
-              <a:defRPr sz="2025" b="0">
-                <a:solidFill>
-                  <a:srgbClr val="142B40"/>
+            <a:defPPr algn="l">
+              <a:defRPr sz="1950" b="0">
+                <a:solidFill>
+                  <a:srgbClr val="132E40"/>
                 </a:solidFill>
                 <a:latin typeface="Arial"/>
                 <a:ea typeface="Arial"/>
@@ -6887,10 +8921,10 @@
             </a:defPPr>
           </a:lstStyle>
           <a:p xmlns:a="http://schemas.openxmlformats.org/drawingml/2006/main">
-            <a:pPr>
-              <a:defRPr sz="2025" b="0">
-                <a:solidFill>
-                  <a:srgbClr val="142B40"/>
+            <a:pPr algn="l">
+              <a:defRPr sz="1950" b="0">
+                <a:solidFill>
+                  <a:srgbClr val="132E40"/>
                 </a:solidFill>
                 <a:latin typeface="Arial"/>
                 <a:ea typeface="Arial"/>
@@ -6898,48 +8932,25 @@
               </a:defRPr>
             </a:pPr>
             <a:r>
-              <a:rPr sz="2025" b="0">
-                <a:solidFill>
-                  <a:srgbClr val="142B40"/>
+              <a:rPr sz="1950" b="0">
+                <a:solidFill>
+                  <a:srgbClr val="132E40"/>
                 </a:solidFill>
                 <a:latin typeface="Arial"/>
                 <a:ea typeface="Arial"/>
                 <a:cs typeface="Arial"/>
               </a:rPr>
-              <a:t>Minari mujoco/halfcheetah/medium-v0</a:t>
-            </a:r>
-          </a:p>
-          <a:p xmlns:a="http://schemas.openxmlformats.org/drawingml/2006/main">
-            <a:pPr>
-              <a:defRPr sz="2025" b="0">
-                <a:solidFill>
-                  <a:srgbClr val="142B40"/>
-                </a:solidFill>
-                <a:latin typeface="Arial"/>
-                <a:ea typeface="Arial"/>
-                <a:cs typeface="Arial"/>
-              </a:defRPr>
-            </a:pPr>
-            <a:r>
-              <a:rPr sz="2025" b="0">
-                <a:solidFill>
-                  <a:srgbClr val="142B40"/>
-                </a:solidFill>
-                <a:latin typeface="Arial"/>
-                <a:ea typeface="Arial"/>
-                <a:cs typeface="Arial"/>
-              </a:rPr>
-              <a:t>1,000 episodes and 1,000,000 transitions</a:t>
-            </a:r>
-          </a:p>
-        </p:txBody>
-      </p:sp>
-      <p:sp>
-        <p:nvSpPr>
-          <p:cNvPr id="4" name="heading">
-            <a:extLst xmlns:a="http://schemas.openxmlformats.org/drawingml/2006/main">
-              <a:ext uri="{FF2B5EF4-FFF2-40B4-BE49-F238E27FC236}">
-                <a16:creationId xmlns:a16="http://schemas.microsoft.com/office/drawing/2014/main" id="{AA2A1C8A-F91C-4AF7-8835-7C240A4F86F0}"/>
+              <a:t>transitions</a:t>
+            </a:r>
+          </a:p>
+        </p:txBody>
+      </p:sp>
+      <p:sp>
+        <p:nvSpPr>
+          <p:cNvPr id="4" name="">
+            <a:extLst xmlns:a="http://schemas.openxmlformats.org/drawingml/2006/main">
+              <a:ext uri="{FF2B5EF4-FFF2-40B4-BE49-F238E27FC236}">
+                <a16:creationId xmlns:a16="http://schemas.microsoft.com/office/drawing/2014/main" id="{09510D7E-1179-4BC9-9D26-BEB60A8D517F}"/>
               </a:ext>
             </a:extLst>
           </p:cNvPr>
@@ -6950,8 +8961,8 @@
         </p:nvSpPr>
         <p:spPr>
           <a:xfrm xmlns:a="http://schemas.openxmlformats.org/drawingml/2006/main">
-            <a:off x="685800" y="2800350"/>
-            <a:ext cx="2714625" cy="647700"/>
+            <a:off x="4143375" y="1695450"/>
+            <a:ext cx="2857500" cy="819150"/>
           </a:xfrm>
           <a:prstGeom xmlns:a="http://schemas.openxmlformats.org/drawingml/2006/main" prst="rect">
             <a:avLst/>
@@ -6964,10 +8975,10 @@
         <p:txBody>
           <a:bodyPr xmlns:a="http://schemas.openxmlformats.org/drawingml/2006/main" lIns="0" tIns="0" rIns="0" bIns="0"/>
           <a:lstStyle xmlns:a="http://schemas.openxmlformats.org/drawingml/2006/main">
-            <a:defPPr>
-              <a:defRPr sz="2100" b="1">
-                <a:solidFill>
-                  <a:srgbClr val="147A78"/>
+            <a:defPPr algn="l">
+              <a:defRPr sz="5250" b="1">
+                <a:solidFill>
+                  <a:srgbClr val="007F80"/>
                 </a:solidFill>
                 <a:latin typeface="Arial"/>
                 <a:ea typeface="Arial"/>
@@ -6976,10 +8987,10 @@
             </a:defPPr>
           </a:lstStyle>
           <a:p xmlns:a="http://schemas.openxmlformats.org/drawingml/2006/main">
-            <a:pPr>
-              <a:defRPr sz="2100" b="1">
-                <a:solidFill>
-                  <a:srgbClr val="147A78"/>
+            <a:pPr algn="l">
+              <a:defRPr sz="5250" b="1">
+                <a:solidFill>
+                  <a:srgbClr val="007F80"/>
                 </a:solidFill>
                 <a:latin typeface="Arial"/>
                 <a:ea typeface="Arial"/>
@@ -6987,25 +8998,25 @@
               </a:defRPr>
             </a:pPr>
             <a:r>
-              <a:rPr sz="2100" b="1">
-                <a:solidFill>
-                  <a:srgbClr val="147A78"/>
+              <a:rPr sz="5250" b="1">
+                <a:solidFill>
+                  <a:srgbClr val="007F80"/>
                 </a:solidFill>
                 <a:latin typeface="Arial"/>
                 <a:ea typeface="Arial"/>
                 <a:cs typeface="Arial"/>
               </a:rPr>
-              <a:t>Training budget</a:t>
-            </a:r>
-          </a:p>
-        </p:txBody>
-      </p:sp>
-      <p:sp>
-        <p:nvSpPr>
-          <p:cNvPr id="5" name="body">
-            <a:extLst xmlns:a="http://schemas.openxmlformats.org/drawingml/2006/main">
-              <a:ext uri="{FF2B5EF4-FFF2-40B4-BE49-F238E27FC236}">
-                <a16:creationId xmlns:a16="http://schemas.microsoft.com/office/drawing/2014/main" id="{46E7E59D-6350-4D34-8A41-BB4892236629}"/>
+              <a:t>3</a:t>
+            </a:r>
+          </a:p>
+        </p:txBody>
+      </p:sp>
+      <p:sp>
+        <p:nvSpPr>
+          <p:cNvPr id="5" name="">
+            <a:extLst xmlns:a="http://schemas.openxmlformats.org/drawingml/2006/main">
+              <a:ext uri="{FF2B5EF4-FFF2-40B4-BE49-F238E27FC236}">
+                <a16:creationId xmlns:a16="http://schemas.microsoft.com/office/drawing/2014/main" id="{046906E1-CB9A-47BA-8620-8004C14CD75B}"/>
               </a:ext>
             </a:extLst>
           </p:cNvPr>
@@ -7016,8 +9027,8 @@
         </p:nvSpPr>
         <p:spPr>
           <a:xfrm xmlns:a="http://schemas.openxmlformats.org/drawingml/2006/main">
-            <a:off x="3571875" y="2800350"/>
-            <a:ext cx="7858125" cy="952500"/>
+            <a:off x="4143375" y="2552700"/>
+            <a:ext cx="2857500" cy="628650"/>
           </a:xfrm>
           <a:prstGeom xmlns:a="http://schemas.openxmlformats.org/drawingml/2006/main" prst="rect">
             <a:avLst/>
@@ -7030,10 +9041,10 @@
         <p:txBody>
           <a:bodyPr xmlns:a="http://schemas.openxmlformats.org/drawingml/2006/main" lIns="0" tIns="0" rIns="0" bIns="0"/>
           <a:lstStyle xmlns:a="http://schemas.openxmlformats.org/drawingml/2006/main">
-            <a:defPPr>
-              <a:defRPr sz="2025" b="0">
-                <a:solidFill>
-                  <a:srgbClr val="142B40"/>
+            <a:defPPr algn="l">
+              <a:defRPr sz="1950" b="0">
+                <a:solidFill>
+                  <a:srgbClr val="132E40"/>
                 </a:solidFill>
                 <a:latin typeface="Arial"/>
                 <a:ea typeface="Arial"/>
@@ -7042,10 +9053,10 @@
             </a:defPPr>
           </a:lstStyle>
           <a:p xmlns:a="http://schemas.openxmlformats.org/drawingml/2006/main">
-            <a:pPr>
-              <a:defRPr sz="2025" b="0">
-                <a:solidFill>
-                  <a:srgbClr val="142B40"/>
+            <a:pPr algn="l">
+              <a:defRPr sz="1950" b="0">
+                <a:solidFill>
+                  <a:srgbClr val="132E40"/>
                 </a:solidFill>
                 <a:latin typeface="Arial"/>
                 <a:ea typeface="Arial"/>
@@ -7053,48 +9064,25 @@
               </a:defRPr>
             </a:pPr>
             <a:r>
-              <a:rPr sz="2025" b="0">
-                <a:solidFill>
-                  <a:srgbClr val="142B40"/>
+              <a:rPr sz="1950" b="0">
+                <a:solidFill>
+                  <a:srgbClr val="132E40"/>
                 </a:solidFill>
                 <a:latin typeface="Arial"/>
                 <a:ea typeface="Arial"/>
                 <a:cs typeface="Arial"/>
               </a:rPr>
-              <a:t>500,000 offline updates per training seed</a:t>
-            </a:r>
-          </a:p>
-          <a:p xmlns:a="http://schemas.openxmlformats.org/drawingml/2006/main">
-            <a:pPr>
-              <a:defRPr sz="2025" b="0">
-                <a:solidFill>
-                  <a:srgbClr val="142B40"/>
-                </a:solidFill>
-                <a:latin typeface="Arial"/>
-                <a:ea typeface="Arial"/>
-                <a:cs typeface="Arial"/>
-              </a:defRPr>
-            </a:pPr>
-            <a:r>
-              <a:rPr sz="2025" b="0">
-                <a:solidFill>
-                  <a:srgbClr val="142B40"/>
-                </a:solidFill>
-                <a:latin typeface="Arial"/>
-                <a:ea typeface="Arial"/>
-                <a:cs typeface="Arial"/>
-              </a:rPr>
-              <a:t>Seeds 0, 1 and 2, batch size 256</a:t>
-            </a:r>
-          </a:p>
-        </p:txBody>
-      </p:sp>
-      <p:sp>
-        <p:nvSpPr>
-          <p:cNvPr id="6" name="heading">
-            <a:extLst xmlns:a="http://schemas.openxmlformats.org/drawingml/2006/main">
-              <a:ext uri="{FF2B5EF4-FFF2-40B4-BE49-F238E27FC236}">
-                <a16:creationId xmlns:a16="http://schemas.microsoft.com/office/drawing/2014/main" id="{F0A0CBA3-7C8A-45AE-9CCF-730F86A9AEA0}"/>
+              <a:t>training seeds</a:t>
+            </a:r>
+          </a:p>
+        </p:txBody>
+      </p:sp>
+      <p:sp>
+        <p:nvSpPr>
+          <p:cNvPr id="6" name="">
+            <a:extLst xmlns:a="http://schemas.openxmlformats.org/drawingml/2006/main">
+              <a:ext uri="{FF2B5EF4-FFF2-40B4-BE49-F238E27FC236}">
+                <a16:creationId xmlns:a16="http://schemas.microsoft.com/office/drawing/2014/main" id="{54B3E6A9-8C94-4733-8AB1-251E23FB402D}"/>
               </a:ext>
             </a:extLst>
           </p:cNvPr>
@@ -7105,8 +9093,8 @@
         </p:nvSpPr>
         <p:spPr>
           <a:xfrm xmlns:a="http://schemas.openxmlformats.org/drawingml/2006/main">
-            <a:off x="685800" y="3838575"/>
-            <a:ext cx="2714625" cy="647700"/>
+            <a:off x="7848600" y="1695450"/>
+            <a:ext cx="3619500" cy="819150"/>
           </a:xfrm>
           <a:prstGeom xmlns:a="http://schemas.openxmlformats.org/drawingml/2006/main" prst="rect">
             <a:avLst/>
@@ -7119,10 +9107,10 @@
         <p:txBody>
           <a:bodyPr xmlns:a="http://schemas.openxmlformats.org/drawingml/2006/main" lIns="0" tIns="0" rIns="0" bIns="0"/>
           <a:lstStyle xmlns:a="http://schemas.openxmlformats.org/drawingml/2006/main">
-            <a:defPPr>
-              <a:defRPr sz="2100" b="1">
-                <a:solidFill>
-                  <a:srgbClr val="147A78"/>
+            <a:defPPr algn="l">
+              <a:defRPr sz="5250" b="1">
+                <a:solidFill>
+                  <a:srgbClr val="007F80"/>
                 </a:solidFill>
                 <a:latin typeface="Arial"/>
                 <a:ea typeface="Arial"/>
@@ -7131,10 +9119,10 @@
             </a:defPPr>
           </a:lstStyle>
           <a:p xmlns:a="http://schemas.openxmlformats.org/drawingml/2006/main">
-            <a:pPr>
-              <a:defRPr sz="2100" b="1">
-                <a:solidFill>
-                  <a:srgbClr val="147A78"/>
+            <a:pPr algn="l">
+              <a:defRPr sz="5250" b="1">
+                <a:solidFill>
+                  <a:srgbClr val="007F80"/>
                 </a:solidFill>
                 <a:latin typeface="Arial"/>
                 <a:ea typeface="Arial"/>
@@ -7142,25 +9130,25 @@
               </a:defRPr>
             </a:pPr>
             <a:r>
-              <a:rPr sz="2100" b="1">
-                <a:solidFill>
-                  <a:srgbClr val="147A78"/>
+              <a:rPr sz="5250" b="1">
+                <a:solidFill>
+                  <a:srgbClr val="007F80"/>
                 </a:solidFill>
                 <a:latin typeface="Arial"/>
                 <a:ea typeface="Arial"/>
                 <a:cs typeface="Arial"/>
               </a:rPr>
-              <a:t>Evaluation</a:t>
-            </a:r>
-          </a:p>
-        </p:txBody>
-      </p:sp>
-      <p:sp>
-        <p:nvSpPr>
-          <p:cNvPr id="7" name="body">
-            <a:extLst xmlns:a="http://schemas.openxmlformats.org/drawingml/2006/main">
-              <a:ext uri="{FF2B5EF4-FFF2-40B4-BE49-F238E27FC236}">
-                <a16:creationId xmlns:a16="http://schemas.microsoft.com/office/drawing/2014/main" id="{3609CC83-076F-45A3-99AB-DF19319239B2}"/>
+              <a:t>500k</a:t>
+            </a:r>
+          </a:p>
+        </p:txBody>
+      </p:sp>
+      <p:sp>
+        <p:nvSpPr>
+          <p:cNvPr id="7" name="">
+            <a:extLst xmlns:a="http://schemas.openxmlformats.org/drawingml/2006/main">
+              <a:ext uri="{FF2B5EF4-FFF2-40B4-BE49-F238E27FC236}">
+                <a16:creationId xmlns:a16="http://schemas.microsoft.com/office/drawing/2014/main" id="{691098DD-2541-46E5-8939-7E94EA7667DE}"/>
               </a:ext>
             </a:extLst>
           </p:cNvPr>
@@ -7171,8 +9159,8 @@
         </p:nvSpPr>
         <p:spPr>
           <a:xfrm xmlns:a="http://schemas.openxmlformats.org/drawingml/2006/main">
-            <a:off x="3571875" y="3838575"/>
-            <a:ext cx="7858125" cy="952500"/>
+            <a:off x="7848600" y="2552700"/>
+            <a:ext cx="3619500" cy="628650"/>
           </a:xfrm>
           <a:prstGeom xmlns:a="http://schemas.openxmlformats.org/drawingml/2006/main" prst="rect">
             <a:avLst/>
@@ -7185,10 +9173,10 @@
         <p:txBody>
           <a:bodyPr xmlns:a="http://schemas.openxmlformats.org/drawingml/2006/main" lIns="0" tIns="0" rIns="0" bIns="0"/>
           <a:lstStyle xmlns:a="http://schemas.openxmlformats.org/drawingml/2006/main">
-            <a:defPPr>
-              <a:defRPr sz="2025" b="0">
-                <a:solidFill>
-                  <a:srgbClr val="142B40"/>
+            <a:defPPr algn="l">
+              <a:defRPr sz="1950" b="0">
+                <a:solidFill>
+                  <a:srgbClr val="132E40"/>
                 </a:solidFill>
                 <a:latin typeface="Arial"/>
                 <a:ea typeface="Arial"/>
@@ -7197,10 +9185,10 @@
             </a:defPPr>
           </a:lstStyle>
           <a:p xmlns:a="http://schemas.openxmlformats.org/drawingml/2006/main">
-            <a:pPr>
-              <a:defRPr sz="2025" b="0">
-                <a:solidFill>
-                  <a:srgbClr val="142B40"/>
+            <a:pPr algn="l">
+              <a:defRPr sz="1950" b="0">
+                <a:solidFill>
+                  <a:srgbClr val="132E40"/>
                 </a:solidFill>
                 <a:latin typeface="Arial"/>
                 <a:ea typeface="Arial"/>
@@ -7208,48 +9196,25 @@
               </a:defRPr>
             </a:pPr>
             <a:r>
-              <a:rPr sz="2025" b="0">
-                <a:solidFill>
-                  <a:srgbClr val="142B40"/>
+              <a:rPr sz="1950" b="0">
+                <a:solidFill>
+                  <a:srgbClr val="132E40"/>
                 </a:solidFill>
                 <a:latin typeface="Arial"/>
                 <a:ea typeface="Arial"/>
                 <a:cs typeface="Arial"/>
               </a:rPr>
-              <a:t>Intermediate checkpoints, 10 episodes per run</a:t>
-            </a:r>
-          </a:p>
-          <a:p xmlns:a="http://schemas.openxmlformats.org/drawingml/2006/main">
-            <a:pPr>
-              <a:defRPr sz="2025" b="0">
-                <a:solidFill>
-                  <a:srgbClr val="142B40"/>
-                </a:solidFill>
-                <a:latin typeface="Arial"/>
-                <a:ea typeface="Arial"/>
-                <a:cs typeface="Arial"/>
-              </a:defRPr>
-            </a:pPr>
-            <a:r>
-              <a:rPr sz="2025" b="0">
-                <a:solidFill>
-                  <a:srgbClr val="142B40"/>
-                </a:solidFill>
-                <a:latin typeface="Arial"/>
-                <a:ea typeface="Arial"/>
-                <a:cs typeface="Arial"/>
-              </a:rPr>
-              <a:t>Raw return, uniform random baseline and full rollouts</a:t>
-            </a:r>
-          </a:p>
-        </p:txBody>
-      </p:sp>
-      <p:sp>
-        <p:nvSpPr>
-          <p:cNvPr id="8" name="heading">
-            <a:extLst xmlns:a="http://schemas.openxmlformats.org/drawingml/2006/main">
-              <a:ext uri="{FF2B5EF4-FFF2-40B4-BE49-F238E27FC236}">
-                <a16:creationId xmlns:a16="http://schemas.microsoft.com/office/drawing/2014/main" id="{9D396859-35C3-492A-B1CB-23349EB095A8}"/>
+              <a:t>updates per seed</a:t>
+            </a:r>
+          </a:p>
+        </p:txBody>
+      </p:sp>
+      <p:sp>
+        <p:nvSpPr>
+          <p:cNvPr id="8" name="">
+            <a:extLst xmlns:a="http://schemas.openxmlformats.org/drawingml/2006/main">
+              <a:ext uri="{FF2B5EF4-FFF2-40B4-BE49-F238E27FC236}">
+                <a16:creationId xmlns:a16="http://schemas.microsoft.com/office/drawing/2014/main" id="{F721FAB7-D66F-48DC-B4C5-A637D7663AB0}"/>
               </a:ext>
             </a:extLst>
           </p:cNvPr>
@@ -7260,8 +9225,8 @@
         </p:nvSpPr>
         <p:spPr>
           <a:xfrm xmlns:a="http://schemas.openxmlformats.org/drawingml/2006/main">
-            <a:off x="685800" y="4876800"/>
-            <a:ext cx="2714625" cy="647700"/>
+            <a:off x="609600" y="3438525"/>
+            <a:ext cx="10858500" cy="400050"/>
           </a:xfrm>
           <a:prstGeom xmlns:a="http://schemas.openxmlformats.org/drawingml/2006/main" prst="rect">
             <a:avLst/>
@@ -7274,10 +9239,10 @@
         <p:txBody>
           <a:bodyPr xmlns:a="http://schemas.openxmlformats.org/drawingml/2006/main" lIns="0" tIns="0" rIns="0" bIns="0"/>
           <a:lstStyle xmlns:a="http://schemas.openxmlformats.org/drawingml/2006/main">
-            <a:defPPr>
-              <a:defRPr sz="2100" b="1">
-                <a:solidFill>
-                  <a:srgbClr val="147A78"/>
+            <a:defPPr algn="l">
+              <a:defRPr sz="2025" b="0">
+                <a:solidFill>
+                  <a:srgbClr val="132E40"/>
                 </a:solidFill>
                 <a:latin typeface="Arial"/>
                 <a:ea typeface="Arial"/>
@@ -7286,10 +9251,10 @@
             </a:defPPr>
           </a:lstStyle>
           <a:p xmlns:a="http://schemas.openxmlformats.org/drawingml/2006/main">
-            <a:pPr>
-              <a:defRPr sz="2100" b="1">
-                <a:solidFill>
-                  <a:srgbClr val="147A78"/>
+            <a:pPr algn="l">
+              <a:defRPr sz="2025" b="0">
+                <a:solidFill>
+                  <a:srgbClr val="132E40"/>
                 </a:solidFill>
                 <a:latin typeface="Arial"/>
                 <a:ea typeface="Arial"/>
@@ -7297,25 +9262,25 @@
               </a:defRPr>
             </a:pPr>
             <a:r>
-              <a:rPr sz="2100" b="1">
-                <a:solidFill>
-                  <a:srgbClr val="147A78"/>
+              <a:rPr sz="2025" b="0">
+                <a:solidFill>
+                  <a:srgbClr val="132E40"/>
                 </a:solidFill>
                 <a:latin typeface="Arial"/>
                 <a:ea typeface="Arial"/>
                 <a:cs typeface="Arial"/>
               </a:rPr>
-              <a:t>Reproducibility</a:t>
-            </a:r>
-          </a:p>
-        </p:txBody>
-      </p:sp>
-      <p:sp>
-        <p:nvSpPr>
-          <p:cNvPr id="9" name="body">
-            <a:extLst xmlns:a="http://schemas.openxmlformats.org/drawingml/2006/main">
-              <a:ext uri="{FF2B5EF4-FFF2-40B4-BE49-F238E27FC236}">
-                <a16:creationId xmlns:a16="http://schemas.microsoft.com/office/drawing/2014/main" id="{C2410BC7-D2CF-405E-A21E-53E1E4339817}"/>
+              <a:t>Minari medium dataset: 1,000 episodes. Batch size: 256.</a:t>
+            </a:r>
+          </a:p>
+        </p:txBody>
+      </p:sp>
+      <p:sp>
+        <p:nvSpPr>
+          <p:cNvPr id="9" name="">
+            <a:extLst xmlns:a="http://schemas.openxmlformats.org/drawingml/2006/main">
+              <a:ext uri="{FF2B5EF4-FFF2-40B4-BE49-F238E27FC236}">
+                <a16:creationId xmlns:a16="http://schemas.microsoft.com/office/drawing/2014/main" id="{4BCEEAD1-E429-4D39-9E39-CA6348DCAC09}"/>
               </a:ext>
             </a:extLst>
           </p:cNvPr>
@@ -7326,8 +9291,38 @@
         </p:nvSpPr>
         <p:spPr>
           <a:xfrm xmlns:a="http://schemas.openxmlformats.org/drawingml/2006/main">
-            <a:off x="3571875" y="4876800"/>
-            <a:ext cx="7858125" cy="952500"/>
+            <a:off x="609600" y="4200525"/>
+            <a:ext cx="2857500" cy="1333500"/>
+          </a:xfrm>
+          <a:prstGeom xmlns:a="http://schemas.openxmlformats.org/drawingml/2006/main" prst="rect">
+            <a:avLst/>
+          </a:prstGeom>
+          <a:solidFill xmlns:a="http://schemas.openxmlformats.org/drawingml/2006/main">
+            <a:srgbClr val="E7F4F1"/>
+          </a:solidFill>
+          <a:ln xmlns:a="http://schemas.openxmlformats.org/drawingml/2006/main" w="0">
+            <a:noFill/>
+          </a:ln>
+        </p:spPr>
+      </p:sp>
+      <p:sp>
+        <p:nvSpPr>
+          <p:cNvPr id="10" name="">
+            <a:extLst xmlns:a="http://schemas.openxmlformats.org/drawingml/2006/main">
+              <a:ext uri="{FF2B5EF4-FFF2-40B4-BE49-F238E27FC236}">
+                <a16:creationId xmlns:a16="http://schemas.microsoft.com/office/drawing/2014/main" id="{A410857F-8DF0-4ED0-9F35-919B8D1AE4B6}"/>
+              </a:ext>
+            </a:extLst>
+          </p:cNvPr>
+          <p:cNvSpPr>
+            <a:spLocks xmlns:a="http://schemas.openxmlformats.org/drawingml/2006/main" noGrp="1"/>
+          </p:cNvSpPr>
+          <p:nvPr/>
+        </p:nvSpPr>
+        <p:spPr>
+          <a:xfrm xmlns:a="http://schemas.openxmlformats.org/drawingml/2006/main">
+            <a:off x="800100" y="4391025"/>
+            <a:ext cx="2476500" cy="476250"/>
           </a:xfrm>
           <a:prstGeom xmlns:a="http://schemas.openxmlformats.org/drawingml/2006/main" prst="rect">
             <a:avLst/>
@@ -7340,10 +9335,10 @@
         <p:txBody>
           <a:bodyPr xmlns:a="http://schemas.openxmlformats.org/drawingml/2006/main" lIns="0" tIns="0" rIns="0" bIns="0"/>
           <a:lstStyle xmlns:a="http://schemas.openxmlformats.org/drawingml/2006/main">
-            <a:defPPr>
-              <a:defRPr sz="2025" b="0">
-                <a:solidFill>
-                  <a:srgbClr val="142B40"/>
+            <a:defPPr algn="l">
+              <a:defRPr sz="2400" b="1">
+                <a:solidFill>
+                  <a:srgbClr val="007F80"/>
                 </a:solidFill>
                 <a:latin typeface="Arial"/>
                 <a:ea typeface="Arial"/>
@@ -7352,10 +9347,10 @@
             </a:defPPr>
           </a:lstStyle>
           <a:p xmlns:a="http://schemas.openxmlformats.org/drawingml/2006/main">
-            <a:pPr>
-              <a:defRPr sz="2025" b="0">
-                <a:solidFill>
-                  <a:srgbClr val="142B40"/>
+            <a:pPr algn="l">
+              <a:defRPr sz="2400" b="1">
+                <a:solidFill>
+                  <a:srgbClr val="007F80"/>
                 </a:solidFill>
                 <a:latin typeface="Arial"/>
                 <a:ea typeface="Arial"/>
@@ -7363,48 +9358,25 @@
               </a:defRPr>
             </a:pPr>
             <a:r>
-              <a:rPr sz="2025" b="0">
-                <a:solidFill>
-                  <a:srgbClr val="142B40"/>
+              <a:rPr sz="2400" b="1">
+                <a:solidFill>
+                  <a:srgbClr val="007F80"/>
                 </a:solidFill>
                 <a:latin typeface="Arial"/>
                 <a:ea typeface="Arial"/>
                 <a:cs typeface="Arial"/>
               </a:rPr>
-              <a:t>Dataset-matched environment, MuJoCo 3.2.3</a:t>
-            </a:r>
-          </a:p>
-          <a:p xmlns:a="http://schemas.openxmlformats.org/drawingml/2006/main">
-            <a:pPr>
-              <a:defRPr sz="2025" b="0">
-                <a:solidFill>
-                  <a:srgbClr val="142B40"/>
-                </a:solidFill>
-                <a:latin typeface="Arial"/>
-                <a:ea typeface="Arial"/>
-                <a:cs typeface="Arial"/>
-              </a:defRPr>
-            </a:pPr>
-            <a:r>
-              <a:rPr sz="2025" b="0">
-                <a:solidFill>
-                  <a:srgbClr val="142B40"/>
-                </a:solidFill>
-                <a:latin typeface="Arial"/>
-                <a:ea typeface="Arial"/>
-                <a:cs typeface="Arial"/>
-              </a:rPr>
-              <a:t>Separate checkpoint selection and final test episodes</a:t>
-            </a:r>
-          </a:p>
-        </p:txBody>
-      </p:sp>
-      <p:sp>
-        <p:nvSpPr>
-          <p:cNvPr id="10" name="body">
-            <a:extLst xmlns:a="http://schemas.openxmlformats.org/drawingml/2006/main">
-              <a:ext uri="{FF2B5EF4-FFF2-40B4-BE49-F238E27FC236}">
-                <a16:creationId xmlns:a16="http://schemas.microsoft.com/office/drawing/2014/main" id="{F60BB0D7-1E3B-44D0-9D98-E06DA9675DB1}"/>
+              <a:t>Train</a:t>
+            </a:r>
+          </a:p>
+        </p:txBody>
+      </p:sp>
+      <p:sp>
+        <p:nvSpPr>
+          <p:cNvPr id="11" name="">
+            <a:extLst xmlns:a="http://schemas.openxmlformats.org/drawingml/2006/main">
+              <a:ext uri="{FF2B5EF4-FFF2-40B4-BE49-F238E27FC236}">
+                <a16:creationId xmlns:a16="http://schemas.microsoft.com/office/drawing/2014/main" id="{711E7375-E33C-45C2-AD52-797C71A5F984}"/>
               </a:ext>
             </a:extLst>
           </p:cNvPr>
@@ -7415,8 +9387,8 @@
         </p:nvSpPr>
         <p:spPr>
           <a:xfrm xmlns:a="http://schemas.openxmlformats.org/drawingml/2006/main">
-            <a:off x="10858500" y="6305550"/>
-            <a:ext cx="762000" cy="266700"/>
+            <a:off x="800100" y="4943475"/>
+            <a:ext cx="2476500" cy="476250"/>
           </a:xfrm>
           <a:prstGeom xmlns:a="http://schemas.openxmlformats.org/drawingml/2006/main" prst="rect">
             <a:avLst/>
@@ -7429,10 +9401,10 @@
         <p:txBody>
           <a:bodyPr xmlns:a="http://schemas.openxmlformats.org/drawingml/2006/main" lIns="0" tIns="0" rIns="0" bIns="0"/>
           <a:lstStyle xmlns:a="http://schemas.openxmlformats.org/drawingml/2006/main">
-            <a:defPPr>
-              <a:defRPr sz="1350" b="0">
-                <a:solidFill>
-                  <a:srgbClr val="5B6D7A"/>
+            <a:defPPr algn="l">
+              <a:defRPr sz="1875" b="0">
+                <a:solidFill>
+                  <a:srgbClr val="132E40"/>
                 </a:solidFill>
                 <a:latin typeface="Arial"/>
                 <a:ea typeface="Arial"/>
@@ -7441,10 +9413,592 @@
             </a:defPPr>
           </a:lstStyle>
           <a:p xmlns:a="http://schemas.openxmlformats.org/drawingml/2006/main">
-            <a:pPr>
+            <a:pPr algn="l">
+              <a:defRPr sz="1875" b="0">
+                <a:solidFill>
+                  <a:srgbClr val="132E40"/>
+                </a:solidFill>
+                <a:latin typeface="Arial"/>
+                <a:ea typeface="Arial"/>
+                <a:cs typeface="Arial"/>
+              </a:defRPr>
+            </a:pPr>
+            <a:r>
+              <a:rPr sz="1875" b="0">
+                <a:solidFill>
+                  <a:srgbClr val="132E40"/>
+                </a:solidFill>
+                <a:latin typeface="Arial"/>
+                <a:ea typeface="Arial"/>
+                <a:cs typeface="Arial"/>
+              </a:rPr>
+              <a:t>Seeds 0, 1, 2</a:t>
+            </a:r>
+          </a:p>
+        </p:txBody>
+      </p:sp>
+      <p:sp>
+        <p:nvSpPr>
+          <p:cNvPr id="12" name="">
+            <a:extLst xmlns:a="http://schemas.openxmlformats.org/drawingml/2006/main">
+              <a:ext uri="{FF2B5EF4-FFF2-40B4-BE49-F238E27FC236}">
+                <a16:creationId xmlns:a16="http://schemas.microsoft.com/office/drawing/2014/main" id="{490534B6-4064-4C81-81E1-3073408D4FD2}"/>
+              </a:ext>
+            </a:extLst>
+          </p:cNvPr>
+          <p:cNvSpPr>
+            <a:spLocks xmlns:a="http://schemas.openxmlformats.org/drawingml/2006/main" noGrp="1"/>
+          </p:cNvSpPr>
+          <p:nvPr/>
+        </p:nvSpPr>
+        <p:spPr>
+          <a:xfrm xmlns:a="http://schemas.openxmlformats.org/drawingml/2006/main">
+            <a:off x="3667125" y="4752975"/>
+            <a:ext cx="457200" cy="228600"/>
+          </a:xfrm>
+          <a:prstGeom xmlns:a="http://schemas.openxmlformats.org/drawingml/2006/main" prst="rightArrow">
+            <a:avLst/>
+          </a:prstGeom>
+          <a:solidFill xmlns:a="http://schemas.openxmlformats.org/drawingml/2006/main">
+            <a:srgbClr val="007F80"/>
+          </a:solidFill>
+          <a:ln xmlns:a="http://schemas.openxmlformats.org/drawingml/2006/main" w="0">
+            <a:noFill/>
+          </a:ln>
+        </p:spPr>
+      </p:sp>
+      <p:sp>
+        <p:nvSpPr>
+          <p:cNvPr id="13" name="">
+            <a:extLst xmlns:a="http://schemas.openxmlformats.org/drawingml/2006/main">
+              <a:ext uri="{FF2B5EF4-FFF2-40B4-BE49-F238E27FC236}">
+                <a16:creationId xmlns:a16="http://schemas.microsoft.com/office/drawing/2014/main" id="{0F22B49C-E371-4C20-A599-2915F662807B}"/>
+              </a:ext>
+            </a:extLst>
+          </p:cNvPr>
+          <p:cNvSpPr>
+            <a:spLocks xmlns:a="http://schemas.openxmlformats.org/drawingml/2006/main" noGrp="1"/>
+          </p:cNvSpPr>
+          <p:nvPr/>
+        </p:nvSpPr>
+        <p:spPr>
+          <a:xfrm xmlns:a="http://schemas.openxmlformats.org/drawingml/2006/main">
+            <a:off x="4333875" y="4200525"/>
+            <a:ext cx="3143250" cy="1333500"/>
+          </a:xfrm>
+          <a:prstGeom xmlns:a="http://schemas.openxmlformats.org/drawingml/2006/main" prst="rect">
+            <a:avLst/>
+          </a:prstGeom>
+          <a:solidFill xmlns:a="http://schemas.openxmlformats.org/drawingml/2006/main">
+            <a:srgbClr val="E7F4F1"/>
+          </a:solidFill>
+          <a:ln xmlns:a="http://schemas.openxmlformats.org/drawingml/2006/main" w="0">
+            <a:noFill/>
+          </a:ln>
+        </p:spPr>
+      </p:sp>
+      <p:sp>
+        <p:nvSpPr>
+          <p:cNvPr id="14" name="">
+            <a:extLst xmlns:a="http://schemas.openxmlformats.org/drawingml/2006/main">
+              <a:ext uri="{FF2B5EF4-FFF2-40B4-BE49-F238E27FC236}">
+                <a16:creationId xmlns:a16="http://schemas.microsoft.com/office/drawing/2014/main" id="{38E0FE14-1B79-4E21-82C1-3E8575105492}"/>
+              </a:ext>
+            </a:extLst>
+          </p:cNvPr>
+          <p:cNvSpPr>
+            <a:spLocks xmlns:a="http://schemas.openxmlformats.org/drawingml/2006/main" noGrp="1"/>
+          </p:cNvSpPr>
+          <p:nvPr/>
+        </p:nvSpPr>
+        <p:spPr>
+          <a:xfrm xmlns:a="http://schemas.openxmlformats.org/drawingml/2006/main">
+            <a:off x="4524375" y="4391025"/>
+            <a:ext cx="2762250" cy="476250"/>
+          </a:xfrm>
+          <a:prstGeom xmlns:a="http://schemas.openxmlformats.org/drawingml/2006/main" prst="rect">
+            <a:avLst/>
+          </a:prstGeom>
+          <a:noFill xmlns:a="http://schemas.openxmlformats.org/drawingml/2006/main"/>
+          <a:ln xmlns:a="http://schemas.openxmlformats.org/drawingml/2006/main" w="0">
+            <a:noFill/>
+          </a:ln>
+        </p:spPr>
+        <p:txBody>
+          <a:bodyPr xmlns:a="http://schemas.openxmlformats.org/drawingml/2006/main" lIns="0" tIns="0" rIns="0" bIns="0"/>
+          <a:lstStyle xmlns:a="http://schemas.openxmlformats.org/drawingml/2006/main">
+            <a:defPPr algn="l">
+              <a:defRPr sz="2400" b="1">
+                <a:solidFill>
+                  <a:srgbClr val="007F80"/>
+                </a:solidFill>
+                <a:latin typeface="Arial"/>
+                <a:ea typeface="Arial"/>
+                <a:cs typeface="Arial"/>
+              </a:defRPr>
+            </a:defPPr>
+          </a:lstStyle>
+          <a:p xmlns:a="http://schemas.openxmlformats.org/drawingml/2006/main">
+            <a:pPr algn="l">
+              <a:defRPr sz="2400" b="1">
+                <a:solidFill>
+                  <a:srgbClr val="007F80"/>
+                </a:solidFill>
+                <a:latin typeface="Arial"/>
+                <a:ea typeface="Arial"/>
+                <a:cs typeface="Arial"/>
+              </a:defRPr>
+            </a:pPr>
+            <a:r>
+              <a:rPr sz="2400" b="1">
+                <a:solidFill>
+                  <a:srgbClr val="007F80"/>
+                </a:solidFill>
+                <a:latin typeface="Arial"/>
+                <a:ea typeface="Arial"/>
+                <a:cs typeface="Arial"/>
+              </a:rPr>
+              <a:t>Select</a:t>
+            </a:r>
+          </a:p>
+        </p:txBody>
+      </p:sp>
+      <p:sp>
+        <p:nvSpPr>
+          <p:cNvPr id="15" name="">
+            <a:extLst xmlns:a="http://schemas.openxmlformats.org/drawingml/2006/main">
+              <a:ext uri="{FF2B5EF4-FFF2-40B4-BE49-F238E27FC236}">
+                <a16:creationId xmlns:a16="http://schemas.microsoft.com/office/drawing/2014/main" id="{40072261-DF87-47CB-A18A-6B021D120260}"/>
+              </a:ext>
+            </a:extLst>
+          </p:cNvPr>
+          <p:cNvSpPr>
+            <a:spLocks xmlns:a="http://schemas.openxmlformats.org/drawingml/2006/main" noGrp="1"/>
+          </p:cNvSpPr>
+          <p:nvPr/>
+        </p:nvSpPr>
+        <p:spPr>
+          <a:xfrm xmlns:a="http://schemas.openxmlformats.org/drawingml/2006/main">
+            <a:off x="4524375" y="4943475"/>
+            <a:ext cx="2762250" cy="476250"/>
+          </a:xfrm>
+          <a:prstGeom xmlns:a="http://schemas.openxmlformats.org/drawingml/2006/main" prst="rect">
+            <a:avLst/>
+          </a:prstGeom>
+          <a:noFill xmlns:a="http://schemas.openxmlformats.org/drawingml/2006/main"/>
+          <a:ln xmlns:a="http://schemas.openxmlformats.org/drawingml/2006/main" w="0">
+            <a:noFill/>
+          </a:ln>
+        </p:spPr>
+        <p:txBody>
+          <a:bodyPr xmlns:a="http://schemas.openxmlformats.org/drawingml/2006/main" lIns="0" tIns="0" rIns="0" bIns="0"/>
+          <a:lstStyle xmlns:a="http://schemas.openxmlformats.org/drawingml/2006/main">
+            <a:defPPr algn="l">
+              <a:defRPr sz="1875" b="0">
+                <a:solidFill>
+                  <a:srgbClr val="132E40"/>
+                </a:solidFill>
+                <a:latin typeface="Arial"/>
+                <a:ea typeface="Arial"/>
+                <a:cs typeface="Arial"/>
+              </a:defRPr>
+            </a:defPPr>
+          </a:lstStyle>
+          <a:p xmlns:a="http://schemas.openxmlformats.org/drawingml/2006/main">
+            <a:pPr algn="l">
+              <a:defRPr sz="1875" b="0">
+                <a:solidFill>
+                  <a:srgbClr val="132E40"/>
+                </a:solidFill>
+                <a:latin typeface="Arial"/>
+                <a:ea typeface="Arial"/>
+                <a:cs typeface="Arial"/>
+              </a:defRPr>
+            </a:pPr>
+            <a:r>
+              <a:rPr sz="1875" b="0">
+                <a:solidFill>
+                  <a:srgbClr val="132E40"/>
+                </a:solidFill>
+                <a:latin typeface="Arial"/>
+                <a:ea typeface="Arial"/>
+                <a:cs typeface="Arial"/>
+              </a:rPr>
+              <a:t>10 episodes / checkpoint</a:t>
+            </a:r>
+          </a:p>
+        </p:txBody>
+      </p:sp>
+      <p:sp>
+        <p:nvSpPr>
+          <p:cNvPr id="16" name="">
+            <a:extLst xmlns:a="http://schemas.openxmlformats.org/drawingml/2006/main">
+              <a:ext uri="{FF2B5EF4-FFF2-40B4-BE49-F238E27FC236}">
+                <a16:creationId xmlns:a16="http://schemas.microsoft.com/office/drawing/2014/main" id="{8C448845-3CD5-41AF-9001-7DF46CB74AC3}"/>
+              </a:ext>
+            </a:extLst>
+          </p:cNvPr>
+          <p:cNvSpPr>
+            <a:spLocks xmlns:a="http://schemas.openxmlformats.org/drawingml/2006/main" noGrp="1"/>
+          </p:cNvSpPr>
+          <p:nvPr/>
+        </p:nvSpPr>
+        <p:spPr>
+          <a:xfrm xmlns:a="http://schemas.openxmlformats.org/drawingml/2006/main">
+            <a:off x="7677150" y="4752975"/>
+            <a:ext cx="457200" cy="228600"/>
+          </a:xfrm>
+          <a:prstGeom xmlns:a="http://schemas.openxmlformats.org/drawingml/2006/main" prst="rightArrow">
+            <a:avLst/>
+          </a:prstGeom>
+          <a:solidFill xmlns:a="http://schemas.openxmlformats.org/drawingml/2006/main">
+            <a:srgbClr val="007F80"/>
+          </a:solidFill>
+          <a:ln xmlns:a="http://schemas.openxmlformats.org/drawingml/2006/main" w="0">
+            <a:noFill/>
+          </a:ln>
+        </p:spPr>
+      </p:sp>
+      <p:sp>
+        <p:nvSpPr>
+          <p:cNvPr id="17" name="">
+            <a:extLst xmlns:a="http://schemas.openxmlformats.org/drawingml/2006/main">
+              <a:ext uri="{FF2B5EF4-FFF2-40B4-BE49-F238E27FC236}">
+                <a16:creationId xmlns:a16="http://schemas.microsoft.com/office/drawing/2014/main" id="{A3F4B734-67FC-41F2-94DE-9D66398EC7D8}"/>
+              </a:ext>
+            </a:extLst>
+          </p:cNvPr>
+          <p:cNvSpPr>
+            <a:spLocks xmlns:a="http://schemas.openxmlformats.org/drawingml/2006/main" noGrp="1"/>
+          </p:cNvSpPr>
+          <p:nvPr/>
+        </p:nvSpPr>
+        <p:spPr>
+          <a:xfrm xmlns:a="http://schemas.openxmlformats.org/drawingml/2006/main">
+            <a:off x="8343900" y="4200525"/>
+            <a:ext cx="3152775" cy="1333500"/>
+          </a:xfrm>
+          <a:prstGeom xmlns:a="http://schemas.openxmlformats.org/drawingml/2006/main" prst="rect">
+            <a:avLst/>
+          </a:prstGeom>
+          <a:solidFill xmlns:a="http://schemas.openxmlformats.org/drawingml/2006/main">
+            <a:srgbClr val="E7F4F1"/>
+          </a:solidFill>
+          <a:ln xmlns:a="http://schemas.openxmlformats.org/drawingml/2006/main" w="0">
+            <a:noFill/>
+          </a:ln>
+        </p:spPr>
+      </p:sp>
+      <p:sp>
+        <p:nvSpPr>
+          <p:cNvPr id="18" name="">
+            <a:extLst xmlns:a="http://schemas.openxmlformats.org/drawingml/2006/main">
+              <a:ext uri="{FF2B5EF4-FFF2-40B4-BE49-F238E27FC236}">
+                <a16:creationId xmlns:a16="http://schemas.microsoft.com/office/drawing/2014/main" id="{3D3B1C74-77AA-4E85-A556-E0E3CF793BE1}"/>
+              </a:ext>
+            </a:extLst>
+          </p:cNvPr>
+          <p:cNvSpPr>
+            <a:spLocks xmlns:a="http://schemas.openxmlformats.org/drawingml/2006/main" noGrp="1"/>
+          </p:cNvSpPr>
+          <p:nvPr/>
+        </p:nvSpPr>
+        <p:spPr>
+          <a:xfrm xmlns:a="http://schemas.openxmlformats.org/drawingml/2006/main">
+            <a:off x="8534400" y="4391025"/>
+            <a:ext cx="2771775" cy="476250"/>
+          </a:xfrm>
+          <a:prstGeom xmlns:a="http://schemas.openxmlformats.org/drawingml/2006/main" prst="rect">
+            <a:avLst/>
+          </a:prstGeom>
+          <a:noFill xmlns:a="http://schemas.openxmlformats.org/drawingml/2006/main"/>
+          <a:ln xmlns:a="http://schemas.openxmlformats.org/drawingml/2006/main" w="0">
+            <a:noFill/>
+          </a:ln>
+        </p:spPr>
+        <p:txBody>
+          <a:bodyPr xmlns:a="http://schemas.openxmlformats.org/drawingml/2006/main" lIns="0" tIns="0" rIns="0" bIns="0"/>
+          <a:lstStyle xmlns:a="http://schemas.openxmlformats.org/drawingml/2006/main">
+            <a:defPPr algn="l">
+              <a:defRPr sz="2400" b="1">
+                <a:solidFill>
+                  <a:srgbClr val="007F80"/>
+                </a:solidFill>
+                <a:latin typeface="Arial"/>
+                <a:ea typeface="Arial"/>
+                <a:cs typeface="Arial"/>
+              </a:defRPr>
+            </a:defPPr>
+          </a:lstStyle>
+          <a:p xmlns:a="http://schemas.openxmlformats.org/drawingml/2006/main">
+            <a:pPr algn="l">
+              <a:defRPr sz="2400" b="1">
+                <a:solidFill>
+                  <a:srgbClr val="007F80"/>
+                </a:solidFill>
+                <a:latin typeface="Arial"/>
+                <a:ea typeface="Arial"/>
+                <a:cs typeface="Arial"/>
+              </a:defRPr>
+            </a:pPr>
+            <a:r>
+              <a:rPr sz="2400" b="1">
+                <a:solidFill>
+                  <a:srgbClr val="007F80"/>
+                </a:solidFill>
+                <a:latin typeface="Arial"/>
+                <a:ea typeface="Arial"/>
+                <a:cs typeface="Arial"/>
+              </a:rPr>
+              <a:t>Final test</a:t>
+            </a:r>
+          </a:p>
+        </p:txBody>
+      </p:sp>
+      <p:sp>
+        <p:nvSpPr>
+          <p:cNvPr id="19" name="">
+            <a:extLst xmlns:a="http://schemas.openxmlformats.org/drawingml/2006/main">
+              <a:ext uri="{FF2B5EF4-FFF2-40B4-BE49-F238E27FC236}">
+                <a16:creationId xmlns:a16="http://schemas.microsoft.com/office/drawing/2014/main" id="{6FE7B635-369D-48F5-B000-56615D160E34}"/>
+              </a:ext>
+            </a:extLst>
+          </p:cNvPr>
+          <p:cNvSpPr>
+            <a:spLocks xmlns:a="http://schemas.openxmlformats.org/drawingml/2006/main" noGrp="1"/>
+          </p:cNvSpPr>
+          <p:nvPr/>
+        </p:nvSpPr>
+        <p:spPr>
+          <a:xfrm xmlns:a="http://schemas.openxmlformats.org/drawingml/2006/main">
+            <a:off x="8534400" y="4943475"/>
+            <a:ext cx="2771775" cy="476250"/>
+          </a:xfrm>
+          <a:prstGeom xmlns:a="http://schemas.openxmlformats.org/drawingml/2006/main" prst="rect">
+            <a:avLst/>
+          </a:prstGeom>
+          <a:noFill xmlns:a="http://schemas.openxmlformats.org/drawingml/2006/main"/>
+          <a:ln xmlns:a="http://schemas.openxmlformats.org/drawingml/2006/main" w="0">
+            <a:noFill/>
+          </a:ln>
+        </p:spPr>
+        <p:txBody>
+          <a:bodyPr xmlns:a="http://schemas.openxmlformats.org/drawingml/2006/main" lIns="0" tIns="0" rIns="0" bIns="0"/>
+          <a:lstStyle xmlns:a="http://schemas.openxmlformats.org/drawingml/2006/main">
+            <a:defPPr algn="l">
+              <a:defRPr sz="1875" b="0">
+                <a:solidFill>
+                  <a:srgbClr val="132E40"/>
+                </a:solidFill>
+                <a:latin typeface="Arial"/>
+                <a:ea typeface="Arial"/>
+                <a:cs typeface="Arial"/>
+              </a:defRPr>
+            </a:defPPr>
+          </a:lstStyle>
+          <a:p xmlns:a="http://schemas.openxmlformats.org/drawingml/2006/main">
+            <a:pPr algn="l">
+              <a:defRPr sz="1875" b="0">
+                <a:solidFill>
+                  <a:srgbClr val="132E40"/>
+                </a:solidFill>
+                <a:latin typeface="Arial"/>
+                <a:ea typeface="Arial"/>
+                <a:cs typeface="Arial"/>
+              </a:defRPr>
+            </a:pPr>
+            <a:r>
+              <a:rPr sz="1875" b="0">
+                <a:solidFill>
+                  <a:srgbClr val="132E40"/>
+                </a:solidFill>
+                <a:latin typeface="Arial"/>
+                <a:ea typeface="Arial"/>
+                <a:cs typeface="Arial"/>
+              </a:rPr>
+              <a:t>Separate episode seeds</a:t>
+            </a:r>
+          </a:p>
+        </p:txBody>
+      </p:sp>
+      <p:sp>
+        <p:nvSpPr>
+          <p:cNvPr id="20" name="">
+            <a:extLst xmlns:a="http://schemas.openxmlformats.org/drawingml/2006/main">
+              <a:ext uri="{FF2B5EF4-FFF2-40B4-BE49-F238E27FC236}">
+                <a16:creationId xmlns:a16="http://schemas.microsoft.com/office/drawing/2014/main" id="{E0A60A0F-968A-4020-9966-9D33B1B2E2F8}"/>
+              </a:ext>
+            </a:extLst>
+          </p:cNvPr>
+          <p:cNvSpPr>
+            <a:spLocks xmlns:a="http://schemas.openxmlformats.org/drawingml/2006/main" noGrp="1"/>
+          </p:cNvSpPr>
+          <p:nvPr/>
+        </p:nvSpPr>
+        <p:spPr>
+          <a:xfrm xmlns:a="http://schemas.openxmlformats.org/drawingml/2006/main">
+            <a:off x="609600" y="5819775"/>
+            <a:ext cx="10668000" cy="400050"/>
+          </a:xfrm>
+          <a:prstGeom xmlns:a="http://schemas.openxmlformats.org/drawingml/2006/main" prst="rect">
+            <a:avLst/>
+          </a:prstGeom>
+          <a:noFill xmlns:a="http://schemas.openxmlformats.org/drawingml/2006/main"/>
+          <a:ln xmlns:a="http://schemas.openxmlformats.org/drawingml/2006/main" w="0">
+            <a:noFill/>
+          </a:ln>
+        </p:spPr>
+        <p:txBody>
+          <a:bodyPr xmlns:a="http://schemas.openxmlformats.org/drawingml/2006/main" lIns="0" tIns="0" rIns="0" bIns="0"/>
+          <a:lstStyle xmlns:a="http://schemas.openxmlformats.org/drawingml/2006/main">
+            <a:defPPr algn="l">
+              <a:defRPr sz="2100" b="1">
+                <a:solidFill>
+                  <a:srgbClr val="132E40"/>
+                </a:solidFill>
+                <a:latin typeface="Arial"/>
+                <a:ea typeface="Arial"/>
+                <a:cs typeface="Arial"/>
+              </a:defRPr>
+            </a:defPPr>
+          </a:lstStyle>
+          <a:p xmlns:a="http://schemas.openxmlformats.org/drawingml/2006/main">
+            <a:pPr algn="l">
+              <a:defRPr sz="2100" b="1">
+                <a:solidFill>
+                  <a:srgbClr val="132E40"/>
+                </a:solidFill>
+                <a:latin typeface="Arial"/>
+                <a:ea typeface="Arial"/>
+                <a:cs typeface="Arial"/>
+              </a:defRPr>
+            </a:pPr>
+            <a:r>
+              <a:rPr sz="2100" b="1">
+                <a:solidFill>
+                  <a:srgbClr val="132E40"/>
+                </a:solidFill>
+                <a:latin typeface="Arial"/>
+                <a:ea typeface="Arial"/>
+                <a:cs typeface="Arial"/>
+              </a:rPr>
+              <a:t>Raw return + random baseline + full videos</a:t>
+            </a:r>
+          </a:p>
+        </p:txBody>
+      </p:sp>
+      <p:sp>
+        <p:nvSpPr>
+          <p:cNvPr id="21" name="">
+            <a:extLst xmlns:a="http://schemas.openxmlformats.org/drawingml/2006/main">
+              <a:ext uri="{FF2B5EF4-FFF2-40B4-BE49-F238E27FC236}">
+                <a16:creationId xmlns:a16="http://schemas.microsoft.com/office/drawing/2014/main" id="{924FD03F-6DE3-4548-8848-4B4A705BED97}"/>
+              </a:ext>
+            </a:extLst>
+          </p:cNvPr>
+          <p:cNvSpPr>
+            <a:spLocks xmlns:a="http://schemas.openxmlformats.org/drawingml/2006/main" noGrp="1"/>
+          </p:cNvSpPr>
+          <p:nvPr/>
+        </p:nvSpPr>
+        <p:spPr>
+          <a:xfrm xmlns:a="http://schemas.openxmlformats.org/drawingml/2006/main">
+            <a:off x="609600" y="6238875"/>
+            <a:ext cx="10096500" cy="295275"/>
+          </a:xfrm>
+          <a:prstGeom xmlns:a="http://schemas.openxmlformats.org/drawingml/2006/main" prst="rect">
+            <a:avLst/>
+          </a:prstGeom>
+          <a:noFill xmlns:a="http://schemas.openxmlformats.org/drawingml/2006/main"/>
+          <a:ln xmlns:a="http://schemas.openxmlformats.org/drawingml/2006/main" w="0">
+            <a:noFill/>
+          </a:ln>
+        </p:spPr>
+        <p:txBody>
+          <a:bodyPr xmlns:a="http://schemas.openxmlformats.org/drawingml/2006/main" lIns="0" tIns="0" rIns="0" bIns="0"/>
+          <a:lstStyle xmlns:a="http://schemas.openxmlformats.org/drawingml/2006/main">
+            <a:defPPr algn="l">
+              <a:defRPr sz="1725" b="0">
+                <a:solidFill>
+                  <a:srgbClr val="6D8190"/>
+                </a:solidFill>
+                <a:latin typeface="Arial"/>
+                <a:ea typeface="Arial"/>
+                <a:cs typeface="Arial"/>
+              </a:defRPr>
+            </a:defPPr>
+          </a:lstStyle>
+          <a:p xmlns:a="http://schemas.openxmlformats.org/drawingml/2006/main">
+            <a:pPr algn="l">
+              <a:defRPr sz="1725" b="0">
+                <a:solidFill>
+                  <a:srgbClr val="6D8190"/>
+                </a:solidFill>
+                <a:latin typeface="Arial"/>
+                <a:ea typeface="Arial"/>
+                <a:cs typeface="Arial"/>
+              </a:defRPr>
+            </a:pPr>
+            <a:r>
+              <a:rPr sz="1725" b="0">
+                <a:solidFill>
+                  <a:srgbClr val="6D8190"/>
+                </a:solidFill>
+                <a:latin typeface="Arial"/>
+                <a:ea typeface="Arial"/>
+                <a:cs typeface="Arial"/>
+              </a:rPr>
+              <a:t>Dataset-matched simulator: MuJoCo 3.2.3</a:t>
+            </a:r>
+          </a:p>
+        </p:txBody>
+      </p:sp>
+      <p:sp>
+        <p:nvSpPr>
+          <p:cNvPr id="22" name="">
+            <a:extLst xmlns:a="http://schemas.openxmlformats.org/drawingml/2006/main">
+              <a:ext uri="{FF2B5EF4-FFF2-40B4-BE49-F238E27FC236}">
+                <a16:creationId xmlns:a16="http://schemas.microsoft.com/office/drawing/2014/main" id="{DC42AA95-F550-4C96-8B0D-10E4FFEDC03F}"/>
+              </a:ext>
+            </a:extLst>
+          </p:cNvPr>
+          <p:cNvSpPr>
+            <a:spLocks xmlns:a="http://schemas.openxmlformats.org/drawingml/2006/main" noGrp="1"/>
+          </p:cNvSpPr>
+          <p:nvPr/>
+        </p:nvSpPr>
+        <p:spPr>
+          <a:xfrm xmlns:a="http://schemas.openxmlformats.org/drawingml/2006/main">
+            <a:off x="11077575" y="6457950"/>
+            <a:ext cx="666750" cy="266700"/>
+          </a:xfrm>
+          <a:prstGeom xmlns:a="http://schemas.openxmlformats.org/drawingml/2006/main" prst="rect">
+            <a:avLst/>
+          </a:prstGeom>
+          <a:noFill xmlns:a="http://schemas.openxmlformats.org/drawingml/2006/main"/>
+          <a:ln xmlns:a="http://schemas.openxmlformats.org/drawingml/2006/main" w="0">
+            <a:noFill/>
+          </a:ln>
+        </p:spPr>
+        <p:txBody>
+          <a:bodyPr xmlns:a="http://schemas.openxmlformats.org/drawingml/2006/main" lIns="0" tIns="0" rIns="0" bIns="0"/>
+          <a:lstStyle xmlns:a="http://schemas.openxmlformats.org/drawingml/2006/main">
+            <a:defPPr algn="l">
               <a:defRPr sz="1350" b="0">
                 <a:solidFill>
-                  <a:srgbClr val="5B6D7A"/>
+                  <a:srgbClr val="6D8190"/>
+                </a:solidFill>
+                <a:latin typeface="Arial"/>
+                <a:ea typeface="Arial"/>
+                <a:cs typeface="Arial"/>
+              </a:defRPr>
+            </a:defPPr>
+          </a:lstStyle>
+          <a:p xmlns:a="http://schemas.openxmlformats.org/drawingml/2006/main">
+            <a:pPr algn="l">
+              <a:defRPr sz="1350" b="0">
+                <a:solidFill>
+                  <a:srgbClr val="6D8190"/>
                 </a:solidFill>
                 <a:latin typeface="Arial"/>
                 <a:ea typeface="Arial"/>
@@ -7454,7 +10008,7 @@
             <a:r>
               <a:rPr sz="1350" b="0">
                 <a:solidFill>
-                  <a:srgbClr val="5B6D7A"/>
+                  <a:srgbClr val="6D8190"/>
                 </a:solidFill>
                 <a:latin typeface="Arial"/>
                 <a:ea typeface="Arial"/>
@@ -7468,7 +10022,7 @@
     </p:spTree>
     <p:extLst>
       <p:ext uri="{BB962C8B-B14F-4D97-AF65-F5344CB8AC3E}">
-        <p14:creationId xmlns:p14="http://schemas.microsoft.com/office/powerpoint/2010/main" val="810176164"/>
+        <p14:creationId xmlns:p14="http://schemas.microsoft.com/office/powerpoint/2010/main" val="1162204892"/>
       </p:ext>
     </p:extLst>
   </p:cSld>
@@ -7481,7 +10035,7 @@
     <p:bg>
       <p:bgPr>
         <a:solidFill xmlns:a="http://schemas.openxmlformats.org/drawingml/2006/main">
-          <a:srgbClr val="F7FAFC"/>
+          <a:srgbClr val="FBFCFD"/>
         </a:solidFill>
       </p:bgPr>
     </p:bg>
@@ -7496,10 +10050,10 @@
       </p:grpSpPr>
       <p:sp>
         <p:nvSpPr>
-          <p:cNvPr id="11" name="heading">
-            <a:extLst xmlns:a="http://schemas.openxmlformats.org/drawingml/2006/main">
-              <a:ext uri="{FF2B5EF4-FFF2-40B4-BE49-F238E27FC236}">
-                <a16:creationId xmlns:a16="http://schemas.microsoft.com/office/drawing/2014/main" id="{0B1BA02D-3E84-49B1-A2D8-CE56410A8878}"/>
+          <p:cNvPr id="15" name="">
+            <a:extLst xmlns:a="http://schemas.openxmlformats.org/drawingml/2006/main">
+              <a:ext uri="{FF2B5EF4-FFF2-40B4-BE49-F238E27FC236}">
+                <a16:creationId xmlns:a16="http://schemas.microsoft.com/office/drawing/2014/main" id="{DAF3E441-C42D-496C-BE8C-8285C2F57CBB}"/>
               </a:ext>
             </a:extLst>
           </p:cNvPr>
@@ -7510,8 +10064,8 @@
         </p:nvSpPr>
         <p:spPr>
           <a:xfrm xmlns:a="http://schemas.openxmlformats.org/drawingml/2006/main">
-            <a:off x="685800" y="523875"/>
-            <a:ext cx="10858500" cy="933450"/>
+            <a:off x="609600" y="457200"/>
+            <a:ext cx="11049000" cy="952500"/>
           </a:xfrm>
           <a:prstGeom xmlns:a="http://schemas.openxmlformats.org/drawingml/2006/main" prst="rect">
             <a:avLst/>
@@ -7524,10 +10078,10 @@
         <p:txBody>
           <a:bodyPr xmlns:a="http://schemas.openxmlformats.org/drawingml/2006/main" lIns="0" tIns="0" rIns="0" bIns="0"/>
           <a:lstStyle xmlns:a="http://schemas.openxmlformats.org/drawingml/2006/main">
-            <a:defPPr>
+            <a:defPPr algn="l">
               <a:defRPr sz="3450" b="1">
                 <a:solidFill>
-                  <a:srgbClr val="142B40"/>
+                  <a:srgbClr val="132E40"/>
                 </a:solidFill>
                 <a:latin typeface="Arial"/>
                 <a:ea typeface="Arial"/>
@@ -7536,10 +10090,10 @@
             </a:defPPr>
           </a:lstStyle>
           <a:p xmlns:a="http://schemas.openxmlformats.org/drawingml/2006/main">
-            <a:pPr>
+            <a:pPr algn="l">
               <a:defRPr sz="3450" b="1">
                 <a:solidFill>
-                  <a:srgbClr val="142B40"/>
+                  <a:srgbClr val="132E40"/>
                 </a:solidFill>
                 <a:latin typeface="Arial"/>
                 <a:ea typeface="Arial"/>
@@ -7549,23 +10103,23 @@
             <a:r>
               <a:rPr sz="3450" b="1">
                 <a:solidFill>
-                  <a:srgbClr val="142B40"/>
+                  <a:srgbClr val="132E40"/>
                 </a:solidFill>
                 <a:latin typeface="Arial"/>
                 <a:ea typeface="Arial"/>
                 <a:cs typeface="Arial"/>
               </a:rPr>
-              <a:t>Why IQL and HalfCheetah fit</a:t>
-            </a:r>
-          </a:p>
-        </p:txBody>
-      </p:sp>
-      <p:sp>
-        <p:nvSpPr>
-          <p:cNvPr id="2" name="heading">
-            <a:extLst xmlns:a="http://schemas.openxmlformats.org/drawingml/2006/main">
-              <a:ext uri="{FF2B5EF4-FFF2-40B4-BE49-F238E27FC236}">
-                <a16:creationId xmlns:a16="http://schemas.microsoft.com/office/drawing/2014/main" id="{E8D04B30-9EA1-4505-9D26-99FEDDB78E09}"/>
+              <a:t>Why this algorithm fits this task</a:t>
+            </a:r>
+          </a:p>
+        </p:txBody>
+      </p:sp>
+      <p:sp>
+        <p:nvSpPr>
+          <p:cNvPr id="2" name="">
+            <a:extLst xmlns:a="http://schemas.openxmlformats.org/drawingml/2006/main">
+              <a:ext uri="{FF2B5EF4-FFF2-40B4-BE49-F238E27FC236}">
+                <a16:creationId xmlns:a16="http://schemas.microsoft.com/office/drawing/2014/main" id="{F017FBDC-86A1-4046-802C-3E5638777503}"/>
               </a:ext>
             </a:extLst>
           </p:cNvPr>
@@ -7576,8 +10130,8 @@
         </p:nvSpPr>
         <p:spPr>
           <a:xfrm xmlns:a="http://schemas.openxmlformats.org/drawingml/2006/main">
-            <a:off x="685800" y="1762125"/>
-            <a:ext cx="2714625" cy="647700"/>
+            <a:off x="609600" y="1685925"/>
+            <a:ext cx="4953000" cy="533400"/>
           </a:xfrm>
           <a:prstGeom xmlns:a="http://schemas.openxmlformats.org/drawingml/2006/main" prst="rect">
             <a:avLst/>
@@ -7590,10 +10144,10 @@
         <p:txBody>
           <a:bodyPr xmlns:a="http://schemas.openxmlformats.org/drawingml/2006/main" lIns="0" tIns="0" rIns="0" bIns="0"/>
           <a:lstStyle xmlns:a="http://schemas.openxmlformats.org/drawingml/2006/main">
-            <a:defPPr>
-              <a:defRPr sz="2100" b="1">
-                <a:solidFill>
-                  <a:srgbClr val="147A78"/>
+            <a:defPPr algn="l">
+              <a:defRPr sz="2550" b="1">
+                <a:solidFill>
+                  <a:srgbClr val="132E40"/>
                 </a:solidFill>
                 <a:latin typeface="Arial"/>
                 <a:ea typeface="Arial"/>
@@ -7602,10 +10156,10 @@
             </a:defPPr>
           </a:lstStyle>
           <a:p xmlns:a="http://schemas.openxmlformats.org/drawingml/2006/main">
-            <a:pPr>
-              <a:defRPr sz="2100" b="1">
-                <a:solidFill>
-                  <a:srgbClr val="147A78"/>
+            <a:pPr algn="l">
+              <a:defRPr sz="2550" b="1">
+                <a:solidFill>
+                  <a:srgbClr val="132E40"/>
                 </a:solidFill>
                 <a:latin typeface="Arial"/>
                 <a:ea typeface="Arial"/>
@@ -7613,25 +10167,25 @@
               </a:defRPr>
             </a:pPr>
             <a:r>
-              <a:rPr sz="2100" b="1">
-                <a:solidFill>
-                  <a:srgbClr val="147A78"/>
+              <a:rPr sz="2550" b="1">
+                <a:solidFill>
+                  <a:srgbClr val="132E40"/>
                 </a:solidFill>
                 <a:latin typeface="Arial"/>
                 <a:ea typeface="Arial"/>
                 <a:cs typeface="Arial"/>
               </a:rPr>
-              <a:t>Continuous control</a:t>
-            </a:r>
-          </a:p>
-        </p:txBody>
-      </p:sp>
-      <p:sp>
-        <p:nvSpPr>
-          <p:cNvPr id="3" name="body">
-            <a:extLst xmlns:a="http://schemas.openxmlformats.org/drawingml/2006/main">
-              <a:ext uri="{FF2B5EF4-FFF2-40B4-BE49-F238E27FC236}">
-                <a16:creationId xmlns:a16="http://schemas.microsoft.com/office/drawing/2014/main" id="{87456B97-C3BD-4B65-B74D-B497A0D7AD0D}"/>
+              <a:t>Continuous torques</a:t>
+            </a:r>
+          </a:p>
+        </p:txBody>
+      </p:sp>
+      <p:sp>
+        <p:nvSpPr>
+          <p:cNvPr id="3" name="">
+            <a:extLst xmlns:a="http://schemas.openxmlformats.org/drawingml/2006/main">
+              <a:ext uri="{FF2B5EF4-FFF2-40B4-BE49-F238E27FC236}">
+                <a16:creationId xmlns:a16="http://schemas.microsoft.com/office/drawing/2014/main" id="{4E9625A3-1D80-4C83-B446-1027EE7CAE23}"/>
               </a:ext>
             </a:extLst>
           </p:cNvPr>
@@ -7642,8 +10196,38 @@
         </p:nvSpPr>
         <p:spPr>
           <a:xfrm xmlns:a="http://schemas.openxmlformats.org/drawingml/2006/main">
-            <a:off x="3571875" y="1762125"/>
-            <a:ext cx="7858125" cy="952500"/>
+            <a:off x="5610225" y="1781175"/>
+            <a:ext cx="685800" cy="228600"/>
+          </a:xfrm>
+          <a:prstGeom xmlns:a="http://schemas.openxmlformats.org/drawingml/2006/main" prst="rightArrow">
+            <a:avLst/>
+          </a:prstGeom>
+          <a:solidFill xmlns:a="http://schemas.openxmlformats.org/drawingml/2006/main">
+            <a:srgbClr val="007F80"/>
+          </a:solidFill>
+          <a:ln xmlns:a="http://schemas.openxmlformats.org/drawingml/2006/main" w="0">
+            <a:noFill/>
+          </a:ln>
+        </p:spPr>
+      </p:sp>
+      <p:sp>
+        <p:nvSpPr>
+          <p:cNvPr id="4" name="">
+            <a:extLst xmlns:a="http://schemas.openxmlformats.org/drawingml/2006/main">
+              <a:ext uri="{FF2B5EF4-FFF2-40B4-BE49-F238E27FC236}">
+                <a16:creationId xmlns:a16="http://schemas.microsoft.com/office/drawing/2014/main" id="{28A79B2E-D025-4270-BE66-27D5E074DDBE}"/>
+              </a:ext>
+            </a:extLst>
+          </p:cNvPr>
+          <p:cNvSpPr>
+            <a:spLocks xmlns:a="http://schemas.openxmlformats.org/drawingml/2006/main" noGrp="1"/>
+          </p:cNvSpPr>
+          <p:nvPr/>
+        </p:nvSpPr>
+        <p:spPr>
+          <a:xfrm xmlns:a="http://schemas.openxmlformats.org/drawingml/2006/main">
+            <a:off x="6762750" y="1685925"/>
+            <a:ext cx="4762500" cy="533400"/>
           </a:xfrm>
           <a:prstGeom xmlns:a="http://schemas.openxmlformats.org/drawingml/2006/main" prst="rect">
             <a:avLst/>
@@ -7656,10 +10240,10 @@
         <p:txBody>
           <a:bodyPr xmlns:a="http://schemas.openxmlformats.org/drawingml/2006/main" lIns="0" tIns="0" rIns="0" bIns="0"/>
           <a:lstStyle xmlns:a="http://schemas.openxmlformats.org/drawingml/2006/main">
-            <a:defPPr>
-              <a:defRPr sz="2025" b="0">
-                <a:solidFill>
-                  <a:srgbClr val="142B40"/>
+            <a:defPPr algn="l">
+              <a:defRPr sz="2550" b="1">
+                <a:solidFill>
+                  <a:srgbClr val="007F80"/>
                 </a:solidFill>
                 <a:latin typeface="Arial"/>
                 <a:ea typeface="Arial"/>
@@ -7668,10 +10252,10 @@
             </a:defPPr>
           </a:lstStyle>
           <a:p xmlns:a="http://schemas.openxmlformats.org/drawingml/2006/main">
-            <a:pPr>
-              <a:defRPr sz="2025" b="0">
-                <a:solidFill>
-                  <a:srgbClr val="142B40"/>
+            <a:pPr algn="l">
+              <a:defRPr sz="2550" b="1">
+                <a:solidFill>
+                  <a:srgbClr val="007F80"/>
                 </a:solidFill>
                 <a:latin typeface="Arial"/>
                 <a:ea typeface="Arial"/>
@@ -7679,25 +10263,25 @@
               </a:defRPr>
             </a:pPr>
             <a:r>
-              <a:rPr sz="2025" b="0">
-                <a:solidFill>
-                  <a:srgbClr val="142B40"/>
+              <a:rPr sz="2550" b="1">
+                <a:solidFill>
+                  <a:srgbClr val="007F80"/>
                 </a:solidFill>
                 <a:latin typeface="Arial"/>
                 <a:ea typeface="Arial"/>
                 <a:cs typeface="Arial"/>
               </a:rPr>
-              <a:t>The policy learns bounded joint torques directly</a:t>
-            </a:r>
-          </a:p>
-        </p:txBody>
-      </p:sp>
-      <p:sp>
-        <p:nvSpPr>
-          <p:cNvPr id="4" name="heading">
-            <a:extLst xmlns:a="http://schemas.openxmlformats.org/drawingml/2006/main">
-              <a:ext uri="{FF2B5EF4-FFF2-40B4-BE49-F238E27FC236}">
-                <a16:creationId xmlns:a16="http://schemas.microsoft.com/office/drawing/2014/main" id="{2A65AC29-6765-46EE-ABD8-A83455E9FE2D}"/>
+              <a:t>Continuous actor</a:t>
+            </a:r>
+          </a:p>
+        </p:txBody>
+      </p:sp>
+      <p:sp>
+        <p:nvSpPr>
+          <p:cNvPr id="5" name="">
+            <a:extLst xmlns:a="http://schemas.openxmlformats.org/drawingml/2006/main">
+              <a:ext uri="{FF2B5EF4-FFF2-40B4-BE49-F238E27FC236}">
+                <a16:creationId xmlns:a16="http://schemas.microsoft.com/office/drawing/2014/main" id="{2D843AEC-6E82-46C7-8967-B5EE4F34C8AB}"/>
               </a:ext>
             </a:extLst>
           </p:cNvPr>
@@ -7708,8 +10292,8 @@
         </p:nvSpPr>
         <p:spPr>
           <a:xfrm xmlns:a="http://schemas.openxmlformats.org/drawingml/2006/main">
-            <a:off x="685800" y="2800350"/>
-            <a:ext cx="2714625" cy="647700"/>
+            <a:off x="609600" y="2819400"/>
+            <a:ext cx="4953000" cy="533400"/>
           </a:xfrm>
           <a:prstGeom xmlns:a="http://schemas.openxmlformats.org/drawingml/2006/main" prst="rect">
             <a:avLst/>
@@ -7722,10 +10306,10 @@
         <p:txBody>
           <a:bodyPr xmlns:a="http://schemas.openxmlformats.org/drawingml/2006/main" lIns="0" tIns="0" rIns="0" bIns="0"/>
           <a:lstStyle xmlns:a="http://schemas.openxmlformats.org/drawingml/2006/main">
-            <a:defPPr>
-              <a:defRPr sz="2100" b="1">
-                <a:solidFill>
-                  <a:srgbClr val="147A78"/>
+            <a:defPPr algn="l">
+              <a:defRPr sz="2550" b="1">
+                <a:solidFill>
+                  <a:srgbClr val="132E40"/>
                 </a:solidFill>
                 <a:latin typeface="Arial"/>
                 <a:ea typeface="Arial"/>
@@ -7734,10 +10318,10 @@
             </a:defPPr>
           </a:lstStyle>
           <a:p xmlns:a="http://schemas.openxmlformats.org/drawingml/2006/main">
-            <a:pPr>
-              <a:defRPr sz="2100" b="1">
-                <a:solidFill>
-                  <a:srgbClr val="147A78"/>
+            <a:pPr algn="l">
+              <a:defRPr sz="2550" b="1">
+                <a:solidFill>
+                  <a:srgbClr val="132E40"/>
                 </a:solidFill>
                 <a:latin typeface="Arial"/>
                 <a:ea typeface="Arial"/>
@@ -7745,25 +10329,25 @@
               </a:defRPr>
             </a:pPr>
             <a:r>
-              <a:rPr sz="2100" b="1">
-                <a:solidFill>
-                  <a:srgbClr val="147A78"/>
+              <a:rPr sz="2550" b="1">
+                <a:solidFill>
+                  <a:srgbClr val="132E40"/>
                 </a:solidFill>
                 <a:latin typeface="Arial"/>
                 <a:ea typeface="Arial"/>
                 <a:cs typeface="Arial"/>
               </a:rPr>
-              <a:t>Available offline data</a:t>
-            </a:r>
-          </a:p>
-        </p:txBody>
-      </p:sp>
-      <p:sp>
-        <p:nvSpPr>
-          <p:cNvPr id="5" name="body">
-            <a:extLst xmlns:a="http://schemas.openxmlformats.org/drawingml/2006/main">
-              <a:ext uri="{FF2B5EF4-FFF2-40B4-BE49-F238E27FC236}">
-                <a16:creationId xmlns:a16="http://schemas.microsoft.com/office/drawing/2014/main" id="{742A1ABE-72BD-4C0A-986E-3180ABA53EBC}"/>
+              <a:t>Recorded locomotion</a:t>
+            </a:r>
+          </a:p>
+        </p:txBody>
+      </p:sp>
+      <p:sp>
+        <p:nvSpPr>
+          <p:cNvPr id="6" name="">
+            <a:extLst xmlns:a="http://schemas.openxmlformats.org/drawingml/2006/main">
+              <a:ext uri="{FF2B5EF4-FFF2-40B4-BE49-F238E27FC236}">
+                <a16:creationId xmlns:a16="http://schemas.microsoft.com/office/drawing/2014/main" id="{3290C158-CDBE-4235-88B0-A0EFCCEB48A5}"/>
               </a:ext>
             </a:extLst>
           </p:cNvPr>
@@ -7774,8 +10358,38 @@
         </p:nvSpPr>
         <p:spPr>
           <a:xfrm xmlns:a="http://schemas.openxmlformats.org/drawingml/2006/main">
-            <a:off x="3571875" y="2800350"/>
-            <a:ext cx="7858125" cy="952500"/>
+            <a:off x="5610225" y="2914650"/>
+            <a:ext cx="685800" cy="228600"/>
+          </a:xfrm>
+          <a:prstGeom xmlns:a="http://schemas.openxmlformats.org/drawingml/2006/main" prst="rightArrow">
+            <a:avLst/>
+          </a:prstGeom>
+          <a:solidFill xmlns:a="http://schemas.openxmlformats.org/drawingml/2006/main">
+            <a:srgbClr val="007F80"/>
+          </a:solidFill>
+          <a:ln xmlns:a="http://schemas.openxmlformats.org/drawingml/2006/main" w="0">
+            <a:noFill/>
+          </a:ln>
+        </p:spPr>
+      </p:sp>
+      <p:sp>
+        <p:nvSpPr>
+          <p:cNvPr id="7" name="">
+            <a:extLst xmlns:a="http://schemas.openxmlformats.org/drawingml/2006/main">
+              <a:ext uri="{FF2B5EF4-FFF2-40B4-BE49-F238E27FC236}">
+                <a16:creationId xmlns:a16="http://schemas.microsoft.com/office/drawing/2014/main" id="{126820E3-14A2-470C-9120-9ABB95A0C270}"/>
+              </a:ext>
+            </a:extLst>
+          </p:cNvPr>
+          <p:cNvSpPr>
+            <a:spLocks xmlns:a="http://schemas.openxmlformats.org/drawingml/2006/main" noGrp="1"/>
+          </p:cNvSpPr>
+          <p:nvPr/>
+        </p:nvSpPr>
+        <p:spPr>
+          <a:xfrm xmlns:a="http://schemas.openxmlformats.org/drawingml/2006/main">
+            <a:off x="6762750" y="2819400"/>
+            <a:ext cx="4762500" cy="533400"/>
           </a:xfrm>
           <a:prstGeom xmlns:a="http://schemas.openxmlformats.org/drawingml/2006/main" prst="rect">
             <a:avLst/>
@@ -7788,10 +10402,10 @@
         <p:txBody>
           <a:bodyPr xmlns:a="http://schemas.openxmlformats.org/drawingml/2006/main" lIns="0" tIns="0" rIns="0" bIns="0"/>
           <a:lstStyle xmlns:a="http://schemas.openxmlformats.org/drawingml/2006/main">
-            <a:defPPr>
-              <a:defRPr sz="2025" b="0">
-                <a:solidFill>
-                  <a:srgbClr val="142B40"/>
+            <a:defPPr algn="l">
+              <a:defRPr sz="2550" b="1">
+                <a:solidFill>
+                  <a:srgbClr val="007F80"/>
                 </a:solidFill>
                 <a:latin typeface="Arial"/>
                 <a:ea typeface="Arial"/>
@@ -7800,10 +10414,10 @@
             </a:defPPr>
           </a:lstStyle>
           <a:p xmlns:a="http://schemas.openxmlformats.org/drawingml/2006/main">
-            <a:pPr>
-              <a:defRPr sz="2025" b="0">
-                <a:solidFill>
-                  <a:srgbClr val="142B40"/>
+            <a:pPr algn="l">
+              <a:defRPr sz="2550" b="1">
+                <a:solidFill>
+                  <a:srgbClr val="007F80"/>
                 </a:solidFill>
                 <a:latin typeface="Arial"/>
                 <a:ea typeface="Arial"/>
@@ -7811,48 +10425,25 @@
               </a:defRPr>
             </a:pPr>
             <a:r>
-              <a:rPr sz="2025" b="0">
-                <a:solidFill>
-                  <a:srgbClr val="142B40"/>
+              <a:rPr sz="2550" b="1">
+                <a:solidFill>
+                  <a:srgbClr val="007F80"/>
                 </a:solidFill>
                 <a:latin typeface="Arial"/>
                 <a:ea typeface="Arial"/>
                 <a:cs typeface="Arial"/>
               </a:rPr>
-              <a:t>A fixed locomotion dataset supports IQL training</a:t>
-            </a:r>
-          </a:p>
-          <a:p xmlns:a="http://schemas.openxmlformats.org/drawingml/2006/main">
-            <a:pPr>
-              <a:defRPr sz="2025" b="0">
-                <a:solidFill>
-                  <a:srgbClr val="142B40"/>
-                </a:solidFill>
-                <a:latin typeface="Arial"/>
-                <a:ea typeface="Arial"/>
-                <a:cs typeface="Arial"/>
-              </a:defRPr>
-            </a:pPr>
-            <a:r>
-              <a:rPr sz="2025" b="0">
-                <a:solidFill>
-                  <a:srgbClr val="142B40"/>
-                </a:solidFill>
-                <a:latin typeface="Arial"/>
-                <a:ea typeface="Arial"/>
-                <a:cs typeface="Arial"/>
-              </a:rPr>
-              <a:t>without collecting new training rollouts</a:t>
-            </a:r>
-          </a:p>
-        </p:txBody>
-      </p:sp>
-      <p:sp>
-        <p:nvSpPr>
-          <p:cNvPr id="6" name="heading">
-            <a:extLst xmlns:a="http://schemas.openxmlformats.org/drawingml/2006/main">
-              <a:ext uri="{FF2B5EF4-FFF2-40B4-BE49-F238E27FC236}">
-                <a16:creationId xmlns:a16="http://schemas.microsoft.com/office/drawing/2014/main" id="{C91CA171-99B2-412B-9443-59F7F11DC8F9}"/>
+              <a:t>Offline learning</a:t>
+            </a:r>
+          </a:p>
+        </p:txBody>
+      </p:sp>
+      <p:sp>
+        <p:nvSpPr>
+          <p:cNvPr id="8" name="">
+            <a:extLst xmlns:a="http://schemas.openxmlformats.org/drawingml/2006/main">
+              <a:ext uri="{FF2B5EF4-FFF2-40B4-BE49-F238E27FC236}">
+                <a16:creationId xmlns:a16="http://schemas.microsoft.com/office/drawing/2014/main" id="{C3402D53-CAF5-446F-84EC-CB1BA77EFB9C}"/>
               </a:ext>
             </a:extLst>
           </p:cNvPr>
@@ -7863,8 +10454,8 @@
         </p:nvSpPr>
         <p:spPr>
           <a:xfrm xmlns:a="http://schemas.openxmlformats.org/drawingml/2006/main">
-            <a:off x="685800" y="3838575"/>
-            <a:ext cx="2714625" cy="647700"/>
+            <a:off x="609600" y="3952875"/>
+            <a:ext cx="4953000" cy="533400"/>
           </a:xfrm>
           <a:prstGeom xmlns:a="http://schemas.openxmlformats.org/drawingml/2006/main" prst="rect">
             <a:avLst/>
@@ -7877,10 +10468,10 @@
         <p:txBody>
           <a:bodyPr xmlns:a="http://schemas.openxmlformats.org/drawingml/2006/main" lIns="0" tIns="0" rIns="0" bIns="0"/>
           <a:lstStyle xmlns:a="http://schemas.openxmlformats.org/drawingml/2006/main">
-            <a:defPPr>
-              <a:defRPr sz="2100" b="1">
-                <a:solidFill>
-                  <a:srgbClr val="147A78"/>
+            <a:defPPr algn="l">
+              <a:defRPr sz="2550" b="1">
+                <a:solidFill>
+                  <a:srgbClr val="132E40"/>
                 </a:solidFill>
                 <a:latin typeface="Arial"/>
                 <a:ea typeface="Arial"/>
@@ -7889,10 +10480,10 @@
             </a:defPPr>
           </a:lstStyle>
           <a:p xmlns:a="http://schemas.openxmlformats.org/drawingml/2006/main">
-            <a:pPr>
-              <a:defRPr sz="2100" b="1">
-                <a:solidFill>
-                  <a:srgbClr val="147A78"/>
+            <a:pPr algn="l">
+              <a:defRPr sz="2550" b="1">
+                <a:solidFill>
+                  <a:srgbClr val="132E40"/>
                 </a:solidFill>
                 <a:latin typeface="Arial"/>
                 <a:ea typeface="Arial"/>
@@ -7900,25 +10491,25 @@
               </a:defRPr>
             </a:pPr>
             <a:r>
-              <a:rPr sz="2100" b="1">
-                <a:solidFill>
-                  <a:srgbClr val="147A78"/>
+              <a:rPr sz="2550" b="1">
+                <a:solidFill>
+                  <a:srgbClr val="132E40"/>
                 </a:solidFill>
                 <a:latin typeface="Arial"/>
                 <a:ea typeface="Arial"/>
                 <a:cs typeface="Arial"/>
               </a:rPr>
-              <a:t>Learning opportunity</a:t>
-            </a:r>
-          </a:p>
-        </p:txBody>
-      </p:sp>
-      <p:sp>
-        <p:nvSpPr>
-          <p:cNvPr id="7" name="body">
-            <a:extLst xmlns:a="http://schemas.openxmlformats.org/drawingml/2006/main">
-              <a:ext uri="{FF2B5EF4-FFF2-40B4-BE49-F238E27FC236}">
-                <a16:creationId xmlns:a16="http://schemas.microsoft.com/office/drawing/2014/main" id="{06E8283E-1746-4DFC-AAAB-49B27F4A74BC}"/>
+              <a:t>Returns + visible gait</a:t>
+            </a:r>
+          </a:p>
+        </p:txBody>
+      </p:sp>
+      <p:sp>
+        <p:nvSpPr>
+          <p:cNvPr id="9" name="">
+            <a:extLst xmlns:a="http://schemas.openxmlformats.org/drawingml/2006/main">
+              <a:ext uri="{FF2B5EF4-FFF2-40B4-BE49-F238E27FC236}">
+                <a16:creationId xmlns:a16="http://schemas.microsoft.com/office/drawing/2014/main" id="{454ECDB7-53EF-4EE1-A6CD-BAF94926CC07}"/>
               </a:ext>
             </a:extLst>
           </p:cNvPr>
@@ -7929,8 +10520,38 @@
         </p:nvSpPr>
         <p:spPr>
           <a:xfrm xmlns:a="http://schemas.openxmlformats.org/drawingml/2006/main">
-            <a:off x="3571875" y="3838575"/>
-            <a:ext cx="7858125" cy="952500"/>
+            <a:off x="5610225" y="4048125"/>
+            <a:ext cx="685800" cy="228600"/>
+          </a:xfrm>
+          <a:prstGeom xmlns:a="http://schemas.openxmlformats.org/drawingml/2006/main" prst="rightArrow">
+            <a:avLst/>
+          </a:prstGeom>
+          <a:solidFill xmlns:a="http://schemas.openxmlformats.org/drawingml/2006/main">
+            <a:srgbClr val="007F80"/>
+          </a:solidFill>
+          <a:ln xmlns:a="http://schemas.openxmlformats.org/drawingml/2006/main" w="0">
+            <a:noFill/>
+          </a:ln>
+        </p:spPr>
+      </p:sp>
+      <p:sp>
+        <p:nvSpPr>
+          <p:cNvPr id="10" name="">
+            <a:extLst xmlns:a="http://schemas.openxmlformats.org/drawingml/2006/main">
+              <a:ext uri="{FF2B5EF4-FFF2-40B4-BE49-F238E27FC236}">
+                <a16:creationId xmlns:a16="http://schemas.microsoft.com/office/drawing/2014/main" id="{A21424AA-C6AF-4BC3-8EBE-1483B561BC54}"/>
+              </a:ext>
+            </a:extLst>
+          </p:cNvPr>
+          <p:cNvSpPr>
+            <a:spLocks xmlns:a="http://schemas.openxmlformats.org/drawingml/2006/main" noGrp="1"/>
+          </p:cNvSpPr>
+          <p:nvPr/>
+        </p:nvSpPr>
+        <p:spPr>
+          <a:xfrm xmlns:a="http://schemas.openxmlformats.org/drawingml/2006/main">
+            <a:off x="6762750" y="3952875"/>
+            <a:ext cx="4762500" cy="533400"/>
           </a:xfrm>
           <a:prstGeom xmlns:a="http://schemas.openxmlformats.org/drawingml/2006/main" prst="rect">
             <a:avLst/>
@@ -7943,10 +10564,10 @@
         <p:txBody>
           <a:bodyPr xmlns:a="http://schemas.openxmlformats.org/drawingml/2006/main" lIns="0" tIns="0" rIns="0" bIns="0"/>
           <a:lstStyle xmlns:a="http://schemas.openxmlformats.org/drawingml/2006/main">
-            <a:defPPr>
-              <a:defRPr sz="2025" b="0">
-                <a:solidFill>
-                  <a:srgbClr val="142B40"/>
+            <a:defPPr algn="l">
+              <a:defRPr sz="2550" b="1">
+                <a:solidFill>
+                  <a:srgbClr val="007F80"/>
                 </a:solidFill>
                 <a:latin typeface="Arial"/>
                 <a:ea typeface="Arial"/>
@@ -7955,10 +10576,10 @@
             </a:defPPr>
           </a:lstStyle>
           <a:p xmlns:a="http://schemas.openxmlformats.org/drawingml/2006/main">
-            <a:pPr>
-              <a:defRPr sz="2025" b="0">
-                <a:solidFill>
-                  <a:srgbClr val="142B40"/>
+            <a:pPr algn="l">
+              <a:defRPr sz="2550" b="1">
+                <a:solidFill>
+                  <a:srgbClr val="007F80"/>
                 </a:solidFill>
                 <a:latin typeface="Arial"/>
                 <a:ea typeface="Arial"/>
@@ -7966,48 +10587,25 @@
               </a:defRPr>
             </a:pPr>
             <a:r>
-              <a:rPr sz="2025" b="0">
-                <a:solidFill>
-                  <a:srgbClr val="142B40"/>
+              <a:rPr sz="2550" b="1">
+                <a:solidFill>
+                  <a:srgbClr val="007F80"/>
                 </a:solidFill>
                 <a:latin typeface="Arial"/>
                 <a:ea typeface="Arial"/>
                 <a:cs typeface="Arial"/>
               </a:rPr>
-              <a:t>Advantage weights emphasize better recorded actions</a:t>
-            </a:r>
-          </a:p>
-          <a:p xmlns:a="http://schemas.openxmlformats.org/drawingml/2006/main">
-            <a:pPr>
-              <a:defRPr sz="2025" b="0">
-                <a:solidFill>
-                  <a:srgbClr val="142B40"/>
-                </a:solidFill>
-                <a:latin typeface="Arial"/>
-                <a:ea typeface="Arial"/>
-                <a:cs typeface="Arial"/>
-              </a:defRPr>
-            </a:pPr>
-            <a:r>
-              <a:rPr sz="2025" b="0">
-                <a:solidFill>
-                  <a:srgbClr val="142B40"/>
-                </a:solidFill>
-                <a:latin typeface="Arial"/>
-                <a:ea typeface="Arial"/>
-                <a:cs typeface="Arial"/>
-              </a:rPr>
-              <a:t>Improvement over the behavior policy is a hypothesis</a:t>
-            </a:r>
-          </a:p>
-        </p:txBody>
-      </p:sp>
-      <p:sp>
-        <p:nvSpPr>
-          <p:cNvPr id="8" name="heading">
-            <a:extLst xmlns:a="http://schemas.openxmlformats.org/drawingml/2006/main">
-              <a:ext uri="{FF2B5EF4-FFF2-40B4-BE49-F238E27FC236}">
-                <a16:creationId xmlns:a16="http://schemas.microsoft.com/office/drawing/2014/main" id="{8E49D9F4-6202-42DC-8EDA-89F7E6EF5E4F}"/>
+              <a:t>Measurable evaluation</a:t>
+            </a:r>
+          </a:p>
+        </p:txBody>
+      </p:sp>
+      <p:sp>
+        <p:nvSpPr>
+          <p:cNvPr id="11" name="">
+            <a:extLst xmlns:a="http://schemas.openxmlformats.org/drawingml/2006/main">
+              <a:ext uri="{FF2B5EF4-FFF2-40B4-BE49-F238E27FC236}">
+                <a16:creationId xmlns:a16="http://schemas.microsoft.com/office/drawing/2014/main" id="{461DB77D-8B96-4816-9877-439ECAF4A2A4}"/>
               </a:ext>
             </a:extLst>
           </p:cNvPr>
@@ -8018,8 +10616,8 @@
         </p:nvSpPr>
         <p:spPr>
           <a:xfrm xmlns:a="http://schemas.openxmlformats.org/drawingml/2006/main">
-            <a:off x="685800" y="4876800"/>
-            <a:ext cx="2714625" cy="647700"/>
+            <a:off x="609600" y="5010150"/>
+            <a:ext cx="10953750" cy="476250"/>
           </a:xfrm>
           <a:prstGeom xmlns:a="http://schemas.openxmlformats.org/drawingml/2006/main" prst="rect">
             <a:avLst/>
@@ -8032,10 +10630,10 @@
         <p:txBody>
           <a:bodyPr xmlns:a="http://schemas.openxmlformats.org/drawingml/2006/main" lIns="0" tIns="0" rIns="0" bIns="0"/>
           <a:lstStyle xmlns:a="http://schemas.openxmlformats.org/drawingml/2006/main">
-            <a:defPPr>
+            <a:defPPr algn="l">
               <a:defRPr sz="2100" b="1">
                 <a:solidFill>
-                  <a:srgbClr val="147A78"/>
+                  <a:srgbClr val="E47F29"/>
                 </a:solidFill>
                 <a:latin typeface="Arial"/>
                 <a:ea typeface="Arial"/>
@@ -8044,10 +10642,10 @@
             </a:defPPr>
           </a:lstStyle>
           <a:p xmlns:a="http://schemas.openxmlformats.org/drawingml/2006/main">
-            <a:pPr>
+            <a:pPr algn="l">
               <a:defRPr sz="2100" b="1">
                 <a:solidFill>
-                  <a:srgbClr val="147A78"/>
+                  <a:srgbClr val="E47F29"/>
                 </a:solidFill>
                 <a:latin typeface="Arial"/>
                 <a:ea typeface="Arial"/>
@@ -8057,23 +10655,23 @@
             <a:r>
               <a:rPr sz="2100" b="1">
                 <a:solidFill>
-                  <a:srgbClr val="147A78"/>
+                  <a:srgbClr val="E47F29"/>
                 </a:solidFill>
                 <a:latin typeface="Arial"/>
                 <a:ea typeface="Arial"/>
                 <a:cs typeface="Arial"/>
               </a:rPr>
-              <a:t>Practical environment</a:t>
-            </a:r>
-          </a:p>
-        </p:txBody>
-      </p:sp>
-      <p:sp>
-        <p:nvSpPr>
-          <p:cNvPr id="9" name="body">
-            <a:extLst xmlns:a="http://schemas.openxmlformats.org/drawingml/2006/main">
-              <a:ext uri="{FF2B5EF4-FFF2-40B4-BE49-F238E27FC236}">
-                <a16:creationId xmlns:a16="http://schemas.microsoft.com/office/drawing/2014/main" id="{0A0CDDF3-1D6C-46F6-96C4-649903B96B56}"/>
+              <a:t>Challenges: data coverage, seed failures, physics differences</a:t>
+            </a:r>
+          </a:p>
+        </p:txBody>
+      </p:sp>
+      <p:sp>
+        <p:nvSpPr>
+          <p:cNvPr id="12" name="">
+            <a:extLst xmlns:a="http://schemas.openxmlformats.org/drawingml/2006/main">
+              <a:ext uri="{FF2B5EF4-FFF2-40B4-BE49-F238E27FC236}">
+                <a16:creationId xmlns:a16="http://schemas.microsoft.com/office/drawing/2014/main" id="{C6970212-8A01-4FAC-9E4F-4FF9E2A3A46F}"/>
               </a:ext>
             </a:extLst>
           </p:cNvPr>
@@ -8084,8 +10682,8 @@
         </p:nvSpPr>
         <p:spPr>
           <a:xfrm xmlns:a="http://schemas.openxmlformats.org/drawingml/2006/main">
-            <a:off x="3571875" y="4876800"/>
-            <a:ext cx="7858125" cy="952500"/>
+            <a:off x="609600" y="5534025"/>
+            <a:ext cx="10953750" cy="438150"/>
           </a:xfrm>
           <a:prstGeom xmlns:a="http://schemas.openxmlformats.org/drawingml/2006/main" prst="rect">
             <a:avLst/>
@@ -8098,10 +10696,10 @@
         <p:txBody>
           <a:bodyPr xmlns:a="http://schemas.openxmlformats.org/drawingml/2006/main" lIns="0" tIns="0" rIns="0" bIns="0"/>
           <a:lstStyle xmlns:a="http://schemas.openxmlformats.org/drawingml/2006/main">
-            <a:defPPr>
-              <a:defRPr sz="2025" b="0">
-                <a:solidFill>
-                  <a:srgbClr val="142B40"/>
+            <a:defPPr algn="l">
+              <a:defRPr sz="2100" b="0">
+                <a:solidFill>
+                  <a:srgbClr val="132E40"/>
                 </a:solidFill>
                 <a:latin typeface="Arial"/>
                 <a:ea typeface="Arial"/>
@@ -8110,10 +10708,10 @@
             </a:defPPr>
           </a:lstStyle>
           <a:p xmlns:a="http://schemas.openxmlformats.org/drawingml/2006/main">
-            <a:pPr>
-              <a:defRPr sz="2025" b="0">
-                <a:solidFill>
-                  <a:srgbClr val="142B40"/>
+            <a:pPr algn="l">
+              <a:defRPr sz="2100" b="0">
+                <a:solidFill>
+                  <a:srgbClr val="132E40"/>
                 </a:solidFill>
                 <a:latin typeface="Arial"/>
                 <a:ea typeface="Arial"/>
@@ -8121,48 +10719,25 @@
               </a:defRPr>
             </a:pPr>
             <a:r>
-              <a:rPr sz="2025" b="0">
-                <a:solidFill>
-                  <a:srgbClr val="142B40"/>
+              <a:rPr sz="2100" b="0">
+                <a:solidFill>
+                  <a:srgbClr val="132E40"/>
                 </a:solidFill>
                 <a:latin typeface="Arial"/>
                 <a:ea typeface="Arial"/>
                 <a:cs typeface="Arial"/>
               </a:rPr>
-              <a:t>Standard benchmark with measurable returns</a:t>
-            </a:r>
-          </a:p>
-          <a:p xmlns:a="http://schemas.openxmlformats.org/drawingml/2006/main">
-            <a:pPr>
-              <a:defRPr sz="2025" b="0">
-                <a:solidFill>
-                  <a:srgbClr val="142B40"/>
-                </a:solidFill>
-                <a:latin typeface="Arial"/>
-                <a:ea typeface="Arial"/>
-                <a:cs typeface="Arial"/>
-              </a:defRPr>
-            </a:pPr>
-            <a:r>
-              <a:rPr sz="2025" b="0">
-                <a:solidFill>
-                  <a:srgbClr val="142B40"/>
-                </a:solidFill>
-                <a:latin typeface="Arial"/>
-                <a:ea typeface="Arial"/>
-                <a:cs typeface="Arial"/>
-              </a:rPr>
-              <a:t>and visible locomotion behavior</a:t>
-            </a:r>
-          </a:p>
-        </p:txBody>
-      </p:sp>
-      <p:sp>
-        <p:nvSpPr>
-          <p:cNvPr id="10" name="body">
-            <a:extLst xmlns:a="http://schemas.openxmlformats.org/drawingml/2006/main">
-              <a:ext uri="{FF2B5EF4-FFF2-40B4-BE49-F238E27FC236}">
-                <a16:creationId xmlns:a16="http://schemas.microsoft.com/office/drawing/2014/main" id="{D9E56815-C800-4667-853C-1653C7D427C3}"/>
+              <a:t>Multiple seeds, full episodes and pinned dependencies</a:t>
+            </a:r>
+          </a:p>
+        </p:txBody>
+      </p:sp>
+      <p:sp>
+        <p:nvSpPr>
+          <p:cNvPr id="13" name="">
+            <a:extLst xmlns:a="http://schemas.openxmlformats.org/drawingml/2006/main">
+              <a:ext uri="{FF2B5EF4-FFF2-40B4-BE49-F238E27FC236}">
+                <a16:creationId xmlns:a16="http://schemas.microsoft.com/office/drawing/2014/main" id="{ED01C02F-C0EB-4810-BBB6-635BAB513AE1}"/>
               </a:ext>
             </a:extLst>
           </p:cNvPr>
@@ -8173,8 +10748,8 @@
         </p:nvSpPr>
         <p:spPr>
           <a:xfrm xmlns:a="http://schemas.openxmlformats.org/drawingml/2006/main">
-            <a:off x="10858500" y="6305550"/>
-            <a:ext cx="762000" cy="266700"/>
+            <a:off x="609600" y="6019800"/>
+            <a:ext cx="10763250" cy="590550"/>
           </a:xfrm>
           <a:prstGeom xmlns:a="http://schemas.openxmlformats.org/drawingml/2006/main" prst="rect">
             <a:avLst/>
@@ -8187,10 +10762,10 @@
         <p:txBody>
           <a:bodyPr xmlns:a="http://schemas.openxmlformats.org/drawingml/2006/main" lIns="0" tIns="0" rIns="0" bIns="0"/>
           <a:lstStyle xmlns:a="http://schemas.openxmlformats.org/drawingml/2006/main">
-            <a:defPPr>
-              <a:defRPr sz="1350" b="0">
-                <a:solidFill>
-                  <a:srgbClr val="5B6D7A"/>
+            <a:defPPr algn="l">
+              <a:defRPr sz="1725" b="0">
+                <a:solidFill>
+                  <a:srgbClr val="132E40"/>
                 </a:solidFill>
                 <a:latin typeface="Arial"/>
                 <a:ea typeface="Arial"/>
@@ -8199,10 +10774,99 @@
             </a:defPPr>
           </a:lstStyle>
           <a:p xmlns:a="http://schemas.openxmlformats.org/drawingml/2006/main">
-            <a:pPr>
+            <a:pPr algn="l">
+              <a:defRPr sz="1725" b="0">
+                <a:solidFill>
+                  <a:srgbClr val="132E40"/>
+                </a:solidFill>
+                <a:latin typeface="Arial"/>
+                <a:ea typeface="Arial"/>
+                <a:cs typeface="Arial"/>
+              </a:defRPr>
+            </a:pPr>
+            <a:r>
+              <a:rPr sz="1725" b="0">
+                <a:solidFill>
+                  <a:srgbClr val="132E40"/>
+                </a:solidFill>
+                <a:latin typeface="Arial"/>
+                <a:ea typeface="Arial"/>
+                <a:cs typeface="Arial"/>
+              </a:rPr>
+              <a:t>Aleksandr: integration   Nikita: data   Leo: IQL</a:t>
+            </a:r>
+          </a:p>
+          <a:p xmlns:a="http://schemas.openxmlformats.org/drawingml/2006/main">
+            <a:pPr algn="l">
+              <a:defRPr sz="1725" b="0">
+                <a:solidFill>
+                  <a:srgbClr val="132E40"/>
+                </a:solidFill>
+                <a:latin typeface="Arial"/>
+                <a:ea typeface="Arial"/>
+                <a:cs typeface="Arial"/>
+              </a:defRPr>
+            </a:pPr>
+            <a:r>
+              <a:rPr sz="1725" b="0">
+                <a:solidFill>
+                  <a:srgbClr val="132E40"/>
+                </a:solidFill>
+                <a:latin typeface="Arial"/>
+                <a:ea typeface="Arial"/>
+                <a:cs typeface="Arial"/>
+              </a:rPr>
+              <a:t>Ruslan: evaluation   Telman: notebook and presentation</a:t>
+            </a:r>
+          </a:p>
+        </p:txBody>
+      </p:sp>
+      <p:sp>
+        <p:nvSpPr>
+          <p:cNvPr id="14" name="">
+            <a:extLst xmlns:a="http://schemas.openxmlformats.org/drawingml/2006/main">
+              <a:ext uri="{FF2B5EF4-FFF2-40B4-BE49-F238E27FC236}">
+                <a16:creationId xmlns:a16="http://schemas.microsoft.com/office/drawing/2014/main" id="{C9593324-1983-4551-A814-A188BED5AB48}"/>
+              </a:ext>
+            </a:extLst>
+          </p:cNvPr>
+          <p:cNvSpPr>
+            <a:spLocks xmlns:a="http://schemas.openxmlformats.org/drawingml/2006/main" noGrp="1"/>
+          </p:cNvSpPr>
+          <p:nvPr/>
+        </p:nvSpPr>
+        <p:spPr>
+          <a:xfrm xmlns:a="http://schemas.openxmlformats.org/drawingml/2006/main">
+            <a:off x="11077575" y="6457950"/>
+            <a:ext cx="666750" cy="266700"/>
+          </a:xfrm>
+          <a:prstGeom xmlns:a="http://schemas.openxmlformats.org/drawingml/2006/main" prst="rect">
+            <a:avLst/>
+          </a:prstGeom>
+          <a:noFill xmlns:a="http://schemas.openxmlformats.org/drawingml/2006/main"/>
+          <a:ln xmlns:a="http://schemas.openxmlformats.org/drawingml/2006/main" w="0">
+            <a:noFill/>
+          </a:ln>
+        </p:spPr>
+        <p:txBody>
+          <a:bodyPr xmlns:a="http://schemas.openxmlformats.org/drawingml/2006/main" lIns="0" tIns="0" rIns="0" bIns="0"/>
+          <a:lstStyle xmlns:a="http://schemas.openxmlformats.org/drawingml/2006/main">
+            <a:defPPr algn="l">
               <a:defRPr sz="1350" b="0">
                 <a:solidFill>
-                  <a:srgbClr val="5B6D7A"/>
+                  <a:srgbClr val="6D8190"/>
+                </a:solidFill>
+                <a:latin typeface="Arial"/>
+                <a:ea typeface="Arial"/>
+                <a:cs typeface="Arial"/>
+              </a:defRPr>
+            </a:defPPr>
+          </a:lstStyle>
+          <a:p xmlns:a="http://schemas.openxmlformats.org/drawingml/2006/main">
+            <a:pPr algn="l">
+              <a:defRPr sz="1350" b="0">
+                <a:solidFill>
+                  <a:srgbClr val="6D8190"/>
                 </a:solidFill>
                 <a:latin typeface="Arial"/>
                 <a:ea typeface="Arial"/>
@@ -8212,7 +10876,7 @@
             <a:r>
               <a:rPr sz="1350" b="0">
                 <a:solidFill>
-                  <a:srgbClr val="5B6D7A"/>
+                  <a:srgbClr val="6D8190"/>
                 </a:solidFill>
                 <a:latin typeface="Arial"/>
                 <a:ea typeface="Arial"/>
@@ -8226,7 +10890,7 @@
     </p:spTree>
     <p:extLst>
       <p:ext uri="{BB962C8B-B14F-4D97-AF65-F5344CB8AC3E}">
-        <p14:creationId xmlns:p14="http://schemas.microsoft.com/office/powerpoint/2010/main" val="1837820871"/>
+        <p14:creationId xmlns:p14="http://schemas.microsoft.com/office/powerpoint/2010/main" val="460821824"/>
       </p:ext>
     </p:extLst>
   </p:cSld>
@@ -8239,7 +10903,7 @@
     <p:bg>
       <p:bgPr>
         <a:solidFill xmlns:a="http://schemas.openxmlformats.org/drawingml/2006/main">
-          <a:srgbClr val="F7FAFC"/>
+          <a:srgbClr val="FBFCFD"/>
         </a:solidFill>
       </p:bgPr>
     </p:bg>
@@ -8254,10 +10918,10 @@
       </p:grpSpPr>
       <p:sp>
         <p:nvSpPr>
-          <p:cNvPr id="11" name="heading">
-            <a:extLst xmlns:a="http://schemas.openxmlformats.org/drawingml/2006/main">
-              <a:ext uri="{FF2B5EF4-FFF2-40B4-BE49-F238E27FC236}">
-                <a16:creationId xmlns:a16="http://schemas.microsoft.com/office/drawing/2014/main" id="{D576CCE7-B734-41CE-9B28-301D816D7C58}"/>
+          <p:cNvPr id="11" name="">
+            <a:extLst xmlns:a="http://schemas.openxmlformats.org/drawingml/2006/main">
+              <a:ext uri="{FF2B5EF4-FFF2-40B4-BE49-F238E27FC236}">
+                <a16:creationId xmlns:a16="http://schemas.microsoft.com/office/drawing/2014/main" id="{930EDEEB-90EE-4248-B1BC-D88E8FD41BB8}"/>
               </a:ext>
             </a:extLst>
           </p:cNvPr>
@@ -8268,8 +10932,8 @@
         </p:nvSpPr>
         <p:spPr>
           <a:xfrm xmlns:a="http://schemas.openxmlformats.org/drawingml/2006/main">
-            <a:off x="685800" y="523875"/>
-            <a:ext cx="10858500" cy="933450"/>
+            <a:off x="609600" y="457200"/>
+            <a:ext cx="11049000" cy="952500"/>
           </a:xfrm>
           <a:prstGeom xmlns:a="http://schemas.openxmlformats.org/drawingml/2006/main" prst="rect">
             <a:avLst/>
@@ -8282,10 +10946,10 @@
         <p:txBody>
           <a:bodyPr xmlns:a="http://schemas.openxmlformats.org/drawingml/2006/main" lIns="0" tIns="0" rIns="0" bIns="0"/>
           <a:lstStyle xmlns:a="http://schemas.openxmlformats.org/drawingml/2006/main">
-            <a:defPPr>
+            <a:defPPr algn="l">
               <a:defRPr sz="3450" b="1">
                 <a:solidFill>
-                  <a:srgbClr val="142B40"/>
+                  <a:srgbClr val="132E40"/>
                 </a:solidFill>
                 <a:latin typeface="Arial"/>
                 <a:ea typeface="Arial"/>
@@ -8294,10 +10958,10 @@
             </a:defPPr>
           </a:lstStyle>
           <a:p xmlns:a="http://schemas.openxmlformats.org/drawingml/2006/main">
-            <a:pPr>
+            <a:pPr algn="l">
               <a:defRPr sz="3450" b="1">
                 <a:solidFill>
-                  <a:srgbClr val="142B40"/>
+                  <a:srgbClr val="132E40"/>
                 </a:solidFill>
                 <a:latin typeface="Arial"/>
                 <a:ea typeface="Arial"/>
@@ -8307,35 +10971,57 @@
             <a:r>
               <a:rPr sz="3450" b="1">
                 <a:solidFill>
-                  <a:srgbClr val="142B40"/>
+                  <a:srgbClr val="132E40"/>
                 </a:solidFill>
                 <a:latin typeface="Arial"/>
                 <a:ea typeface="Arial"/>
                 <a:cs typeface="Arial"/>
               </a:rPr>
-              <a:t>Challenges and final-project plan</a:t>
-            </a:r>
-          </a:p>
-        </p:txBody>
-      </p:sp>
-      <p:sp>
-        <p:nvSpPr>
-          <p:cNvPr id="2" name="heading">
-            <a:extLst xmlns:a="http://schemas.openxmlformats.org/drawingml/2006/main">
-              <a:ext uri="{FF2B5EF4-FFF2-40B4-BE49-F238E27FC236}">
-                <a16:creationId xmlns:a16="http://schemas.microsoft.com/office/drawing/2014/main" id="{D20E2B5D-9AE3-4183-A915-F9C4AF966C43}"/>
-              </a:ext>
-            </a:extLst>
-          </p:cNvPr>
-          <p:cNvSpPr>
-            <a:spLocks xmlns:a="http://schemas.openxmlformats.org/drawingml/2006/main" noGrp="1"/>
-          </p:cNvSpPr>
+              <a:t>Learning progress and final test</a:t>
+            </a:r>
+          </a:p>
+        </p:txBody>
+      </p:sp>
+      <p:graphicFrame>
+        <p:nvGraphicFramePr>
+          <p:cNvPr id="2" name="Chart">
+            <a:extLst xmlns:a="http://schemas.openxmlformats.org/drawingml/2006/main">
+              <a:ext uri="{FF2B5EF4-FFF2-40B4-BE49-F238E27FC236}">
+                <a16:creationId xmlns:a16="http://schemas.microsoft.com/office/drawing/2014/main" id="{99D6F153-064D-4B20-9FE3-31503DD5E876}"/>
+              </a:ext>
+            </a:extLst>
+          </p:cNvPr>
+          <p:cNvGraphicFramePr/>
           <p:nvPr/>
-        </p:nvSpPr>
-        <p:spPr>
-          <a:xfrm xmlns:a="http://schemas.openxmlformats.org/drawingml/2006/main">
-            <a:off x="685800" y="1762125"/>
-            <a:ext cx="2714625" cy="647700"/>
+        </p:nvGraphicFramePr>
+        <p:xfrm>
+          <a:off xmlns:a="http://schemas.openxmlformats.org/drawingml/2006/main" x="400050" y="1552575"/>
+          <a:ext xmlns:a="http://schemas.openxmlformats.org/drawingml/2006/main" cx="7620000" cy="4210050"/>
+        </p:xfrm>
+        <a:graphic xmlns:a="http://schemas.openxmlformats.org/drawingml/2006/main">
+          <a:graphicData uri="http://schemas.openxmlformats.org/drawingml/2006/chart">
+            <c:chart xmlns:r="http://schemas.openxmlformats.org/officeDocument/2006/relationships" xmlns:c="http://schemas.openxmlformats.org/drawingml/2006/chart" r:id="R305b737795b846ec"/>
+          </a:graphicData>
+        </a:graphic>
+      </p:graphicFrame>
+      <p:sp>
+        <p:nvSpPr>
+          <p:cNvPr id="3" name="">
+            <a:extLst xmlns:a="http://schemas.openxmlformats.org/drawingml/2006/main">
+              <a:ext uri="{FF2B5EF4-FFF2-40B4-BE49-F238E27FC236}">
+                <a16:creationId xmlns:a16="http://schemas.microsoft.com/office/drawing/2014/main" id="{AAEE9B92-6CDD-4B2E-B4AD-EF61590B3987}"/>
+              </a:ext>
+            </a:extLst>
+          </p:cNvPr>
+          <p:cNvSpPr>
+            <a:spLocks xmlns:a="http://schemas.openxmlformats.org/drawingml/2006/main" noGrp="1"/>
+          </p:cNvSpPr>
+          <p:nvPr/>
+        </p:nvSpPr>
+        <p:spPr>
+          <a:xfrm xmlns:a="http://schemas.openxmlformats.org/drawingml/2006/main">
+            <a:off x="8534400" y="1809750"/>
+            <a:ext cx="3000375" cy="819150"/>
           </a:xfrm>
           <a:prstGeom xmlns:a="http://schemas.openxmlformats.org/drawingml/2006/main" prst="rect">
             <a:avLst/>
@@ -8348,10 +11034,10 @@
         <p:txBody>
           <a:bodyPr xmlns:a="http://schemas.openxmlformats.org/drawingml/2006/main" lIns="0" tIns="0" rIns="0" bIns="0"/>
           <a:lstStyle xmlns:a="http://schemas.openxmlformats.org/drawingml/2006/main">
-            <a:defPPr>
-              <a:defRPr sz="2100" b="1">
-                <a:solidFill>
-                  <a:srgbClr val="147A78"/>
+            <a:defPPr algn="l">
+              <a:defRPr sz="5250" b="1">
+                <a:solidFill>
+                  <a:srgbClr val="007F80"/>
                 </a:solidFill>
                 <a:latin typeface="Arial"/>
                 <a:ea typeface="Arial"/>
@@ -8360,10 +11046,10 @@
             </a:defPPr>
           </a:lstStyle>
           <a:p xmlns:a="http://schemas.openxmlformats.org/drawingml/2006/main">
-            <a:pPr>
-              <a:defRPr sz="2100" b="1">
-                <a:solidFill>
-                  <a:srgbClr val="147A78"/>
+            <a:pPr algn="l">
+              <a:defRPr sz="5250" b="1">
+                <a:solidFill>
+                  <a:srgbClr val="007F80"/>
                 </a:solidFill>
                 <a:latin typeface="Arial"/>
                 <a:ea typeface="Arial"/>
@@ -8371,25 +11057,25 @@
               </a:defRPr>
             </a:pPr>
             <a:r>
-              <a:rPr sz="2100" b="1">
-                <a:solidFill>
-                  <a:srgbClr val="147A78"/>
+              <a:rPr sz="5250" b="1">
+                <a:solidFill>
+                  <a:srgbClr val="007F80"/>
                 </a:solidFill>
                 <a:latin typeface="Arial"/>
                 <a:ea typeface="Arial"/>
                 <a:cs typeface="Arial"/>
               </a:rPr>
-              <a:t>Coverage and stability</a:t>
-            </a:r>
-          </a:p>
-        </p:txBody>
-      </p:sp>
-      <p:sp>
-        <p:nvSpPr>
-          <p:cNvPr id="3" name="body">
-            <a:extLst xmlns:a="http://schemas.openxmlformats.org/drawingml/2006/main">
-              <a:ext uri="{FF2B5EF4-FFF2-40B4-BE49-F238E27FC236}">
-                <a16:creationId xmlns:a16="http://schemas.microsoft.com/office/drawing/2014/main" id="{35343980-EE2C-4C7D-934D-5E23B3C372FF}"/>
+              <a:t>15,260</a:t>
+            </a:r>
+          </a:p>
+        </p:txBody>
+      </p:sp>
+      <p:sp>
+        <p:nvSpPr>
+          <p:cNvPr id="4" name="">
+            <a:extLst xmlns:a="http://schemas.openxmlformats.org/drawingml/2006/main">
+              <a:ext uri="{FF2B5EF4-FFF2-40B4-BE49-F238E27FC236}">
+                <a16:creationId xmlns:a16="http://schemas.microsoft.com/office/drawing/2014/main" id="{06FF584D-3250-45F8-BFD9-E2069D2FF67B}"/>
               </a:ext>
             </a:extLst>
           </p:cNvPr>
@@ -8400,8 +11086,8 @@
         </p:nvSpPr>
         <p:spPr>
           <a:xfrm xmlns:a="http://schemas.openxmlformats.org/drawingml/2006/main">
-            <a:off x="3571875" y="1762125"/>
-            <a:ext cx="7858125" cy="952500"/>
+            <a:off x="8534400" y="2667000"/>
+            <a:ext cx="3000375" cy="628650"/>
           </a:xfrm>
           <a:prstGeom xmlns:a="http://schemas.openxmlformats.org/drawingml/2006/main" prst="rect">
             <a:avLst/>
@@ -8414,10 +11100,10 @@
         <p:txBody>
           <a:bodyPr xmlns:a="http://schemas.openxmlformats.org/drawingml/2006/main" lIns="0" tIns="0" rIns="0" bIns="0"/>
           <a:lstStyle xmlns:a="http://schemas.openxmlformats.org/drawingml/2006/main">
-            <a:defPPr>
-              <a:defRPr sz="2025" b="0">
-                <a:solidFill>
-                  <a:srgbClr val="142B40"/>
+            <a:defPPr algn="l">
+              <a:defRPr sz="1950" b="0">
+                <a:solidFill>
+                  <a:srgbClr val="132E40"/>
                 </a:solidFill>
                 <a:latin typeface="Arial"/>
                 <a:ea typeface="Arial"/>
@@ -8426,10 +11112,10 @@
             </a:defPPr>
           </a:lstStyle>
           <a:p xmlns:a="http://schemas.openxmlformats.org/drawingml/2006/main">
-            <a:pPr>
-              <a:defRPr sz="2025" b="0">
-                <a:solidFill>
-                  <a:srgbClr val="142B40"/>
+            <a:pPr algn="l">
+              <a:defRPr sz="1950" b="0">
+                <a:solidFill>
+                  <a:srgbClr val="132E40"/>
                 </a:solidFill>
                 <a:latin typeface="Arial"/>
                 <a:ea typeface="Arial"/>
@@ -8437,48 +11123,25 @@
               </a:defRPr>
             </a:pPr>
             <a:r>
-              <a:rPr sz="2025" b="0">
-                <a:solidFill>
-                  <a:srgbClr val="142B40"/>
+              <a:rPr sz="1950" b="0">
+                <a:solidFill>
+                  <a:srgbClr val="132E40"/>
                 </a:solidFill>
                 <a:latin typeface="Arial"/>
                 <a:ea typeface="Arial"/>
                 <a:cs typeface="Arial"/>
               </a:rPr>
-              <a:t>Limited data coverage and seed-dependent failures</a:t>
-            </a:r>
-          </a:p>
-          <a:p xmlns:a="http://schemas.openxmlformats.org/drawingml/2006/main">
-            <a:pPr>
-              <a:defRPr sz="2025" b="0">
-                <a:solidFill>
-                  <a:srgbClr val="142B40"/>
-                </a:solidFill>
-                <a:latin typeface="Arial"/>
-                <a:ea typeface="Arial"/>
-                <a:cs typeface="Arial"/>
-              </a:defRPr>
-            </a:pPr>
-            <a:r>
-              <a:rPr sz="2025" b="0">
-                <a:solidFill>
-                  <a:srgbClr val="142B40"/>
-                </a:solidFill>
-                <a:latin typeface="Arial"/>
-                <a:ea typeface="Arial"/>
-                <a:cs typeface="Arial"/>
-              </a:rPr>
-              <a:t>Multiple seeds, separate final tests and full videos</a:t>
-            </a:r>
-          </a:p>
-        </p:txBody>
-      </p:sp>
-      <p:sp>
-        <p:nvSpPr>
-          <p:cNvPr id="4" name="heading">
-            <a:extLst xmlns:a="http://schemas.openxmlformats.org/drawingml/2006/main">
-              <a:ext uri="{FF2B5EF4-FFF2-40B4-BE49-F238E27FC236}">
-                <a16:creationId xmlns:a16="http://schemas.microsoft.com/office/drawing/2014/main" id="{6487D063-A874-4AA3-A588-07956449913C}"/>
+              <a:t>final-test mean, 500k</a:t>
+            </a:r>
+          </a:p>
+        </p:txBody>
+      </p:sp>
+      <p:sp>
+        <p:nvSpPr>
+          <p:cNvPr id="5" name="">
+            <a:extLst xmlns:a="http://schemas.openxmlformats.org/drawingml/2006/main">
+              <a:ext uri="{FF2B5EF4-FFF2-40B4-BE49-F238E27FC236}">
+                <a16:creationId xmlns:a16="http://schemas.microsoft.com/office/drawing/2014/main" id="{9744ECF3-DAAF-423E-B679-FD01C3294F94}"/>
               </a:ext>
             </a:extLst>
           </p:cNvPr>
@@ -8489,8 +11152,8 @@
         </p:nvSpPr>
         <p:spPr>
           <a:xfrm xmlns:a="http://schemas.openxmlformats.org/drawingml/2006/main">
-            <a:off x="685800" y="2819400"/>
-            <a:ext cx="2714625" cy="647700"/>
+            <a:off x="8534400" y="3409950"/>
+            <a:ext cx="3000375" cy="428625"/>
           </a:xfrm>
           <a:prstGeom xmlns:a="http://schemas.openxmlformats.org/drawingml/2006/main" prst="rect">
             <a:avLst/>
@@ -8503,10 +11166,10 @@
         <p:txBody>
           <a:bodyPr xmlns:a="http://schemas.openxmlformats.org/drawingml/2006/main" lIns="0" tIns="0" rIns="0" bIns="0"/>
           <a:lstStyle xmlns:a="http://schemas.openxmlformats.org/drawingml/2006/main">
-            <a:defPPr>
-              <a:defRPr sz="2100" b="1">
-                <a:solidFill>
-                  <a:srgbClr val="147A78"/>
+            <a:defPPr algn="l">
+              <a:defRPr sz="2100" b="0">
+                <a:solidFill>
+                  <a:srgbClr val="6D8190"/>
                 </a:solidFill>
                 <a:latin typeface="Arial"/>
                 <a:ea typeface="Arial"/>
@@ -8515,10 +11178,10 @@
             </a:defPPr>
           </a:lstStyle>
           <a:p xmlns:a="http://schemas.openxmlformats.org/drawingml/2006/main">
-            <a:pPr>
-              <a:defRPr sz="2100" b="1">
-                <a:solidFill>
-                  <a:srgbClr val="147A78"/>
+            <a:pPr algn="l">
+              <a:defRPr sz="2100" b="0">
+                <a:solidFill>
+                  <a:srgbClr val="6D8190"/>
                 </a:solidFill>
                 <a:latin typeface="Arial"/>
                 <a:ea typeface="Arial"/>
@@ -8526,25 +11189,25 @@
               </a:defRPr>
             </a:pPr>
             <a:r>
-              <a:rPr sz="2100" b="1">
-                <a:solidFill>
-                  <a:srgbClr val="147A78"/>
+              <a:rPr sz="2100" b="0">
+                <a:solidFill>
+                  <a:srgbClr val="6D8190"/>
                 </a:solidFill>
                 <a:latin typeface="Arial"/>
                 <a:ea typeface="Arial"/>
                 <a:cs typeface="Arial"/>
               </a:rPr>
-              <a:t>Reliable comparisons</a:t>
-            </a:r>
-          </a:p>
-        </p:txBody>
-      </p:sp>
-      <p:sp>
-        <p:nvSpPr>
-          <p:cNvPr id="5" name="body">
-            <a:extLst xmlns:a="http://schemas.openxmlformats.org/drawingml/2006/main">
-              <a:ext uri="{FF2B5EF4-FFF2-40B4-BE49-F238E27FC236}">
-                <a16:creationId xmlns:a16="http://schemas.microsoft.com/office/drawing/2014/main" id="{47702CFA-91BB-4F8D-B54E-582CE4322935}"/>
+              <a:t>vs 2,026 at 100k</a:t>
+            </a:r>
+          </a:p>
+        </p:txBody>
+      </p:sp>
+      <p:sp>
+        <p:nvSpPr>
+          <p:cNvPr id="6" name="">
+            <a:extLst xmlns:a="http://schemas.openxmlformats.org/drawingml/2006/main">
+              <a:ext uri="{FF2B5EF4-FFF2-40B4-BE49-F238E27FC236}">
+                <a16:creationId xmlns:a16="http://schemas.microsoft.com/office/drawing/2014/main" id="{BA0644A2-8BFD-4818-8979-5E48FB5604EE}"/>
               </a:ext>
             </a:extLst>
           </p:cNvPr>
@@ -8555,8 +11218,8 @@
         </p:nvSpPr>
         <p:spPr>
           <a:xfrm xmlns:a="http://schemas.openxmlformats.org/drawingml/2006/main">
-            <a:off x="3571875" y="2819400"/>
-            <a:ext cx="7858125" cy="952500"/>
+            <a:off x="8258175" y="4229100"/>
+            <a:ext cx="3286125" cy="590550"/>
           </a:xfrm>
           <a:prstGeom xmlns:a="http://schemas.openxmlformats.org/drawingml/2006/main" prst="rect">
             <a:avLst/>
@@ -8569,10 +11232,10 @@
         <p:txBody>
           <a:bodyPr xmlns:a="http://schemas.openxmlformats.org/drawingml/2006/main" lIns="0" tIns="0" rIns="0" bIns="0"/>
           <a:lstStyle xmlns:a="http://schemas.openxmlformats.org/drawingml/2006/main">
-            <a:defPPr>
-              <a:defRPr sz="2025" b="0">
-                <a:solidFill>
-                  <a:srgbClr val="142B40"/>
+            <a:defPPr algn="l">
+              <a:defRPr sz="3225" b="1">
+                <a:solidFill>
+                  <a:srgbClr val="007F80"/>
                 </a:solidFill>
                 <a:latin typeface="Arial"/>
                 <a:ea typeface="Arial"/>
@@ -8581,10 +11244,10 @@
             </a:defPPr>
           </a:lstStyle>
           <a:p xmlns:a="http://schemas.openxmlformats.org/drawingml/2006/main">
-            <a:pPr>
-              <a:defRPr sz="2025" b="0">
-                <a:solidFill>
-                  <a:srgbClr val="142B40"/>
+            <a:pPr algn="l">
+              <a:defRPr sz="3225" b="1">
+                <a:solidFill>
+                  <a:srgbClr val="007F80"/>
                 </a:solidFill>
                 <a:latin typeface="Arial"/>
                 <a:ea typeface="Arial"/>
@@ -8592,48 +11255,25 @@
               </a:defRPr>
             </a:pPr>
             <a:r>
-              <a:rPr sz="2025" b="0">
-                <a:solidFill>
-                  <a:srgbClr val="142B40"/>
+              <a:rPr sz="3225" b="1">
+                <a:solidFill>
+                  <a:srgbClr val="007F80"/>
                 </a:solidFill>
                 <a:latin typeface="Arial"/>
                 <a:ea typeface="Arial"/>
                 <a:cs typeface="Arial"/>
               </a:rPr>
-              <a:t>Physics versions and checkpoint selection affect results</a:t>
-            </a:r>
-          </a:p>
-          <a:p xmlns:a="http://schemas.openxmlformats.org/drawingml/2006/main">
-            <a:pPr>
-              <a:defRPr sz="2025" b="0">
-                <a:solidFill>
-                  <a:srgbClr val="142B40"/>
-                </a:solidFill>
-                <a:latin typeface="Arial"/>
-                <a:ea typeface="Arial"/>
-                <a:cs typeface="Arial"/>
-              </a:defRPr>
-            </a:pPr>
-            <a:r>
-              <a:rPr sz="2025" b="0">
-                <a:solidFill>
-                  <a:srgbClr val="142B40"/>
-                </a:solidFill>
-                <a:latin typeface="Arial"/>
-                <a:ea typeface="Arial"/>
-                <a:cs typeface="Arial"/>
-              </a:rPr>
-              <a:t>Pinned dependencies and documented evaluation seeds</a:t>
-            </a:r>
-          </a:p>
-        </p:txBody>
-      </p:sp>
-      <p:sp>
-        <p:nvSpPr>
-          <p:cNvPr id="6" name="heading">
-            <a:extLst xmlns:a="http://schemas.openxmlformats.org/drawingml/2006/main">
-              <a:ext uri="{FF2B5EF4-FFF2-40B4-BE49-F238E27FC236}">
-                <a16:creationId xmlns:a16="http://schemas.microsoft.com/office/drawing/2014/main" id="{E8B165E5-D767-4AB0-9CEA-A17F8493D29A}"/>
+              <a:t>10/10 → 0/10</a:t>
+            </a:r>
+          </a:p>
+        </p:txBody>
+      </p:sp>
+      <p:sp>
+        <p:nvSpPr>
+          <p:cNvPr id="7" name="">
+            <a:extLst xmlns:a="http://schemas.openxmlformats.org/drawingml/2006/main">
+              <a:ext uri="{FF2B5EF4-FFF2-40B4-BE49-F238E27FC236}">
+                <a16:creationId xmlns:a16="http://schemas.microsoft.com/office/drawing/2014/main" id="{DECE21AC-0361-4AE9-BDD9-24464051B22C}"/>
               </a:ext>
             </a:extLst>
           </p:cNvPr>
@@ -8644,8 +11284,8 @@
         </p:nvSpPr>
         <p:spPr>
           <a:xfrm xmlns:a="http://schemas.openxmlformats.org/drawingml/2006/main">
-            <a:off x="685800" y="3876675"/>
-            <a:ext cx="2714625" cy="647700"/>
+            <a:off x="8534400" y="4867275"/>
+            <a:ext cx="3000375" cy="752475"/>
           </a:xfrm>
           <a:prstGeom xmlns:a="http://schemas.openxmlformats.org/drawingml/2006/main" prst="rect">
             <a:avLst/>
@@ -8658,10 +11298,10 @@
         <p:txBody>
           <a:bodyPr xmlns:a="http://schemas.openxmlformats.org/drawingml/2006/main" lIns="0" tIns="0" rIns="0" bIns="0"/>
           <a:lstStyle xmlns:a="http://schemas.openxmlformats.org/drawingml/2006/main">
-            <a:defPPr>
-              <a:defRPr sz="2100" b="1">
-                <a:solidFill>
-                  <a:srgbClr val="147A78"/>
+            <a:defPPr algn="l">
+              <a:defRPr sz="1950" b="0">
+                <a:solidFill>
+                  <a:srgbClr val="132E40"/>
                 </a:solidFill>
                 <a:latin typeface="Arial"/>
                 <a:ea typeface="Arial"/>
@@ -8670,10 +11310,10 @@
             </a:defPPr>
           </a:lstStyle>
           <a:p xmlns:a="http://schemas.openxmlformats.org/drawingml/2006/main">
-            <a:pPr>
-              <a:defRPr sz="2100" b="1">
-                <a:solidFill>
-                  <a:srgbClr val="147A78"/>
+            <a:pPr algn="l">
+              <a:defRPr sz="1950" b="0">
+                <a:solidFill>
+                  <a:srgbClr val="132E40"/>
                 </a:solidFill>
                 <a:latin typeface="Arial"/>
                 <a:ea typeface="Arial"/>
@@ -8681,25 +11321,48 @@
               </a:defRPr>
             </a:pPr>
             <a:r>
-              <a:rPr sz="2100" b="1">
-                <a:solidFill>
-                  <a:srgbClr val="147A78"/>
+              <a:rPr sz="1950" b="0">
+                <a:solidFill>
+                  <a:srgbClr val="132E40"/>
                 </a:solidFill>
                 <a:latin typeface="Arial"/>
                 <a:ea typeface="Arial"/>
                 <a:cs typeface="Arial"/>
               </a:rPr>
-              <a:t>Team ownership</a:t>
-            </a:r>
-          </a:p>
-        </p:txBody>
-      </p:sp>
-      <p:sp>
-        <p:nvSpPr>
-          <p:cNvPr id="7" name="body">
-            <a:extLst xmlns:a="http://schemas.openxmlformats.org/drawingml/2006/main">
-              <a:ext uri="{FF2B5EF4-FFF2-40B4-BE49-F238E27FC236}">
-                <a16:creationId xmlns:a16="http://schemas.microsoft.com/office/drawing/2014/main" id="{CB8DA4A0-3D6B-4027-A47B-7BDB4AE3DBEF}"/>
+              <a:t>episodes with long</a:t>
+            </a:r>
+          </a:p>
+          <a:p xmlns:a="http://schemas.openxmlformats.org/drawingml/2006/main">
+            <a:pPr algn="l">
+              <a:defRPr sz="1950" b="0">
+                <a:solidFill>
+                  <a:srgbClr val="132E40"/>
+                </a:solidFill>
+                <a:latin typeface="Arial"/>
+                <a:ea typeface="Arial"/>
+                <a:cs typeface="Arial"/>
+              </a:defRPr>
+            </a:pPr>
+            <a:r>
+              <a:rPr sz="1950" b="0">
+                <a:solidFill>
+                  <a:srgbClr val="132E40"/>
+                </a:solidFill>
+                <a:latin typeface="Arial"/>
+                <a:ea typeface="Arial"/>
+                <a:cs typeface="Arial"/>
+              </a:rPr>
+              <a:t>stationary tails</a:t>
+            </a:r>
+          </a:p>
+        </p:txBody>
+      </p:sp>
+      <p:sp>
+        <p:nvSpPr>
+          <p:cNvPr id="8" name="">
+            <a:extLst xmlns:a="http://schemas.openxmlformats.org/drawingml/2006/main">
+              <a:ext uri="{FF2B5EF4-FFF2-40B4-BE49-F238E27FC236}">
+                <a16:creationId xmlns:a16="http://schemas.microsoft.com/office/drawing/2014/main" id="{A4F6E6E5-1C89-4A17-9756-020E5AE62AC4}"/>
               </a:ext>
             </a:extLst>
           </p:cNvPr>
@@ -8710,8 +11373,8 @@
         </p:nvSpPr>
         <p:spPr>
           <a:xfrm xmlns:a="http://schemas.openxmlformats.org/drawingml/2006/main">
-            <a:off x="3571875" y="3876675"/>
-            <a:ext cx="7858125" cy="952500"/>
+            <a:off x="609600" y="5867400"/>
+            <a:ext cx="11049000" cy="323850"/>
           </a:xfrm>
           <a:prstGeom xmlns:a="http://schemas.openxmlformats.org/drawingml/2006/main" prst="rect">
             <a:avLst/>
@@ -8724,10 +11387,10 @@
         <p:txBody>
           <a:bodyPr xmlns:a="http://schemas.openxmlformats.org/drawingml/2006/main" lIns="0" tIns="0" rIns="0" bIns="0"/>
           <a:lstStyle xmlns:a="http://schemas.openxmlformats.org/drawingml/2006/main">
-            <a:defPPr>
-              <a:defRPr sz="2025" b="0">
-                <a:solidFill>
-                  <a:srgbClr val="142B40"/>
+            <a:defPPr algn="l">
+              <a:defRPr sz="1725" b="0">
+                <a:solidFill>
+                  <a:srgbClr val="6D8190"/>
                 </a:solidFill>
                 <a:latin typeface="Arial"/>
                 <a:ea typeface="Arial"/>
@@ -8736,10 +11399,10 @@
             </a:defPPr>
           </a:lstStyle>
           <a:p xmlns:a="http://schemas.openxmlformats.org/drawingml/2006/main">
-            <a:pPr>
-              <a:defRPr sz="2025" b="0">
-                <a:solidFill>
-                  <a:srgbClr val="142B40"/>
+            <a:pPr algn="l">
+              <a:defRPr sz="1725" b="0">
+                <a:solidFill>
+                  <a:srgbClr val="6D8190"/>
                 </a:solidFill>
                 <a:latin typeface="Arial"/>
                 <a:ea typeface="Arial"/>
@@ -8747,71 +11410,25 @@
               </a:defRPr>
             </a:pPr>
             <a:r>
-              <a:rPr sz="2025" b="0">
-                <a:solidFill>
-                  <a:srgbClr val="142B40"/>
+              <a:rPr sz="1725" b="0">
+                <a:solidFill>
+                  <a:srgbClr val="6D8190"/>
                 </a:solidFill>
                 <a:latin typeface="Arial"/>
                 <a:ea typeface="Arial"/>
                 <a:cs typeface="Arial"/>
               </a:rPr>
-              <a:t>Aleksandr: integration and reproducibility</a:t>
-            </a:r>
-          </a:p>
-          <a:p xmlns:a="http://schemas.openxmlformats.org/drawingml/2006/main">
-            <a:pPr>
-              <a:defRPr sz="2025" b="0">
-                <a:solidFill>
-                  <a:srgbClr val="142B40"/>
-                </a:solidFill>
-                <a:latin typeface="Arial"/>
-                <a:ea typeface="Arial"/>
-                <a:cs typeface="Arial"/>
-              </a:defRPr>
-            </a:pPr>
-            <a:r>
-              <a:rPr sz="2025" b="0">
-                <a:solidFill>
-                  <a:srgbClr val="142B40"/>
-                </a:solidFill>
-                <a:latin typeface="Arial"/>
-                <a:ea typeface="Arial"/>
-                <a:cs typeface="Arial"/>
-              </a:rPr>
-              <a:t>Nikita: environment and dataset; Leo: IQL</a:t>
-            </a:r>
-          </a:p>
-          <a:p xmlns:a="http://schemas.openxmlformats.org/drawingml/2006/main">
-            <a:pPr>
-              <a:defRPr sz="2025" b="0">
-                <a:solidFill>
-                  <a:srgbClr val="142B40"/>
-                </a:solidFill>
-                <a:latin typeface="Arial"/>
-                <a:ea typeface="Arial"/>
-                <a:cs typeface="Arial"/>
-              </a:defRPr>
-            </a:pPr>
-            <a:r>
-              <a:rPr sz="2025" b="0">
-                <a:solidFill>
-                  <a:srgbClr val="142B40"/>
-                </a:solidFill>
-                <a:latin typeface="Arial"/>
-                <a:ea typeface="Arial"/>
-                <a:cs typeface="Arial"/>
-              </a:rPr>
-              <a:t>Ruslan: evaluation; Telman: notebook and presentation</a:t>
-            </a:r>
-          </a:p>
-        </p:txBody>
-      </p:sp>
-      <p:sp>
-        <p:nvSpPr>
-          <p:cNvPr id="8" name="heading">
-            <a:extLst xmlns:a="http://schemas.openxmlformats.org/drawingml/2006/main">
-              <a:ext uri="{FF2B5EF4-FFF2-40B4-BE49-F238E27FC236}">
-                <a16:creationId xmlns:a16="http://schemas.microsoft.com/office/drawing/2014/main" id="{B970EC32-9973-412D-8ABB-58914319B6F6}"/>
+              <a:t>Means only: 10 episodes per point. Colab, MuJoCo 3.2.3.</a:t>
+            </a:r>
+          </a:p>
+        </p:txBody>
+      </p:sp>
+      <p:sp>
+        <p:nvSpPr>
+          <p:cNvPr id="9" name="">
+            <a:extLst xmlns:a="http://schemas.openxmlformats.org/drawingml/2006/main">
+              <a:ext uri="{FF2B5EF4-FFF2-40B4-BE49-F238E27FC236}">
+                <a16:creationId xmlns:a16="http://schemas.microsoft.com/office/drawing/2014/main" id="{DE23A003-03EF-4EAC-956C-FC17AD435D56}"/>
               </a:ext>
             </a:extLst>
           </p:cNvPr>
@@ -8822,8 +11439,8 @@
         </p:nvSpPr>
         <p:spPr>
           <a:xfrm xmlns:a="http://schemas.openxmlformats.org/drawingml/2006/main">
-            <a:off x="685800" y="4933950"/>
-            <a:ext cx="2714625" cy="647700"/>
+            <a:off x="609600" y="6210300"/>
+            <a:ext cx="10668000" cy="323850"/>
           </a:xfrm>
           <a:prstGeom xmlns:a="http://schemas.openxmlformats.org/drawingml/2006/main" prst="rect">
             <a:avLst/>
@@ -8836,10 +11453,10 @@
         <p:txBody>
           <a:bodyPr xmlns:a="http://schemas.openxmlformats.org/drawingml/2006/main" lIns="0" tIns="0" rIns="0" bIns="0"/>
           <a:lstStyle xmlns:a="http://schemas.openxmlformats.org/drawingml/2006/main">
-            <a:defPPr>
-              <a:defRPr sz="2100" b="1">
-                <a:solidFill>
-                  <a:srgbClr val="147A78"/>
+            <a:defPPr algn="l">
+              <a:defRPr sz="1725" b="1">
+                <a:solidFill>
+                  <a:srgbClr val="E47F29"/>
                 </a:solidFill>
                 <a:latin typeface="Arial"/>
                 <a:ea typeface="Arial"/>
@@ -8848,10 +11465,10 @@
             </a:defPPr>
           </a:lstStyle>
           <a:p xmlns:a="http://schemas.openxmlformats.org/drawingml/2006/main">
-            <a:pPr>
-              <a:defRPr sz="2100" b="1">
-                <a:solidFill>
-                  <a:srgbClr val="147A78"/>
+            <a:pPr algn="l">
+              <a:defRPr sz="1725" b="1">
+                <a:solidFill>
+                  <a:srgbClr val="E47F29"/>
                 </a:solidFill>
                 <a:latin typeface="Arial"/>
                 <a:ea typeface="Arial"/>
@@ -8859,25 +11476,25 @@
               </a:defRPr>
             </a:pPr>
             <a:r>
-              <a:rPr sz="2100" b="1">
-                <a:solidFill>
-                  <a:srgbClr val="147A78"/>
+              <a:rPr sz="1725" b="1">
+                <a:solidFill>
+                  <a:srgbClr val="E47F29"/>
                 </a:solidFill>
                 <a:latin typeface="Arial"/>
                 <a:ea typeface="Arial"/>
                 <a:cs typeface="Arial"/>
               </a:rPr>
-              <a:t>Final deliverables</a:t>
-            </a:r>
-          </a:p>
-        </p:txBody>
-      </p:sp>
-      <p:sp>
-        <p:nvSpPr>
-          <p:cNvPr id="9" name="body">
-            <a:extLst xmlns:a="http://schemas.openxmlformats.org/drawingml/2006/main">
-              <a:ext uri="{FF2B5EF4-FFF2-40B4-BE49-F238E27FC236}">
-                <a16:creationId xmlns:a16="http://schemas.microsoft.com/office/drawing/2014/main" id="{81CBDA74-E9D8-40BF-849A-42CEFD00CAB7}"/>
+              <a:t>Final test: seed 1, 10 new episodes. Other training seeds still fail.</a:t>
+            </a:r>
+          </a:p>
+        </p:txBody>
+      </p:sp>
+      <p:sp>
+        <p:nvSpPr>
+          <p:cNvPr id="10" name="">
+            <a:extLst xmlns:a="http://schemas.openxmlformats.org/drawingml/2006/main">
+              <a:ext uri="{FF2B5EF4-FFF2-40B4-BE49-F238E27FC236}">
+                <a16:creationId xmlns:a16="http://schemas.microsoft.com/office/drawing/2014/main" id="{8467E24D-BBDB-4398-B3E4-7B63AF2EA914}"/>
               </a:ext>
             </a:extLst>
           </p:cNvPr>
@@ -8888,8 +11505,8 @@
         </p:nvSpPr>
         <p:spPr>
           <a:xfrm xmlns:a="http://schemas.openxmlformats.org/drawingml/2006/main">
-            <a:off x="3571875" y="4933950"/>
-            <a:ext cx="7858125" cy="952500"/>
+            <a:off x="11077575" y="6457950"/>
+            <a:ext cx="666750" cy="266700"/>
           </a:xfrm>
           <a:prstGeom xmlns:a="http://schemas.openxmlformats.org/drawingml/2006/main" prst="rect">
             <a:avLst/>
@@ -8902,10 +11519,10 @@
         <p:txBody>
           <a:bodyPr xmlns:a="http://schemas.openxmlformats.org/drawingml/2006/main" lIns="0" tIns="0" rIns="0" bIns="0"/>
           <a:lstStyle xmlns:a="http://schemas.openxmlformats.org/drawingml/2006/main">
-            <a:defPPr>
-              <a:defRPr sz="2025" b="0">
-                <a:solidFill>
-                  <a:srgbClr val="142B40"/>
+            <a:defPPr algn="l">
+              <a:defRPr sz="1350" b="0">
+                <a:solidFill>
+                  <a:srgbClr val="6D8190"/>
                 </a:solidFill>
                 <a:latin typeface="Arial"/>
                 <a:ea typeface="Arial"/>
@@ -8914,10 +11531,10 @@
             </a:defPPr>
           </a:lstStyle>
           <a:p xmlns:a="http://schemas.openxmlformats.org/drawingml/2006/main">
-            <a:pPr>
-              <a:defRPr sz="2025" b="0">
-                <a:solidFill>
-                  <a:srgbClr val="142B40"/>
+            <a:pPr algn="l">
+              <a:defRPr sz="1350" b="0">
+                <a:solidFill>
+                  <a:srgbClr val="6D8190"/>
                 </a:solidFill>
                 <a:latin typeface="Arial"/>
                 <a:ea typeface="Arial"/>
@@ -8925,98 +11542,9 @@
               </a:defRPr>
             </a:pPr>
             <a:r>
-              <a:rPr sz="2025" b="0">
-                <a:solidFill>
-                  <a:srgbClr val="142B40"/>
-                </a:solidFill>
-                <a:latin typeface="Arial"/>
-                <a:ea typeface="Arial"/>
-                <a:cs typeface="Arial"/>
-              </a:rPr>
-              <a:t>Reproducible Colab, checkpoints, evaluation plots</a:t>
-            </a:r>
-          </a:p>
-          <a:p xmlns:a="http://schemas.openxmlformats.org/drawingml/2006/main">
-            <a:pPr>
-              <a:defRPr sz="2025" b="0">
-                <a:solidFill>
-                  <a:srgbClr val="142B40"/>
-                </a:solidFill>
-                <a:latin typeface="Arial"/>
-                <a:ea typeface="Arial"/>
-                <a:cs typeface="Arial"/>
-              </a:defRPr>
-            </a:pPr>
-            <a:r>
-              <a:rPr sz="2025" b="0">
-                <a:solidFill>
-                  <a:srgbClr val="142B40"/>
-                </a:solidFill>
-                <a:latin typeface="Arial"/>
-                <a:ea typeface="Arial"/>
-                <a:cs typeface="Arial"/>
-              </a:rPr>
-              <a:t>and a complete policy demonstration</a:t>
-            </a:r>
-          </a:p>
-        </p:txBody>
-      </p:sp>
-      <p:sp>
-        <p:nvSpPr>
-          <p:cNvPr id="10" name="body">
-            <a:extLst xmlns:a="http://schemas.openxmlformats.org/drawingml/2006/main">
-              <a:ext uri="{FF2B5EF4-FFF2-40B4-BE49-F238E27FC236}">
-                <a16:creationId xmlns:a16="http://schemas.microsoft.com/office/drawing/2014/main" id="{0FDF7A5B-5D8A-4310-B502-4E23030F0B31}"/>
-              </a:ext>
-            </a:extLst>
-          </p:cNvPr>
-          <p:cNvSpPr>
-            <a:spLocks xmlns:a="http://schemas.openxmlformats.org/drawingml/2006/main" noGrp="1"/>
-          </p:cNvSpPr>
-          <p:nvPr/>
-        </p:nvSpPr>
-        <p:spPr>
-          <a:xfrm xmlns:a="http://schemas.openxmlformats.org/drawingml/2006/main">
-            <a:off x="10858500" y="6305550"/>
-            <a:ext cx="762000" cy="266700"/>
-          </a:xfrm>
-          <a:prstGeom xmlns:a="http://schemas.openxmlformats.org/drawingml/2006/main" prst="rect">
-            <a:avLst/>
-          </a:prstGeom>
-          <a:noFill xmlns:a="http://schemas.openxmlformats.org/drawingml/2006/main"/>
-          <a:ln xmlns:a="http://schemas.openxmlformats.org/drawingml/2006/main" w="0">
-            <a:noFill/>
-          </a:ln>
-        </p:spPr>
-        <p:txBody>
-          <a:bodyPr xmlns:a="http://schemas.openxmlformats.org/drawingml/2006/main" lIns="0" tIns="0" rIns="0" bIns="0"/>
-          <a:lstStyle xmlns:a="http://schemas.openxmlformats.org/drawingml/2006/main">
-            <a:defPPr>
-              <a:defRPr sz="1350" b="0">
-                <a:solidFill>
-                  <a:srgbClr val="5B6D7A"/>
-                </a:solidFill>
-                <a:latin typeface="Arial"/>
-                <a:ea typeface="Arial"/>
-                <a:cs typeface="Arial"/>
-              </a:defRPr>
-            </a:defPPr>
-          </a:lstStyle>
-          <a:p xmlns:a="http://schemas.openxmlformats.org/drawingml/2006/main">
-            <a:pPr>
-              <a:defRPr sz="1350" b="0">
-                <a:solidFill>
-                  <a:srgbClr val="5B6D7A"/>
-                </a:solidFill>
-                <a:latin typeface="Arial"/>
-                <a:ea typeface="Arial"/>
-                <a:cs typeface="Arial"/>
-              </a:defRPr>
-            </a:pPr>
-            <a:r>
               <a:rPr sz="1350" b="0">
                 <a:solidFill>
-                  <a:srgbClr val="5B6D7A"/>
+                  <a:srgbClr val="6D8190"/>
                 </a:solidFill>
                 <a:latin typeface="Arial"/>
                 <a:ea typeface="Arial"/>
@@ -9030,7 +11558,7 @@
     </p:spTree>
     <p:extLst>
       <p:ext uri="{BB962C8B-B14F-4D97-AF65-F5344CB8AC3E}">
-        <p14:creationId xmlns:p14="http://schemas.microsoft.com/office/powerpoint/2010/main" val="147905450"/>
+        <p14:creationId xmlns:p14="http://schemas.microsoft.com/office/powerpoint/2010/main" val="419985294"/>
       </p:ext>
     </p:extLst>
   </p:cSld>

--- a/docs/presentation/IQL_RL_Proposal.pptx
+++ b/docs/presentation/IQL_RL_Proposal.pptx
@@ -449,7 +449,7 @@
           <a:lstStyle xmlns:a="http://schemas.openxmlformats.org/drawingml/2006/main"/>
           <a:p xmlns:a="http://schemas.openxmlformats.org/drawingml/2006/main">
             <a:r>
-              <a:t>20 seconds. Suggested speaker: Aleksandr Medvedev.</a:t>
+              <a:t>0:00-0:10</a:t>
             </a:r>
           </a:p>
           <a:p xmlns:a="http://schemas.openxmlformats.org/drawingml/2006/main">
@@ -459,7 +459,7 @@
           </a:p>
           <a:p xmlns:a="http://schemas.openxmlformats.org/drawingml/2006/main">
             <a:r>
-              <a:t>Our project uses Implicit Q-Learning, or IQL, to learn continuous locomotion from recorded data. We will explain how the algorithm works, what HalfCheetah requires, and why this combination is suitable. The final slide shows measured feasibility evidence from our existing project.</a:t>
+              <a:t>Our project uses Implicit Q-Learning to teach HalfCheetah efficient locomotion from recorded data.</a:t>
             </a:r>
           </a:p>
           <a:p xmlns:a="http://schemas.openxmlformats.org/drawingml/2006/main">
@@ -469,27 +469,7 @@
           </a:p>
           <a:p xmlns:a="http://schemas.openxmlformats.org/drawingml/2006/main">
             <a:r>
-              <a:t>Show: Introduce the title and team. Point to the actual HalfCheetah rollout image; hold briefly before advancing.</a:t>
-            </a:r>
-          </a:p>
-          <a:p xmlns:a="http://schemas.openxmlformats.org/drawingml/2006/main">
-            <a:r>
-              <a:t/>
-            </a:r>
-          </a:p>
-          <a:p xmlns:a="http://schemas.openxmlformats.org/drawingml/2006/main">
-            <a:r>
-              <a:t>Sources:</a:t>
-            </a:r>
-          </a:p>
-          <a:p xmlns:a="http://schemas.openxmlformats.org/drawingml/2006/main">
-            <a:r>
-              <a:t>https://github.com/MedvAx-AI/iql-halfcheetah</a:t>
-            </a:r>
-          </a:p>
-          <a:p xmlns:a="http://schemas.openxmlformats.org/drawingml/2006/main">
-            <a:r>
-              <a:t>Image: actual project rollout, seed 1 at 500k, evaluation seed 10000, frame at 20 seconds. https://github.com/MedvAx-AI/iql-halfcheetah/releases/tag/policy-continuation-experiment</a:t>
+              <a:t>Sources: [1], [4]. Full references: SLIDE_SOURCES.md.</a:t>
             </a:r>
           </a:p>
         </p:txBody>
@@ -559,7 +539,7 @@
           <a:lstStyle xmlns:a="http://schemas.openxmlformats.org/drawingml/2006/main"/>
           <a:p xmlns:a="http://schemas.openxmlformats.org/drawingml/2006/main">
             <a:r>
-              <a:t>50 seconds. Suggested speaker: Leo Vesin.</a:t>
+              <a:t>0:10-0:45</a:t>
             </a:r>
           </a:p>
           <a:p xmlns:a="http://schemas.openxmlformats.org/drawingml/2006/main">
@@ -569,7 +549,7 @@
           </a:p>
           <a:p xmlns:a="http://schemas.openxmlformats.org/drawingml/2006/main">
             <a:r>
-              <a:t>IQL is offline, model-free actor-critic reinforcement learning. Training starts with a fixed dataset of observations, actions, rewards and next observations. The diagram separates learning from evaluation. IQL estimates values using recorded actions, then trains the actor to imitate stronger actions more heavily. It avoids explicitly maximizing the value backup over unseen actions. The simulator is used to evaluate the policy after training, rather than collect new training data. The policy produces six bounded torque controls at each step.</a:t>
+              <a:t>IQL is offline, model-free actor-critic learning. It trains on fixed transitions, then gives better recorded actions more weight when fitting the policy. The actor outputs six continuous torques. Simulator rollouts evaluate the learned policy, without collecting new training data.</a:t>
             </a:r>
           </a:p>
           <a:p xmlns:a="http://schemas.openxmlformats.org/drawingml/2006/main">
@@ -579,27 +559,7 @@
           </a:p>
           <a:p xmlns:a="http://schemas.openxmlformats.org/drawingml/2006/main">
             <a:r>
-              <a:t>Show: Follow the upper diagram from recorded transitions to learner to policy. Point to the separate simulator evaluation path. Pause so the audience can follow the distinction.</a:t>
-            </a:r>
-          </a:p>
-          <a:p xmlns:a="http://schemas.openxmlformats.org/drawingml/2006/main">
-            <a:r>
-              <a:t/>
-            </a:r>
-          </a:p>
-          <a:p xmlns:a="http://schemas.openxmlformats.org/drawingml/2006/main">
-            <a:r>
-              <a:t>Sources:</a:t>
-            </a:r>
-          </a:p>
-          <a:p xmlns:a="http://schemas.openxmlformats.org/drawingml/2006/main">
-            <a:r>
-              <a:t>https://arxiv.org/abs/2110.06169</a:t>
-            </a:r>
-          </a:p>
-          <a:p xmlns:a="http://schemas.openxmlformats.org/drawingml/2006/main">
-            <a:r>
-              <a:t>https://github.com/ikostrikov/implicit_q_learning</a:t>
+              <a:t>Sources: [1]. Full references: SLIDE_SOURCES.md.</a:t>
             </a:r>
           </a:p>
         </p:txBody>
@@ -669,7 +629,7 @@
           <a:lstStyle xmlns:a="http://schemas.openxmlformats.org/drawingml/2006/main"/>
           <a:p xmlns:a="http://schemas.openxmlformats.org/drawingml/2006/main">
             <a:r>
-              <a:t>50 seconds. Suggested speaker: Leo Vesin.</a:t>
+              <a:t>0:45-1:30</a:t>
             </a:r>
           </a:p>
           <a:p xmlns:a="http://schemas.openxmlformats.org/drawingml/2006/main">
@@ -679,7 +639,7 @@
           </a:p>
           <a:p xmlns:a="http://schemas.openxmlformats.org/drawingml/2006/main">
             <a:r>
-              <a:t>The learner has three updates. First, the state-value network uses an upper expectile of zero point seven, emphasizing higher-valued recorded actions. Second, the twin Q networks fit reward plus discounted next-state value, with discount zero point nine nine. Third, the actor fits recorded actions using advantage weights: the exponential of three times advantage, capped at one hundred. Advantage is the minimum target-critic estimate minus the state value. Three is inverse temperature. A tanh-squashed Gaussian keeps the actor's outputs within the action bounds. The repeated updates improve the policy without changing the fixed dataset.</a:t>
+              <a:t>IQL updates three components. The value network uses expectile 0.7 to favor stronger recorded actions. Twin critics fit reward plus discounted next-state value, with discount 0.99. The actor imitates actions using advantage weights, capped at 100. Advantage is minimum target Q minus V. The weight uses inverse temperature 3. A tanh-squashed Gaussian keeps actions bounded.</a:t>
             </a:r>
           </a:p>
           <a:p xmlns:a="http://schemas.openxmlformats.org/drawingml/2006/main">
@@ -689,32 +649,7 @@
           </a:p>
           <a:p xmlns:a="http://schemas.openxmlformats.org/drawingml/2006/main">
             <a:r>
-              <a:t>Show: Explain each update in order. Point to 0.7, 0.99 and the weight cap of 100. Read the equations in words and allow brief pauses.</a:t>
-            </a:r>
-          </a:p>
-          <a:p xmlns:a="http://schemas.openxmlformats.org/drawingml/2006/main">
-            <a:r>
-              <a:t/>
-            </a:r>
-          </a:p>
-          <a:p xmlns:a="http://schemas.openxmlformats.org/drawingml/2006/main">
-            <a:r>
-              <a:t>Sources:</a:t>
-            </a:r>
-          </a:p>
-          <a:p xmlns:a="http://schemas.openxmlformats.org/drawingml/2006/main">
-            <a:r>
-              <a:t>https://arxiv.org/abs/2110.06169</a:t>
-            </a:r>
-          </a:p>
-          <a:p xmlns:a="http://schemas.openxmlformats.org/drawingml/2006/main">
-            <a:r>
-              <a:t>https://github.com/MedvAx-AI/iql-halfcheetah/blob/c372ec0423b81839956ec00dd7338700db8d3737/src/iql_project/iql.py</a:t>
-            </a:r>
-          </a:p>
-          <a:p xmlns:a="http://schemas.openxmlformats.org/drawingml/2006/main">
-            <a:r>
-              <a:t>https://github.com/MedvAx-AI/iql-halfcheetah/blob/c372ec0423b81839956ec00dd7338700db8d3737/configs/halfcheetah.toml</a:t>
+              <a:t>Sources: [1], [3]. Full references: SLIDE_SOURCES.md.</a:t>
             </a:r>
           </a:p>
         </p:txBody>
@@ -784,7 +719,7 @@
           <a:lstStyle xmlns:a="http://schemas.openxmlformats.org/drawingml/2006/main"/>
           <a:p xmlns:a="http://schemas.openxmlformats.org/drawingml/2006/main">
             <a:r>
-              <a:t>65 seconds. Suggested speaker: Nikita Shankin.</a:t>
+              <a:t>1:30-2:30</a:t>
             </a:r>
           </a:p>
           <a:p xmlns:a="http://schemas.openxmlformats.org/drawingml/2006/main">
@@ -794,7 +729,7 @@
           </a:p>
           <a:p xmlns:a="http://schemas.openxmlformats.org/drawingml/2006/main">
             <a:r>
-              <a:t>HalfCheetah version five is a two-dimensional locomotion task in Gymnasium and MuJoCo. The robot has front and back legs. Its seventeen-value observation combines eight position or angle values with nine velocities. These describe the robot's pose and motion. Absolute horizontal position is excluded from the default observation. The action has six continuous torque components: thigh, shin and foot on each leg. Every component lies between minus one and one. The policy must use the current observation to coordinate these joints into a useful gait. The image comes from a real project rollout, while the color split shows the observation structure.</a:t>
+              <a:t>HalfCheetah-v5 is a two-dimensional locomotion task in Gymnasium and MuJoCo. Its 17 observations contain eight pose values and nine velocities. Absolute horizontal position is excluded. Six actions control the thigh, shin and foot on both legs. Each torque lies between minus one and one. The agent must coordinate these joints into a sustained forward gait.</a:t>
             </a:r>
           </a:p>
           <a:p xmlns:a="http://schemas.openxmlformats.org/drawingml/2006/main">
@@ -804,27 +739,7 @@
           </a:p>
           <a:p xmlns:a="http://schemas.openxmlformats.org/drawingml/2006/main">
             <a:r>
-              <a:t>Show: Point to the actual robot, then trace the 8 plus 9 observation split. Explain the three joints on each of two legs and the action bound. Leave time for the audience to inspect the image.</a:t>
-            </a:r>
-          </a:p>
-          <a:p xmlns:a="http://schemas.openxmlformats.org/drawingml/2006/main">
-            <a:r>
-              <a:t/>
-            </a:r>
-          </a:p>
-          <a:p xmlns:a="http://schemas.openxmlformats.org/drawingml/2006/main">
-            <a:r>
-              <a:t>Sources:</a:t>
-            </a:r>
-          </a:p>
-          <a:p xmlns:a="http://schemas.openxmlformats.org/drawingml/2006/main">
-            <a:r>
-              <a:t>https://gymnasium.farama.org/environments/mujoco/half_cheetah/</a:t>
-            </a:r>
-          </a:p>
-          <a:p xmlns:a="http://schemas.openxmlformats.org/drawingml/2006/main">
-            <a:r>
-              <a:t>Image: actual project rollout, seed 1 at 500k, evaluation seed 10000, frame at 0 seconds. https://github.com/MedvAx-AI/iql-halfcheetah/releases/tag/policy-continuation-experiment</a:t>
+              <a:t>Sources: [2], [4]. Full references: SLIDE_SOURCES.md.</a:t>
             </a:r>
           </a:p>
         </p:txBody>
@@ -894,7 +809,7 @@
           <a:lstStyle xmlns:a="http://schemas.openxmlformats.org/drawingml/2006/main"/>
           <a:p xmlns:a="http://schemas.openxmlformats.org/drawingml/2006/main">
             <a:r>
-              <a:t>55 seconds. Suggested speaker: Nikita Shankin.</a:t>
+              <a:t>2:30-3:30</a:t>
             </a:r>
           </a:p>
           <a:p xmlns:a="http://schemas.openxmlformats.org/drawingml/2006/main">
@@ -904,7 +819,7 @@
           </a:p>
           <a:p xmlns:a="http://schemas.openxmlformats.org/drawingml/2006/main">
             <a:r>
-              <a:t>The default reward is forward velocity minus zero point one times squared control effort. The numerical example is illustrative: at five meters per second, six action components of zero point five produce a cost of zero point fifteen, so the reward is four point eight five. This encourages efficient forward motion. The agent should learn a gait that maintains speed throughout the episode. A fall does not terminate HalfCheetah. The time limit is one thousand steps, about fifty simulated seconds. A failed policy can remain on the ground until that limit. Time-limit truncation still preserves next-state value bootstrapping in our learning targets.</a:t>
+              <a:t>Reward is forward velocity minus 0.1 times squared action effort. In this example, speed contributes 5 and control costs 0.15, giving 4.85 reward. The goal is efficient, sustained forward motion. A fall does not end HalfCheetah: the episode lasts 1,000 steps, about 50 simulated seconds. Time-limit truncation preserves next-state value bootstrapping. We inspect complete episodes to detect falls and stalls.</a:t>
             </a:r>
           </a:p>
           <a:p xmlns:a="http://schemas.openxmlformats.org/drawingml/2006/main">
@@ -914,27 +829,7 @@
           </a:p>
           <a:p xmlns:a="http://schemas.openxmlformats.org/drawingml/2006/main">
             <a:r>
-              <a:t>Show: Follow the numerical reward example from speed through effort cost to net reward. Trace the 0-to-50-second episode line. Emphasize that a fall does not end the episode.</a:t>
-            </a:r>
-          </a:p>
-          <a:p xmlns:a="http://schemas.openxmlformats.org/drawingml/2006/main">
-            <a:r>
-              <a:t/>
-            </a:r>
-          </a:p>
-          <a:p xmlns:a="http://schemas.openxmlformats.org/drawingml/2006/main">
-            <a:r>
-              <a:t>Sources:</a:t>
-            </a:r>
-          </a:p>
-          <a:p xmlns:a="http://schemas.openxmlformats.org/drawingml/2006/main">
-            <a:r>
-              <a:t>https://gymnasium.farama.org/environments/mujoco/half_cheetah/</a:t>
-            </a:r>
-          </a:p>
-          <a:p xmlns:a="http://schemas.openxmlformats.org/drawingml/2006/main">
-            <a:r>
-              <a:t>https://github.com/MedvAx-AI/iql-halfcheetah/blob/c372ec0423b81839956ec00dd7338700db8d3737/src/iql_project/iql.py</a:t>
+              <a:t>Sources: [2], [3]. Full references: SLIDE_SOURCES.md.</a:t>
             </a:r>
           </a:p>
         </p:txBody>
@@ -1004,7 +899,7 @@
           <a:lstStyle xmlns:a="http://schemas.openxmlformats.org/drawingml/2006/main"/>
           <a:p xmlns:a="http://schemas.openxmlformats.org/drawingml/2006/main">
             <a:r>
-              <a:t>40 seconds. Suggested speaker: Ruslan Nasibullin.</a:t>
+              <a:t>3:30-3:50</a:t>
             </a:r>
           </a:p>
           <a:p xmlns:a="http://schemas.openxmlformats.org/drawingml/2006/main">
@@ -1014,7 +909,7 @@
           </a:p>
           <a:p xmlns:a="http://schemas.openxmlformats.org/drawingml/2006/main">
             <a:r>
-              <a:t>We use Minari's HalfCheetah medium dataset: one million transitions from one thousand episodes. Our protocol trains three seeds for five hundred thousand offline updates each, with batches of two hundred fifty-six. We evaluate checkpoints over ten episodes, compare raw return with a random baseline, then test the selected checkpoint on separate final episode seeds. We retain full videos and separate episode variation from training-seed variation. MuJoCo three point two point three matches the recorded dataset runtime.</a:t>
+              <a:t>We use one million Minari transitions. Three training seeds receive 500k updates each. Checkpoints use ten evaluation episodes and a random baseline. The selected policy then uses separate final-test seeds. We retain full videos and pin MuJoCo 3.2.3 for reproducibility.</a:t>
             </a:r>
           </a:p>
           <a:p xmlns:a="http://schemas.openxmlformats.org/drawingml/2006/main">
@@ -1024,27 +919,7 @@
           </a:p>
           <a:p xmlns:a="http://schemas.openxmlformats.org/drawingml/2006/main">
             <a:r>
-              <a:t>Show: Point to the large dataset and budget numbers, then follow the training-to-selection-to-final-test timeline. Distinguish training seeds from evaluation episode seeds.</a:t>
-            </a:r>
-          </a:p>
-          <a:p xmlns:a="http://schemas.openxmlformats.org/drawingml/2006/main">
-            <a:r>
-              <a:t/>
-            </a:r>
-          </a:p>
-          <a:p xmlns:a="http://schemas.openxmlformats.org/drawingml/2006/main">
-            <a:r>
-              <a:t>Sources:</a:t>
-            </a:r>
-          </a:p>
-          <a:p xmlns:a="http://schemas.openxmlformats.org/drawingml/2006/main">
-            <a:r>
-              <a:t>https://minari.farama.org/datasets/mujoco/halfcheetah/medium-v0/</a:t>
-            </a:r>
-          </a:p>
-          <a:p xmlns:a="http://schemas.openxmlformats.org/drawingml/2006/main">
-            <a:r>
-              <a:t>https://github.com/MedvAx-AI/iql-halfcheetah/blob/c372ec0423b81839956ec00dd7338700db8d3737/docs/POLICY_CONTINUATION.md</a:t>
+              <a:t>Sources: [3], [5]. Full references: SLIDE_SOURCES.md.</a:t>
             </a:r>
           </a:p>
         </p:txBody>
@@ -1114,7 +989,7 @@
           <a:lstStyle xmlns:a="http://schemas.openxmlformats.org/drawingml/2006/main"/>
           <a:p xmlns:a="http://schemas.openxmlformats.org/drawingml/2006/main">
             <a:r>
-              <a:t>60 seconds. Suggested speaker: Telman Nuruzov.</a:t>
+              <a:t>3:50-4:30</a:t>
             </a:r>
           </a:p>
           <a:p xmlns:a="http://schemas.openxmlformats.org/drawingml/2006/main">
@@ -1124,7 +999,7 @@
           </a:p>
           <a:p xmlns:a="http://schemas.openxmlformats.org/drawingml/2006/main">
             <a:r>
-              <a:t>The match has three practical reasons. Continuous joint torques fit a continuous actor directly. Available offline locomotion data makes training feasible without a new data-collection stage. Finally, numerical returns and visible movement make evaluation understandable. IQL's advantage weighting can favor better recorded actions, but improvement is something to test, not assume. The main challenges are limited coverage, policy variation and simulator differences. We address them with multiple training seeds, pinned dependencies and full-episode evaluation. Aleksandr owns integration, Nikita the environment and data, Leo IQL, Ruslan evaluation, and Telman the notebook and presentation. Our shared outputs are a reproducible Colab, checkpoints, plots and complete rollouts.</a:t>
+              <a:t>HalfCheetah fits IQL because it has continuous controls, available offline data, and measurable locomotion. Advantage weighting can favor better actions, but improvement must be tested. Main challenges are data coverage, seed failures and physics differences. We address them with multiple seeds, pinned dependencies and full-episode evaluation. Team responsibilities and deliverables appear here.</a:t>
             </a:r>
           </a:p>
           <a:p xmlns:a="http://schemas.openxmlformats.org/drawingml/2006/main">
@@ -1134,32 +1009,7 @@
           </a:p>
           <a:p xmlns:a="http://schemas.openxmlformats.org/drawingml/2006/main">
             <a:r>
-              <a:t>Show: Follow the three algorithm-to-task matches. Explain the challenges along the bottom. Point to the team ownership line and name each personâ€™s contribution without reading all slide labels aloud.</a:t>
-            </a:r>
-          </a:p>
-          <a:p xmlns:a="http://schemas.openxmlformats.org/drawingml/2006/main">
-            <a:r>
-              <a:t/>
-            </a:r>
-          </a:p>
-          <a:p xmlns:a="http://schemas.openxmlformats.org/drawingml/2006/main">
-            <a:r>
-              <a:t>Sources:</a:t>
-            </a:r>
-          </a:p>
-          <a:p xmlns:a="http://schemas.openxmlformats.org/drawingml/2006/main">
-            <a:r>
-              <a:t>https://arxiv.org/abs/2110.06169</a:t>
-            </a:r>
-          </a:p>
-          <a:p xmlns:a="http://schemas.openxmlformats.org/drawingml/2006/main">
-            <a:r>
-              <a:t>https://minari.farama.org/datasets/mujoco/halfcheetah/medium-v0/</a:t>
-            </a:r>
-          </a:p>
-          <a:p xmlns:a="http://schemas.openxmlformats.org/drawingml/2006/main">
-            <a:r>
-              <a:t>https://gymnasium.farama.org/environments/mujoco/half_cheetah/</a:t>
+              <a:t>Sources: [1], [2], [3]. Full references: SLIDE_SOURCES.md.</a:t>
             </a:r>
           </a:p>
         </p:txBody>
@@ -1229,7 +1079,7 @@
           <a:lstStyle xmlns:a="http://schemas.openxmlformats.org/drawingml/2006/main"/>
           <a:p xmlns:a="http://schemas.openxmlformats.org/drawingml/2006/main">
             <a:r>
-              <a:t>50 seconds. Suggested speaker: Aleksandr Medvedev.</a:t>
+              <a:t>4:30-5:00</a:t>
             </a:r>
           </a:p>
           <a:p xmlns:a="http://schemas.openxmlformats.org/drawingml/2006/main">
@@ -1239,7 +1089,7 @@
           </a:p>
           <a:p xmlns:a="http://schemas.openxmlformats.org/drawingml/2006/main">
             <a:r>
-              <a:t>This chart shows recorded Colab validation means for all three training seeds at five measured checkpoints. Each point averages ten episodes. Performance varies across seeds, and the lines do not claim values between measurements. The selected seed-one policy reached a raw return of about fifteen thousand two hundred sixty on ten separate final-test episodes, compared with about two thousand twenty-six at one hundred thousand updates. Long stationary tails decreased from ten out of ten episodes to zero out of ten. Those tails mean at least five seconds of very slow movement at the end. Other training seeds still fail, and these samples do not guarantee success everywhere. The evidence supports feasibility while preserving the limits. Thank you.</a:t>
+              <a:t>The curves show measured means for all three training seeds, with ten episodes per point. On ten separate final-test episodes, selected seed 1 achieved about 15,260 return versus 2,026 at 100k. Long stationary tails decreased from ten episodes to zero. Other training seeds still fail, so these results demonstrate feasibility rather than guaranteed success. Thank you.</a:t>
             </a:r>
           </a:p>
           <a:p xmlns:a="http://schemas.openxmlformats.org/drawingml/2006/main">
@@ -1249,42 +1099,7 @@
           </a:p>
           <a:p xmlns:a="http://schemas.openxmlformats.org/drawingml/2006/main">
             <a:r>
-              <a:t>Show: Trace all three measured curves. Point to the separate final-test return and stationary-tail counts. Say the other-seed limitation clearly, then pause on the closing slide.</a:t>
-            </a:r>
-          </a:p>
-          <a:p xmlns:a="http://schemas.openxmlformats.org/drawingml/2006/main">
-            <a:r>
-              <a:t/>
-            </a:r>
-          </a:p>
-          <a:p xmlns:a="http://schemas.openxmlformats.org/drawingml/2006/main">
-            <a:r>
-              <a:t>Sources:</a:t>
-            </a:r>
-          </a:p>
-          <a:p xmlns:a="http://schemas.openxmlformats.org/drawingml/2006/main">
-            <a:r>
-              <a:t>https://github.com/MedvAx-AI/iql-halfcheetah</a:t>
-            </a:r>
-          </a:p>
-          <a:p xmlns:a="http://schemas.openxmlformats.org/drawingml/2006/main">
-            <a:r>
-              <a:t>https://github.com/MedvAx-AI/iql-halfcheetah/blob/c372ec0423b81839956ec00dd7338700db8d3737/docs/POLICY_CONTINUATION.md</a:t>
-            </a:r>
-          </a:p>
-          <a:p xmlns:a="http://schemas.openxmlformats.org/drawingml/2006/main">
-            <a:r>
-              <a:t>https://github.com/MedvAx-AI/iql-halfcheetah/blob/aa9ad5baec910730502e1f24459325b5f273b952/docs/evidence/continuation/validation/summary.json</a:t>
-            </a:r>
-          </a:p>
-          <a:p xmlns:a="http://schemas.openxmlformats.org/drawingml/2006/main">
-            <a:r>
-              <a:t>https://github.com/MedvAx-AI/iql-halfcheetah/blob/aa9ad5baec910730502e1f24459325b5f273b952/docs/evidence/continuation/independent-final-test.json</a:t>
-            </a:r>
-          </a:p>
-          <a:p xmlns:a="http://schemas.openxmlformats.org/drawingml/2006/main">
-            <a:r>
-              <a:t>Long stationary tail: at least 5 seconds at the end with absolute forward velocity &lt;= 0.1 m/s. Descriptive diagnostic, not a standard benchmark success score.</a:t>
+              <a:t>Sources: [6]. Full references: SLIDE_SOURCES.md.</a:t>
             </a:r>
           </a:p>
         </p:txBody>

--- a/docs/presentation/IQL_RL_Proposal.pptx
+++ b/docs/presentation/IQL_RL_Proposal.pptx
@@ -3943,11 +3943,11 @@
 </file>
 
 <file path=ppt/slides/slide1.xml><?xml version="1.0" encoding="utf-8"?>
-<p:sld xmlns:p="http://schemas.openxmlformats.org/presentationml/2006/main">
+<p:sld xmlns:a="http://schemas.openxmlformats.org/drawingml/2006/main" xmlns:ns2="http://schemas.microsoft.com/office/drawing/2014/main" xmlns:ns4="http://schemas.microsoft.com/office/powerpoint/2010/main" xmlns:p="http://schemas.openxmlformats.org/presentationml/2006/main" xmlns:r="http://schemas.openxmlformats.org/officeDocument/2006/relationships">
   <p:cSld>
     <p:bg>
       <p:bgPr>
-        <a:solidFill xmlns:a="http://schemas.openxmlformats.org/drawingml/2006/main">
+        <a:solidFill>
           <a:srgbClr val="112D3D"/>
         </a:solidFill>
       </p:bgPr>
@@ -3959,38 +3959,38 @@
         <p:nvPr/>
       </p:nvGrpSpPr>
       <p:grpSpPr>
-        <a:xfrm xmlns:a="http://schemas.openxmlformats.org/drawingml/2006/main"/>
+        <a:xfrm/>
       </p:grpSpPr>
       <p:sp>
         <p:nvSpPr>
           <p:cNvPr id="6" name="">
-            <a:extLst xmlns:a="http://schemas.openxmlformats.org/drawingml/2006/main">
-              <a:ext uri="{FF2B5EF4-FFF2-40B4-BE49-F238E27FC236}">
-                <a16:creationId xmlns:a16="http://schemas.microsoft.com/office/drawing/2014/main" id="{13523960-0F0D-4DF4-ADA8-B88590B09DEA}"/>
-              </a:ext>
-            </a:extLst>
-          </p:cNvPr>
-          <p:cNvSpPr>
-            <a:spLocks xmlns:a="http://schemas.openxmlformats.org/drawingml/2006/main" noGrp="1"/>
+            <a:extLst>
+              <a:ext uri="{FF2B5EF4-FFF2-40B4-BE49-F238E27FC236}">
+                <ns2:creationId id="{13523960-0F0D-4DF4-ADA8-B88590B09DEA}"/>
+              </a:ext>
+            </a:extLst>
+          </p:cNvPr>
+          <p:cNvSpPr>
+            <a:spLocks noGrp="1"/>
           </p:cNvSpPr>
           <p:nvPr/>
         </p:nvSpPr>
         <p:spPr>
-          <a:xfrm xmlns:a="http://schemas.openxmlformats.org/drawingml/2006/main">
+          <a:xfrm>
             <a:off x="609600" y="1104900"/>
             <a:ext cx="5619750" cy="2019300"/>
           </a:xfrm>
-          <a:prstGeom xmlns:a="http://schemas.openxmlformats.org/drawingml/2006/main" prst="rect">
-            <a:avLst/>
-          </a:prstGeom>
-          <a:noFill xmlns:a="http://schemas.openxmlformats.org/drawingml/2006/main"/>
-          <a:ln xmlns:a="http://schemas.openxmlformats.org/drawingml/2006/main" w="0">
-            <a:noFill/>
-          </a:ln>
-        </p:spPr>
-        <p:txBody>
-          <a:bodyPr xmlns:a="http://schemas.openxmlformats.org/drawingml/2006/main" lIns="0" tIns="0" rIns="0" bIns="0"/>
-          <a:lstStyle xmlns:a="http://schemas.openxmlformats.org/drawingml/2006/main">
+          <a:prstGeom prst="rect">
+            <a:avLst/>
+          </a:prstGeom>
+          <a:noFill/>
+          <a:ln w="0">
+            <a:noFill/>
+          </a:ln>
+        </p:spPr>
+        <p:txBody>
+          <a:bodyPr lIns="0" tIns="0" rIns="0" bIns="0"/>
+          <a:lstStyle>
             <a:defPPr algn="l">
               <a:defRPr sz="6300" b="1">
                 <a:solidFill>
@@ -4002,7 +4002,7 @@
               </a:defRPr>
             </a:defPPr>
           </a:lstStyle>
-          <a:p xmlns:a="http://schemas.openxmlformats.org/drawingml/2006/main">
+          <a:p>
             <a:pPr algn="l">
               <a:defRPr sz="6300" b="1">
                 <a:solidFill>
@@ -4025,7 +4025,7 @@
               <a:t>Implicit</a:t>
             </a:r>
           </a:p>
-          <a:p xmlns:a="http://schemas.openxmlformats.org/drawingml/2006/main">
+          <a:p>
             <a:pPr algn="l">
               <a:defRPr sz="6300" b="1">
                 <a:solidFill>
@@ -4053,33 +4053,33 @@
       <p:sp>
         <p:nvSpPr>
           <p:cNvPr id="2" name="">
-            <a:extLst xmlns:a="http://schemas.openxmlformats.org/drawingml/2006/main">
-              <a:ext uri="{FF2B5EF4-FFF2-40B4-BE49-F238E27FC236}">
-                <a16:creationId xmlns:a16="http://schemas.microsoft.com/office/drawing/2014/main" id="{6295A5AF-486C-4922-934D-D4F10E58CBF5}"/>
-              </a:ext>
-            </a:extLst>
-          </p:cNvPr>
-          <p:cNvSpPr>
-            <a:spLocks xmlns:a="http://schemas.openxmlformats.org/drawingml/2006/main" noGrp="1"/>
+            <a:extLst>
+              <a:ext uri="{FF2B5EF4-FFF2-40B4-BE49-F238E27FC236}">
+                <ns2:creationId id="{6295A5AF-486C-4922-934D-D4F10E58CBF5}"/>
+              </a:ext>
+            </a:extLst>
+          </p:cNvPr>
+          <p:cNvSpPr>
+            <a:spLocks noGrp="1"/>
           </p:cNvSpPr>
           <p:nvPr/>
         </p:nvSpPr>
         <p:spPr>
-          <a:xfrm xmlns:a="http://schemas.openxmlformats.org/drawingml/2006/main">
+          <a:xfrm>
             <a:off x="609600" y="3476625"/>
             <a:ext cx="5715000" cy="685800"/>
           </a:xfrm>
-          <a:prstGeom xmlns:a="http://schemas.openxmlformats.org/drawingml/2006/main" prst="rect">
-            <a:avLst/>
-          </a:prstGeom>
-          <a:noFill xmlns:a="http://schemas.openxmlformats.org/drawingml/2006/main"/>
-          <a:ln xmlns:a="http://schemas.openxmlformats.org/drawingml/2006/main" w="0">
-            <a:noFill/>
-          </a:ln>
-        </p:spPr>
-        <p:txBody>
-          <a:bodyPr xmlns:a="http://schemas.openxmlformats.org/drawingml/2006/main" lIns="0" tIns="0" rIns="0" bIns="0"/>
-          <a:lstStyle xmlns:a="http://schemas.openxmlformats.org/drawingml/2006/main">
+          <a:prstGeom prst="rect">
+            <a:avLst/>
+          </a:prstGeom>
+          <a:noFill/>
+          <a:ln w="0">
+            <a:noFill/>
+          </a:ln>
+        </p:spPr>
+        <p:txBody>
+          <a:bodyPr lIns="0" tIns="0" rIns="0" bIns="0"/>
+          <a:lstStyle>
             <a:defPPr algn="l">
               <a:defRPr sz="3750" b="1">
                 <a:solidFill>
@@ -4091,7 +4091,7 @@
               </a:defRPr>
             </a:defPPr>
           </a:lstStyle>
-          <a:p xmlns:a="http://schemas.openxmlformats.org/drawingml/2006/main">
+          <a:p>
             <a:pPr algn="l">
               <a:defRPr sz="3750" b="1">
                 <a:solidFill>
@@ -4119,33 +4119,33 @@
       <p:sp>
         <p:nvSpPr>
           <p:cNvPr id="3" name="">
-            <a:extLst xmlns:a="http://schemas.openxmlformats.org/drawingml/2006/main">
-              <a:ext uri="{FF2B5EF4-FFF2-40B4-BE49-F238E27FC236}">
-                <a16:creationId xmlns:a16="http://schemas.microsoft.com/office/drawing/2014/main" id="{C060235E-A541-47ED-81C4-DFCFFF0967BF}"/>
-              </a:ext>
-            </a:extLst>
-          </p:cNvPr>
-          <p:cNvSpPr>
-            <a:spLocks xmlns:a="http://schemas.openxmlformats.org/drawingml/2006/main" noGrp="1"/>
+            <a:extLst>
+              <a:ext uri="{FF2B5EF4-FFF2-40B4-BE49-F238E27FC236}">
+                <ns2:creationId id="{C060235E-A541-47ED-81C4-DFCFFF0967BF}"/>
+              </a:ext>
+            </a:extLst>
+          </p:cNvPr>
+          <p:cNvSpPr>
+            <a:spLocks noGrp="1"/>
           </p:cNvSpPr>
           <p:nvPr/>
         </p:nvSpPr>
         <p:spPr>
-          <a:xfrm xmlns:a="http://schemas.openxmlformats.org/drawingml/2006/main">
+          <a:xfrm>
             <a:off x="609600" y="4295775"/>
             <a:ext cx="6191250" cy="495300"/>
           </a:xfrm>
-          <a:prstGeom xmlns:a="http://schemas.openxmlformats.org/drawingml/2006/main" prst="rect">
-            <a:avLst/>
-          </a:prstGeom>
-          <a:noFill xmlns:a="http://schemas.openxmlformats.org/drawingml/2006/main"/>
-          <a:ln xmlns:a="http://schemas.openxmlformats.org/drawingml/2006/main" w="0">
-            <a:noFill/>
-          </a:ln>
-        </p:spPr>
-        <p:txBody>
-          <a:bodyPr xmlns:a="http://schemas.openxmlformats.org/drawingml/2006/main" lIns="0" tIns="0" rIns="0" bIns="0"/>
-          <a:lstStyle xmlns:a="http://schemas.openxmlformats.org/drawingml/2006/main">
+          <a:prstGeom prst="rect">
+            <a:avLst/>
+          </a:prstGeom>
+          <a:noFill/>
+          <a:ln w="0">
+            <a:noFill/>
+          </a:ln>
+        </p:spPr>
+        <p:txBody>
+          <a:bodyPr lIns="0" tIns="0" rIns="0" bIns="0"/>
+          <a:lstStyle>
             <a:defPPr algn="l">
               <a:defRPr sz="2400" b="0">
                 <a:solidFill>
@@ -4157,7 +4157,7 @@
               </a:defRPr>
             </a:defPPr>
           </a:lstStyle>
-          <a:p xmlns:a="http://schemas.openxmlformats.org/drawingml/2006/main">
+          <a:p>
             <a:pPr algn="l">
               <a:defRPr sz="2400" b="0">
                 <a:solidFill>
@@ -4185,27 +4185,27 @@
       <p:pic>
         <p:nvPicPr>
           <p:cNvPr id="4" name="">
-            <a:extLst xmlns:a="http://schemas.openxmlformats.org/drawingml/2006/main">
-              <a:ext uri="{FF2B5EF4-FFF2-40B4-BE49-F238E27FC236}">
-                <a16:creationId xmlns:a16="http://schemas.microsoft.com/office/drawing/2014/main" id="{B33F9EC7-77F2-4E67-91B5-843441801DDE}"/>
+            <a:extLst>
+              <a:ext uri="{FF2B5EF4-FFF2-40B4-BE49-F238E27FC236}">
+                <ns2:creationId id="{B33F9EC7-77F2-4E67-91B5-843441801DDE}"/>
               </a:ext>
             </a:extLst>
           </p:cNvPr>
           <p:cNvPicPr>
-            <a:picLocks xmlns:a="http://schemas.openxmlformats.org/drawingml/2006/main" noChangeAspect="1"/>
+            <a:picLocks noChangeAspect="1"/>
           </p:cNvPicPr>
           <p:nvPr/>
         </p:nvPicPr>
         <p:blipFill>
-          <a:blip xmlns:r="http://schemas.openxmlformats.org/officeDocument/2006/relationships" xmlns:a="http://schemas.openxmlformats.org/drawingml/2006/main" r:embed="Rd12b72b076d44a07"/>
-          <a:stretch xmlns:a="http://schemas.openxmlformats.org/drawingml/2006/main"/>
+          <a:blip r:embed="Rd12b72b076d44a07"/>
+          <a:stretch/>
         </p:blipFill>
         <p:spPr>
-          <a:xfrm xmlns:a="http://schemas.openxmlformats.org/drawingml/2006/main">
+          <a:xfrm>
             <a:off x="6638925" y="1600498"/>
             <a:ext cx="4943475" cy="2780705"/>
           </a:xfrm>
-          <a:prstGeom xmlns:a="http://schemas.openxmlformats.org/drawingml/2006/main" prst="rect">
+          <a:prstGeom prst="rect">
             <a:avLst/>
           </a:prstGeom>
         </p:spPr>
@@ -4213,33 +4213,33 @@
       <p:sp>
         <p:nvSpPr>
           <p:cNvPr id="5" name="">
-            <a:extLst xmlns:a="http://schemas.openxmlformats.org/drawingml/2006/main">
-              <a:ext uri="{FF2B5EF4-FFF2-40B4-BE49-F238E27FC236}">
-                <a16:creationId xmlns:a16="http://schemas.microsoft.com/office/drawing/2014/main" id="{2E4EBB61-2487-45B9-A529-5A18364DEDCB}"/>
-              </a:ext>
-            </a:extLst>
-          </p:cNvPr>
-          <p:cNvSpPr>
-            <a:spLocks xmlns:a="http://schemas.openxmlformats.org/drawingml/2006/main" noGrp="1"/>
+            <a:extLst>
+              <a:ext uri="{FF2B5EF4-FFF2-40B4-BE49-F238E27FC236}">
+                <ns2:creationId id="{2E4EBB61-2487-45B9-A529-5A18364DEDCB}"/>
+              </a:ext>
+            </a:extLst>
+          </p:cNvPr>
+          <p:cNvSpPr>
+            <a:spLocks noGrp="1"/>
           </p:cNvSpPr>
           <p:nvPr/>
         </p:nvSpPr>
         <p:spPr>
-          <a:xfrm xmlns:a="http://schemas.openxmlformats.org/drawingml/2006/main">
+          <a:xfrm>
             <a:off x="609600" y="5514975"/>
             <a:ext cx="10763250" cy="838200"/>
           </a:xfrm>
-          <a:prstGeom xmlns:a="http://schemas.openxmlformats.org/drawingml/2006/main" prst="rect">
-            <a:avLst/>
-          </a:prstGeom>
-          <a:noFill xmlns:a="http://schemas.openxmlformats.org/drawingml/2006/main"/>
-          <a:ln xmlns:a="http://schemas.openxmlformats.org/drawingml/2006/main" w="0">
-            <a:noFill/>
-          </a:ln>
-        </p:spPr>
-        <p:txBody>
-          <a:bodyPr xmlns:a="http://schemas.openxmlformats.org/drawingml/2006/main" lIns="0" tIns="0" rIns="0" bIns="0"/>
-          <a:lstStyle xmlns:a="http://schemas.openxmlformats.org/drawingml/2006/main">
+          <a:prstGeom prst="rect">
+            <a:avLst/>
+          </a:prstGeom>
+          <a:noFill/>
+          <a:ln w="0">
+            <a:noFill/>
+          </a:ln>
+        </p:spPr>
+        <p:txBody>
+          <a:bodyPr lIns="0" tIns="0" rIns="0" bIns="0"/>
+          <a:lstStyle>
             <a:defPPr algn="l">
               <a:defRPr sz="2175" b="0">
                 <a:solidFill>
@@ -4251,7 +4251,7 @@
               </a:defRPr>
             </a:defPPr>
           </a:lstStyle>
-          <a:p xmlns:a="http://schemas.openxmlformats.org/drawingml/2006/main">
+          <a:p>
             <a:pPr algn="l">
               <a:defRPr sz="2175" b="0">
                 <a:solidFill>
@@ -4274,7 +4274,7 @@
               <a:t>Aleksandr Medvedev   Nikita Shankin   Leo Vesin</a:t>
             </a:r>
           </a:p>
-          <a:p xmlns:a="http://schemas.openxmlformats.org/drawingml/2006/main">
+          <a:p>
             <a:pPr algn="l">
               <a:defRPr sz="2175" b="0">
                 <a:solidFill>
@@ -4295,6 +4295,140 @@
                 <a:cs typeface="Arial"/>
               </a:rPr>
               <a:t>Ruslan Nasibullin   Telman Nuruzov</a:t>
+            </a:r>
+          </a:p>
+        </p:txBody>
+      </p:sp>
+      <p:sp>
+        <p:nvSpPr>
+          <p:cNvPr id="7" name="colab-link">
+            <a:extLst>
+              <a:ext uri="{FF2B5EF4-FFF2-40B4-BE49-F238E27FC236}">
+                <ns2:creationId id="{88DDBF00-78C6-4C72-80F8-E84C291B9440}"/>
+              </a:ext>
+            </a:extLst>
+          </p:cNvPr>
+          <p:cNvSpPr>
+            <a:spLocks noGrp="1"/>
+          </p:cNvSpPr>
+          <p:nvPr/>
+        </p:nvSpPr>
+        <p:spPr>
+          <a:xfrm>
+            <a:off x="7010400" y="4619625"/>
+            <a:ext cx="4572000" cy="400050"/>
+          </a:xfrm>
+          <a:prstGeom prst="rect">
+            <a:avLst/>
+          </a:prstGeom>
+          <a:noFill/>
+          <a:ln w="0">
+            <a:noFill/>
+          </a:ln>
+        </p:spPr>
+        <p:txBody>
+          <a:bodyPr lIns="0" tIns="0" rIns="0" bIns="0"/>
+          <a:lstStyle>
+            <a:defPPr>
+              <a:defRPr sz="2100">
+                <a:solidFill>
+                  <a:srgbClr val="70D9CA"/>
+                </a:solidFill>
+                <a:latin typeface="Arial"/>
+                <a:ea typeface="Arial"/>
+                <a:cs typeface="Arial"/>
+              </a:defRPr>
+            </a:defPPr>
+          </a:lstStyle>
+          <a:p>
+            <a:pPr>
+              <a:defRPr sz="2100">
+                <a:solidFill>
+                  <a:srgbClr val="70D9CA"/>
+                </a:solidFill>
+                <a:latin typeface="Arial"/>
+                <a:ea typeface="Arial"/>
+                <a:cs typeface="Arial"/>
+              </a:defRPr>
+            </a:pPr>
+            <a:r>
+              <a:rPr sz="2100" u="sng">
+                <a:solidFill>
+                  <a:srgbClr val="70D9CA"/>
+                </a:solidFill>
+                <a:latin typeface="Arial"/>
+                <a:ea typeface="Arial"/>
+                <a:cs typeface="Arial"/>
+                <a:hlinkClick r:id="rId1"/>
+              </a:rPr>
+              <a:t>Open notebook in Colab</a:t>
+            </a:r>
+          </a:p>
+        </p:txBody>
+      </p:sp>
+      <p:sp>
+        <p:nvSpPr>
+          <p:cNvPr id="8" name="github-link">
+            <a:extLst>
+              <a:ext uri="{FF2B5EF4-FFF2-40B4-BE49-F238E27FC236}">
+                <ns2:creationId id="{4972675B-6F4E-4218-895B-B818B3E98B97}"/>
+              </a:ext>
+            </a:extLst>
+          </p:cNvPr>
+          <p:cNvSpPr>
+            <a:spLocks noGrp="1"/>
+          </p:cNvSpPr>
+          <p:nvPr/>
+        </p:nvSpPr>
+        <p:spPr>
+          <a:xfrm>
+            <a:off x="7010400" y="5048250"/>
+            <a:ext cx="4572000" cy="400050"/>
+          </a:xfrm>
+          <a:prstGeom prst="rect">
+            <a:avLst/>
+          </a:prstGeom>
+          <a:noFill/>
+          <a:ln w="0">
+            <a:noFill/>
+          </a:ln>
+        </p:spPr>
+        <p:txBody>
+          <a:bodyPr lIns="0" tIns="0" rIns="0" bIns="0"/>
+          <a:lstStyle>
+            <a:defPPr>
+              <a:defRPr sz="2100">
+                <a:solidFill>
+                  <a:srgbClr val="70D9CA"/>
+                </a:solidFill>
+                <a:latin typeface="Arial"/>
+                <a:ea typeface="Arial"/>
+                <a:cs typeface="Arial"/>
+              </a:defRPr>
+            </a:defPPr>
+          </a:lstStyle>
+          <a:p>
+            <a:pPr>
+              <a:defRPr sz="2100">
+                <a:solidFill>
+                  <a:srgbClr val="70D9CA"/>
+                </a:solidFill>
+                <a:latin typeface="Arial"/>
+                <a:ea typeface="Arial"/>
+                <a:cs typeface="Arial"/>
+              </a:defRPr>
+            </a:pPr>
+            <a:r>
+              <a:rPr sz="2100" u="sng">
+                <a:solidFill>
+                  <a:srgbClr val="70D9CA"/>
+                </a:solidFill>
+                <a:latin typeface="Arial"/>
+                <a:ea typeface="Arial"/>
+                <a:cs typeface="Arial"/>
+                <a:hlinkClick r:id="rId2"/>
+              </a:rPr>
+              <a:t>GitHub repository</a:t>
             </a:r>
           </a:p>
         </p:txBody>
@@ -4302,7 +4436,7 @@
     </p:spTree>
     <p:extLst>
       <p:ext uri="{BB962C8B-B14F-4D97-AF65-F5344CB8AC3E}">
-        <p14:creationId xmlns:p14="http://schemas.microsoft.com/office/powerpoint/2010/main" val="1222042575"/>
+        <ns4:creationId val="1222042575"/>
       </p:ext>
     </p:extLst>
   </p:cSld>
